--- a/docs/pptx/carbo/jx-carbo-linsubhr-ratio-anemia3.pptx
+++ b/docs/pptx/carbo/jx-carbo-linsubhr-ratio-anemia3.pptx
@@ -2271,7 +2271,7 @@
           </p:nvSpPr>
           <p:spPr>
             <a:xfrm>
-              <a:off x="817517" y="5114368"/>
+              <a:off x="817517" y="5142518"/>
               <a:ext cx="7799693" cy="0"/>
             </a:xfrm>
             <a:custGeom>
@@ -2314,7 +2314,7 @@
           </p:nvSpPr>
           <p:spPr>
             <a:xfrm>
-              <a:off x="817517" y="4244691"/>
+              <a:off x="817517" y="4313054"/>
               <a:ext cx="7799693" cy="0"/>
             </a:xfrm>
             <a:custGeom>
@@ -2357,7 +2357,7 @@
           </p:nvSpPr>
           <p:spPr>
             <a:xfrm>
-              <a:off x="817517" y="3375014"/>
+              <a:off x="817517" y="3483591"/>
               <a:ext cx="7799693" cy="0"/>
             </a:xfrm>
             <a:custGeom>
@@ -2400,7 +2400,7 @@
           </p:nvSpPr>
           <p:spPr>
             <a:xfrm>
-              <a:off x="817517" y="2505337"/>
+              <a:off x="817517" y="2654127"/>
               <a:ext cx="7799693" cy="0"/>
             </a:xfrm>
             <a:custGeom>
@@ -2443,15 +2443,15 @@
           </p:nvSpPr>
           <p:spPr>
             <a:xfrm>
-              <a:off x="1615213" y="1896563"/>
-              <a:ext cx="0" cy="3826579"/>
+              <a:off x="1615213" y="2073503"/>
+              <a:ext cx="0" cy="3649639"/>
             </a:xfrm>
             <a:custGeom>
               <a:avLst/>
               <a:pathLst>
-                <a:path w="0" h="3826579">
+                <a:path w="0" h="3649639">
                   <a:moveTo>
-                    <a:pt x="0" y="3826579"/>
+                    <a:pt x="0" y="3649639"/>
                   </a:moveTo>
                   <a:lnTo>
                     <a:pt x="0" y="0"/>
@@ -2486,15 +2486,15 @@
           </p:nvSpPr>
           <p:spPr>
             <a:xfrm>
-              <a:off x="3387871" y="1896563"/>
-              <a:ext cx="0" cy="3826579"/>
+              <a:off x="3387871" y="2073503"/>
+              <a:ext cx="0" cy="3649639"/>
             </a:xfrm>
             <a:custGeom>
               <a:avLst/>
               <a:pathLst>
-                <a:path w="0" h="3826579">
+                <a:path w="0" h="3649639">
                   <a:moveTo>
-                    <a:pt x="0" y="3826579"/>
+                    <a:pt x="0" y="3649639"/>
                   </a:moveTo>
                   <a:lnTo>
                     <a:pt x="0" y="0"/>
@@ -2529,15 +2529,15 @@
           </p:nvSpPr>
           <p:spPr>
             <a:xfrm>
-              <a:off x="5160528" y="1896563"/>
-              <a:ext cx="0" cy="3826579"/>
+              <a:off x="5160528" y="2073503"/>
+              <a:ext cx="0" cy="3649639"/>
             </a:xfrm>
             <a:custGeom>
               <a:avLst/>
               <a:pathLst>
-                <a:path w="0" h="3826579">
+                <a:path w="0" h="3649639">
                   <a:moveTo>
-                    <a:pt x="0" y="3826579"/>
+                    <a:pt x="0" y="3649639"/>
                   </a:moveTo>
                   <a:lnTo>
                     <a:pt x="0" y="0"/>
@@ -2572,15 +2572,15 @@
           </p:nvSpPr>
           <p:spPr>
             <a:xfrm>
-              <a:off x="6933186" y="1896563"/>
-              <a:ext cx="0" cy="3826579"/>
+              <a:off x="6933186" y="2073503"/>
+              <a:ext cx="0" cy="3649639"/>
             </a:xfrm>
             <a:custGeom>
               <a:avLst/>
               <a:pathLst>
-                <a:path w="0" h="3826579">
+                <a:path w="0" h="3649639">
                   <a:moveTo>
-                    <a:pt x="0" y="3826579"/>
+                    <a:pt x="0" y="3649639"/>
                   </a:moveTo>
                   <a:lnTo>
                     <a:pt x="0" y="0"/>
@@ -2615,7 +2615,7 @@
           </p:nvSpPr>
           <p:spPr>
             <a:xfrm>
-              <a:off x="817517" y="5549207"/>
+              <a:off x="817517" y="5557249"/>
               <a:ext cx="7799693" cy="0"/>
             </a:xfrm>
             <a:custGeom>
@@ -2658,7 +2658,7 @@
           </p:nvSpPr>
           <p:spPr>
             <a:xfrm>
-              <a:off x="817517" y="4679530"/>
+              <a:off x="817517" y="4727786"/>
               <a:ext cx="7799693" cy="0"/>
             </a:xfrm>
             <a:custGeom>
@@ -2701,7 +2701,7 @@
           </p:nvSpPr>
           <p:spPr>
             <a:xfrm>
-              <a:off x="817517" y="3809853"/>
+              <a:off x="817517" y="3898322"/>
               <a:ext cx="7799693" cy="0"/>
             </a:xfrm>
             <a:custGeom>
@@ -2744,7 +2744,7 @@
           </p:nvSpPr>
           <p:spPr>
             <a:xfrm>
-              <a:off x="817517" y="2940175"/>
+              <a:off x="817517" y="3068859"/>
               <a:ext cx="7799693" cy="0"/>
             </a:xfrm>
             <a:custGeom>
@@ -2787,7 +2787,7 @@
           </p:nvSpPr>
           <p:spPr>
             <a:xfrm>
-              <a:off x="817517" y="2070498"/>
+              <a:off x="817517" y="2239395"/>
               <a:ext cx="7799693" cy="0"/>
             </a:xfrm>
             <a:custGeom>
@@ -2830,15 +2830,15 @@
           </p:nvSpPr>
           <p:spPr>
             <a:xfrm>
-              <a:off x="2501542" y="1896563"/>
-              <a:ext cx="0" cy="3826579"/>
+              <a:off x="2501542" y="2073503"/>
+              <a:ext cx="0" cy="3649639"/>
             </a:xfrm>
             <a:custGeom>
               <a:avLst/>
               <a:pathLst>
-                <a:path w="0" h="3826579">
+                <a:path w="0" h="3649639">
                   <a:moveTo>
-                    <a:pt x="0" y="3826579"/>
+                    <a:pt x="0" y="3649639"/>
                   </a:moveTo>
                   <a:lnTo>
                     <a:pt x="0" y="0"/>
@@ -2873,15 +2873,15 @@
           </p:nvSpPr>
           <p:spPr>
             <a:xfrm>
-              <a:off x="4274200" y="1896563"/>
-              <a:ext cx="0" cy="3826579"/>
+              <a:off x="4274200" y="2073503"/>
+              <a:ext cx="0" cy="3649639"/>
             </a:xfrm>
             <a:custGeom>
               <a:avLst/>
               <a:pathLst>
-                <a:path w="0" h="3826579">
+                <a:path w="0" h="3649639">
                   <a:moveTo>
-                    <a:pt x="0" y="3826579"/>
+                    <a:pt x="0" y="3649639"/>
                   </a:moveTo>
                   <a:lnTo>
                     <a:pt x="0" y="0"/>
@@ -2916,15 +2916,15 @@
           </p:nvSpPr>
           <p:spPr>
             <a:xfrm>
-              <a:off x="6046857" y="1896563"/>
-              <a:ext cx="0" cy="3826579"/>
+              <a:off x="6046857" y="2073503"/>
+              <a:ext cx="0" cy="3649639"/>
             </a:xfrm>
             <a:custGeom>
               <a:avLst/>
               <a:pathLst>
-                <a:path w="0" h="3826579">
+                <a:path w="0" h="3649639">
                   <a:moveTo>
-                    <a:pt x="0" y="3826579"/>
+                    <a:pt x="0" y="3649639"/>
                   </a:moveTo>
                   <a:lnTo>
                     <a:pt x="0" y="0"/>
@@ -2959,15 +2959,15 @@
           </p:nvSpPr>
           <p:spPr>
             <a:xfrm>
-              <a:off x="7819515" y="1896563"/>
-              <a:ext cx="0" cy="3826579"/>
+              <a:off x="7819515" y="2073503"/>
+              <a:ext cx="0" cy="3649639"/>
             </a:xfrm>
             <a:custGeom>
               <a:avLst/>
               <a:pathLst>
-                <a:path w="0" h="3826579">
+                <a:path w="0" h="3649639">
                   <a:moveTo>
-                    <a:pt x="0" y="3826579"/>
+                    <a:pt x="0" y="3649639"/>
                   </a:moveTo>
                   <a:lnTo>
                     <a:pt x="0" y="0"/>
@@ -3002,564 +3002,564 @@
           </p:nvSpPr>
           <p:spPr>
             <a:xfrm>
-              <a:off x="817517" y="1896563"/>
-              <a:ext cx="7403783" cy="3568762"/>
+              <a:off x="817517" y="2073503"/>
+              <a:ext cx="7403783" cy="3403744"/>
             </a:xfrm>
             <a:custGeom>
               <a:avLst/>
               <a:pathLst>
-                <a:path w="7403783" h="3568762">
+                <a:path w="7403783" h="3403744">
                   <a:moveTo>
                     <a:pt x="954313" y="0"/>
                   </a:moveTo>
                   <a:lnTo>
-                    <a:pt x="966649" y="26766"/>
-                  </a:lnTo>
-                  <a:lnTo>
-                    <a:pt x="1043281" y="185754"/>
-                  </a:lnTo>
-                  <a:lnTo>
-                    <a:pt x="1119914" y="337771"/>
-                  </a:lnTo>
-                  <a:lnTo>
-                    <a:pt x="1196546" y="483123"/>
-                  </a:lnTo>
-                  <a:lnTo>
-                    <a:pt x="1273179" y="622101"/>
-                  </a:lnTo>
-                  <a:lnTo>
-                    <a:pt x="1349811" y="754985"/>
-                  </a:lnTo>
-                  <a:lnTo>
-                    <a:pt x="1426444" y="882042"/>
-                  </a:lnTo>
-                  <a:lnTo>
-                    <a:pt x="1503076" y="1003528"/>
-                  </a:lnTo>
-                  <a:lnTo>
-                    <a:pt x="1579709" y="1119687"/>
-                  </a:lnTo>
-                  <a:lnTo>
-                    <a:pt x="1656342" y="1230753"/>
-                  </a:lnTo>
-                  <a:lnTo>
-                    <a:pt x="1732974" y="1336948"/>
-                  </a:lnTo>
-                  <a:lnTo>
-                    <a:pt x="1809607" y="1438488"/>
-                  </a:lnTo>
-                  <a:lnTo>
-                    <a:pt x="1886239" y="1535574"/>
-                  </a:lnTo>
-                  <a:lnTo>
-                    <a:pt x="1962872" y="1628404"/>
-                  </a:lnTo>
-                  <a:lnTo>
-                    <a:pt x="2039504" y="1717164"/>
-                  </a:lnTo>
-                  <a:lnTo>
-                    <a:pt x="2116137" y="1802031"/>
-                  </a:lnTo>
-                  <a:lnTo>
-                    <a:pt x="2192769" y="1883177"/>
-                  </a:lnTo>
-                  <a:lnTo>
-                    <a:pt x="2269402" y="1960765"/>
-                  </a:lnTo>
-                  <a:lnTo>
-                    <a:pt x="2346034" y="2034951"/>
-                  </a:lnTo>
-                  <a:lnTo>
-                    <a:pt x="2422667" y="2105884"/>
-                  </a:lnTo>
-                  <a:lnTo>
-                    <a:pt x="2499300" y="2173707"/>
-                  </a:lnTo>
-                  <a:lnTo>
-                    <a:pt x="2575932" y="2238555"/>
-                  </a:lnTo>
-                  <a:lnTo>
-                    <a:pt x="2652565" y="2300561"/>
-                  </a:lnTo>
-                  <a:lnTo>
-                    <a:pt x="2729197" y="2359847"/>
-                  </a:lnTo>
-                  <a:lnTo>
-                    <a:pt x="2805830" y="2416534"/>
-                  </a:lnTo>
-                  <a:lnTo>
-                    <a:pt x="2882462" y="2470735"/>
-                  </a:lnTo>
-                  <a:lnTo>
-                    <a:pt x="2959095" y="2522560"/>
-                  </a:lnTo>
-                  <a:lnTo>
-                    <a:pt x="3035727" y="2572112"/>
-                  </a:lnTo>
-                  <a:lnTo>
-                    <a:pt x="3112360" y="2619492"/>
-                  </a:lnTo>
-                  <a:lnTo>
-                    <a:pt x="3188993" y="2664793"/>
-                  </a:lnTo>
-                  <a:lnTo>
-                    <a:pt x="3265625" y="2708109"/>
-                  </a:lnTo>
-                  <a:lnTo>
-                    <a:pt x="3342258" y="2749525"/>
-                  </a:lnTo>
-                  <a:lnTo>
-                    <a:pt x="3418890" y="2784801"/>
-                  </a:lnTo>
-                  <a:lnTo>
-                    <a:pt x="3495523" y="2796289"/>
-                  </a:lnTo>
-                  <a:lnTo>
-                    <a:pt x="3572155" y="2807624"/>
-                  </a:lnTo>
-                  <a:lnTo>
-                    <a:pt x="3648788" y="2818810"/>
-                  </a:lnTo>
-                  <a:lnTo>
-                    <a:pt x="3725420" y="2829847"/>
-                  </a:lnTo>
-                  <a:lnTo>
-                    <a:pt x="3802053" y="2840739"/>
-                  </a:lnTo>
-                  <a:lnTo>
-                    <a:pt x="3878685" y="2851486"/>
-                  </a:lnTo>
-                  <a:lnTo>
-                    <a:pt x="3955318" y="2862091"/>
-                  </a:lnTo>
-                  <a:lnTo>
-                    <a:pt x="4031951" y="2872556"/>
-                  </a:lnTo>
-                  <a:lnTo>
-                    <a:pt x="4108583" y="2882882"/>
-                  </a:lnTo>
-                  <a:lnTo>
-                    <a:pt x="4185216" y="2893071"/>
-                  </a:lnTo>
-                  <a:lnTo>
-                    <a:pt x="4261848" y="2903126"/>
-                  </a:lnTo>
-                  <a:lnTo>
-                    <a:pt x="4338481" y="2913047"/>
-                  </a:lnTo>
-                  <a:lnTo>
-                    <a:pt x="4415113" y="2922837"/>
-                  </a:lnTo>
-                  <a:lnTo>
-                    <a:pt x="4491746" y="2932498"/>
-                  </a:lnTo>
-                  <a:lnTo>
-                    <a:pt x="4568378" y="2942030"/>
-                  </a:lnTo>
-                  <a:lnTo>
-                    <a:pt x="4645011" y="2951437"/>
-                  </a:lnTo>
-                  <a:lnTo>
-                    <a:pt x="4721644" y="2960718"/>
-                  </a:lnTo>
-                  <a:lnTo>
-                    <a:pt x="4798276" y="2969878"/>
-                  </a:lnTo>
-                  <a:lnTo>
-                    <a:pt x="4874909" y="2978915"/>
-                  </a:lnTo>
-                  <a:lnTo>
-                    <a:pt x="4951541" y="2987834"/>
-                  </a:lnTo>
-                  <a:lnTo>
-                    <a:pt x="5028174" y="2996634"/>
-                  </a:lnTo>
-                  <a:lnTo>
-                    <a:pt x="5104806" y="3005317"/>
-                  </a:lnTo>
-                  <a:lnTo>
-                    <a:pt x="5181439" y="3013886"/>
-                  </a:lnTo>
-                  <a:lnTo>
-                    <a:pt x="5258071" y="3022341"/>
-                  </a:lnTo>
-                  <a:lnTo>
-                    <a:pt x="5334704" y="3030685"/>
-                  </a:lnTo>
-                  <a:lnTo>
-                    <a:pt x="5411336" y="3038917"/>
-                  </a:lnTo>
-                  <a:lnTo>
-                    <a:pt x="5487969" y="3047041"/>
-                  </a:lnTo>
-                  <a:lnTo>
-                    <a:pt x="5564602" y="3055058"/>
-                  </a:lnTo>
-                  <a:lnTo>
-                    <a:pt x="5641234" y="3062968"/>
-                  </a:lnTo>
-                  <a:lnTo>
-                    <a:pt x="5717867" y="3070774"/>
-                  </a:lnTo>
-                  <a:lnTo>
-                    <a:pt x="5794499" y="3078476"/>
-                  </a:lnTo>
-                  <a:lnTo>
-                    <a:pt x="5871132" y="3086076"/>
-                  </a:lnTo>
-                  <a:lnTo>
-                    <a:pt x="5947764" y="3093576"/>
-                  </a:lnTo>
-                  <a:lnTo>
-                    <a:pt x="6024397" y="3100976"/>
-                  </a:lnTo>
-                  <a:lnTo>
-                    <a:pt x="6101029" y="3108279"/>
-                  </a:lnTo>
-                  <a:lnTo>
-                    <a:pt x="6177662" y="3115484"/>
-                  </a:lnTo>
-                  <a:lnTo>
-                    <a:pt x="6254294" y="3122595"/>
-                  </a:lnTo>
-                  <a:lnTo>
-                    <a:pt x="6330927" y="3129611"/>
-                  </a:lnTo>
-                  <a:lnTo>
-                    <a:pt x="6407560" y="3136535"/>
-                  </a:lnTo>
-                  <a:lnTo>
-                    <a:pt x="6484192" y="3143366"/>
-                  </a:lnTo>
-                  <a:lnTo>
-                    <a:pt x="6560825" y="3150108"/>
-                  </a:lnTo>
-                  <a:lnTo>
-                    <a:pt x="6637457" y="3156760"/>
-                  </a:lnTo>
-                  <a:lnTo>
-                    <a:pt x="6714090" y="3163324"/>
-                  </a:lnTo>
-                  <a:lnTo>
-                    <a:pt x="6790722" y="3169801"/>
-                  </a:lnTo>
-                  <a:lnTo>
-                    <a:pt x="6867355" y="3176192"/>
-                  </a:lnTo>
-                  <a:lnTo>
-                    <a:pt x="6943987" y="3182499"/>
-                  </a:lnTo>
-                  <a:lnTo>
-                    <a:pt x="7020620" y="3188722"/>
-                  </a:lnTo>
-                  <a:lnTo>
-                    <a:pt x="7097253" y="3194863"/>
-                  </a:lnTo>
-                  <a:lnTo>
-                    <a:pt x="7173885" y="3200923"/>
-                  </a:lnTo>
-                  <a:lnTo>
-                    <a:pt x="7250518" y="3206902"/>
-                  </a:lnTo>
-                  <a:lnTo>
-                    <a:pt x="7327150" y="3212803"/>
-                  </a:lnTo>
-                  <a:lnTo>
-                    <a:pt x="7403783" y="3218625"/>
-                  </a:lnTo>
-                  <a:lnTo>
-                    <a:pt x="7403783" y="3568762"/>
-                  </a:lnTo>
-                  <a:lnTo>
-                    <a:pt x="7327150" y="3564915"/>
-                  </a:lnTo>
-                  <a:lnTo>
-                    <a:pt x="7250518" y="3560892"/>
-                  </a:lnTo>
-                  <a:lnTo>
-                    <a:pt x="7173885" y="3556684"/>
-                  </a:lnTo>
-                  <a:lnTo>
-                    <a:pt x="7097253" y="3552284"/>
-                  </a:lnTo>
-                  <a:lnTo>
-                    <a:pt x="7020620" y="3547681"/>
-                  </a:lnTo>
-                  <a:lnTo>
-                    <a:pt x="6943987" y="3542868"/>
-                  </a:lnTo>
-                  <a:lnTo>
-                    <a:pt x="6867355" y="3537834"/>
-                  </a:lnTo>
-                  <a:lnTo>
-                    <a:pt x="6790722" y="3532569"/>
-                  </a:lnTo>
-                  <a:lnTo>
-                    <a:pt x="6714090" y="3527062"/>
-                  </a:lnTo>
-                  <a:lnTo>
-                    <a:pt x="6637457" y="3521303"/>
-                  </a:lnTo>
-                  <a:lnTo>
-                    <a:pt x="6560825" y="3515280"/>
-                  </a:lnTo>
-                  <a:lnTo>
-                    <a:pt x="6484192" y="3508981"/>
-                  </a:lnTo>
-                  <a:lnTo>
-                    <a:pt x="6407560" y="3502392"/>
-                  </a:lnTo>
-                  <a:lnTo>
-                    <a:pt x="6330927" y="3495502"/>
-                  </a:lnTo>
-                  <a:lnTo>
-                    <a:pt x="6254294" y="3488296"/>
-                  </a:lnTo>
-                  <a:lnTo>
-                    <a:pt x="6177662" y="3480759"/>
-                  </a:lnTo>
-                  <a:lnTo>
-                    <a:pt x="6101029" y="3472876"/>
-                  </a:lnTo>
-                  <a:lnTo>
-                    <a:pt x="6024397" y="3464632"/>
-                  </a:lnTo>
-                  <a:lnTo>
-                    <a:pt x="5947764" y="3456010"/>
-                  </a:lnTo>
-                  <a:lnTo>
-                    <a:pt x="5871132" y="3446993"/>
-                  </a:lnTo>
-                  <a:lnTo>
-                    <a:pt x="5794499" y="3437562"/>
-                  </a:lnTo>
-                  <a:lnTo>
-                    <a:pt x="5717867" y="3427698"/>
-                  </a:lnTo>
-                  <a:lnTo>
-                    <a:pt x="5641234" y="3417383"/>
-                  </a:lnTo>
-                  <a:lnTo>
-                    <a:pt x="5564602" y="3406594"/>
-                  </a:lnTo>
-                  <a:lnTo>
-                    <a:pt x="5487969" y="3395310"/>
-                  </a:lnTo>
-                  <a:lnTo>
-                    <a:pt x="5411336" y="3383509"/>
-                  </a:lnTo>
-                  <a:lnTo>
-                    <a:pt x="5334704" y="3371167"/>
-                  </a:lnTo>
-                  <a:lnTo>
-                    <a:pt x="5258071" y="3358259"/>
-                  </a:lnTo>
-                  <a:lnTo>
-                    <a:pt x="5181439" y="3344758"/>
-                  </a:lnTo>
-                  <a:lnTo>
-                    <a:pt x="5104806" y="3330639"/>
-                  </a:lnTo>
-                  <a:lnTo>
-                    <a:pt x="5028174" y="3315872"/>
-                  </a:lnTo>
-                  <a:lnTo>
-                    <a:pt x="4951541" y="3300428"/>
-                  </a:lnTo>
-                  <a:lnTo>
-                    <a:pt x="4874909" y="3284276"/>
-                  </a:lnTo>
-                  <a:lnTo>
-                    <a:pt x="4798276" y="3267383"/>
-                  </a:lnTo>
-                  <a:lnTo>
-                    <a:pt x="4721644" y="3249715"/>
-                  </a:lnTo>
-                  <a:lnTo>
-                    <a:pt x="4645011" y="3231237"/>
-                  </a:lnTo>
-                  <a:lnTo>
-                    <a:pt x="4568378" y="3211912"/>
-                  </a:lnTo>
-                  <a:lnTo>
-                    <a:pt x="4491746" y="3191701"/>
-                  </a:lnTo>
-                  <a:lnTo>
-                    <a:pt x="4415113" y="3170562"/>
-                  </a:lnTo>
-                  <a:lnTo>
-                    <a:pt x="4338481" y="3148454"/>
-                  </a:lnTo>
-                  <a:lnTo>
-                    <a:pt x="4261848" y="3125333"/>
-                  </a:lnTo>
-                  <a:lnTo>
-                    <a:pt x="4185216" y="3101151"/>
-                  </a:lnTo>
-                  <a:lnTo>
-                    <a:pt x="4108583" y="3075860"/>
-                  </a:lnTo>
-                  <a:lnTo>
-                    <a:pt x="4031951" y="3049409"/>
-                  </a:lnTo>
-                  <a:lnTo>
-                    <a:pt x="3955318" y="3021745"/>
-                  </a:lnTo>
-                  <a:lnTo>
-                    <a:pt x="3878685" y="2992813"/>
-                  </a:lnTo>
-                  <a:lnTo>
-                    <a:pt x="3802053" y="2962554"/>
-                  </a:lnTo>
-                  <a:lnTo>
-                    <a:pt x="3725420" y="2930907"/>
-                  </a:lnTo>
-                  <a:lnTo>
-                    <a:pt x="3648788" y="2897809"/>
-                  </a:lnTo>
-                  <a:lnTo>
-                    <a:pt x="3572155" y="2863193"/>
-                  </a:lnTo>
-                  <a:lnTo>
-                    <a:pt x="3495523" y="2826989"/>
-                  </a:lnTo>
-                  <a:lnTo>
-                    <a:pt x="3418890" y="2789125"/>
-                  </a:lnTo>
-                  <a:lnTo>
-                    <a:pt x="3342258" y="2773159"/>
-                  </a:lnTo>
-                  <a:lnTo>
-                    <a:pt x="3265625" y="2761361"/>
-                  </a:lnTo>
-                  <a:lnTo>
-                    <a:pt x="3188993" y="2749405"/>
-                  </a:lnTo>
-                  <a:lnTo>
-                    <a:pt x="3112360" y="2737289"/>
-                  </a:lnTo>
-                  <a:lnTo>
-                    <a:pt x="3035727" y="2725010"/>
-                  </a:lnTo>
-                  <a:lnTo>
-                    <a:pt x="2959095" y="2712566"/>
-                  </a:lnTo>
-                  <a:lnTo>
-                    <a:pt x="2882462" y="2699955"/>
-                  </a:lnTo>
-                  <a:lnTo>
-                    <a:pt x="2805830" y="2687175"/>
-                  </a:lnTo>
-                  <a:lnTo>
-                    <a:pt x="2729197" y="2674224"/>
-                  </a:lnTo>
-                  <a:lnTo>
-                    <a:pt x="2652565" y="2661098"/>
-                  </a:lnTo>
-                  <a:lnTo>
-                    <a:pt x="2575932" y="2647797"/>
-                  </a:lnTo>
-                  <a:lnTo>
-                    <a:pt x="2499300" y="2634318"/>
-                  </a:lnTo>
-                  <a:lnTo>
-                    <a:pt x="2422667" y="2620657"/>
-                  </a:lnTo>
-                  <a:lnTo>
-                    <a:pt x="2346034" y="2606813"/>
-                  </a:lnTo>
-                  <a:lnTo>
-                    <a:pt x="2269402" y="2592784"/>
-                  </a:lnTo>
-                  <a:lnTo>
-                    <a:pt x="2192769" y="2578566"/>
-                  </a:lnTo>
-                  <a:lnTo>
-                    <a:pt x="2116137" y="2564158"/>
-                  </a:lnTo>
-                  <a:lnTo>
-                    <a:pt x="2039504" y="2549556"/>
-                  </a:lnTo>
-                  <a:lnTo>
-                    <a:pt x="1962872" y="2534759"/>
-                  </a:lnTo>
-                  <a:lnTo>
-                    <a:pt x="1886239" y="2519763"/>
-                  </a:lnTo>
-                  <a:lnTo>
-                    <a:pt x="1809607" y="2504566"/>
-                  </a:lnTo>
-                  <a:lnTo>
-                    <a:pt x="1732974" y="2489165"/>
-                  </a:lnTo>
-                  <a:lnTo>
-                    <a:pt x="1656342" y="2473557"/>
-                  </a:lnTo>
-                  <a:lnTo>
-                    <a:pt x="1579709" y="2457740"/>
-                  </a:lnTo>
-                  <a:lnTo>
-                    <a:pt x="1503076" y="2441711"/>
-                  </a:lnTo>
-                  <a:lnTo>
-                    <a:pt x="1426444" y="2425467"/>
-                  </a:lnTo>
-                  <a:lnTo>
-                    <a:pt x="1349811" y="2409005"/>
-                  </a:lnTo>
-                  <a:lnTo>
-                    <a:pt x="1273179" y="2392322"/>
-                  </a:lnTo>
-                  <a:lnTo>
-                    <a:pt x="1196546" y="2375415"/>
-                  </a:lnTo>
-                  <a:lnTo>
-                    <a:pt x="1119914" y="2358281"/>
-                  </a:lnTo>
-                  <a:lnTo>
-                    <a:pt x="1043281" y="2340918"/>
-                  </a:lnTo>
-                  <a:lnTo>
-                    <a:pt x="966649" y="2323322"/>
-                  </a:lnTo>
-                  <a:lnTo>
-                    <a:pt x="890016" y="2305489"/>
-                  </a:lnTo>
-                  <a:lnTo>
-                    <a:pt x="813384" y="2287418"/>
-                  </a:lnTo>
-                  <a:lnTo>
-                    <a:pt x="736751" y="2269104"/>
-                  </a:lnTo>
-                  <a:lnTo>
-                    <a:pt x="660118" y="2250544"/>
-                  </a:lnTo>
-                  <a:lnTo>
-                    <a:pt x="583486" y="2231736"/>
-                  </a:lnTo>
-                  <a:lnTo>
-                    <a:pt x="506853" y="2212675"/>
-                  </a:lnTo>
-                  <a:lnTo>
-                    <a:pt x="430221" y="2193358"/>
-                  </a:lnTo>
-                  <a:lnTo>
-                    <a:pt x="353588" y="2173782"/>
-                  </a:lnTo>
-                  <a:lnTo>
-                    <a:pt x="276956" y="2153944"/>
-                  </a:lnTo>
-                  <a:lnTo>
-                    <a:pt x="200323" y="2133839"/>
-                  </a:lnTo>
-                  <a:lnTo>
-                    <a:pt x="123691" y="2113465"/>
-                  </a:lnTo>
-                  <a:lnTo>
-                    <a:pt x="47058" y="2092818"/>
-                  </a:lnTo>
-                  <a:lnTo>
-                    <a:pt x="0" y="2079968"/>
+                    <a:pt x="966649" y="25528"/>
+                  </a:lnTo>
+                  <a:lnTo>
+                    <a:pt x="1043281" y="177165"/>
+                  </a:lnTo>
+                  <a:lnTo>
+                    <a:pt x="1119914" y="322153"/>
+                  </a:lnTo>
+                  <a:lnTo>
+                    <a:pt x="1196546" y="460783"/>
+                  </a:lnTo>
+                  <a:lnTo>
+                    <a:pt x="1273179" y="593335"/>
+                  </a:lnTo>
+                  <a:lnTo>
+                    <a:pt x="1349811" y="720074"/>
+                  </a:lnTo>
+                  <a:lnTo>
+                    <a:pt x="1426444" y="841257"/>
+                  </a:lnTo>
+                  <a:lnTo>
+                    <a:pt x="1503076" y="957125"/>
+                  </a:lnTo>
+                  <a:lnTo>
+                    <a:pt x="1579709" y="1067913"/>
+                  </a:lnTo>
+                  <a:lnTo>
+                    <a:pt x="1656342" y="1173843"/>
+                  </a:lnTo>
+                  <a:lnTo>
+                    <a:pt x="1732974" y="1275128"/>
+                  </a:lnTo>
+                  <a:lnTo>
+                    <a:pt x="1809607" y="1371972"/>
+                  </a:lnTo>
+                  <a:lnTo>
+                    <a:pt x="1886239" y="1464570"/>
+                  </a:lnTo>
+                  <a:lnTo>
+                    <a:pt x="1962872" y="1553107"/>
+                  </a:lnTo>
+                  <a:lnTo>
+                    <a:pt x="2039504" y="1637763"/>
+                  </a:lnTo>
+                  <a:lnTo>
+                    <a:pt x="2116137" y="1718706"/>
+                  </a:lnTo>
+                  <a:lnTo>
+                    <a:pt x="2192769" y="1796100"/>
+                  </a:lnTo>
+                  <a:lnTo>
+                    <a:pt x="2269402" y="1870100"/>
+                  </a:lnTo>
+                  <a:lnTo>
+                    <a:pt x="2346034" y="1940856"/>
+                  </a:lnTo>
+                  <a:lnTo>
+                    <a:pt x="2422667" y="2008509"/>
+                  </a:lnTo>
+                  <a:lnTo>
+                    <a:pt x="2499300" y="2073195"/>
+                  </a:lnTo>
+                  <a:lnTo>
+                    <a:pt x="2575932" y="2135045"/>
+                  </a:lnTo>
+                  <a:lnTo>
+                    <a:pt x="2652565" y="2194184"/>
+                  </a:lnTo>
+                  <a:lnTo>
+                    <a:pt x="2729197" y="2250729"/>
+                  </a:lnTo>
+                  <a:lnTo>
+                    <a:pt x="2805830" y="2304794"/>
+                  </a:lnTo>
+                  <a:lnTo>
+                    <a:pt x="2882462" y="2356489"/>
+                  </a:lnTo>
+                  <a:lnTo>
+                    <a:pt x="2959095" y="2405918"/>
+                  </a:lnTo>
+                  <a:lnTo>
+                    <a:pt x="3035727" y="2453179"/>
+                  </a:lnTo>
+                  <a:lnTo>
+                    <a:pt x="3112360" y="2498367"/>
+                  </a:lnTo>
+                  <a:lnTo>
+                    <a:pt x="3188993" y="2541574"/>
+                  </a:lnTo>
+                  <a:lnTo>
+                    <a:pt x="3265625" y="2582887"/>
+                  </a:lnTo>
+                  <a:lnTo>
+                    <a:pt x="3342258" y="2622388"/>
+                  </a:lnTo>
+                  <a:lnTo>
+                    <a:pt x="3418890" y="2656033"/>
+                  </a:lnTo>
+                  <a:lnTo>
+                    <a:pt x="3495523" y="2666989"/>
+                  </a:lnTo>
+                  <a:lnTo>
+                    <a:pt x="3572155" y="2677801"/>
+                  </a:lnTo>
+                  <a:lnTo>
+                    <a:pt x="3648788" y="2688469"/>
+                  </a:lnTo>
+                  <a:lnTo>
+                    <a:pt x="3725420" y="2698996"/>
+                  </a:lnTo>
+                  <a:lnTo>
+                    <a:pt x="3802053" y="2709384"/>
+                  </a:lnTo>
+                  <a:lnTo>
+                    <a:pt x="3878685" y="2719634"/>
+                  </a:lnTo>
+                  <a:lnTo>
+                    <a:pt x="3955318" y="2729749"/>
+                  </a:lnTo>
+                  <a:lnTo>
+                    <a:pt x="4031951" y="2739730"/>
+                  </a:lnTo>
+                  <a:lnTo>
+                    <a:pt x="4108583" y="2749578"/>
+                  </a:lnTo>
+                  <a:lnTo>
+                    <a:pt x="4185216" y="2759297"/>
+                  </a:lnTo>
+                  <a:lnTo>
+                    <a:pt x="4261848" y="2768886"/>
+                  </a:lnTo>
+                  <a:lnTo>
+                    <a:pt x="4338481" y="2778349"/>
+                  </a:lnTo>
+                  <a:lnTo>
+                    <a:pt x="4415113" y="2787686"/>
+                  </a:lnTo>
+                  <a:lnTo>
+                    <a:pt x="4491746" y="2796900"/>
+                  </a:lnTo>
+                  <a:lnTo>
+                    <a:pt x="4568378" y="2805992"/>
+                  </a:lnTo>
+                  <a:lnTo>
+                    <a:pt x="4645011" y="2814963"/>
+                  </a:lnTo>
+                  <a:lnTo>
+                    <a:pt x="4721644" y="2823816"/>
+                  </a:lnTo>
+                  <a:lnTo>
+                    <a:pt x="4798276" y="2832551"/>
+                  </a:lnTo>
+                  <a:lnTo>
+                    <a:pt x="4874909" y="2841171"/>
+                  </a:lnTo>
+                  <a:lnTo>
+                    <a:pt x="4951541" y="2849677"/>
+                  </a:lnTo>
+                  <a:lnTo>
+                    <a:pt x="5028174" y="2858070"/>
+                  </a:lnTo>
+                  <a:lnTo>
+                    <a:pt x="5104806" y="2866352"/>
+                  </a:lnTo>
+                  <a:lnTo>
+                    <a:pt x="5181439" y="2874525"/>
+                  </a:lnTo>
+                  <a:lnTo>
+                    <a:pt x="5258071" y="2882589"/>
+                  </a:lnTo>
+                  <a:lnTo>
+                    <a:pt x="5334704" y="2890547"/>
+                  </a:lnTo>
+                  <a:lnTo>
+                    <a:pt x="5411336" y="2898399"/>
+                  </a:lnTo>
+                  <a:lnTo>
+                    <a:pt x="5487969" y="2906147"/>
+                  </a:lnTo>
+                  <a:lnTo>
+                    <a:pt x="5564602" y="2913793"/>
+                  </a:lnTo>
+                  <a:lnTo>
+                    <a:pt x="5641234" y="2921338"/>
+                  </a:lnTo>
+                  <a:lnTo>
+                    <a:pt x="5717867" y="2928782"/>
+                  </a:lnTo>
+                  <a:lnTo>
+                    <a:pt x="5794499" y="2936128"/>
+                  </a:lnTo>
+                  <a:lnTo>
+                    <a:pt x="5871132" y="2943377"/>
+                  </a:lnTo>
+                  <a:lnTo>
+                    <a:pt x="5947764" y="2950530"/>
+                  </a:lnTo>
+                  <a:lnTo>
+                    <a:pt x="6024397" y="2957588"/>
+                  </a:lnTo>
+                  <a:lnTo>
+                    <a:pt x="6101029" y="2964553"/>
+                  </a:lnTo>
+                  <a:lnTo>
+                    <a:pt x="6177662" y="2971426"/>
+                  </a:lnTo>
+                  <a:lnTo>
+                    <a:pt x="6254294" y="2978207"/>
+                  </a:lnTo>
+                  <a:lnTo>
+                    <a:pt x="6330927" y="2984899"/>
+                  </a:lnTo>
+                  <a:lnTo>
+                    <a:pt x="6407560" y="2991502"/>
+                  </a:lnTo>
+                  <a:lnTo>
+                    <a:pt x="6484192" y="2998018"/>
+                  </a:lnTo>
+                  <a:lnTo>
+                    <a:pt x="6560825" y="3004448"/>
+                  </a:lnTo>
+                  <a:lnTo>
+                    <a:pt x="6637457" y="3010792"/>
+                  </a:lnTo>
+                  <a:lnTo>
+                    <a:pt x="6714090" y="3017053"/>
+                  </a:lnTo>
+                  <a:lnTo>
+                    <a:pt x="6790722" y="3023230"/>
+                  </a:lnTo>
+                  <a:lnTo>
+                    <a:pt x="6867355" y="3029326"/>
+                  </a:lnTo>
+                  <a:lnTo>
+                    <a:pt x="6943987" y="3035341"/>
+                  </a:lnTo>
+                  <a:lnTo>
+                    <a:pt x="7020620" y="3041277"/>
+                  </a:lnTo>
+                  <a:lnTo>
+                    <a:pt x="7097253" y="3047134"/>
+                  </a:lnTo>
+                  <a:lnTo>
+                    <a:pt x="7173885" y="3052914"/>
+                  </a:lnTo>
+                  <a:lnTo>
+                    <a:pt x="7250518" y="3058616"/>
+                  </a:lnTo>
+                  <a:lnTo>
+                    <a:pt x="7327150" y="3064244"/>
+                  </a:lnTo>
+                  <a:lnTo>
+                    <a:pt x="7403783" y="3069797"/>
+                  </a:lnTo>
+                  <a:lnTo>
+                    <a:pt x="7403783" y="3403744"/>
+                  </a:lnTo>
+                  <a:lnTo>
+                    <a:pt x="7327150" y="3400075"/>
+                  </a:lnTo>
+                  <a:lnTo>
+                    <a:pt x="7250518" y="3396238"/>
+                  </a:lnTo>
+                  <a:lnTo>
+                    <a:pt x="7173885" y="3392225"/>
+                  </a:lnTo>
+                  <a:lnTo>
+                    <a:pt x="7097253" y="3388027"/>
+                  </a:lnTo>
+                  <a:lnTo>
+                    <a:pt x="7020620" y="3383638"/>
+                  </a:lnTo>
+                  <a:lnTo>
+                    <a:pt x="6943987" y="3379047"/>
+                  </a:lnTo>
+                  <a:lnTo>
+                    <a:pt x="6867355" y="3374246"/>
+                  </a:lnTo>
+                  <a:lnTo>
+                    <a:pt x="6790722" y="3369224"/>
+                  </a:lnTo>
+                  <a:lnTo>
+                    <a:pt x="6714090" y="3363972"/>
+                  </a:lnTo>
+                  <a:lnTo>
+                    <a:pt x="6637457" y="3358479"/>
+                  </a:lnTo>
+                  <a:lnTo>
+                    <a:pt x="6560825" y="3352735"/>
+                  </a:lnTo>
+                  <a:lnTo>
+                    <a:pt x="6484192" y="3346727"/>
+                  </a:lnTo>
+                  <a:lnTo>
+                    <a:pt x="6407560" y="3340443"/>
+                  </a:lnTo>
+                  <a:lnTo>
+                    <a:pt x="6330927" y="3333871"/>
+                  </a:lnTo>
+                  <a:lnTo>
+                    <a:pt x="6254294" y="3326998"/>
+                  </a:lnTo>
+                  <a:lnTo>
+                    <a:pt x="6177662" y="3319810"/>
+                  </a:lnTo>
+                  <a:lnTo>
+                    <a:pt x="6101029" y="3312292"/>
+                  </a:lnTo>
+                  <a:lnTo>
+                    <a:pt x="6024397" y="3304429"/>
+                  </a:lnTo>
+                  <a:lnTo>
+                    <a:pt x="5947764" y="3296206"/>
+                  </a:lnTo>
+                  <a:lnTo>
+                    <a:pt x="5871132" y="3287605"/>
+                  </a:lnTo>
+                  <a:lnTo>
+                    <a:pt x="5794499" y="3278610"/>
+                  </a:lnTo>
+                  <a:lnTo>
+                    <a:pt x="5717867" y="3269203"/>
+                  </a:lnTo>
+                  <a:lnTo>
+                    <a:pt x="5641234" y="3259364"/>
+                  </a:lnTo>
+                  <a:lnTo>
+                    <a:pt x="5564602" y="3249074"/>
+                  </a:lnTo>
+                  <a:lnTo>
+                    <a:pt x="5487969" y="3238312"/>
+                  </a:lnTo>
+                  <a:lnTo>
+                    <a:pt x="5411336" y="3227057"/>
+                  </a:lnTo>
+                  <a:lnTo>
+                    <a:pt x="5334704" y="3215285"/>
+                  </a:lnTo>
+                  <a:lnTo>
+                    <a:pt x="5258071" y="3202974"/>
+                  </a:lnTo>
+                  <a:lnTo>
+                    <a:pt x="5181439" y="3190098"/>
+                  </a:lnTo>
+                  <a:lnTo>
+                    <a:pt x="5104806" y="3176632"/>
+                  </a:lnTo>
+                  <a:lnTo>
+                    <a:pt x="5028174" y="3162548"/>
+                  </a:lnTo>
+                  <a:lnTo>
+                    <a:pt x="4951541" y="3147818"/>
+                  </a:lnTo>
+                  <a:lnTo>
+                    <a:pt x="4874909" y="3132412"/>
+                  </a:lnTo>
+                  <a:lnTo>
+                    <a:pt x="4798276" y="3116300"/>
+                  </a:lnTo>
+                  <a:lnTo>
+                    <a:pt x="4721644" y="3099450"/>
+                  </a:lnTo>
+                  <a:lnTo>
+                    <a:pt x="4645011" y="3081826"/>
+                  </a:lnTo>
+                  <a:lnTo>
+                    <a:pt x="4568378" y="3063395"/>
+                  </a:lnTo>
+                  <a:lnTo>
+                    <a:pt x="4491746" y="3044118"/>
+                  </a:lnTo>
+                  <a:lnTo>
+                    <a:pt x="4415113" y="3023957"/>
+                  </a:lnTo>
+                  <a:lnTo>
+                    <a:pt x="4338481" y="3002871"/>
+                  </a:lnTo>
+                  <a:lnTo>
+                    <a:pt x="4261848" y="2980819"/>
+                  </a:lnTo>
+                  <a:lnTo>
+                    <a:pt x="4185216" y="2957755"/>
+                  </a:lnTo>
+                  <a:lnTo>
+                    <a:pt x="4108583" y="2933633"/>
+                  </a:lnTo>
+                  <a:lnTo>
+                    <a:pt x="4031951" y="2908405"/>
+                  </a:lnTo>
+                  <a:lnTo>
+                    <a:pt x="3955318" y="2882021"/>
+                  </a:lnTo>
+                  <a:lnTo>
+                    <a:pt x="3878685" y="2854426"/>
+                  </a:lnTo>
+                  <a:lnTo>
+                    <a:pt x="3802053" y="2825566"/>
+                  </a:lnTo>
+                  <a:lnTo>
+                    <a:pt x="3725420" y="2795383"/>
+                  </a:lnTo>
+                  <a:lnTo>
+                    <a:pt x="3648788" y="2763815"/>
+                  </a:lnTo>
+                  <a:lnTo>
+                    <a:pt x="3572155" y="2730800"/>
+                  </a:lnTo>
+                  <a:lnTo>
+                    <a:pt x="3495523" y="2696270"/>
+                  </a:lnTo>
+                  <a:lnTo>
+                    <a:pt x="3418890" y="2660157"/>
+                  </a:lnTo>
+                  <a:lnTo>
+                    <a:pt x="3342258" y="2644930"/>
+                  </a:lnTo>
+                  <a:lnTo>
+                    <a:pt x="3265625" y="2633677"/>
+                  </a:lnTo>
+                  <a:lnTo>
+                    <a:pt x="3188993" y="2622274"/>
+                  </a:lnTo>
+                  <a:lnTo>
+                    <a:pt x="3112360" y="2610717"/>
+                  </a:lnTo>
+                  <a:lnTo>
+                    <a:pt x="3035727" y="2599006"/>
+                  </a:lnTo>
+                  <a:lnTo>
+                    <a:pt x="2959095" y="2587138"/>
+                  </a:lnTo>
+                  <a:lnTo>
+                    <a:pt x="2882462" y="2575110"/>
+                  </a:lnTo>
+                  <a:lnTo>
+                    <a:pt x="2805830" y="2562921"/>
+                  </a:lnTo>
+                  <a:lnTo>
+                    <a:pt x="2729197" y="2550568"/>
+                  </a:lnTo>
+                  <a:lnTo>
+                    <a:pt x="2652565" y="2538050"/>
+                  </a:lnTo>
+                  <a:lnTo>
+                    <a:pt x="2575932" y="2525364"/>
+                  </a:lnTo>
+                  <a:lnTo>
+                    <a:pt x="2499300" y="2512508"/>
+                  </a:lnTo>
+                  <a:lnTo>
+                    <a:pt x="2422667" y="2499479"/>
+                  </a:lnTo>
+                  <a:lnTo>
+                    <a:pt x="2346034" y="2486275"/>
+                  </a:lnTo>
+                  <a:lnTo>
+                    <a:pt x="2269402" y="2472895"/>
+                  </a:lnTo>
+                  <a:lnTo>
+                    <a:pt x="2192769" y="2459334"/>
+                  </a:lnTo>
+                  <a:lnTo>
+                    <a:pt x="2116137" y="2445592"/>
+                  </a:lnTo>
+                  <a:lnTo>
+                    <a:pt x="2039504" y="2431666"/>
+                  </a:lnTo>
+                  <a:lnTo>
+                    <a:pt x="1962872" y="2417553"/>
+                  </a:lnTo>
+                  <a:lnTo>
+                    <a:pt x="1886239" y="2403250"/>
+                  </a:lnTo>
+                  <a:lnTo>
+                    <a:pt x="1809607" y="2388756"/>
+                  </a:lnTo>
+                  <a:lnTo>
+                    <a:pt x="1732974" y="2374067"/>
+                  </a:lnTo>
+                  <a:lnTo>
+                    <a:pt x="1656342" y="2359181"/>
+                  </a:lnTo>
+                  <a:lnTo>
+                    <a:pt x="1579709" y="2344095"/>
+                  </a:lnTo>
+                  <a:lnTo>
+                    <a:pt x="1503076" y="2328807"/>
+                  </a:lnTo>
+                  <a:lnTo>
+                    <a:pt x="1426444" y="2313314"/>
+                  </a:lnTo>
+                  <a:lnTo>
+                    <a:pt x="1349811" y="2297613"/>
+                  </a:lnTo>
+                  <a:lnTo>
+                    <a:pt x="1273179" y="2281702"/>
+                  </a:lnTo>
+                  <a:lnTo>
+                    <a:pt x="1196546" y="2265577"/>
+                  </a:lnTo>
+                  <a:lnTo>
+                    <a:pt x="1119914" y="2249235"/>
+                  </a:lnTo>
+                  <a:lnTo>
+                    <a:pt x="1043281" y="2232675"/>
+                  </a:lnTo>
+                  <a:lnTo>
+                    <a:pt x="966649" y="2215892"/>
+                  </a:lnTo>
+                  <a:lnTo>
+                    <a:pt x="890016" y="2198884"/>
+                  </a:lnTo>
+                  <a:lnTo>
+                    <a:pt x="813384" y="2181648"/>
+                  </a:lnTo>
+                  <a:lnTo>
+                    <a:pt x="736751" y="2164181"/>
+                  </a:lnTo>
+                  <a:lnTo>
+                    <a:pt x="660118" y="2146480"/>
+                  </a:lnTo>
+                  <a:lnTo>
+                    <a:pt x="583486" y="2128541"/>
+                  </a:lnTo>
+                  <a:lnTo>
+                    <a:pt x="506853" y="2110361"/>
+                  </a:lnTo>
+                  <a:lnTo>
+                    <a:pt x="430221" y="2091938"/>
+                  </a:lnTo>
+                  <a:lnTo>
+                    <a:pt x="353588" y="2073267"/>
+                  </a:lnTo>
+                  <a:lnTo>
+                    <a:pt x="276956" y="2054346"/>
+                  </a:lnTo>
+                  <a:lnTo>
+                    <a:pt x="200323" y="2035171"/>
+                  </a:lnTo>
+                  <a:lnTo>
+                    <a:pt x="123691" y="2015739"/>
+                  </a:lnTo>
+                  <a:lnTo>
+                    <a:pt x="47058" y="1996047"/>
+                  </a:lnTo>
+                  <a:lnTo>
+                    <a:pt x="0" y="1983791"/>
                   </a:lnTo>
                   <a:close/>
                 </a:path>
@@ -3585,270 +3585,270 @@
           </p:nvSpPr>
           <p:spPr>
             <a:xfrm>
-              <a:off x="1771831" y="1896563"/>
-              <a:ext cx="6449469" cy="3218625"/>
+              <a:off x="1771831" y="2073503"/>
+              <a:ext cx="6449469" cy="3069797"/>
             </a:xfrm>
             <a:custGeom>
               <a:avLst/>
               <a:pathLst>
-                <a:path w="6449469" h="3218625">
+                <a:path w="6449469" h="3069797">
                   <a:moveTo>
                     <a:pt x="0" y="0"/>
                   </a:moveTo>
                   <a:lnTo>
-                    <a:pt x="12335" y="26766"/>
-                  </a:lnTo>
-                  <a:lnTo>
-                    <a:pt x="88968" y="185754"/>
-                  </a:lnTo>
-                  <a:lnTo>
-                    <a:pt x="165600" y="337771"/>
-                  </a:lnTo>
-                  <a:lnTo>
-                    <a:pt x="242233" y="483123"/>
-                  </a:lnTo>
-                  <a:lnTo>
-                    <a:pt x="318865" y="622101"/>
-                  </a:lnTo>
-                  <a:lnTo>
-                    <a:pt x="395498" y="754985"/>
-                  </a:lnTo>
-                  <a:lnTo>
-                    <a:pt x="472130" y="882042"/>
-                  </a:lnTo>
-                  <a:lnTo>
-                    <a:pt x="548763" y="1003528"/>
-                  </a:lnTo>
-                  <a:lnTo>
-                    <a:pt x="625396" y="1119687"/>
-                  </a:lnTo>
-                  <a:lnTo>
-                    <a:pt x="702028" y="1230753"/>
-                  </a:lnTo>
-                  <a:lnTo>
-                    <a:pt x="778661" y="1336948"/>
-                  </a:lnTo>
-                  <a:lnTo>
-                    <a:pt x="855293" y="1438488"/>
-                  </a:lnTo>
-                  <a:lnTo>
-                    <a:pt x="931926" y="1535574"/>
-                  </a:lnTo>
-                  <a:lnTo>
-                    <a:pt x="1008558" y="1628404"/>
-                  </a:lnTo>
-                  <a:lnTo>
-                    <a:pt x="1085191" y="1717164"/>
-                  </a:lnTo>
-                  <a:lnTo>
-                    <a:pt x="1161823" y="1802031"/>
-                  </a:lnTo>
-                  <a:lnTo>
-                    <a:pt x="1238456" y="1883177"/>
-                  </a:lnTo>
-                  <a:lnTo>
-                    <a:pt x="1315088" y="1960765"/>
-                  </a:lnTo>
-                  <a:lnTo>
-                    <a:pt x="1391721" y="2034951"/>
-                  </a:lnTo>
-                  <a:lnTo>
-                    <a:pt x="1468354" y="2105884"/>
-                  </a:lnTo>
-                  <a:lnTo>
-                    <a:pt x="1544986" y="2173707"/>
-                  </a:lnTo>
-                  <a:lnTo>
-                    <a:pt x="1621619" y="2238555"/>
-                  </a:lnTo>
-                  <a:lnTo>
-                    <a:pt x="1698251" y="2300561"/>
-                  </a:lnTo>
-                  <a:lnTo>
-                    <a:pt x="1774884" y="2359847"/>
-                  </a:lnTo>
-                  <a:lnTo>
-                    <a:pt x="1851516" y="2416534"/>
-                  </a:lnTo>
-                  <a:lnTo>
-                    <a:pt x="1928149" y="2470735"/>
-                  </a:lnTo>
-                  <a:lnTo>
-                    <a:pt x="2004781" y="2522560"/>
-                  </a:lnTo>
-                  <a:lnTo>
-                    <a:pt x="2081414" y="2572112"/>
-                  </a:lnTo>
-                  <a:lnTo>
-                    <a:pt x="2158047" y="2619492"/>
-                  </a:lnTo>
-                  <a:lnTo>
-                    <a:pt x="2234679" y="2664793"/>
-                  </a:lnTo>
-                  <a:lnTo>
-                    <a:pt x="2311312" y="2708109"/>
-                  </a:lnTo>
-                  <a:lnTo>
-                    <a:pt x="2387944" y="2749525"/>
-                  </a:lnTo>
-                  <a:lnTo>
-                    <a:pt x="2464577" y="2784801"/>
-                  </a:lnTo>
-                  <a:lnTo>
-                    <a:pt x="2541209" y="2796289"/>
-                  </a:lnTo>
-                  <a:lnTo>
-                    <a:pt x="2617842" y="2807624"/>
-                  </a:lnTo>
-                  <a:lnTo>
-                    <a:pt x="2694474" y="2818810"/>
-                  </a:lnTo>
-                  <a:lnTo>
-                    <a:pt x="2771107" y="2829847"/>
-                  </a:lnTo>
-                  <a:lnTo>
-                    <a:pt x="2847739" y="2840739"/>
-                  </a:lnTo>
-                  <a:lnTo>
-                    <a:pt x="2924372" y="2851486"/>
-                  </a:lnTo>
-                  <a:lnTo>
-                    <a:pt x="3001005" y="2862091"/>
-                  </a:lnTo>
-                  <a:lnTo>
-                    <a:pt x="3077637" y="2872556"/>
-                  </a:lnTo>
-                  <a:lnTo>
-                    <a:pt x="3154270" y="2882882"/>
-                  </a:lnTo>
-                  <a:lnTo>
-                    <a:pt x="3230902" y="2893071"/>
-                  </a:lnTo>
-                  <a:lnTo>
-                    <a:pt x="3307535" y="2903126"/>
-                  </a:lnTo>
-                  <a:lnTo>
-                    <a:pt x="3384167" y="2913047"/>
-                  </a:lnTo>
-                  <a:lnTo>
-                    <a:pt x="3460800" y="2922837"/>
-                  </a:lnTo>
-                  <a:lnTo>
-                    <a:pt x="3537432" y="2932498"/>
-                  </a:lnTo>
-                  <a:lnTo>
-                    <a:pt x="3614065" y="2942030"/>
-                  </a:lnTo>
-                  <a:lnTo>
-                    <a:pt x="3690698" y="2951437"/>
-                  </a:lnTo>
-                  <a:lnTo>
-                    <a:pt x="3767330" y="2960718"/>
-                  </a:lnTo>
-                  <a:lnTo>
-                    <a:pt x="3843963" y="2969878"/>
-                  </a:lnTo>
-                  <a:lnTo>
-                    <a:pt x="3920595" y="2978915"/>
-                  </a:lnTo>
-                  <a:lnTo>
-                    <a:pt x="3997228" y="2987834"/>
-                  </a:lnTo>
-                  <a:lnTo>
-                    <a:pt x="4073860" y="2996634"/>
-                  </a:lnTo>
-                  <a:lnTo>
-                    <a:pt x="4150493" y="3005317"/>
-                  </a:lnTo>
-                  <a:lnTo>
-                    <a:pt x="4227125" y="3013886"/>
-                  </a:lnTo>
-                  <a:lnTo>
-                    <a:pt x="4303758" y="3022341"/>
-                  </a:lnTo>
-                  <a:lnTo>
-                    <a:pt x="4380390" y="3030685"/>
-                  </a:lnTo>
-                  <a:lnTo>
-                    <a:pt x="4457023" y="3038917"/>
-                  </a:lnTo>
-                  <a:lnTo>
-                    <a:pt x="4533656" y="3047041"/>
-                  </a:lnTo>
-                  <a:lnTo>
-                    <a:pt x="4610288" y="3055058"/>
-                  </a:lnTo>
-                  <a:lnTo>
-                    <a:pt x="4686921" y="3062968"/>
-                  </a:lnTo>
-                  <a:lnTo>
-                    <a:pt x="4763553" y="3070774"/>
-                  </a:lnTo>
-                  <a:lnTo>
-                    <a:pt x="4840186" y="3078476"/>
-                  </a:lnTo>
-                  <a:lnTo>
-                    <a:pt x="4916818" y="3086076"/>
-                  </a:lnTo>
-                  <a:lnTo>
-                    <a:pt x="4993451" y="3093576"/>
-                  </a:lnTo>
-                  <a:lnTo>
-                    <a:pt x="5070083" y="3100976"/>
-                  </a:lnTo>
-                  <a:lnTo>
-                    <a:pt x="5146716" y="3108279"/>
-                  </a:lnTo>
-                  <a:lnTo>
-                    <a:pt x="5223348" y="3115484"/>
-                  </a:lnTo>
-                  <a:lnTo>
-                    <a:pt x="5299981" y="3122595"/>
-                  </a:lnTo>
-                  <a:lnTo>
-                    <a:pt x="5376614" y="3129611"/>
-                  </a:lnTo>
-                  <a:lnTo>
-                    <a:pt x="5453246" y="3136535"/>
-                  </a:lnTo>
-                  <a:lnTo>
-                    <a:pt x="5529879" y="3143366"/>
-                  </a:lnTo>
-                  <a:lnTo>
-                    <a:pt x="5606511" y="3150108"/>
-                  </a:lnTo>
-                  <a:lnTo>
-                    <a:pt x="5683144" y="3156760"/>
-                  </a:lnTo>
-                  <a:lnTo>
-                    <a:pt x="5759776" y="3163324"/>
-                  </a:lnTo>
-                  <a:lnTo>
-                    <a:pt x="5836409" y="3169801"/>
-                  </a:lnTo>
-                  <a:lnTo>
-                    <a:pt x="5913041" y="3176192"/>
-                  </a:lnTo>
-                  <a:lnTo>
-                    <a:pt x="5989674" y="3182499"/>
-                  </a:lnTo>
-                  <a:lnTo>
-                    <a:pt x="6066307" y="3188722"/>
-                  </a:lnTo>
-                  <a:lnTo>
-                    <a:pt x="6142939" y="3194863"/>
-                  </a:lnTo>
-                  <a:lnTo>
-                    <a:pt x="6219572" y="3200923"/>
-                  </a:lnTo>
-                  <a:lnTo>
-                    <a:pt x="6296204" y="3206902"/>
-                  </a:lnTo>
-                  <a:lnTo>
-                    <a:pt x="6372837" y="3212803"/>
-                  </a:lnTo>
-                  <a:lnTo>
-                    <a:pt x="6449469" y="3218625"/>
+                    <a:pt x="12335" y="25528"/>
+                  </a:lnTo>
+                  <a:lnTo>
+                    <a:pt x="88968" y="177165"/>
+                  </a:lnTo>
+                  <a:lnTo>
+                    <a:pt x="165600" y="322153"/>
+                  </a:lnTo>
+                  <a:lnTo>
+                    <a:pt x="242233" y="460783"/>
+                  </a:lnTo>
+                  <a:lnTo>
+                    <a:pt x="318865" y="593335"/>
+                  </a:lnTo>
+                  <a:lnTo>
+                    <a:pt x="395498" y="720074"/>
+                  </a:lnTo>
+                  <a:lnTo>
+                    <a:pt x="472130" y="841257"/>
+                  </a:lnTo>
+                  <a:lnTo>
+                    <a:pt x="548763" y="957125"/>
+                  </a:lnTo>
+                  <a:lnTo>
+                    <a:pt x="625396" y="1067913"/>
+                  </a:lnTo>
+                  <a:lnTo>
+                    <a:pt x="702028" y="1173843"/>
+                  </a:lnTo>
+                  <a:lnTo>
+                    <a:pt x="778661" y="1275128"/>
+                  </a:lnTo>
+                  <a:lnTo>
+                    <a:pt x="855293" y="1371972"/>
+                  </a:lnTo>
+                  <a:lnTo>
+                    <a:pt x="931926" y="1464570"/>
+                  </a:lnTo>
+                  <a:lnTo>
+                    <a:pt x="1008558" y="1553107"/>
+                  </a:lnTo>
+                  <a:lnTo>
+                    <a:pt x="1085191" y="1637763"/>
+                  </a:lnTo>
+                  <a:lnTo>
+                    <a:pt x="1161823" y="1718706"/>
+                  </a:lnTo>
+                  <a:lnTo>
+                    <a:pt x="1238456" y="1796100"/>
+                  </a:lnTo>
+                  <a:lnTo>
+                    <a:pt x="1315088" y="1870100"/>
+                  </a:lnTo>
+                  <a:lnTo>
+                    <a:pt x="1391721" y="1940856"/>
+                  </a:lnTo>
+                  <a:lnTo>
+                    <a:pt x="1468354" y="2008509"/>
+                  </a:lnTo>
+                  <a:lnTo>
+                    <a:pt x="1544986" y="2073195"/>
+                  </a:lnTo>
+                  <a:lnTo>
+                    <a:pt x="1621619" y="2135045"/>
+                  </a:lnTo>
+                  <a:lnTo>
+                    <a:pt x="1698251" y="2194184"/>
+                  </a:lnTo>
+                  <a:lnTo>
+                    <a:pt x="1774884" y="2250729"/>
+                  </a:lnTo>
+                  <a:lnTo>
+                    <a:pt x="1851516" y="2304794"/>
+                  </a:lnTo>
+                  <a:lnTo>
+                    <a:pt x="1928149" y="2356489"/>
+                  </a:lnTo>
+                  <a:lnTo>
+                    <a:pt x="2004781" y="2405918"/>
+                  </a:lnTo>
+                  <a:lnTo>
+                    <a:pt x="2081414" y="2453179"/>
+                  </a:lnTo>
+                  <a:lnTo>
+                    <a:pt x="2158047" y="2498367"/>
+                  </a:lnTo>
+                  <a:lnTo>
+                    <a:pt x="2234679" y="2541574"/>
+                  </a:lnTo>
+                  <a:lnTo>
+                    <a:pt x="2311312" y="2582887"/>
+                  </a:lnTo>
+                  <a:lnTo>
+                    <a:pt x="2387944" y="2622388"/>
+                  </a:lnTo>
+                  <a:lnTo>
+                    <a:pt x="2464577" y="2656033"/>
+                  </a:lnTo>
+                  <a:lnTo>
+                    <a:pt x="2541209" y="2666989"/>
+                  </a:lnTo>
+                  <a:lnTo>
+                    <a:pt x="2617842" y="2677801"/>
+                  </a:lnTo>
+                  <a:lnTo>
+                    <a:pt x="2694474" y="2688469"/>
+                  </a:lnTo>
+                  <a:lnTo>
+                    <a:pt x="2771107" y="2698996"/>
+                  </a:lnTo>
+                  <a:lnTo>
+                    <a:pt x="2847739" y="2709384"/>
+                  </a:lnTo>
+                  <a:lnTo>
+                    <a:pt x="2924372" y="2719634"/>
+                  </a:lnTo>
+                  <a:lnTo>
+                    <a:pt x="3001005" y="2729749"/>
+                  </a:lnTo>
+                  <a:lnTo>
+                    <a:pt x="3077637" y="2739730"/>
+                  </a:lnTo>
+                  <a:lnTo>
+                    <a:pt x="3154270" y="2749578"/>
+                  </a:lnTo>
+                  <a:lnTo>
+                    <a:pt x="3230902" y="2759297"/>
+                  </a:lnTo>
+                  <a:lnTo>
+                    <a:pt x="3307535" y="2768886"/>
+                  </a:lnTo>
+                  <a:lnTo>
+                    <a:pt x="3384167" y="2778349"/>
+                  </a:lnTo>
+                  <a:lnTo>
+                    <a:pt x="3460800" y="2787686"/>
+                  </a:lnTo>
+                  <a:lnTo>
+                    <a:pt x="3537432" y="2796900"/>
+                  </a:lnTo>
+                  <a:lnTo>
+                    <a:pt x="3614065" y="2805992"/>
+                  </a:lnTo>
+                  <a:lnTo>
+                    <a:pt x="3690698" y="2814963"/>
+                  </a:lnTo>
+                  <a:lnTo>
+                    <a:pt x="3767330" y="2823816"/>
+                  </a:lnTo>
+                  <a:lnTo>
+                    <a:pt x="3843963" y="2832551"/>
+                  </a:lnTo>
+                  <a:lnTo>
+                    <a:pt x="3920595" y="2841171"/>
+                  </a:lnTo>
+                  <a:lnTo>
+                    <a:pt x="3997228" y="2849677"/>
+                  </a:lnTo>
+                  <a:lnTo>
+                    <a:pt x="4073860" y="2858070"/>
+                  </a:lnTo>
+                  <a:lnTo>
+                    <a:pt x="4150493" y="2866352"/>
+                  </a:lnTo>
+                  <a:lnTo>
+                    <a:pt x="4227125" y="2874525"/>
+                  </a:lnTo>
+                  <a:lnTo>
+                    <a:pt x="4303758" y="2882589"/>
+                  </a:lnTo>
+                  <a:lnTo>
+                    <a:pt x="4380390" y="2890547"/>
+                  </a:lnTo>
+                  <a:lnTo>
+                    <a:pt x="4457023" y="2898399"/>
+                  </a:lnTo>
+                  <a:lnTo>
+                    <a:pt x="4533656" y="2906147"/>
+                  </a:lnTo>
+                  <a:lnTo>
+                    <a:pt x="4610288" y="2913793"/>
+                  </a:lnTo>
+                  <a:lnTo>
+                    <a:pt x="4686921" y="2921338"/>
+                  </a:lnTo>
+                  <a:lnTo>
+                    <a:pt x="4763553" y="2928782"/>
+                  </a:lnTo>
+                  <a:lnTo>
+                    <a:pt x="4840186" y="2936128"/>
+                  </a:lnTo>
+                  <a:lnTo>
+                    <a:pt x="4916818" y="2943377"/>
+                  </a:lnTo>
+                  <a:lnTo>
+                    <a:pt x="4993451" y="2950530"/>
+                  </a:lnTo>
+                  <a:lnTo>
+                    <a:pt x="5070083" y="2957588"/>
+                  </a:lnTo>
+                  <a:lnTo>
+                    <a:pt x="5146716" y="2964553"/>
+                  </a:lnTo>
+                  <a:lnTo>
+                    <a:pt x="5223348" y="2971426"/>
+                  </a:lnTo>
+                  <a:lnTo>
+                    <a:pt x="5299981" y="2978207"/>
+                  </a:lnTo>
+                  <a:lnTo>
+                    <a:pt x="5376614" y="2984899"/>
+                  </a:lnTo>
+                  <a:lnTo>
+                    <a:pt x="5453246" y="2991502"/>
+                  </a:lnTo>
+                  <a:lnTo>
+                    <a:pt x="5529879" y="2998018"/>
+                  </a:lnTo>
+                  <a:lnTo>
+                    <a:pt x="5606511" y="3004448"/>
+                  </a:lnTo>
+                  <a:lnTo>
+                    <a:pt x="5683144" y="3010792"/>
+                  </a:lnTo>
+                  <a:lnTo>
+                    <a:pt x="5759776" y="3017053"/>
+                  </a:lnTo>
+                  <a:lnTo>
+                    <a:pt x="5836409" y="3023230"/>
+                  </a:lnTo>
+                  <a:lnTo>
+                    <a:pt x="5913041" y="3029326"/>
+                  </a:lnTo>
+                  <a:lnTo>
+                    <a:pt x="5989674" y="3035341"/>
+                  </a:lnTo>
+                  <a:lnTo>
+                    <a:pt x="6066307" y="3041277"/>
+                  </a:lnTo>
+                  <a:lnTo>
+                    <a:pt x="6142939" y="3047134"/>
+                  </a:lnTo>
+                  <a:lnTo>
+                    <a:pt x="6219572" y="3052914"/>
+                  </a:lnTo>
+                  <a:lnTo>
+                    <a:pt x="6296204" y="3058616"/>
+                  </a:lnTo>
+                  <a:lnTo>
+                    <a:pt x="6372837" y="3064244"/>
+                  </a:lnTo>
+                  <a:lnTo>
+                    <a:pt x="6449469" y="3069797"/>
                   </a:lnTo>
                 </a:path>
               </a:pathLst>
@@ -3868,303 +3868,303 @@
           </p:nvSpPr>
           <p:spPr>
             <a:xfrm>
-              <a:off x="817517" y="3976532"/>
-              <a:ext cx="7403783" cy="1488793"/>
+              <a:off x="817517" y="4057294"/>
+              <a:ext cx="7403783" cy="1419952"/>
             </a:xfrm>
             <a:custGeom>
               <a:avLst/>
               <a:pathLst>
-                <a:path w="7403783" h="1488793">
+                <a:path w="7403783" h="1419952">
                   <a:moveTo>
-                    <a:pt x="7403783" y="1488793"/>
+                    <a:pt x="7403783" y="1419952"/>
                   </a:moveTo>
                   <a:lnTo>
-                    <a:pt x="7327150" y="1484946"/>
-                  </a:lnTo>
-                  <a:lnTo>
-                    <a:pt x="7250518" y="1480923"/>
-                  </a:lnTo>
-                  <a:lnTo>
-                    <a:pt x="7173885" y="1476715"/>
-                  </a:lnTo>
-                  <a:lnTo>
-                    <a:pt x="7097253" y="1472315"/>
-                  </a:lnTo>
-                  <a:lnTo>
-                    <a:pt x="7020620" y="1467712"/>
-                  </a:lnTo>
-                  <a:lnTo>
-                    <a:pt x="6943987" y="1462899"/>
-                  </a:lnTo>
-                  <a:lnTo>
-                    <a:pt x="6867355" y="1457865"/>
-                  </a:lnTo>
-                  <a:lnTo>
-                    <a:pt x="6790722" y="1452600"/>
-                  </a:lnTo>
-                  <a:lnTo>
-                    <a:pt x="6714090" y="1447093"/>
-                  </a:lnTo>
-                  <a:lnTo>
-                    <a:pt x="6637457" y="1441334"/>
-                  </a:lnTo>
-                  <a:lnTo>
-                    <a:pt x="6560825" y="1435311"/>
-                  </a:lnTo>
-                  <a:lnTo>
-                    <a:pt x="6484192" y="1429012"/>
-                  </a:lnTo>
-                  <a:lnTo>
-                    <a:pt x="6407560" y="1422423"/>
-                  </a:lnTo>
-                  <a:lnTo>
-                    <a:pt x="6330927" y="1415533"/>
-                  </a:lnTo>
-                  <a:lnTo>
-                    <a:pt x="6254294" y="1408327"/>
-                  </a:lnTo>
-                  <a:lnTo>
-                    <a:pt x="6177662" y="1400790"/>
-                  </a:lnTo>
-                  <a:lnTo>
-                    <a:pt x="6101029" y="1392907"/>
-                  </a:lnTo>
-                  <a:lnTo>
-                    <a:pt x="6024397" y="1384663"/>
-                  </a:lnTo>
-                  <a:lnTo>
-                    <a:pt x="5947764" y="1376041"/>
-                  </a:lnTo>
-                  <a:lnTo>
-                    <a:pt x="5871132" y="1367024"/>
-                  </a:lnTo>
-                  <a:lnTo>
-                    <a:pt x="5794499" y="1357593"/>
-                  </a:lnTo>
-                  <a:lnTo>
-                    <a:pt x="5717867" y="1347730"/>
-                  </a:lnTo>
-                  <a:lnTo>
-                    <a:pt x="5641234" y="1337414"/>
-                  </a:lnTo>
-                  <a:lnTo>
-                    <a:pt x="5564602" y="1326625"/>
-                  </a:lnTo>
-                  <a:lnTo>
-                    <a:pt x="5487969" y="1315341"/>
-                  </a:lnTo>
-                  <a:lnTo>
-                    <a:pt x="5411336" y="1303540"/>
-                  </a:lnTo>
-                  <a:lnTo>
-                    <a:pt x="5334704" y="1291198"/>
-                  </a:lnTo>
-                  <a:lnTo>
-                    <a:pt x="5258071" y="1278290"/>
-                  </a:lnTo>
-                  <a:lnTo>
-                    <a:pt x="5181439" y="1264790"/>
-                  </a:lnTo>
-                  <a:lnTo>
-                    <a:pt x="5104806" y="1250670"/>
-                  </a:lnTo>
-                  <a:lnTo>
-                    <a:pt x="5028174" y="1235903"/>
-                  </a:lnTo>
-                  <a:lnTo>
-                    <a:pt x="4951541" y="1220459"/>
-                  </a:lnTo>
-                  <a:lnTo>
-                    <a:pt x="4874909" y="1204307"/>
-                  </a:lnTo>
-                  <a:lnTo>
-                    <a:pt x="4798276" y="1187414"/>
-                  </a:lnTo>
-                  <a:lnTo>
-                    <a:pt x="4721644" y="1169746"/>
-                  </a:lnTo>
-                  <a:lnTo>
-                    <a:pt x="4645011" y="1151269"/>
-                  </a:lnTo>
-                  <a:lnTo>
-                    <a:pt x="4568378" y="1131943"/>
-                  </a:lnTo>
-                  <a:lnTo>
-                    <a:pt x="4491746" y="1111732"/>
-                  </a:lnTo>
-                  <a:lnTo>
-                    <a:pt x="4415113" y="1090593"/>
-                  </a:lnTo>
-                  <a:lnTo>
-                    <a:pt x="4338481" y="1068486"/>
-                  </a:lnTo>
-                  <a:lnTo>
-                    <a:pt x="4261848" y="1045364"/>
-                  </a:lnTo>
-                  <a:lnTo>
-                    <a:pt x="4185216" y="1021182"/>
-                  </a:lnTo>
-                  <a:lnTo>
-                    <a:pt x="4108583" y="995891"/>
-                  </a:lnTo>
-                  <a:lnTo>
-                    <a:pt x="4031951" y="969440"/>
-                  </a:lnTo>
-                  <a:lnTo>
-                    <a:pt x="3955318" y="941776"/>
-                  </a:lnTo>
-                  <a:lnTo>
-                    <a:pt x="3878685" y="912844"/>
-                  </a:lnTo>
-                  <a:lnTo>
-                    <a:pt x="3802053" y="882585"/>
-                  </a:lnTo>
-                  <a:lnTo>
-                    <a:pt x="3725420" y="850938"/>
-                  </a:lnTo>
-                  <a:lnTo>
-                    <a:pt x="3648788" y="817840"/>
-                  </a:lnTo>
-                  <a:lnTo>
-                    <a:pt x="3572155" y="783224"/>
-                  </a:lnTo>
-                  <a:lnTo>
-                    <a:pt x="3495523" y="747020"/>
-                  </a:lnTo>
-                  <a:lnTo>
-                    <a:pt x="3418890" y="709156"/>
-                  </a:lnTo>
-                  <a:lnTo>
-                    <a:pt x="3342258" y="693190"/>
-                  </a:lnTo>
-                  <a:lnTo>
-                    <a:pt x="3265625" y="681393"/>
-                  </a:lnTo>
-                  <a:lnTo>
-                    <a:pt x="3188993" y="669436"/>
-                  </a:lnTo>
-                  <a:lnTo>
-                    <a:pt x="3112360" y="657320"/>
-                  </a:lnTo>
-                  <a:lnTo>
-                    <a:pt x="3035727" y="645041"/>
-                  </a:lnTo>
-                  <a:lnTo>
-                    <a:pt x="2959095" y="632597"/>
-                  </a:lnTo>
-                  <a:lnTo>
-                    <a:pt x="2882462" y="619986"/>
-                  </a:lnTo>
-                  <a:lnTo>
-                    <a:pt x="2805830" y="607206"/>
-                  </a:lnTo>
-                  <a:lnTo>
-                    <a:pt x="2729197" y="594255"/>
-                  </a:lnTo>
-                  <a:lnTo>
-                    <a:pt x="2652565" y="581129"/>
-                  </a:lnTo>
-                  <a:lnTo>
-                    <a:pt x="2575932" y="567828"/>
-                  </a:lnTo>
-                  <a:lnTo>
-                    <a:pt x="2499300" y="554349"/>
-                  </a:lnTo>
-                  <a:lnTo>
-                    <a:pt x="2422667" y="540688"/>
-                  </a:lnTo>
-                  <a:lnTo>
-                    <a:pt x="2346034" y="526844"/>
-                  </a:lnTo>
-                  <a:lnTo>
-                    <a:pt x="2269402" y="512815"/>
-                  </a:lnTo>
-                  <a:lnTo>
-                    <a:pt x="2192769" y="498597"/>
-                  </a:lnTo>
-                  <a:lnTo>
-                    <a:pt x="2116137" y="484189"/>
-                  </a:lnTo>
-                  <a:lnTo>
-                    <a:pt x="2039504" y="469588"/>
-                  </a:lnTo>
-                  <a:lnTo>
-                    <a:pt x="1962872" y="454790"/>
-                  </a:lnTo>
-                  <a:lnTo>
-                    <a:pt x="1886239" y="439794"/>
-                  </a:lnTo>
-                  <a:lnTo>
-                    <a:pt x="1809607" y="424597"/>
-                  </a:lnTo>
-                  <a:lnTo>
-                    <a:pt x="1732974" y="409196"/>
-                  </a:lnTo>
-                  <a:lnTo>
-                    <a:pt x="1656342" y="393588"/>
-                  </a:lnTo>
-                  <a:lnTo>
-                    <a:pt x="1579709" y="377771"/>
-                  </a:lnTo>
-                  <a:lnTo>
-                    <a:pt x="1503076" y="361742"/>
-                  </a:lnTo>
-                  <a:lnTo>
-                    <a:pt x="1426444" y="345498"/>
-                  </a:lnTo>
-                  <a:lnTo>
-                    <a:pt x="1349811" y="329036"/>
-                  </a:lnTo>
-                  <a:lnTo>
-                    <a:pt x="1273179" y="312353"/>
-                  </a:lnTo>
-                  <a:lnTo>
-                    <a:pt x="1196546" y="295446"/>
-                  </a:lnTo>
-                  <a:lnTo>
-                    <a:pt x="1119914" y="278313"/>
-                  </a:lnTo>
-                  <a:lnTo>
-                    <a:pt x="1043281" y="260949"/>
-                  </a:lnTo>
-                  <a:lnTo>
-                    <a:pt x="966649" y="243353"/>
-                  </a:lnTo>
-                  <a:lnTo>
-                    <a:pt x="890016" y="225520"/>
-                  </a:lnTo>
-                  <a:lnTo>
-                    <a:pt x="813384" y="207449"/>
-                  </a:lnTo>
-                  <a:lnTo>
-                    <a:pt x="736751" y="189135"/>
-                  </a:lnTo>
-                  <a:lnTo>
-                    <a:pt x="660118" y="170575"/>
-                  </a:lnTo>
-                  <a:lnTo>
-                    <a:pt x="583486" y="151767"/>
-                  </a:lnTo>
-                  <a:lnTo>
-                    <a:pt x="506853" y="132706"/>
-                  </a:lnTo>
-                  <a:lnTo>
-                    <a:pt x="430221" y="113389"/>
-                  </a:lnTo>
-                  <a:lnTo>
-                    <a:pt x="353588" y="93813"/>
-                  </a:lnTo>
-                  <a:lnTo>
-                    <a:pt x="276956" y="73975"/>
-                  </a:lnTo>
-                  <a:lnTo>
-                    <a:pt x="200323" y="53870"/>
-                  </a:lnTo>
-                  <a:lnTo>
-                    <a:pt x="123691" y="33496"/>
-                  </a:lnTo>
-                  <a:lnTo>
-                    <a:pt x="47058" y="12849"/>
+                    <a:pt x="7327150" y="1416283"/>
+                  </a:lnTo>
+                  <a:lnTo>
+                    <a:pt x="7250518" y="1412446"/>
+                  </a:lnTo>
+                  <a:lnTo>
+                    <a:pt x="7173885" y="1408433"/>
+                  </a:lnTo>
+                  <a:lnTo>
+                    <a:pt x="7097253" y="1404236"/>
+                  </a:lnTo>
+                  <a:lnTo>
+                    <a:pt x="7020620" y="1399846"/>
+                  </a:lnTo>
+                  <a:lnTo>
+                    <a:pt x="6943987" y="1395255"/>
+                  </a:lnTo>
+                  <a:lnTo>
+                    <a:pt x="6867355" y="1390454"/>
+                  </a:lnTo>
+                  <a:lnTo>
+                    <a:pt x="6790722" y="1385432"/>
+                  </a:lnTo>
+                  <a:lnTo>
+                    <a:pt x="6714090" y="1380180"/>
+                  </a:lnTo>
+                  <a:lnTo>
+                    <a:pt x="6637457" y="1374687"/>
+                  </a:lnTo>
+                  <a:lnTo>
+                    <a:pt x="6560825" y="1368943"/>
+                  </a:lnTo>
+                  <a:lnTo>
+                    <a:pt x="6484192" y="1362935"/>
+                  </a:lnTo>
+                  <a:lnTo>
+                    <a:pt x="6407560" y="1356651"/>
+                  </a:lnTo>
+                  <a:lnTo>
+                    <a:pt x="6330927" y="1350079"/>
+                  </a:lnTo>
+                  <a:lnTo>
+                    <a:pt x="6254294" y="1343206"/>
+                  </a:lnTo>
+                  <a:lnTo>
+                    <a:pt x="6177662" y="1336018"/>
+                  </a:lnTo>
+                  <a:lnTo>
+                    <a:pt x="6101029" y="1328500"/>
+                  </a:lnTo>
+                  <a:lnTo>
+                    <a:pt x="6024397" y="1320637"/>
+                  </a:lnTo>
+                  <a:lnTo>
+                    <a:pt x="5947764" y="1312414"/>
+                  </a:lnTo>
+                  <a:lnTo>
+                    <a:pt x="5871132" y="1303813"/>
+                  </a:lnTo>
+                  <a:lnTo>
+                    <a:pt x="5794499" y="1294818"/>
+                  </a:lnTo>
+                  <a:lnTo>
+                    <a:pt x="5717867" y="1285411"/>
+                  </a:lnTo>
+                  <a:lnTo>
+                    <a:pt x="5641234" y="1275572"/>
+                  </a:lnTo>
+                  <a:lnTo>
+                    <a:pt x="5564602" y="1265282"/>
+                  </a:lnTo>
+                  <a:lnTo>
+                    <a:pt x="5487969" y="1254520"/>
+                  </a:lnTo>
+                  <a:lnTo>
+                    <a:pt x="5411336" y="1243265"/>
+                  </a:lnTo>
+                  <a:lnTo>
+                    <a:pt x="5334704" y="1231493"/>
+                  </a:lnTo>
+                  <a:lnTo>
+                    <a:pt x="5258071" y="1219182"/>
+                  </a:lnTo>
+                  <a:lnTo>
+                    <a:pt x="5181439" y="1206306"/>
+                  </a:lnTo>
+                  <a:lnTo>
+                    <a:pt x="5104806" y="1192840"/>
+                  </a:lnTo>
+                  <a:lnTo>
+                    <a:pt x="5028174" y="1178756"/>
+                  </a:lnTo>
+                  <a:lnTo>
+                    <a:pt x="4951541" y="1164026"/>
+                  </a:lnTo>
+                  <a:lnTo>
+                    <a:pt x="4874909" y="1148620"/>
+                  </a:lnTo>
+                  <a:lnTo>
+                    <a:pt x="4798276" y="1132509"/>
+                  </a:lnTo>
+                  <a:lnTo>
+                    <a:pt x="4721644" y="1115658"/>
+                  </a:lnTo>
+                  <a:lnTo>
+                    <a:pt x="4645011" y="1098034"/>
+                  </a:lnTo>
+                  <a:lnTo>
+                    <a:pt x="4568378" y="1079603"/>
+                  </a:lnTo>
+                  <a:lnTo>
+                    <a:pt x="4491746" y="1060326"/>
+                  </a:lnTo>
+                  <a:lnTo>
+                    <a:pt x="4415113" y="1040165"/>
+                  </a:lnTo>
+                  <a:lnTo>
+                    <a:pt x="4338481" y="1019079"/>
+                  </a:lnTo>
+                  <a:lnTo>
+                    <a:pt x="4261848" y="997027"/>
+                  </a:lnTo>
+                  <a:lnTo>
+                    <a:pt x="4185216" y="973963"/>
+                  </a:lnTo>
+                  <a:lnTo>
+                    <a:pt x="4108583" y="949841"/>
+                  </a:lnTo>
+                  <a:lnTo>
+                    <a:pt x="4031951" y="924614"/>
+                  </a:lnTo>
+                  <a:lnTo>
+                    <a:pt x="3955318" y="898229"/>
+                  </a:lnTo>
+                  <a:lnTo>
+                    <a:pt x="3878685" y="870634"/>
+                  </a:lnTo>
+                  <a:lnTo>
+                    <a:pt x="3802053" y="841774"/>
+                  </a:lnTo>
+                  <a:lnTo>
+                    <a:pt x="3725420" y="811591"/>
+                  </a:lnTo>
+                  <a:lnTo>
+                    <a:pt x="3648788" y="780023"/>
+                  </a:lnTo>
+                  <a:lnTo>
+                    <a:pt x="3572155" y="747008"/>
+                  </a:lnTo>
+                  <a:lnTo>
+                    <a:pt x="3495523" y="712478"/>
+                  </a:lnTo>
+                  <a:lnTo>
+                    <a:pt x="3418890" y="676365"/>
+                  </a:lnTo>
+                  <a:lnTo>
+                    <a:pt x="3342258" y="661138"/>
+                  </a:lnTo>
+                  <a:lnTo>
+                    <a:pt x="3265625" y="649885"/>
+                  </a:lnTo>
+                  <a:lnTo>
+                    <a:pt x="3188993" y="638482"/>
+                  </a:lnTo>
+                  <a:lnTo>
+                    <a:pt x="3112360" y="626926"/>
+                  </a:lnTo>
+                  <a:lnTo>
+                    <a:pt x="3035727" y="615214"/>
+                  </a:lnTo>
+                  <a:lnTo>
+                    <a:pt x="2959095" y="603346"/>
+                  </a:lnTo>
+                  <a:lnTo>
+                    <a:pt x="2882462" y="591318"/>
+                  </a:lnTo>
+                  <a:lnTo>
+                    <a:pt x="2805830" y="579129"/>
+                  </a:lnTo>
+                  <a:lnTo>
+                    <a:pt x="2729197" y="566776"/>
+                  </a:lnTo>
+                  <a:lnTo>
+                    <a:pt x="2652565" y="554258"/>
+                  </a:lnTo>
+                  <a:lnTo>
+                    <a:pt x="2575932" y="541572"/>
+                  </a:lnTo>
+                  <a:lnTo>
+                    <a:pt x="2499300" y="528716"/>
+                  </a:lnTo>
+                  <a:lnTo>
+                    <a:pt x="2422667" y="515687"/>
+                  </a:lnTo>
+                  <a:lnTo>
+                    <a:pt x="2346034" y="502483"/>
+                  </a:lnTo>
+                  <a:lnTo>
+                    <a:pt x="2269402" y="489103"/>
+                  </a:lnTo>
+                  <a:lnTo>
+                    <a:pt x="2192769" y="475542"/>
+                  </a:lnTo>
+                  <a:lnTo>
+                    <a:pt x="2116137" y="461800"/>
+                  </a:lnTo>
+                  <a:lnTo>
+                    <a:pt x="2039504" y="447874"/>
+                  </a:lnTo>
+                  <a:lnTo>
+                    <a:pt x="1962872" y="433761"/>
+                  </a:lnTo>
+                  <a:lnTo>
+                    <a:pt x="1886239" y="419458"/>
+                  </a:lnTo>
+                  <a:lnTo>
+                    <a:pt x="1809607" y="404964"/>
+                  </a:lnTo>
+                  <a:lnTo>
+                    <a:pt x="1732974" y="390275"/>
+                  </a:lnTo>
+                  <a:lnTo>
+                    <a:pt x="1656342" y="375389"/>
+                  </a:lnTo>
+                  <a:lnTo>
+                    <a:pt x="1579709" y="360303"/>
+                  </a:lnTo>
+                  <a:lnTo>
+                    <a:pt x="1503076" y="345015"/>
+                  </a:lnTo>
+                  <a:lnTo>
+                    <a:pt x="1426444" y="329522"/>
+                  </a:lnTo>
+                  <a:lnTo>
+                    <a:pt x="1349811" y="313821"/>
+                  </a:lnTo>
+                  <a:lnTo>
+                    <a:pt x="1273179" y="297910"/>
+                  </a:lnTo>
+                  <a:lnTo>
+                    <a:pt x="1196546" y="281785"/>
+                  </a:lnTo>
+                  <a:lnTo>
+                    <a:pt x="1119914" y="265443"/>
+                  </a:lnTo>
+                  <a:lnTo>
+                    <a:pt x="1043281" y="248883"/>
+                  </a:lnTo>
+                  <a:lnTo>
+                    <a:pt x="966649" y="232100"/>
+                  </a:lnTo>
+                  <a:lnTo>
+                    <a:pt x="890016" y="215092"/>
+                  </a:lnTo>
+                  <a:lnTo>
+                    <a:pt x="813384" y="197857"/>
+                  </a:lnTo>
+                  <a:lnTo>
+                    <a:pt x="736751" y="180389"/>
+                  </a:lnTo>
+                  <a:lnTo>
+                    <a:pt x="660118" y="162688"/>
+                  </a:lnTo>
+                  <a:lnTo>
+                    <a:pt x="583486" y="144749"/>
+                  </a:lnTo>
+                  <a:lnTo>
+                    <a:pt x="506853" y="126569"/>
+                  </a:lnTo>
+                  <a:lnTo>
+                    <a:pt x="430221" y="108146"/>
+                  </a:lnTo>
+                  <a:lnTo>
+                    <a:pt x="353588" y="89475"/>
+                  </a:lnTo>
+                  <a:lnTo>
+                    <a:pt x="276956" y="70554"/>
+                  </a:lnTo>
+                  <a:lnTo>
+                    <a:pt x="200323" y="51379"/>
+                  </a:lnTo>
+                  <a:lnTo>
+                    <a:pt x="123691" y="31947"/>
+                  </a:lnTo>
+                  <a:lnTo>
+                    <a:pt x="47058" y="12255"/>
                   </a:lnTo>
                   <a:lnTo>
                     <a:pt x="0" y="0"/>
@@ -4187,306 +4187,306 @@
           </p:nvSpPr>
           <p:spPr>
             <a:xfrm>
-              <a:off x="817517" y="2380493"/>
-              <a:ext cx="7403783" cy="2977910"/>
+              <a:off x="817517" y="2535056"/>
+              <a:ext cx="7403783" cy="2840212"/>
             </a:xfrm>
             <a:custGeom>
               <a:avLst/>
               <a:pathLst>
-                <a:path w="7403783" h="2977910">
+                <a:path w="7403783" h="2840212">
                   <a:moveTo>
                     <a:pt x="0" y="0"/>
                   </a:moveTo>
                   <a:lnTo>
-                    <a:pt x="47058" y="56398"/>
-                  </a:lnTo>
-                  <a:lnTo>
-                    <a:pt x="123691" y="145607"/>
-                  </a:lnTo>
-                  <a:lnTo>
-                    <a:pt x="200323" y="232259"/>
-                  </a:lnTo>
-                  <a:lnTo>
-                    <a:pt x="276956" y="316427"/>
-                  </a:lnTo>
-                  <a:lnTo>
-                    <a:pt x="353588" y="398183"/>
-                  </a:lnTo>
-                  <a:lnTo>
-                    <a:pt x="430221" y="477595"/>
-                  </a:lnTo>
-                  <a:lnTo>
-                    <a:pt x="506853" y="554731"/>
-                  </a:lnTo>
-                  <a:lnTo>
-                    <a:pt x="583486" y="629656"/>
-                  </a:lnTo>
-                  <a:lnTo>
-                    <a:pt x="660118" y="702434"/>
-                  </a:lnTo>
-                  <a:lnTo>
-                    <a:pt x="736751" y="773125"/>
-                  </a:lnTo>
-                  <a:lnTo>
-                    <a:pt x="813384" y="841791"/>
-                  </a:lnTo>
-                  <a:lnTo>
-                    <a:pt x="890016" y="908488"/>
-                  </a:lnTo>
-                  <a:lnTo>
-                    <a:pt x="966649" y="973273"/>
-                  </a:lnTo>
-                  <a:lnTo>
-                    <a:pt x="1043281" y="1036202"/>
-                  </a:lnTo>
-                  <a:lnTo>
-                    <a:pt x="1119914" y="1097326"/>
-                  </a:lnTo>
-                  <a:lnTo>
-                    <a:pt x="1196546" y="1156699"/>
-                  </a:lnTo>
-                  <a:lnTo>
-                    <a:pt x="1273179" y="1214370"/>
-                  </a:lnTo>
-                  <a:lnTo>
-                    <a:pt x="1349811" y="1270388"/>
-                  </a:lnTo>
-                  <a:lnTo>
-                    <a:pt x="1426444" y="1324800"/>
-                  </a:lnTo>
-                  <a:lnTo>
-                    <a:pt x="1503076" y="1377652"/>
-                  </a:lnTo>
-                  <a:lnTo>
-                    <a:pt x="1579709" y="1428990"/>
-                  </a:lnTo>
-                  <a:lnTo>
-                    <a:pt x="1656342" y="1478856"/>
-                  </a:lnTo>
-                  <a:lnTo>
-                    <a:pt x="1732974" y="1527293"/>
-                  </a:lnTo>
-                  <a:lnTo>
-                    <a:pt x="1809607" y="1574341"/>
-                  </a:lnTo>
-                  <a:lnTo>
-                    <a:pt x="1886239" y="1620041"/>
-                  </a:lnTo>
-                  <a:lnTo>
-                    <a:pt x="1962872" y="1664431"/>
-                  </a:lnTo>
-                  <a:lnTo>
-                    <a:pt x="2039504" y="1707549"/>
-                  </a:lnTo>
-                  <a:lnTo>
-                    <a:pt x="2116137" y="1749430"/>
-                  </a:lnTo>
-                  <a:lnTo>
-                    <a:pt x="2192769" y="1790112"/>
-                  </a:lnTo>
-                  <a:lnTo>
-                    <a:pt x="2269402" y="1829627"/>
-                  </a:lnTo>
-                  <a:lnTo>
-                    <a:pt x="2346034" y="1868009"/>
-                  </a:lnTo>
-                  <a:lnTo>
-                    <a:pt x="2422667" y="1905292"/>
-                  </a:lnTo>
-                  <a:lnTo>
-                    <a:pt x="2499300" y="1941505"/>
-                  </a:lnTo>
-                  <a:lnTo>
-                    <a:pt x="2575932" y="1976681"/>
-                  </a:lnTo>
-                  <a:lnTo>
-                    <a:pt x="2652565" y="2010849"/>
-                  </a:lnTo>
-                  <a:lnTo>
-                    <a:pt x="2729197" y="2044037"/>
-                  </a:lnTo>
-                  <a:lnTo>
-                    <a:pt x="2805830" y="2076274"/>
-                  </a:lnTo>
-                  <a:lnTo>
-                    <a:pt x="2882462" y="2107587"/>
-                  </a:lnTo>
-                  <a:lnTo>
-                    <a:pt x="2959095" y="2138002"/>
-                  </a:lnTo>
-                  <a:lnTo>
-                    <a:pt x="3035727" y="2167545"/>
-                  </a:lnTo>
-                  <a:lnTo>
-                    <a:pt x="3112360" y="2196242"/>
-                  </a:lnTo>
-                  <a:lnTo>
-                    <a:pt x="3188993" y="2224116"/>
-                  </a:lnTo>
-                  <a:lnTo>
-                    <a:pt x="3265625" y="2251192"/>
-                  </a:lnTo>
-                  <a:lnTo>
-                    <a:pt x="3342258" y="2277491"/>
-                  </a:lnTo>
-                  <a:lnTo>
-                    <a:pt x="3418890" y="2303036"/>
-                  </a:lnTo>
-                  <a:lnTo>
-                    <a:pt x="3495523" y="2327849"/>
-                  </a:lnTo>
-                  <a:lnTo>
-                    <a:pt x="3572155" y="2351951"/>
-                  </a:lnTo>
-                  <a:lnTo>
-                    <a:pt x="3648788" y="2375362"/>
-                  </a:lnTo>
-                  <a:lnTo>
-                    <a:pt x="3725420" y="2398102"/>
-                  </a:lnTo>
-                  <a:lnTo>
-                    <a:pt x="3802053" y="2420190"/>
-                  </a:lnTo>
-                  <a:lnTo>
-                    <a:pt x="3878685" y="2441645"/>
-                  </a:lnTo>
-                  <a:lnTo>
-                    <a:pt x="3955318" y="2462485"/>
-                  </a:lnTo>
-                  <a:lnTo>
-                    <a:pt x="4031951" y="2482728"/>
-                  </a:lnTo>
-                  <a:lnTo>
-                    <a:pt x="4108583" y="2502391"/>
-                  </a:lnTo>
-                  <a:lnTo>
-                    <a:pt x="4185216" y="2521490"/>
-                  </a:lnTo>
-                  <a:lnTo>
-                    <a:pt x="4261848" y="2540041"/>
-                  </a:lnTo>
-                  <a:lnTo>
-                    <a:pt x="4338481" y="2558061"/>
-                  </a:lnTo>
-                  <a:lnTo>
-                    <a:pt x="4415113" y="2575564"/>
-                  </a:lnTo>
-                  <a:lnTo>
-                    <a:pt x="4491746" y="2592566"/>
-                  </a:lnTo>
-                  <a:lnTo>
-                    <a:pt x="4568378" y="2609080"/>
-                  </a:lnTo>
-                  <a:lnTo>
-                    <a:pt x="4645011" y="2625121"/>
-                  </a:lnTo>
-                  <a:lnTo>
-                    <a:pt x="4721644" y="2640702"/>
-                  </a:lnTo>
-                  <a:lnTo>
-                    <a:pt x="4798276" y="2655837"/>
-                  </a:lnTo>
-                  <a:lnTo>
-                    <a:pt x="4874909" y="2670537"/>
-                  </a:lnTo>
-                  <a:lnTo>
-                    <a:pt x="4951541" y="2684817"/>
-                  </a:lnTo>
-                  <a:lnTo>
-                    <a:pt x="5028174" y="2698687"/>
-                  </a:lnTo>
-                  <a:lnTo>
-                    <a:pt x="5104806" y="2712159"/>
-                  </a:lnTo>
-                  <a:lnTo>
-                    <a:pt x="5181439" y="2725246"/>
-                  </a:lnTo>
-                  <a:lnTo>
-                    <a:pt x="5258071" y="2737957"/>
-                  </a:lnTo>
-                  <a:lnTo>
-                    <a:pt x="5334704" y="2750304"/>
-                  </a:lnTo>
-                  <a:lnTo>
-                    <a:pt x="5411336" y="2762297"/>
-                  </a:lnTo>
-                  <a:lnTo>
-                    <a:pt x="5487969" y="2773946"/>
-                  </a:lnTo>
-                  <a:lnTo>
-                    <a:pt x="5564602" y="2785261"/>
-                  </a:lnTo>
-                  <a:lnTo>
-                    <a:pt x="5641234" y="2796252"/>
-                  </a:lnTo>
-                  <a:lnTo>
-                    <a:pt x="5717867" y="2806928"/>
-                  </a:lnTo>
-                  <a:lnTo>
-                    <a:pt x="5794499" y="2817298"/>
-                  </a:lnTo>
-                  <a:lnTo>
-                    <a:pt x="5871132" y="2827371"/>
-                  </a:lnTo>
-                  <a:lnTo>
-                    <a:pt x="5947764" y="2837155"/>
-                  </a:lnTo>
-                  <a:lnTo>
-                    <a:pt x="6024397" y="2846658"/>
-                  </a:lnTo>
-                  <a:lnTo>
-                    <a:pt x="6101029" y="2855889"/>
-                  </a:lnTo>
-                  <a:lnTo>
-                    <a:pt x="6177662" y="2864856"/>
-                  </a:lnTo>
-                  <a:lnTo>
-                    <a:pt x="6254294" y="2873565"/>
-                  </a:lnTo>
-                  <a:lnTo>
-                    <a:pt x="6330927" y="2882025"/>
-                  </a:lnTo>
-                  <a:lnTo>
-                    <a:pt x="6407560" y="2890243"/>
-                  </a:lnTo>
-                  <a:lnTo>
-                    <a:pt x="6484192" y="2898225"/>
-                  </a:lnTo>
-                  <a:lnTo>
-                    <a:pt x="6560825" y="2905978"/>
-                  </a:lnTo>
-                  <a:lnTo>
-                    <a:pt x="6637457" y="2913509"/>
-                  </a:lnTo>
-                  <a:lnTo>
-                    <a:pt x="6714090" y="2920824"/>
-                  </a:lnTo>
-                  <a:lnTo>
-                    <a:pt x="6790722" y="2927929"/>
-                  </a:lnTo>
-                  <a:lnTo>
-                    <a:pt x="6867355" y="2934831"/>
-                  </a:lnTo>
-                  <a:lnTo>
-                    <a:pt x="6943987" y="2941534"/>
-                  </a:lnTo>
-                  <a:lnTo>
-                    <a:pt x="7020620" y="2948046"/>
-                  </a:lnTo>
-                  <a:lnTo>
-                    <a:pt x="7097253" y="2954371"/>
-                  </a:lnTo>
-                  <a:lnTo>
-                    <a:pt x="7173885" y="2960515"/>
-                  </a:lnTo>
-                  <a:lnTo>
-                    <a:pt x="7250518" y="2966482"/>
-                  </a:lnTo>
-                  <a:lnTo>
-                    <a:pt x="7327150" y="2972279"/>
-                  </a:lnTo>
-                  <a:lnTo>
-                    <a:pt x="7403783" y="2977910"/>
+                    <a:pt x="47058" y="53790"/>
+                  </a:lnTo>
+                  <a:lnTo>
+                    <a:pt x="123691" y="138874"/>
+                  </a:lnTo>
+                  <a:lnTo>
+                    <a:pt x="200323" y="221519"/>
+                  </a:lnTo>
+                  <a:lnTo>
+                    <a:pt x="276956" y="301795"/>
+                  </a:lnTo>
+                  <a:lnTo>
+                    <a:pt x="353588" y="379771"/>
+                  </a:lnTo>
+                  <a:lnTo>
+                    <a:pt x="430221" y="455511"/>
+                  </a:lnTo>
+                  <a:lnTo>
+                    <a:pt x="506853" y="529081"/>
+                  </a:lnTo>
+                  <a:lnTo>
+                    <a:pt x="583486" y="600541"/>
+                  </a:lnTo>
+                  <a:lnTo>
+                    <a:pt x="660118" y="669954"/>
+                  </a:lnTo>
+                  <a:lnTo>
+                    <a:pt x="736751" y="737376"/>
+                  </a:lnTo>
+                  <a:lnTo>
+                    <a:pt x="813384" y="802867"/>
+                  </a:lnTo>
+                  <a:lnTo>
+                    <a:pt x="890016" y="866480"/>
+                  </a:lnTo>
+                  <a:lnTo>
+                    <a:pt x="966649" y="928269"/>
+                  </a:lnTo>
+                  <a:lnTo>
+                    <a:pt x="1043281" y="988288"/>
+                  </a:lnTo>
+                  <a:lnTo>
+                    <a:pt x="1119914" y="1046586"/>
+                  </a:lnTo>
+                  <a:lnTo>
+                    <a:pt x="1196546" y="1103214"/>
+                  </a:lnTo>
+                  <a:lnTo>
+                    <a:pt x="1273179" y="1158218"/>
+                  </a:lnTo>
+                  <a:lnTo>
+                    <a:pt x="1349811" y="1211645"/>
+                  </a:lnTo>
+                  <a:lnTo>
+                    <a:pt x="1426444" y="1263542"/>
+                  </a:lnTo>
+                  <a:lnTo>
+                    <a:pt x="1503076" y="1313950"/>
+                  </a:lnTo>
+                  <a:lnTo>
+                    <a:pt x="1579709" y="1362914"/>
+                  </a:lnTo>
+                  <a:lnTo>
+                    <a:pt x="1656342" y="1410474"/>
+                  </a:lnTo>
+                  <a:lnTo>
+                    <a:pt x="1732974" y="1456671"/>
+                  </a:lnTo>
+                  <a:lnTo>
+                    <a:pt x="1809607" y="1501544"/>
+                  </a:lnTo>
+                  <a:lnTo>
+                    <a:pt x="1886239" y="1545131"/>
+                  </a:lnTo>
+                  <a:lnTo>
+                    <a:pt x="1962872" y="1587468"/>
+                  </a:lnTo>
+                  <a:lnTo>
+                    <a:pt x="2039504" y="1628592"/>
+                  </a:lnTo>
+                  <a:lnTo>
+                    <a:pt x="2116137" y="1668537"/>
+                  </a:lnTo>
+                  <a:lnTo>
+                    <a:pt x="2192769" y="1707337"/>
+                  </a:lnTo>
+                  <a:lnTo>
+                    <a:pt x="2269402" y="1745025"/>
+                  </a:lnTo>
+                  <a:lnTo>
+                    <a:pt x="2346034" y="1781633"/>
+                  </a:lnTo>
+                  <a:lnTo>
+                    <a:pt x="2422667" y="1817192"/>
+                  </a:lnTo>
+                  <a:lnTo>
+                    <a:pt x="2499300" y="1851731"/>
+                  </a:lnTo>
+                  <a:lnTo>
+                    <a:pt x="2575932" y="1885280"/>
+                  </a:lnTo>
+                  <a:lnTo>
+                    <a:pt x="2652565" y="1917868"/>
+                  </a:lnTo>
+                  <a:lnTo>
+                    <a:pt x="2729197" y="1949521"/>
+                  </a:lnTo>
+                  <a:lnTo>
+                    <a:pt x="2805830" y="1980268"/>
+                  </a:lnTo>
+                  <a:lnTo>
+                    <a:pt x="2882462" y="2010133"/>
+                  </a:lnTo>
+                  <a:lnTo>
+                    <a:pt x="2959095" y="2039141"/>
+                  </a:lnTo>
+                  <a:lnTo>
+                    <a:pt x="3035727" y="2067319"/>
+                  </a:lnTo>
+                  <a:lnTo>
+                    <a:pt x="3112360" y="2094689"/>
+                  </a:lnTo>
+                  <a:lnTo>
+                    <a:pt x="3188993" y="2121274"/>
+                  </a:lnTo>
+                  <a:lnTo>
+                    <a:pt x="3265625" y="2147097"/>
+                  </a:lnTo>
+                  <a:lnTo>
+                    <a:pt x="3342258" y="2172180"/>
+                  </a:lnTo>
+                  <a:lnTo>
+                    <a:pt x="3418890" y="2196544"/>
+                  </a:lnTo>
+                  <a:lnTo>
+                    <a:pt x="3495523" y="2220210"/>
+                  </a:lnTo>
+                  <a:lnTo>
+                    <a:pt x="3572155" y="2243198"/>
+                  </a:lnTo>
+                  <a:lnTo>
+                    <a:pt x="3648788" y="2265526"/>
+                  </a:lnTo>
+                  <a:lnTo>
+                    <a:pt x="3725420" y="2287215"/>
+                  </a:lnTo>
+                  <a:lnTo>
+                    <a:pt x="3802053" y="2308282"/>
+                  </a:lnTo>
+                  <a:lnTo>
+                    <a:pt x="3878685" y="2328745"/>
+                  </a:lnTo>
+                  <a:lnTo>
+                    <a:pt x="3955318" y="2348621"/>
+                  </a:lnTo>
+                  <a:lnTo>
+                    <a:pt x="4031951" y="2367928"/>
+                  </a:lnTo>
+                  <a:lnTo>
+                    <a:pt x="4108583" y="2386681"/>
+                  </a:lnTo>
+                  <a:lnTo>
+                    <a:pt x="4185216" y="2404897"/>
+                  </a:lnTo>
+                  <a:lnTo>
+                    <a:pt x="4261848" y="2422591"/>
+                  </a:lnTo>
+                  <a:lnTo>
+                    <a:pt x="4338481" y="2439777"/>
+                  </a:lnTo>
+                  <a:lnTo>
+                    <a:pt x="4415113" y="2456471"/>
+                  </a:lnTo>
+                  <a:lnTo>
+                    <a:pt x="4491746" y="2472687"/>
+                  </a:lnTo>
+                  <a:lnTo>
+                    <a:pt x="4568378" y="2488437"/>
+                  </a:lnTo>
+                  <a:lnTo>
+                    <a:pt x="4645011" y="2503736"/>
+                  </a:lnTo>
+                  <a:lnTo>
+                    <a:pt x="4721644" y="2518597"/>
+                  </a:lnTo>
+                  <a:lnTo>
+                    <a:pt x="4798276" y="2533032"/>
+                  </a:lnTo>
+                  <a:lnTo>
+                    <a:pt x="4874909" y="2547053"/>
+                  </a:lnTo>
+                  <a:lnTo>
+                    <a:pt x="4951541" y="2560672"/>
+                  </a:lnTo>
+                  <a:lnTo>
+                    <a:pt x="5028174" y="2573900"/>
+                  </a:lnTo>
+                  <a:lnTo>
+                    <a:pt x="5104806" y="2586750"/>
+                  </a:lnTo>
+                  <a:lnTo>
+                    <a:pt x="5181439" y="2599231"/>
+                  </a:lnTo>
+                  <a:lnTo>
+                    <a:pt x="5258071" y="2611355"/>
+                  </a:lnTo>
+                  <a:lnTo>
+                    <a:pt x="5334704" y="2623131"/>
+                  </a:lnTo>
+                  <a:lnTo>
+                    <a:pt x="5411336" y="2634569"/>
+                  </a:lnTo>
+                  <a:lnTo>
+                    <a:pt x="5487969" y="2645680"/>
+                  </a:lnTo>
+                  <a:lnTo>
+                    <a:pt x="5564602" y="2656472"/>
+                  </a:lnTo>
+                  <a:lnTo>
+                    <a:pt x="5641234" y="2666954"/>
+                  </a:lnTo>
+                  <a:lnTo>
+                    <a:pt x="5717867" y="2677137"/>
+                  </a:lnTo>
+                  <a:lnTo>
+                    <a:pt x="5794499" y="2687027"/>
+                  </a:lnTo>
+                  <a:lnTo>
+                    <a:pt x="5871132" y="2696634"/>
+                  </a:lnTo>
+                  <a:lnTo>
+                    <a:pt x="5947764" y="2705966"/>
+                  </a:lnTo>
+                  <a:lnTo>
+                    <a:pt x="6024397" y="2715030"/>
+                  </a:lnTo>
+                  <a:lnTo>
+                    <a:pt x="6101029" y="2723834"/>
+                  </a:lnTo>
+                  <a:lnTo>
+                    <a:pt x="6177662" y="2732386"/>
+                  </a:lnTo>
+                  <a:lnTo>
+                    <a:pt x="6254294" y="2740693"/>
+                  </a:lnTo>
+                  <a:lnTo>
+                    <a:pt x="6330927" y="2748762"/>
+                  </a:lnTo>
+                  <a:lnTo>
+                    <a:pt x="6407560" y="2756599"/>
+                  </a:lnTo>
+                  <a:lnTo>
+                    <a:pt x="6484192" y="2764212"/>
+                  </a:lnTo>
+                  <a:lnTo>
+                    <a:pt x="6560825" y="2771606"/>
+                  </a:lnTo>
+                  <a:lnTo>
+                    <a:pt x="6637457" y="2778789"/>
+                  </a:lnTo>
+                  <a:lnTo>
+                    <a:pt x="6714090" y="2785766"/>
+                  </a:lnTo>
+                  <a:lnTo>
+                    <a:pt x="6790722" y="2792543"/>
+                  </a:lnTo>
+                  <a:lnTo>
+                    <a:pt x="6867355" y="2799125"/>
+                  </a:lnTo>
+                  <a:lnTo>
+                    <a:pt x="6943987" y="2805519"/>
+                  </a:lnTo>
+                  <a:lnTo>
+                    <a:pt x="7020620" y="2811729"/>
+                  </a:lnTo>
+                  <a:lnTo>
+                    <a:pt x="7097253" y="2817762"/>
+                  </a:lnTo>
+                  <a:lnTo>
+                    <a:pt x="7173885" y="2823622"/>
+                  </a:lnTo>
+                  <a:lnTo>
+                    <a:pt x="7250518" y="2829313"/>
+                  </a:lnTo>
+                  <a:lnTo>
+                    <a:pt x="7327150" y="2834842"/>
+                  </a:lnTo>
+                  <a:lnTo>
+                    <a:pt x="7403783" y="2840212"/>
                   </a:lnTo>
                 </a:path>
               </a:pathLst>
@@ -4515,7 +4515,7 @@
           </p:nvSpPr>
           <p:spPr>
             <a:xfrm>
-              <a:off x="817517" y="4679530"/>
+              <a:off x="817517" y="4727786"/>
               <a:ext cx="7799693" cy="0"/>
             </a:xfrm>
             <a:custGeom>
@@ -4558,15 +4558,15 @@
           </p:nvSpPr>
           <p:spPr>
             <a:xfrm>
-              <a:off x="4224261" y="1896563"/>
-              <a:ext cx="0" cy="3826579"/>
+              <a:off x="4224261" y="2073503"/>
+              <a:ext cx="0" cy="3649639"/>
             </a:xfrm>
             <a:custGeom>
               <a:avLst/>
               <a:pathLst>
-                <a:path w="0" h="3826579">
+                <a:path w="0" h="3649639">
                   <a:moveTo>
-                    <a:pt x="0" y="3826579"/>
+                    <a:pt x="0" y="3649639"/>
                   </a:moveTo>
                   <a:lnTo>
                     <a:pt x="0" y="0"/>
@@ -4601,7 +4601,7 @@
           </p:nvSpPr>
           <p:spPr>
             <a:xfrm>
-              <a:off x="692708" y="5509156"/>
+              <a:off x="692708" y="5517199"/>
               <a:ext cx="62179" cy="80101"/>
             </a:xfrm>
             <a:prstGeom prst="rect">
@@ -4647,7 +4647,7 @@
           </p:nvSpPr>
           <p:spPr>
             <a:xfrm>
-              <a:off x="692708" y="4639479"/>
+              <a:off x="692708" y="4687735"/>
               <a:ext cx="62179" cy="80101"/>
             </a:xfrm>
             <a:prstGeom prst="rect">
@@ -4693,7 +4693,7 @@
           </p:nvSpPr>
           <p:spPr>
             <a:xfrm>
-              <a:off x="692708" y="3769802"/>
+              <a:off x="692708" y="3858272"/>
               <a:ext cx="62179" cy="80101"/>
             </a:xfrm>
             <a:prstGeom prst="rect">
@@ -4739,7 +4739,7 @@
           </p:nvSpPr>
           <p:spPr>
             <a:xfrm>
-              <a:off x="692708" y="2900125"/>
+              <a:off x="692708" y="3028808"/>
               <a:ext cx="62179" cy="80101"/>
             </a:xfrm>
             <a:prstGeom prst="rect">
@@ -4785,7 +4785,7 @@
           </p:nvSpPr>
           <p:spPr>
             <a:xfrm>
-              <a:off x="692708" y="2030448"/>
+              <a:off x="692708" y="2199345"/>
               <a:ext cx="62179" cy="80101"/>
             </a:xfrm>
             <a:prstGeom prst="rect">
@@ -5061,7 +5061,7 @@
           </p:nvSpPr>
           <p:spPr>
             <a:xfrm rot="-5400000">
-              <a:off x="68446" y="3759743"/>
+              <a:off x="68446" y="3848213"/>
               <a:ext cx="1016904" cy="100218"/>
             </a:xfrm>
             <a:prstGeom prst="rect">
@@ -5102,6 +5102,52 @@
         <p:sp>
           <p:nvSpPr>
             <p:cNvPr id="38" name="tx38"/>
+            <p:cNvSpPr/>
+            <p:nvPr/>
+          </p:nvSpPr>
+          <p:spPr>
+            <a:xfrm>
+              <a:off x="817517" y="1896563"/>
+              <a:ext cx="5626211" cy="82021"/>
+            </a:xfrm>
+            <a:prstGeom prst="rect">
+              <a:avLst/>
+            </a:prstGeom>
+            <a:noFill/>
+          </p:spPr>
+          <p:txBody>
+            <a:bodyPr lIns="0" rIns="0" tIns="0" bIns="0" anchorCtr="1" anchor="ctr" wrap="none"/>
+            <a:lstStyle/>
+            <a:p>
+              <a:pPr algn="l" marL="0" marR="0" indent="0">
+                <a:lnSpc>
+                  <a:spcPts val="900"/>
+                </a:lnSpc>
+                <a:spcBef>
+                  <a:spcPts val="0"/>
+                </a:spcBef>
+                <a:spcAft>
+                  <a:spcPts val="0"/>
+                </a:spcAft>
+              </a:pPr>
+              <a:r>
+                <a:rPr sz="900">
+                  <a:solidFill>
+                    <a:srgbClr val="404040">
+                      <a:alpha val="100000"/>
+                    </a:srgbClr>
+                  </a:solidFill>
+                  <a:latin typeface="Helvetica"/>
+                  <a:cs typeface="Helvetica"/>
+                </a:rPr>
+                <a:t>subHR per 0.1 ratio decline: 1.40 (1.17-1.68)  |  per IQR decline (Δ = 0.30): 2.74 (1.59-4.72)  |  IQR: [0.85, 1.15]</a:t>
+              </a:r>
+            </a:p>
+          </p:txBody>
+        </p:sp>
+        <p:sp>
+          <p:nvSpPr>
+            <p:cNvPr id="39" name="tx39"/>
             <p:cNvSpPr/>
             <p:nvPr/>
           </p:nvSpPr>

--- a/docs/pptx/carbo/jx-carbo-linsubhr-ratio-anemia3.pptx
+++ b/docs/pptx/carbo/jx-carbo-linsubhr-ratio-anemia3.pptx
@@ -5108,7 +5108,7 @@
           <p:spPr>
             <a:xfrm>
               <a:off x="817517" y="1896563"/>
-              <a:ext cx="5626211" cy="82021"/>
+              <a:ext cx="6236116" cy="82021"/>
             </a:xfrm>
             <a:prstGeom prst="rect">
               <a:avLst/>
@@ -5140,7 +5140,7 @@
                   <a:latin typeface="Helvetica"/>
                   <a:cs typeface="Helvetica"/>
                 </a:rPr>
-                <a:t>subHR per 0.1 ratio decline: 1.40 (1.17-1.68)  |  per IQR decline (Δ = 0.30): 2.74 (1.59-4.72)  |  IQR: [0.85, 1.15]</a:t>
+                <a:t>subHR per 0.1 ratio decline: 1.40 (1.17-1.68), p = &lt;0.001  |  per IQR decline (Δ = 0.30): 2.74 (1.59-4.72)  |  IQR: [0.85, 1.15]</a:t>
               </a:r>
             </a:p>
           </p:txBody>

--- a/docs/pptx/carbo/jx-carbo-linsubhr-ratio-anemia3.pptx
+++ b/docs/pptx/carbo/jx-carbo-linsubhr-ratio-anemia3.pptx
@@ -5108,7 +5108,7 @@
           <p:spPr>
             <a:xfrm>
               <a:off x="817517" y="1896563"/>
-              <a:ext cx="6236116" cy="82021"/>
+              <a:ext cx="6833128" cy="82021"/>
             </a:xfrm>
             <a:prstGeom prst="rect">
               <a:avLst/>
@@ -5140,7 +5140,7 @@
                   <a:latin typeface="Helvetica"/>
                   <a:cs typeface="Helvetica"/>
                 </a:rPr>
-                <a:t>subHR per 0.1 ratio decline: 1.40 (1.17-1.68), p = &lt;0.001  |  per IQR decline (Δ = 0.30): 2.74 (1.59-4.72)  |  IQR: [0.85, 1.15]</a:t>
+                <a:t>subHR per 0.1 ratio decline: 1.40 (1.17-1.68), p_Bonf = 0.002 (n = 6)  |  per IQR decline (Δ = 0.30): 2.74 (1.59-4.72)  |  IQR: [0.85, 1.15]</a:t>
               </a:r>
             </a:p>
           </p:txBody>

--- a/docs/pptx/carbo/jx-carbo-linsubhr-ratio-anemia3.pptx
+++ b/docs/pptx/carbo/jx-carbo-linsubhr-ratio-anemia3.pptx
@@ -2443,7 +2443,7 @@
           </p:nvSpPr>
           <p:spPr>
             <a:xfrm>
-              <a:off x="1615213" y="2073503"/>
+              <a:off x="1467192" y="2073503"/>
               <a:ext cx="0" cy="3649639"/>
             </a:xfrm>
             <a:custGeom>
@@ -2486,7 +2486,7 @@
           </p:nvSpPr>
           <p:spPr>
             <a:xfrm>
-              <a:off x="3387871" y="2073503"/>
+              <a:off x="3538150" y="2073503"/>
               <a:ext cx="0" cy="3649639"/>
             </a:xfrm>
             <a:custGeom>
@@ -2529,7 +2529,7 @@
           </p:nvSpPr>
           <p:spPr>
             <a:xfrm>
-              <a:off x="5160528" y="2073503"/>
+              <a:off x="5609107" y="2073503"/>
               <a:ext cx="0" cy="3649639"/>
             </a:xfrm>
             <a:custGeom>
@@ -2572,7 +2572,7 @@
           </p:nvSpPr>
           <p:spPr>
             <a:xfrm>
-              <a:off x="6933186" y="2073503"/>
+              <a:off x="7680065" y="2073503"/>
               <a:ext cx="0" cy="3649639"/>
             </a:xfrm>
             <a:custGeom>
@@ -2830,7 +2830,7 @@
           </p:nvSpPr>
           <p:spPr>
             <a:xfrm>
-              <a:off x="2501542" y="2073503"/>
+              <a:off x="2502671" y="2073503"/>
               <a:ext cx="0" cy="3649639"/>
             </a:xfrm>
             <a:custGeom>
@@ -2873,7 +2873,7 @@
           </p:nvSpPr>
           <p:spPr>
             <a:xfrm>
-              <a:off x="4274200" y="2073503"/>
+              <a:off x="4573628" y="2073503"/>
               <a:ext cx="0" cy="3649639"/>
             </a:xfrm>
             <a:custGeom>
@@ -2916,7 +2916,7 @@
           </p:nvSpPr>
           <p:spPr>
             <a:xfrm>
-              <a:off x="6046857" y="2073503"/>
+              <a:off x="6644586" y="2073503"/>
               <a:ext cx="0" cy="3649639"/>
             </a:xfrm>
             <a:custGeom>
@@ -2953,613 +2953,576 @@
         </p:sp>
         <p:sp>
           <p:nvSpPr>
-            <p:cNvPr id="20" name="pl20"/>
+            <p:cNvPr id="20" name="pg20"/>
             <p:cNvSpPr/>
             <p:nvPr/>
           </p:nvSpPr>
           <p:spPr>
             <a:xfrm>
-              <a:off x="7819515" y="2073503"/>
-              <a:ext cx="0" cy="3649639"/>
+              <a:off x="1172049" y="2073503"/>
+              <a:ext cx="7090630" cy="3403744"/>
             </a:xfrm>
             <a:custGeom>
               <a:avLst/>
               <a:pathLst>
-                <a:path w="0" h="3649639">
+                <a:path w="7090630" h="3403744">
                   <a:moveTo>
-                    <a:pt x="0" y="3649639"/>
+                    <a:pt x="1062808" y="0"/>
                   </a:moveTo>
                   <a:lnTo>
-                    <a:pt x="0" y="0"/>
-                  </a:lnTo>
-                  <a:lnTo>
-                    <a:pt x="0" y="0"/>
-                  </a:lnTo>
-                </a:path>
-              </a:pathLst>
-            </a:custGeom>
-            <a:ln w="13550" cap="flat">
-              <a:solidFill>
-                <a:srgbClr val="EBEBEB">
-                  <a:alpha val="100000"/>
-                </a:srgbClr>
-              </a:solidFill>
-              <a:prstDash val="solid"/>
-              <a:round/>
-            </a:ln>
-          </p:spPr>
-          <p:txBody>
-            <a:bodyPr/>
-            <a:lstStyle/>
-            <a:p/>
-          </p:txBody>
-        </p:sp>
-        <p:sp>
-          <p:nvSpPr>
-            <p:cNvPr id="21" name="pg21"/>
-            <p:cNvSpPr/>
-            <p:nvPr/>
-          </p:nvSpPr>
-          <p:spPr>
-            <a:xfrm>
-              <a:off x="817517" y="2073503"/>
-              <a:ext cx="7403783" cy="3403744"/>
-            </a:xfrm>
-            <a:custGeom>
-              <a:avLst/>
-              <a:pathLst>
-                <a:path w="7403783" h="3403744">
-                  <a:moveTo>
-                    <a:pt x="954313" y="0"/>
-                  </a:moveTo>
-                  <a:lnTo>
-                    <a:pt x="966649" y="25528"/>
-                  </a:lnTo>
-                  <a:lnTo>
-                    <a:pt x="1043281" y="177165"/>
-                  </a:lnTo>
-                  <a:lnTo>
-                    <a:pt x="1119914" y="322153"/>
-                  </a:lnTo>
-                  <a:lnTo>
-                    <a:pt x="1196546" y="460783"/>
-                  </a:lnTo>
-                  <a:lnTo>
-                    <a:pt x="1273179" y="593335"/>
-                  </a:lnTo>
-                  <a:lnTo>
-                    <a:pt x="1349811" y="720074"/>
-                  </a:lnTo>
-                  <a:lnTo>
-                    <a:pt x="1426444" y="841257"/>
-                  </a:lnTo>
-                  <a:lnTo>
-                    <a:pt x="1503076" y="957125"/>
-                  </a:lnTo>
-                  <a:lnTo>
-                    <a:pt x="1579709" y="1067913"/>
-                  </a:lnTo>
-                  <a:lnTo>
-                    <a:pt x="1656342" y="1173843"/>
-                  </a:lnTo>
-                  <a:lnTo>
-                    <a:pt x="1732974" y="1275128"/>
-                  </a:lnTo>
-                  <a:lnTo>
-                    <a:pt x="1809607" y="1371972"/>
-                  </a:lnTo>
-                  <a:lnTo>
-                    <a:pt x="1886239" y="1464570"/>
-                  </a:lnTo>
-                  <a:lnTo>
-                    <a:pt x="1962872" y="1553107"/>
-                  </a:lnTo>
-                  <a:lnTo>
-                    <a:pt x="2039504" y="1637763"/>
-                  </a:lnTo>
-                  <a:lnTo>
-                    <a:pt x="2116137" y="1718706"/>
-                  </a:lnTo>
-                  <a:lnTo>
-                    <a:pt x="2192769" y="1796100"/>
-                  </a:lnTo>
-                  <a:lnTo>
-                    <a:pt x="2269402" y="1870100"/>
-                  </a:lnTo>
-                  <a:lnTo>
-                    <a:pt x="2346034" y="1940856"/>
-                  </a:lnTo>
-                  <a:lnTo>
-                    <a:pt x="2422667" y="2008509"/>
-                  </a:lnTo>
-                  <a:lnTo>
-                    <a:pt x="2499300" y="2073195"/>
-                  </a:lnTo>
-                  <a:lnTo>
-                    <a:pt x="2575932" y="2135045"/>
-                  </a:lnTo>
-                  <a:lnTo>
-                    <a:pt x="2652565" y="2194184"/>
-                  </a:lnTo>
-                  <a:lnTo>
-                    <a:pt x="2729197" y="2250729"/>
-                  </a:lnTo>
-                  <a:lnTo>
-                    <a:pt x="2805830" y="2304794"/>
-                  </a:lnTo>
-                  <a:lnTo>
-                    <a:pt x="2882462" y="2356489"/>
-                  </a:lnTo>
-                  <a:lnTo>
-                    <a:pt x="2959095" y="2405918"/>
-                  </a:lnTo>
-                  <a:lnTo>
-                    <a:pt x="3035727" y="2453179"/>
-                  </a:lnTo>
-                  <a:lnTo>
-                    <a:pt x="3112360" y="2498367"/>
-                  </a:lnTo>
-                  <a:lnTo>
-                    <a:pt x="3188993" y="2541574"/>
-                  </a:lnTo>
-                  <a:lnTo>
-                    <a:pt x="3265625" y="2582887"/>
-                  </a:lnTo>
-                  <a:lnTo>
-                    <a:pt x="3342258" y="2622388"/>
-                  </a:lnTo>
-                  <a:lnTo>
-                    <a:pt x="3418890" y="2656033"/>
-                  </a:lnTo>
-                  <a:lnTo>
-                    <a:pt x="3495523" y="2666989"/>
-                  </a:lnTo>
-                  <a:lnTo>
-                    <a:pt x="3572155" y="2677801"/>
-                  </a:lnTo>
-                  <a:lnTo>
-                    <a:pt x="3648788" y="2688469"/>
-                  </a:lnTo>
-                  <a:lnTo>
-                    <a:pt x="3725420" y="2698996"/>
-                  </a:lnTo>
-                  <a:lnTo>
-                    <a:pt x="3802053" y="2709384"/>
-                  </a:lnTo>
-                  <a:lnTo>
-                    <a:pt x="3878685" y="2719634"/>
-                  </a:lnTo>
-                  <a:lnTo>
-                    <a:pt x="3955318" y="2729749"/>
-                  </a:lnTo>
-                  <a:lnTo>
-                    <a:pt x="4031951" y="2739730"/>
-                  </a:lnTo>
-                  <a:lnTo>
-                    <a:pt x="4108583" y="2749578"/>
-                  </a:lnTo>
-                  <a:lnTo>
-                    <a:pt x="4185216" y="2759297"/>
-                  </a:lnTo>
-                  <a:lnTo>
-                    <a:pt x="4261848" y="2768886"/>
-                  </a:lnTo>
-                  <a:lnTo>
-                    <a:pt x="4338481" y="2778349"/>
-                  </a:lnTo>
-                  <a:lnTo>
-                    <a:pt x="4415113" y="2787686"/>
-                  </a:lnTo>
-                  <a:lnTo>
-                    <a:pt x="4491746" y="2796900"/>
-                  </a:lnTo>
-                  <a:lnTo>
-                    <a:pt x="4568378" y="2805992"/>
-                  </a:lnTo>
-                  <a:lnTo>
-                    <a:pt x="4645011" y="2814963"/>
-                  </a:lnTo>
-                  <a:lnTo>
-                    <a:pt x="4721644" y="2823816"/>
-                  </a:lnTo>
-                  <a:lnTo>
-                    <a:pt x="4798276" y="2832551"/>
-                  </a:lnTo>
-                  <a:lnTo>
-                    <a:pt x="4874909" y="2841171"/>
-                  </a:lnTo>
-                  <a:lnTo>
-                    <a:pt x="4951541" y="2849677"/>
-                  </a:lnTo>
-                  <a:lnTo>
-                    <a:pt x="5028174" y="2858070"/>
-                  </a:lnTo>
-                  <a:lnTo>
-                    <a:pt x="5104806" y="2866352"/>
-                  </a:lnTo>
-                  <a:lnTo>
-                    <a:pt x="5181439" y="2874525"/>
-                  </a:lnTo>
-                  <a:lnTo>
-                    <a:pt x="5258071" y="2882589"/>
-                  </a:lnTo>
-                  <a:lnTo>
-                    <a:pt x="5334704" y="2890547"/>
-                  </a:lnTo>
-                  <a:lnTo>
-                    <a:pt x="5411336" y="2898399"/>
-                  </a:lnTo>
-                  <a:lnTo>
-                    <a:pt x="5487969" y="2906147"/>
-                  </a:lnTo>
-                  <a:lnTo>
-                    <a:pt x="5564602" y="2913793"/>
-                  </a:lnTo>
-                  <a:lnTo>
-                    <a:pt x="5641234" y="2921338"/>
-                  </a:lnTo>
-                  <a:lnTo>
-                    <a:pt x="5717867" y="2928782"/>
-                  </a:lnTo>
-                  <a:lnTo>
-                    <a:pt x="5794499" y="2936128"/>
-                  </a:lnTo>
-                  <a:lnTo>
-                    <a:pt x="5871132" y="2943377"/>
-                  </a:lnTo>
-                  <a:lnTo>
-                    <a:pt x="5947764" y="2950530"/>
-                  </a:lnTo>
-                  <a:lnTo>
-                    <a:pt x="6024397" y="2957588"/>
-                  </a:lnTo>
-                  <a:lnTo>
-                    <a:pt x="6101029" y="2964553"/>
-                  </a:lnTo>
-                  <a:lnTo>
-                    <a:pt x="6177662" y="2971426"/>
-                  </a:lnTo>
-                  <a:lnTo>
-                    <a:pt x="6254294" y="2978207"/>
-                  </a:lnTo>
-                  <a:lnTo>
-                    <a:pt x="6330927" y="2984899"/>
-                  </a:lnTo>
-                  <a:lnTo>
-                    <a:pt x="6407560" y="2991502"/>
-                  </a:lnTo>
-                  <a:lnTo>
-                    <a:pt x="6484192" y="2998018"/>
-                  </a:lnTo>
-                  <a:lnTo>
-                    <a:pt x="6560825" y="3004448"/>
-                  </a:lnTo>
-                  <a:lnTo>
-                    <a:pt x="6637457" y="3010792"/>
-                  </a:lnTo>
-                  <a:lnTo>
-                    <a:pt x="6714090" y="3017053"/>
-                  </a:lnTo>
-                  <a:lnTo>
-                    <a:pt x="6790722" y="3023230"/>
-                  </a:lnTo>
-                  <a:lnTo>
-                    <a:pt x="6867355" y="3029326"/>
-                  </a:lnTo>
-                  <a:lnTo>
-                    <a:pt x="6943987" y="3035341"/>
-                  </a:lnTo>
-                  <a:lnTo>
-                    <a:pt x="7020620" y="3041277"/>
-                  </a:lnTo>
-                  <a:lnTo>
-                    <a:pt x="7097253" y="3047134"/>
-                  </a:lnTo>
-                  <a:lnTo>
-                    <a:pt x="7173885" y="3052914"/>
-                  </a:lnTo>
-                  <a:lnTo>
-                    <a:pt x="7250518" y="3058616"/>
-                  </a:lnTo>
-                  <a:lnTo>
-                    <a:pt x="7327150" y="3064244"/>
-                  </a:lnTo>
-                  <a:lnTo>
-                    <a:pt x="7403783" y="3069797"/>
-                  </a:lnTo>
-                  <a:lnTo>
-                    <a:pt x="7403783" y="3403744"/>
-                  </a:lnTo>
-                  <a:lnTo>
-                    <a:pt x="7327150" y="3400075"/>
-                  </a:lnTo>
-                  <a:lnTo>
-                    <a:pt x="7250518" y="3396238"/>
-                  </a:lnTo>
-                  <a:lnTo>
-                    <a:pt x="7173885" y="3392225"/>
-                  </a:lnTo>
-                  <a:lnTo>
-                    <a:pt x="7097253" y="3388027"/>
-                  </a:lnTo>
-                  <a:lnTo>
-                    <a:pt x="7020620" y="3383638"/>
-                  </a:lnTo>
-                  <a:lnTo>
-                    <a:pt x="6943987" y="3379047"/>
-                  </a:lnTo>
-                  <a:lnTo>
-                    <a:pt x="6867355" y="3374246"/>
-                  </a:lnTo>
-                  <a:lnTo>
-                    <a:pt x="6790722" y="3369224"/>
-                  </a:lnTo>
-                  <a:lnTo>
-                    <a:pt x="6714090" y="3363972"/>
-                  </a:lnTo>
-                  <a:lnTo>
-                    <a:pt x="6637457" y="3358479"/>
-                  </a:lnTo>
-                  <a:lnTo>
-                    <a:pt x="6560825" y="3352735"/>
-                  </a:lnTo>
-                  <a:lnTo>
-                    <a:pt x="6484192" y="3346727"/>
-                  </a:lnTo>
-                  <a:lnTo>
-                    <a:pt x="6407560" y="3340443"/>
-                  </a:lnTo>
-                  <a:lnTo>
-                    <a:pt x="6330927" y="3333871"/>
-                  </a:lnTo>
-                  <a:lnTo>
-                    <a:pt x="6254294" y="3326998"/>
-                  </a:lnTo>
-                  <a:lnTo>
-                    <a:pt x="6177662" y="3319810"/>
-                  </a:lnTo>
-                  <a:lnTo>
-                    <a:pt x="6101029" y="3312292"/>
-                  </a:lnTo>
-                  <a:lnTo>
-                    <a:pt x="6024397" y="3304429"/>
-                  </a:lnTo>
-                  <a:lnTo>
-                    <a:pt x="5947764" y="3296206"/>
-                  </a:lnTo>
-                  <a:lnTo>
-                    <a:pt x="5871132" y="3287605"/>
-                  </a:lnTo>
-                  <a:lnTo>
-                    <a:pt x="5794499" y="3278610"/>
-                  </a:lnTo>
-                  <a:lnTo>
-                    <a:pt x="5717867" y="3269203"/>
-                  </a:lnTo>
-                  <a:lnTo>
-                    <a:pt x="5641234" y="3259364"/>
-                  </a:lnTo>
-                  <a:lnTo>
-                    <a:pt x="5564602" y="3249074"/>
-                  </a:lnTo>
-                  <a:lnTo>
-                    <a:pt x="5487969" y="3238312"/>
-                  </a:lnTo>
-                  <a:lnTo>
-                    <a:pt x="5411336" y="3227057"/>
-                  </a:lnTo>
-                  <a:lnTo>
-                    <a:pt x="5334704" y="3215285"/>
-                  </a:lnTo>
-                  <a:lnTo>
-                    <a:pt x="5258071" y="3202974"/>
-                  </a:lnTo>
-                  <a:lnTo>
-                    <a:pt x="5181439" y="3190098"/>
-                  </a:lnTo>
-                  <a:lnTo>
-                    <a:pt x="5104806" y="3176632"/>
-                  </a:lnTo>
-                  <a:lnTo>
-                    <a:pt x="5028174" y="3162548"/>
-                  </a:lnTo>
-                  <a:lnTo>
-                    <a:pt x="4951541" y="3147818"/>
-                  </a:lnTo>
-                  <a:lnTo>
-                    <a:pt x="4874909" y="3132412"/>
-                  </a:lnTo>
-                  <a:lnTo>
-                    <a:pt x="4798276" y="3116300"/>
-                  </a:lnTo>
-                  <a:lnTo>
-                    <a:pt x="4721644" y="3099450"/>
-                  </a:lnTo>
-                  <a:lnTo>
-                    <a:pt x="4645011" y="3081826"/>
-                  </a:lnTo>
-                  <a:lnTo>
-                    <a:pt x="4568378" y="3063395"/>
-                  </a:lnTo>
-                  <a:lnTo>
-                    <a:pt x="4491746" y="3044118"/>
-                  </a:lnTo>
-                  <a:lnTo>
-                    <a:pt x="4415113" y="3023957"/>
-                  </a:lnTo>
-                  <a:lnTo>
-                    <a:pt x="4338481" y="3002871"/>
-                  </a:lnTo>
-                  <a:lnTo>
-                    <a:pt x="4261848" y="2980819"/>
-                  </a:lnTo>
-                  <a:lnTo>
-                    <a:pt x="4185216" y="2957755"/>
-                  </a:lnTo>
-                  <a:lnTo>
-                    <a:pt x="4108583" y="2933633"/>
-                  </a:lnTo>
-                  <a:lnTo>
-                    <a:pt x="4031951" y="2908405"/>
-                  </a:lnTo>
-                  <a:lnTo>
-                    <a:pt x="3955318" y="2882021"/>
-                  </a:lnTo>
-                  <a:lnTo>
-                    <a:pt x="3878685" y="2854426"/>
-                  </a:lnTo>
-                  <a:lnTo>
-                    <a:pt x="3802053" y="2825566"/>
-                  </a:lnTo>
-                  <a:lnTo>
-                    <a:pt x="3725420" y="2795383"/>
-                  </a:lnTo>
-                  <a:lnTo>
-                    <a:pt x="3648788" y="2763815"/>
-                  </a:lnTo>
-                  <a:lnTo>
-                    <a:pt x="3572155" y="2730800"/>
-                  </a:lnTo>
-                  <a:lnTo>
-                    <a:pt x="3495523" y="2696270"/>
-                  </a:lnTo>
-                  <a:lnTo>
-                    <a:pt x="3418890" y="2660157"/>
-                  </a:lnTo>
-                  <a:lnTo>
-                    <a:pt x="3342258" y="2644930"/>
-                  </a:lnTo>
-                  <a:lnTo>
-                    <a:pt x="3265625" y="2633677"/>
-                  </a:lnTo>
-                  <a:lnTo>
-                    <a:pt x="3188993" y="2622274"/>
-                  </a:lnTo>
-                  <a:lnTo>
-                    <a:pt x="3112360" y="2610717"/>
-                  </a:lnTo>
-                  <a:lnTo>
-                    <a:pt x="3035727" y="2599006"/>
-                  </a:lnTo>
-                  <a:lnTo>
-                    <a:pt x="2959095" y="2587138"/>
-                  </a:lnTo>
-                  <a:lnTo>
-                    <a:pt x="2882462" y="2575110"/>
-                  </a:lnTo>
-                  <a:lnTo>
-                    <a:pt x="2805830" y="2562921"/>
-                  </a:lnTo>
-                  <a:lnTo>
-                    <a:pt x="2729197" y="2550568"/>
-                  </a:lnTo>
-                  <a:lnTo>
-                    <a:pt x="2652565" y="2538050"/>
-                  </a:lnTo>
-                  <a:lnTo>
-                    <a:pt x="2575932" y="2525364"/>
-                  </a:lnTo>
-                  <a:lnTo>
-                    <a:pt x="2499300" y="2512508"/>
-                  </a:lnTo>
-                  <a:lnTo>
-                    <a:pt x="2422667" y="2499479"/>
-                  </a:lnTo>
-                  <a:lnTo>
-                    <a:pt x="2346034" y="2486275"/>
-                  </a:lnTo>
-                  <a:lnTo>
-                    <a:pt x="2269402" y="2472895"/>
-                  </a:lnTo>
-                  <a:lnTo>
-                    <a:pt x="2192769" y="2459334"/>
-                  </a:lnTo>
-                  <a:lnTo>
-                    <a:pt x="2116137" y="2445592"/>
-                  </a:lnTo>
-                  <a:lnTo>
-                    <a:pt x="2039504" y="2431666"/>
-                  </a:lnTo>
-                  <a:lnTo>
-                    <a:pt x="1962872" y="2417553"/>
-                  </a:lnTo>
-                  <a:lnTo>
-                    <a:pt x="1886239" y="2403250"/>
-                  </a:lnTo>
-                  <a:lnTo>
-                    <a:pt x="1809607" y="2388756"/>
-                  </a:lnTo>
-                  <a:lnTo>
-                    <a:pt x="1732974" y="2374067"/>
-                  </a:lnTo>
-                  <a:lnTo>
-                    <a:pt x="1656342" y="2359181"/>
-                  </a:lnTo>
-                  <a:lnTo>
-                    <a:pt x="1579709" y="2344095"/>
-                  </a:lnTo>
-                  <a:lnTo>
-                    <a:pt x="1503076" y="2328807"/>
-                  </a:lnTo>
-                  <a:lnTo>
-                    <a:pt x="1426444" y="2313314"/>
-                  </a:lnTo>
-                  <a:lnTo>
-                    <a:pt x="1349811" y="2297613"/>
-                  </a:lnTo>
-                  <a:lnTo>
-                    <a:pt x="1273179" y="2281702"/>
-                  </a:lnTo>
-                  <a:lnTo>
-                    <a:pt x="1196546" y="2265577"/>
-                  </a:lnTo>
-                  <a:lnTo>
-                    <a:pt x="1119914" y="2249235"/>
-                  </a:lnTo>
-                  <a:lnTo>
-                    <a:pt x="1043281" y="2232675"/>
-                  </a:lnTo>
-                  <a:lnTo>
-                    <a:pt x="966649" y="2215892"/>
-                  </a:lnTo>
-                  <a:lnTo>
-                    <a:pt x="890016" y="2198884"/>
-                  </a:lnTo>
-                  <a:lnTo>
-                    <a:pt x="813384" y="2181648"/>
-                  </a:lnTo>
-                  <a:lnTo>
-                    <a:pt x="736751" y="2164181"/>
-                  </a:lnTo>
-                  <a:lnTo>
-                    <a:pt x="660118" y="2146480"/>
-                  </a:lnTo>
-                  <a:lnTo>
-                    <a:pt x="583486" y="2128541"/>
-                  </a:lnTo>
-                  <a:lnTo>
-                    <a:pt x="506853" y="2110361"/>
-                  </a:lnTo>
-                  <a:lnTo>
-                    <a:pt x="430221" y="2091938"/>
-                  </a:lnTo>
-                  <a:lnTo>
-                    <a:pt x="353588" y="2073267"/>
-                  </a:lnTo>
-                  <a:lnTo>
-                    <a:pt x="276956" y="2054346"/>
-                  </a:lnTo>
-                  <a:lnTo>
-                    <a:pt x="200323" y="2035171"/>
-                  </a:lnTo>
-                  <a:lnTo>
-                    <a:pt x="123691" y="2015739"/>
-                  </a:lnTo>
-                  <a:lnTo>
-                    <a:pt x="47058" y="1996047"/>
-                  </a:lnTo>
-                  <a:lnTo>
-                    <a:pt x="0" y="1983791"/>
+                    <a:pt x="1074337" y="25528"/>
+                  </a:lnTo>
+                  <a:lnTo>
+                    <a:pt x="1145960" y="177165"/>
+                  </a:lnTo>
+                  <a:lnTo>
+                    <a:pt x="1217582" y="322153"/>
+                  </a:lnTo>
+                  <a:lnTo>
+                    <a:pt x="1289205" y="460783"/>
+                  </a:lnTo>
+                  <a:lnTo>
+                    <a:pt x="1360827" y="593335"/>
+                  </a:lnTo>
+                  <a:lnTo>
+                    <a:pt x="1432450" y="720074"/>
+                  </a:lnTo>
+                  <a:lnTo>
+                    <a:pt x="1504073" y="841257"/>
+                  </a:lnTo>
+                  <a:lnTo>
+                    <a:pt x="1575695" y="957125"/>
+                  </a:lnTo>
+                  <a:lnTo>
+                    <a:pt x="1647318" y="1067913"/>
+                  </a:lnTo>
+                  <a:lnTo>
+                    <a:pt x="1718940" y="1173843"/>
+                  </a:lnTo>
+                  <a:lnTo>
+                    <a:pt x="1790563" y="1275128"/>
+                  </a:lnTo>
+                  <a:lnTo>
+                    <a:pt x="1862185" y="1371972"/>
+                  </a:lnTo>
+                  <a:lnTo>
+                    <a:pt x="1933808" y="1464570"/>
+                  </a:lnTo>
+                  <a:lnTo>
+                    <a:pt x="2005430" y="1553107"/>
+                  </a:lnTo>
+                  <a:lnTo>
+                    <a:pt x="2077053" y="1637763"/>
+                  </a:lnTo>
+                  <a:lnTo>
+                    <a:pt x="2148675" y="1718706"/>
+                  </a:lnTo>
+                  <a:lnTo>
+                    <a:pt x="2220298" y="1796100"/>
+                  </a:lnTo>
+                  <a:lnTo>
+                    <a:pt x="2291920" y="1870100"/>
+                  </a:lnTo>
+                  <a:lnTo>
+                    <a:pt x="2363543" y="1940856"/>
+                  </a:lnTo>
+                  <a:lnTo>
+                    <a:pt x="2435165" y="2008509"/>
+                  </a:lnTo>
+                  <a:lnTo>
+                    <a:pt x="2506788" y="2073195"/>
+                  </a:lnTo>
+                  <a:lnTo>
+                    <a:pt x="2578410" y="2135045"/>
+                  </a:lnTo>
+                  <a:lnTo>
+                    <a:pt x="2650033" y="2194184"/>
+                  </a:lnTo>
+                  <a:lnTo>
+                    <a:pt x="2721655" y="2250729"/>
+                  </a:lnTo>
+                  <a:lnTo>
+                    <a:pt x="2793278" y="2304794"/>
+                  </a:lnTo>
+                  <a:lnTo>
+                    <a:pt x="2864901" y="2356489"/>
+                  </a:lnTo>
+                  <a:lnTo>
+                    <a:pt x="2936523" y="2405918"/>
+                  </a:lnTo>
+                  <a:lnTo>
+                    <a:pt x="3008146" y="2453179"/>
+                  </a:lnTo>
+                  <a:lnTo>
+                    <a:pt x="3079768" y="2498367"/>
+                  </a:lnTo>
+                  <a:lnTo>
+                    <a:pt x="3151391" y="2541574"/>
+                  </a:lnTo>
+                  <a:lnTo>
+                    <a:pt x="3223013" y="2582887"/>
+                  </a:lnTo>
+                  <a:lnTo>
+                    <a:pt x="3294636" y="2622388"/>
+                  </a:lnTo>
+                  <a:lnTo>
+                    <a:pt x="3366258" y="2656033"/>
+                  </a:lnTo>
+                  <a:lnTo>
+                    <a:pt x="3437881" y="2666989"/>
+                  </a:lnTo>
+                  <a:lnTo>
+                    <a:pt x="3509503" y="2677801"/>
+                  </a:lnTo>
+                  <a:lnTo>
+                    <a:pt x="3581126" y="2688469"/>
+                  </a:lnTo>
+                  <a:lnTo>
+                    <a:pt x="3652748" y="2698996"/>
+                  </a:lnTo>
+                  <a:lnTo>
+                    <a:pt x="3724371" y="2709384"/>
+                  </a:lnTo>
+                  <a:lnTo>
+                    <a:pt x="3795993" y="2719634"/>
+                  </a:lnTo>
+                  <a:lnTo>
+                    <a:pt x="3867616" y="2729749"/>
+                  </a:lnTo>
+                  <a:lnTo>
+                    <a:pt x="3939238" y="2739730"/>
+                  </a:lnTo>
+                  <a:lnTo>
+                    <a:pt x="4010861" y="2749578"/>
+                  </a:lnTo>
+                  <a:lnTo>
+                    <a:pt x="4082483" y="2759297"/>
+                  </a:lnTo>
+                  <a:lnTo>
+                    <a:pt x="4154106" y="2768886"/>
+                  </a:lnTo>
+                  <a:lnTo>
+                    <a:pt x="4225729" y="2778349"/>
+                  </a:lnTo>
+                  <a:lnTo>
+                    <a:pt x="4297351" y="2787686"/>
+                  </a:lnTo>
+                  <a:lnTo>
+                    <a:pt x="4368974" y="2796900"/>
+                  </a:lnTo>
+                  <a:lnTo>
+                    <a:pt x="4440596" y="2805992"/>
+                  </a:lnTo>
+                  <a:lnTo>
+                    <a:pt x="4512219" y="2814963"/>
+                  </a:lnTo>
+                  <a:lnTo>
+                    <a:pt x="4583841" y="2823816"/>
+                  </a:lnTo>
+                  <a:lnTo>
+                    <a:pt x="4655464" y="2832551"/>
+                  </a:lnTo>
+                  <a:lnTo>
+                    <a:pt x="4727086" y="2841171"/>
+                  </a:lnTo>
+                  <a:lnTo>
+                    <a:pt x="4798709" y="2849677"/>
+                  </a:lnTo>
+                  <a:lnTo>
+                    <a:pt x="4870331" y="2858070"/>
+                  </a:lnTo>
+                  <a:lnTo>
+                    <a:pt x="4941954" y="2866352"/>
+                  </a:lnTo>
+                  <a:lnTo>
+                    <a:pt x="5013576" y="2874525"/>
+                  </a:lnTo>
+                  <a:lnTo>
+                    <a:pt x="5085199" y="2882589"/>
+                  </a:lnTo>
+                  <a:lnTo>
+                    <a:pt x="5156821" y="2890547"/>
+                  </a:lnTo>
+                  <a:lnTo>
+                    <a:pt x="5228444" y="2898399"/>
+                  </a:lnTo>
+                  <a:lnTo>
+                    <a:pt x="5300066" y="2906147"/>
+                  </a:lnTo>
+                  <a:lnTo>
+                    <a:pt x="5371689" y="2913793"/>
+                  </a:lnTo>
+                  <a:lnTo>
+                    <a:pt x="5443311" y="2921338"/>
+                  </a:lnTo>
+                  <a:lnTo>
+                    <a:pt x="5514934" y="2928782"/>
+                  </a:lnTo>
+                  <a:lnTo>
+                    <a:pt x="5586557" y="2936128"/>
+                  </a:lnTo>
+                  <a:lnTo>
+                    <a:pt x="5658179" y="2943377"/>
+                  </a:lnTo>
+                  <a:lnTo>
+                    <a:pt x="5729802" y="2950530"/>
+                  </a:lnTo>
+                  <a:lnTo>
+                    <a:pt x="5801424" y="2957588"/>
+                  </a:lnTo>
+                  <a:lnTo>
+                    <a:pt x="5873047" y="2964553"/>
+                  </a:lnTo>
+                  <a:lnTo>
+                    <a:pt x="5944669" y="2971426"/>
+                  </a:lnTo>
+                  <a:lnTo>
+                    <a:pt x="6016292" y="2978207"/>
+                  </a:lnTo>
+                  <a:lnTo>
+                    <a:pt x="6087914" y="2984899"/>
+                  </a:lnTo>
+                  <a:lnTo>
+                    <a:pt x="6159537" y="2991502"/>
+                  </a:lnTo>
+                  <a:lnTo>
+                    <a:pt x="6231159" y="2998018"/>
+                  </a:lnTo>
+                  <a:lnTo>
+                    <a:pt x="6302782" y="3004448"/>
+                  </a:lnTo>
+                  <a:lnTo>
+                    <a:pt x="6374404" y="3010792"/>
+                  </a:lnTo>
+                  <a:lnTo>
+                    <a:pt x="6446027" y="3017053"/>
+                  </a:lnTo>
+                  <a:lnTo>
+                    <a:pt x="6517649" y="3023230"/>
+                  </a:lnTo>
+                  <a:lnTo>
+                    <a:pt x="6589272" y="3029326"/>
+                  </a:lnTo>
+                  <a:lnTo>
+                    <a:pt x="6660894" y="3035341"/>
+                  </a:lnTo>
+                  <a:lnTo>
+                    <a:pt x="6732517" y="3041277"/>
+                  </a:lnTo>
+                  <a:lnTo>
+                    <a:pt x="6804139" y="3047134"/>
+                  </a:lnTo>
+                  <a:lnTo>
+                    <a:pt x="6875762" y="3052914"/>
+                  </a:lnTo>
+                  <a:lnTo>
+                    <a:pt x="6947385" y="3058616"/>
+                  </a:lnTo>
+                  <a:lnTo>
+                    <a:pt x="7019007" y="3064244"/>
+                  </a:lnTo>
+                  <a:lnTo>
+                    <a:pt x="7090630" y="3069797"/>
+                  </a:lnTo>
+                  <a:lnTo>
+                    <a:pt x="7090630" y="3403744"/>
+                  </a:lnTo>
+                  <a:lnTo>
+                    <a:pt x="7019007" y="3400075"/>
+                  </a:lnTo>
+                  <a:lnTo>
+                    <a:pt x="6947385" y="3396238"/>
+                  </a:lnTo>
+                  <a:lnTo>
+                    <a:pt x="6875762" y="3392225"/>
+                  </a:lnTo>
+                  <a:lnTo>
+                    <a:pt x="6804139" y="3388027"/>
+                  </a:lnTo>
+                  <a:lnTo>
+                    <a:pt x="6732517" y="3383638"/>
+                  </a:lnTo>
+                  <a:lnTo>
+                    <a:pt x="6660894" y="3379047"/>
+                  </a:lnTo>
+                  <a:lnTo>
+                    <a:pt x="6589272" y="3374246"/>
+                  </a:lnTo>
+                  <a:lnTo>
+                    <a:pt x="6517649" y="3369224"/>
+                  </a:lnTo>
+                  <a:lnTo>
+                    <a:pt x="6446027" y="3363972"/>
+                  </a:lnTo>
+                  <a:lnTo>
+                    <a:pt x="6374404" y="3358479"/>
+                  </a:lnTo>
+                  <a:lnTo>
+                    <a:pt x="6302782" y="3352735"/>
+                  </a:lnTo>
+                  <a:lnTo>
+                    <a:pt x="6231159" y="3346727"/>
+                  </a:lnTo>
+                  <a:lnTo>
+                    <a:pt x="6159537" y="3340443"/>
+                  </a:lnTo>
+                  <a:lnTo>
+                    <a:pt x="6087914" y="3333871"/>
+                  </a:lnTo>
+                  <a:lnTo>
+                    <a:pt x="6016292" y="3326998"/>
+                  </a:lnTo>
+                  <a:lnTo>
+                    <a:pt x="5944669" y="3319810"/>
+                  </a:lnTo>
+                  <a:lnTo>
+                    <a:pt x="5873047" y="3312292"/>
+                  </a:lnTo>
+                  <a:lnTo>
+                    <a:pt x="5801424" y="3304429"/>
+                  </a:lnTo>
+                  <a:lnTo>
+                    <a:pt x="5729802" y="3296206"/>
+                  </a:lnTo>
+                  <a:lnTo>
+                    <a:pt x="5658179" y="3287605"/>
+                  </a:lnTo>
+                  <a:lnTo>
+                    <a:pt x="5586557" y="3278610"/>
+                  </a:lnTo>
+                  <a:lnTo>
+                    <a:pt x="5514934" y="3269203"/>
+                  </a:lnTo>
+                  <a:lnTo>
+                    <a:pt x="5443311" y="3259364"/>
+                  </a:lnTo>
+                  <a:lnTo>
+                    <a:pt x="5371689" y="3249074"/>
+                  </a:lnTo>
+                  <a:lnTo>
+                    <a:pt x="5300066" y="3238312"/>
+                  </a:lnTo>
+                  <a:lnTo>
+                    <a:pt x="5228444" y="3227057"/>
+                  </a:lnTo>
+                  <a:lnTo>
+                    <a:pt x="5156821" y="3215285"/>
+                  </a:lnTo>
+                  <a:lnTo>
+                    <a:pt x="5085199" y="3202974"/>
+                  </a:lnTo>
+                  <a:lnTo>
+                    <a:pt x="5013576" y="3190098"/>
+                  </a:lnTo>
+                  <a:lnTo>
+                    <a:pt x="4941954" y="3176632"/>
+                  </a:lnTo>
+                  <a:lnTo>
+                    <a:pt x="4870331" y="3162548"/>
+                  </a:lnTo>
+                  <a:lnTo>
+                    <a:pt x="4798709" y="3147818"/>
+                  </a:lnTo>
+                  <a:lnTo>
+                    <a:pt x="4727086" y="3132412"/>
+                  </a:lnTo>
+                  <a:lnTo>
+                    <a:pt x="4655464" y="3116300"/>
+                  </a:lnTo>
+                  <a:lnTo>
+                    <a:pt x="4583841" y="3099450"/>
+                  </a:lnTo>
+                  <a:lnTo>
+                    <a:pt x="4512219" y="3081826"/>
+                  </a:lnTo>
+                  <a:lnTo>
+                    <a:pt x="4440596" y="3063395"/>
+                  </a:lnTo>
+                  <a:lnTo>
+                    <a:pt x="4368974" y="3044118"/>
+                  </a:lnTo>
+                  <a:lnTo>
+                    <a:pt x="4297351" y="3023957"/>
+                  </a:lnTo>
+                  <a:lnTo>
+                    <a:pt x="4225729" y="3002871"/>
+                  </a:lnTo>
+                  <a:lnTo>
+                    <a:pt x="4154106" y="2980819"/>
+                  </a:lnTo>
+                  <a:lnTo>
+                    <a:pt x="4082483" y="2957755"/>
+                  </a:lnTo>
+                  <a:lnTo>
+                    <a:pt x="4010861" y="2933633"/>
+                  </a:lnTo>
+                  <a:lnTo>
+                    <a:pt x="3939238" y="2908405"/>
+                  </a:lnTo>
+                  <a:lnTo>
+                    <a:pt x="3867616" y="2882021"/>
+                  </a:lnTo>
+                  <a:lnTo>
+                    <a:pt x="3795993" y="2854426"/>
+                  </a:lnTo>
+                  <a:lnTo>
+                    <a:pt x="3724371" y="2825566"/>
+                  </a:lnTo>
+                  <a:lnTo>
+                    <a:pt x="3652748" y="2795383"/>
+                  </a:lnTo>
+                  <a:lnTo>
+                    <a:pt x="3581126" y="2763815"/>
+                  </a:lnTo>
+                  <a:lnTo>
+                    <a:pt x="3509503" y="2730800"/>
+                  </a:lnTo>
+                  <a:lnTo>
+                    <a:pt x="3437881" y="2696270"/>
+                  </a:lnTo>
+                  <a:lnTo>
+                    <a:pt x="3366258" y="2660157"/>
+                  </a:lnTo>
+                  <a:lnTo>
+                    <a:pt x="3294636" y="2644930"/>
+                  </a:lnTo>
+                  <a:lnTo>
+                    <a:pt x="3223013" y="2633677"/>
+                  </a:lnTo>
+                  <a:lnTo>
+                    <a:pt x="3151391" y="2622274"/>
+                  </a:lnTo>
+                  <a:lnTo>
+                    <a:pt x="3079768" y="2610717"/>
+                  </a:lnTo>
+                  <a:lnTo>
+                    <a:pt x="3008146" y="2599006"/>
+                  </a:lnTo>
+                  <a:lnTo>
+                    <a:pt x="2936523" y="2587138"/>
+                  </a:lnTo>
+                  <a:lnTo>
+                    <a:pt x="2864901" y="2575110"/>
+                  </a:lnTo>
+                  <a:lnTo>
+                    <a:pt x="2793278" y="2562921"/>
+                  </a:lnTo>
+                  <a:lnTo>
+                    <a:pt x="2721655" y="2550568"/>
+                  </a:lnTo>
+                  <a:lnTo>
+                    <a:pt x="2650033" y="2538050"/>
+                  </a:lnTo>
+                  <a:lnTo>
+                    <a:pt x="2578410" y="2525364"/>
+                  </a:lnTo>
+                  <a:lnTo>
+                    <a:pt x="2506788" y="2512508"/>
+                  </a:lnTo>
+                  <a:lnTo>
+                    <a:pt x="2435165" y="2499479"/>
+                  </a:lnTo>
+                  <a:lnTo>
+                    <a:pt x="2363543" y="2486275"/>
+                  </a:lnTo>
+                  <a:lnTo>
+                    <a:pt x="2291920" y="2472895"/>
+                  </a:lnTo>
+                  <a:lnTo>
+                    <a:pt x="2220298" y="2459334"/>
+                  </a:lnTo>
+                  <a:lnTo>
+                    <a:pt x="2148675" y="2445592"/>
+                  </a:lnTo>
+                  <a:lnTo>
+                    <a:pt x="2077053" y="2431666"/>
+                  </a:lnTo>
+                  <a:lnTo>
+                    <a:pt x="2005430" y="2417553"/>
+                  </a:lnTo>
+                  <a:lnTo>
+                    <a:pt x="1933808" y="2403250"/>
+                  </a:lnTo>
+                  <a:lnTo>
+                    <a:pt x="1862185" y="2388756"/>
+                  </a:lnTo>
+                  <a:lnTo>
+                    <a:pt x="1790563" y="2374067"/>
+                  </a:lnTo>
+                  <a:lnTo>
+                    <a:pt x="1718940" y="2359181"/>
+                  </a:lnTo>
+                  <a:lnTo>
+                    <a:pt x="1647318" y="2344095"/>
+                  </a:lnTo>
+                  <a:lnTo>
+                    <a:pt x="1575695" y="2328807"/>
+                  </a:lnTo>
+                  <a:lnTo>
+                    <a:pt x="1504073" y="2313314"/>
+                  </a:lnTo>
+                  <a:lnTo>
+                    <a:pt x="1432450" y="2297613"/>
+                  </a:lnTo>
+                  <a:lnTo>
+                    <a:pt x="1360827" y="2281702"/>
+                  </a:lnTo>
+                  <a:lnTo>
+                    <a:pt x="1289205" y="2265577"/>
+                  </a:lnTo>
+                  <a:lnTo>
+                    <a:pt x="1217582" y="2249235"/>
+                  </a:lnTo>
+                  <a:lnTo>
+                    <a:pt x="1145960" y="2232675"/>
+                  </a:lnTo>
+                  <a:lnTo>
+                    <a:pt x="1074337" y="2215892"/>
+                  </a:lnTo>
+                  <a:lnTo>
+                    <a:pt x="1002715" y="2198884"/>
+                  </a:lnTo>
+                  <a:lnTo>
+                    <a:pt x="931092" y="2181648"/>
+                  </a:lnTo>
+                  <a:lnTo>
+                    <a:pt x="859470" y="2164181"/>
+                  </a:lnTo>
+                  <a:lnTo>
+                    <a:pt x="787847" y="2146480"/>
+                  </a:lnTo>
+                  <a:lnTo>
+                    <a:pt x="716225" y="2128541"/>
+                  </a:lnTo>
+                  <a:lnTo>
+                    <a:pt x="644602" y="2110361"/>
+                  </a:lnTo>
+                  <a:lnTo>
+                    <a:pt x="572980" y="2091938"/>
+                  </a:lnTo>
+                  <a:lnTo>
+                    <a:pt x="501357" y="2073267"/>
+                  </a:lnTo>
+                  <a:lnTo>
+                    <a:pt x="429735" y="2054346"/>
+                  </a:lnTo>
+                  <a:lnTo>
+                    <a:pt x="358112" y="2035171"/>
+                  </a:lnTo>
+                  <a:lnTo>
+                    <a:pt x="286490" y="2015739"/>
+                  </a:lnTo>
+                  <a:lnTo>
+                    <a:pt x="214867" y="1996047"/>
+                  </a:lnTo>
+                  <a:lnTo>
+                    <a:pt x="143245" y="1976090"/>
+                  </a:lnTo>
+                  <a:lnTo>
+                    <a:pt x="71622" y="1955865"/>
+                  </a:lnTo>
+                  <a:lnTo>
+                    <a:pt x="0" y="1935369"/>
                   </a:lnTo>
                   <a:close/>
                 </a:path>
@@ -3579,276 +3542,601 @@
         </p:sp>
         <p:sp>
           <p:nvSpPr>
+            <p:cNvPr id="21" name="pl21"/>
+            <p:cNvSpPr/>
+            <p:nvPr/>
+          </p:nvSpPr>
+          <p:spPr>
+            <a:xfrm>
+              <a:off x="2234858" y="2073503"/>
+              <a:ext cx="6027821" cy="3069797"/>
+            </a:xfrm>
+            <a:custGeom>
+              <a:avLst/>
+              <a:pathLst>
+                <a:path w="6027821" h="3069797">
+                  <a:moveTo>
+                    <a:pt x="0" y="0"/>
+                  </a:moveTo>
+                  <a:lnTo>
+                    <a:pt x="11529" y="25528"/>
+                  </a:lnTo>
+                  <a:lnTo>
+                    <a:pt x="83151" y="177165"/>
+                  </a:lnTo>
+                  <a:lnTo>
+                    <a:pt x="154774" y="322153"/>
+                  </a:lnTo>
+                  <a:lnTo>
+                    <a:pt x="226396" y="460783"/>
+                  </a:lnTo>
+                  <a:lnTo>
+                    <a:pt x="298019" y="593335"/>
+                  </a:lnTo>
+                  <a:lnTo>
+                    <a:pt x="369641" y="720074"/>
+                  </a:lnTo>
+                  <a:lnTo>
+                    <a:pt x="441264" y="841257"/>
+                  </a:lnTo>
+                  <a:lnTo>
+                    <a:pt x="512886" y="957125"/>
+                  </a:lnTo>
+                  <a:lnTo>
+                    <a:pt x="584509" y="1067913"/>
+                  </a:lnTo>
+                  <a:lnTo>
+                    <a:pt x="656131" y="1173843"/>
+                  </a:lnTo>
+                  <a:lnTo>
+                    <a:pt x="727754" y="1275128"/>
+                  </a:lnTo>
+                  <a:lnTo>
+                    <a:pt x="799376" y="1371972"/>
+                  </a:lnTo>
+                  <a:lnTo>
+                    <a:pt x="870999" y="1464570"/>
+                  </a:lnTo>
+                  <a:lnTo>
+                    <a:pt x="942622" y="1553107"/>
+                  </a:lnTo>
+                  <a:lnTo>
+                    <a:pt x="1014244" y="1637763"/>
+                  </a:lnTo>
+                  <a:lnTo>
+                    <a:pt x="1085867" y="1718706"/>
+                  </a:lnTo>
+                  <a:lnTo>
+                    <a:pt x="1157489" y="1796100"/>
+                  </a:lnTo>
+                  <a:lnTo>
+                    <a:pt x="1229112" y="1870100"/>
+                  </a:lnTo>
+                  <a:lnTo>
+                    <a:pt x="1300734" y="1940856"/>
+                  </a:lnTo>
+                  <a:lnTo>
+                    <a:pt x="1372357" y="2008509"/>
+                  </a:lnTo>
+                  <a:lnTo>
+                    <a:pt x="1443979" y="2073195"/>
+                  </a:lnTo>
+                  <a:lnTo>
+                    <a:pt x="1515602" y="2135045"/>
+                  </a:lnTo>
+                  <a:lnTo>
+                    <a:pt x="1587224" y="2194184"/>
+                  </a:lnTo>
+                  <a:lnTo>
+                    <a:pt x="1658847" y="2250729"/>
+                  </a:lnTo>
+                  <a:lnTo>
+                    <a:pt x="1730469" y="2304794"/>
+                  </a:lnTo>
+                  <a:lnTo>
+                    <a:pt x="1802092" y="2356489"/>
+                  </a:lnTo>
+                  <a:lnTo>
+                    <a:pt x="1873714" y="2405918"/>
+                  </a:lnTo>
+                  <a:lnTo>
+                    <a:pt x="1945337" y="2453179"/>
+                  </a:lnTo>
+                  <a:lnTo>
+                    <a:pt x="2016959" y="2498367"/>
+                  </a:lnTo>
+                  <a:lnTo>
+                    <a:pt x="2088582" y="2541574"/>
+                  </a:lnTo>
+                  <a:lnTo>
+                    <a:pt x="2160204" y="2582887"/>
+                  </a:lnTo>
+                  <a:lnTo>
+                    <a:pt x="2231827" y="2622388"/>
+                  </a:lnTo>
+                  <a:lnTo>
+                    <a:pt x="2303450" y="2656033"/>
+                  </a:lnTo>
+                  <a:lnTo>
+                    <a:pt x="2375072" y="2666989"/>
+                  </a:lnTo>
+                  <a:lnTo>
+                    <a:pt x="2446695" y="2677801"/>
+                  </a:lnTo>
+                  <a:lnTo>
+                    <a:pt x="2518317" y="2688469"/>
+                  </a:lnTo>
+                  <a:lnTo>
+                    <a:pt x="2589940" y="2698996"/>
+                  </a:lnTo>
+                  <a:lnTo>
+                    <a:pt x="2661562" y="2709384"/>
+                  </a:lnTo>
+                  <a:lnTo>
+                    <a:pt x="2733185" y="2719634"/>
+                  </a:lnTo>
+                  <a:lnTo>
+                    <a:pt x="2804807" y="2729749"/>
+                  </a:lnTo>
+                  <a:lnTo>
+                    <a:pt x="2876430" y="2739730"/>
+                  </a:lnTo>
+                  <a:lnTo>
+                    <a:pt x="2948052" y="2749578"/>
+                  </a:lnTo>
+                  <a:lnTo>
+                    <a:pt x="3019675" y="2759297"/>
+                  </a:lnTo>
+                  <a:lnTo>
+                    <a:pt x="3091297" y="2768886"/>
+                  </a:lnTo>
+                  <a:lnTo>
+                    <a:pt x="3162920" y="2778349"/>
+                  </a:lnTo>
+                  <a:lnTo>
+                    <a:pt x="3234542" y="2787686"/>
+                  </a:lnTo>
+                  <a:lnTo>
+                    <a:pt x="3306165" y="2796900"/>
+                  </a:lnTo>
+                  <a:lnTo>
+                    <a:pt x="3377787" y="2805992"/>
+                  </a:lnTo>
+                  <a:lnTo>
+                    <a:pt x="3449410" y="2814963"/>
+                  </a:lnTo>
+                  <a:lnTo>
+                    <a:pt x="3521032" y="2823816"/>
+                  </a:lnTo>
+                  <a:lnTo>
+                    <a:pt x="3592655" y="2832551"/>
+                  </a:lnTo>
+                  <a:lnTo>
+                    <a:pt x="3664278" y="2841171"/>
+                  </a:lnTo>
+                  <a:lnTo>
+                    <a:pt x="3735900" y="2849677"/>
+                  </a:lnTo>
+                  <a:lnTo>
+                    <a:pt x="3807523" y="2858070"/>
+                  </a:lnTo>
+                  <a:lnTo>
+                    <a:pt x="3879145" y="2866352"/>
+                  </a:lnTo>
+                  <a:lnTo>
+                    <a:pt x="3950768" y="2874525"/>
+                  </a:lnTo>
+                  <a:lnTo>
+                    <a:pt x="4022390" y="2882589"/>
+                  </a:lnTo>
+                  <a:lnTo>
+                    <a:pt x="4094013" y="2890547"/>
+                  </a:lnTo>
+                  <a:lnTo>
+                    <a:pt x="4165635" y="2898399"/>
+                  </a:lnTo>
+                  <a:lnTo>
+                    <a:pt x="4237258" y="2906147"/>
+                  </a:lnTo>
+                  <a:lnTo>
+                    <a:pt x="4308880" y="2913793"/>
+                  </a:lnTo>
+                  <a:lnTo>
+                    <a:pt x="4380503" y="2921338"/>
+                  </a:lnTo>
+                  <a:lnTo>
+                    <a:pt x="4452125" y="2928782"/>
+                  </a:lnTo>
+                  <a:lnTo>
+                    <a:pt x="4523748" y="2936128"/>
+                  </a:lnTo>
+                  <a:lnTo>
+                    <a:pt x="4595370" y="2943377"/>
+                  </a:lnTo>
+                  <a:lnTo>
+                    <a:pt x="4666993" y="2950530"/>
+                  </a:lnTo>
+                  <a:lnTo>
+                    <a:pt x="4738615" y="2957588"/>
+                  </a:lnTo>
+                  <a:lnTo>
+                    <a:pt x="4810238" y="2964553"/>
+                  </a:lnTo>
+                  <a:lnTo>
+                    <a:pt x="4881860" y="2971426"/>
+                  </a:lnTo>
+                  <a:lnTo>
+                    <a:pt x="4953483" y="2978207"/>
+                  </a:lnTo>
+                  <a:lnTo>
+                    <a:pt x="5025106" y="2984899"/>
+                  </a:lnTo>
+                  <a:lnTo>
+                    <a:pt x="5096728" y="2991502"/>
+                  </a:lnTo>
+                  <a:lnTo>
+                    <a:pt x="5168351" y="2998018"/>
+                  </a:lnTo>
+                  <a:lnTo>
+                    <a:pt x="5239973" y="3004448"/>
+                  </a:lnTo>
+                  <a:lnTo>
+                    <a:pt x="5311596" y="3010792"/>
+                  </a:lnTo>
+                  <a:lnTo>
+                    <a:pt x="5383218" y="3017053"/>
+                  </a:lnTo>
+                  <a:lnTo>
+                    <a:pt x="5454841" y="3023230"/>
+                  </a:lnTo>
+                  <a:lnTo>
+                    <a:pt x="5526463" y="3029326"/>
+                  </a:lnTo>
+                  <a:lnTo>
+                    <a:pt x="5598086" y="3035341"/>
+                  </a:lnTo>
+                  <a:lnTo>
+                    <a:pt x="5669708" y="3041277"/>
+                  </a:lnTo>
+                  <a:lnTo>
+                    <a:pt x="5741331" y="3047134"/>
+                  </a:lnTo>
+                  <a:lnTo>
+                    <a:pt x="5812953" y="3052914"/>
+                  </a:lnTo>
+                  <a:lnTo>
+                    <a:pt x="5884576" y="3058616"/>
+                  </a:lnTo>
+                  <a:lnTo>
+                    <a:pt x="5956198" y="3064244"/>
+                  </a:lnTo>
+                  <a:lnTo>
+                    <a:pt x="6027821" y="3069797"/>
+                  </a:lnTo>
+                </a:path>
+              </a:pathLst>
+            </a:custGeom>
+          </p:spPr>
+          <p:txBody>
+            <a:bodyPr/>
+            <a:lstStyle/>
+            <a:p/>
+          </p:txBody>
+        </p:sp>
+        <p:sp>
+          <p:nvSpPr>
             <p:cNvPr id="22" name="pl22"/>
             <p:cNvSpPr/>
             <p:nvPr/>
           </p:nvSpPr>
           <p:spPr>
             <a:xfrm>
-              <a:off x="1771831" y="2073503"/>
-              <a:ext cx="6449469" cy="3069797"/>
+              <a:off x="1172049" y="4008872"/>
+              <a:ext cx="7090630" cy="1468374"/>
             </a:xfrm>
             <a:custGeom>
               <a:avLst/>
               <a:pathLst>
-                <a:path w="6449469" h="3069797">
+                <a:path w="7090630" h="1468374">
                   <a:moveTo>
+                    <a:pt x="7090630" y="1468374"/>
+                  </a:moveTo>
+                  <a:lnTo>
+                    <a:pt x="7019007" y="1464705"/>
+                  </a:lnTo>
+                  <a:lnTo>
+                    <a:pt x="6947385" y="1460868"/>
+                  </a:lnTo>
+                  <a:lnTo>
+                    <a:pt x="6875762" y="1456855"/>
+                  </a:lnTo>
+                  <a:lnTo>
+                    <a:pt x="6804139" y="1452658"/>
+                  </a:lnTo>
+                  <a:lnTo>
+                    <a:pt x="6732517" y="1448268"/>
+                  </a:lnTo>
+                  <a:lnTo>
+                    <a:pt x="6660894" y="1443677"/>
+                  </a:lnTo>
+                  <a:lnTo>
+                    <a:pt x="6589272" y="1438876"/>
+                  </a:lnTo>
+                  <a:lnTo>
+                    <a:pt x="6517649" y="1433854"/>
+                  </a:lnTo>
+                  <a:lnTo>
+                    <a:pt x="6446027" y="1428602"/>
+                  </a:lnTo>
+                  <a:lnTo>
+                    <a:pt x="6374404" y="1423110"/>
+                  </a:lnTo>
+                  <a:lnTo>
+                    <a:pt x="6302782" y="1417365"/>
+                  </a:lnTo>
+                  <a:lnTo>
+                    <a:pt x="6231159" y="1411357"/>
+                  </a:lnTo>
+                  <a:lnTo>
+                    <a:pt x="6159537" y="1405073"/>
+                  </a:lnTo>
+                  <a:lnTo>
+                    <a:pt x="6087914" y="1398502"/>
+                  </a:lnTo>
+                  <a:lnTo>
+                    <a:pt x="6016292" y="1391628"/>
+                  </a:lnTo>
+                  <a:lnTo>
+                    <a:pt x="5944669" y="1384440"/>
+                  </a:lnTo>
+                  <a:lnTo>
+                    <a:pt x="5873047" y="1376922"/>
+                  </a:lnTo>
+                  <a:lnTo>
+                    <a:pt x="5801424" y="1369059"/>
+                  </a:lnTo>
+                  <a:lnTo>
+                    <a:pt x="5729802" y="1360836"/>
+                  </a:lnTo>
+                  <a:lnTo>
+                    <a:pt x="5658179" y="1352236"/>
+                  </a:lnTo>
+                  <a:lnTo>
+                    <a:pt x="5586557" y="1343241"/>
+                  </a:lnTo>
+                  <a:lnTo>
+                    <a:pt x="5514934" y="1333833"/>
+                  </a:lnTo>
+                  <a:lnTo>
+                    <a:pt x="5443311" y="1323995"/>
+                  </a:lnTo>
+                  <a:lnTo>
+                    <a:pt x="5371689" y="1313705"/>
+                  </a:lnTo>
+                  <a:lnTo>
+                    <a:pt x="5300066" y="1302943"/>
+                  </a:lnTo>
+                  <a:lnTo>
+                    <a:pt x="5228444" y="1291687"/>
+                  </a:lnTo>
+                  <a:lnTo>
+                    <a:pt x="5156821" y="1279916"/>
+                  </a:lnTo>
+                  <a:lnTo>
+                    <a:pt x="5085199" y="1267604"/>
+                  </a:lnTo>
+                  <a:lnTo>
+                    <a:pt x="5013576" y="1254729"/>
+                  </a:lnTo>
+                  <a:lnTo>
+                    <a:pt x="4941954" y="1241262"/>
+                  </a:lnTo>
+                  <a:lnTo>
+                    <a:pt x="4870331" y="1227178"/>
+                  </a:lnTo>
+                  <a:lnTo>
+                    <a:pt x="4798709" y="1212448"/>
+                  </a:lnTo>
+                  <a:lnTo>
+                    <a:pt x="4727086" y="1197043"/>
+                  </a:lnTo>
+                  <a:lnTo>
+                    <a:pt x="4655464" y="1180931"/>
+                  </a:lnTo>
+                  <a:lnTo>
+                    <a:pt x="4583841" y="1164080"/>
+                  </a:lnTo>
+                  <a:lnTo>
+                    <a:pt x="4512219" y="1146457"/>
+                  </a:lnTo>
+                  <a:lnTo>
+                    <a:pt x="4440596" y="1128025"/>
+                  </a:lnTo>
+                  <a:lnTo>
+                    <a:pt x="4368974" y="1108748"/>
+                  </a:lnTo>
+                  <a:lnTo>
+                    <a:pt x="4297351" y="1088587"/>
+                  </a:lnTo>
+                  <a:lnTo>
+                    <a:pt x="4225729" y="1067501"/>
+                  </a:lnTo>
+                  <a:lnTo>
+                    <a:pt x="4154106" y="1045449"/>
+                  </a:lnTo>
+                  <a:lnTo>
+                    <a:pt x="4082483" y="1022385"/>
+                  </a:lnTo>
+                  <a:lnTo>
+                    <a:pt x="4010861" y="998264"/>
+                  </a:lnTo>
+                  <a:lnTo>
+                    <a:pt x="3939238" y="973036"/>
+                  </a:lnTo>
+                  <a:lnTo>
+                    <a:pt x="3867616" y="946651"/>
+                  </a:lnTo>
+                  <a:lnTo>
+                    <a:pt x="3795993" y="919057"/>
+                  </a:lnTo>
+                  <a:lnTo>
+                    <a:pt x="3724371" y="890197"/>
+                  </a:lnTo>
+                  <a:lnTo>
+                    <a:pt x="3652748" y="860013"/>
+                  </a:lnTo>
+                  <a:lnTo>
+                    <a:pt x="3581126" y="828445"/>
+                  </a:lnTo>
+                  <a:lnTo>
+                    <a:pt x="3509503" y="795430"/>
+                  </a:lnTo>
+                  <a:lnTo>
+                    <a:pt x="3437881" y="760901"/>
+                  </a:lnTo>
+                  <a:lnTo>
+                    <a:pt x="3366258" y="724788"/>
+                  </a:lnTo>
+                  <a:lnTo>
+                    <a:pt x="3294636" y="709560"/>
+                  </a:lnTo>
+                  <a:lnTo>
+                    <a:pt x="3223013" y="698308"/>
+                  </a:lnTo>
+                  <a:lnTo>
+                    <a:pt x="3151391" y="686904"/>
+                  </a:lnTo>
+                  <a:lnTo>
+                    <a:pt x="3079768" y="675348"/>
+                  </a:lnTo>
+                  <a:lnTo>
+                    <a:pt x="3008146" y="663637"/>
+                  </a:lnTo>
+                  <a:lnTo>
+                    <a:pt x="2936523" y="651768"/>
+                  </a:lnTo>
+                  <a:lnTo>
+                    <a:pt x="2864901" y="639740"/>
+                  </a:lnTo>
+                  <a:lnTo>
+                    <a:pt x="2793278" y="627551"/>
+                  </a:lnTo>
+                  <a:lnTo>
+                    <a:pt x="2721655" y="615199"/>
+                  </a:lnTo>
+                  <a:lnTo>
+                    <a:pt x="2650033" y="602681"/>
+                  </a:lnTo>
+                  <a:lnTo>
+                    <a:pt x="2578410" y="589994"/>
+                  </a:lnTo>
+                  <a:lnTo>
+                    <a:pt x="2506788" y="577138"/>
+                  </a:lnTo>
+                  <a:lnTo>
+                    <a:pt x="2435165" y="564109"/>
+                  </a:lnTo>
+                  <a:lnTo>
+                    <a:pt x="2363543" y="550906"/>
+                  </a:lnTo>
+                  <a:lnTo>
+                    <a:pt x="2291920" y="537525"/>
+                  </a:lnTo>
+                  <a:lnTo>
+                    <a:pt x="2220298" y="523965"/>
+                  </a:lnTo>
+                  <a:lnTo>
+                    <a:pt x="2148675" y="510223"/>
+                  </a:lnTo>
+                  <a:lnTo>
+                    <a:pt x="2077053" y="496296"/>
+                  </a:lnTo>
+                  <a:lnTo>
+                    <a:pt x="2005430" y="482183"/>
+                  </a:lnTo>
+                  <a:lnTo>
+                    <a:pt x="1933808" y="467880"/>
+                  </a:lnTo>
+                  <a:lnTo>
+                    <a:pt x="1862185" y="453386"/>
+                  </a:lnTo>
+                  <a:lnTo>
+                    <a:pt x="1790563" y="438697"/>
+                  </a:lnTo>
+                  <a:lnTo>
+                    <a:pt x="1718940" y="423811"/>
+                  </a:lnTo>
+                  <a:lnTo>
+                    <a:pt x="1647318" y="408726"/>
+                  </a:lnTo>
+                  <a:lnTo>
+                    <a:pt x="1575695" y="393438"/>
+                  </a:lnTo>
+                  <a:lnTo>
+                    <a:pt x="1504073" y="377945"/>
+                  </a:lnTo>
+                  <a:lnTo>
+                    <a:pt x="1432450" y="362244"/>
+                  </a:lnTo>
+                  <a:lnTo>
+                    <a:pt x="1360827" y="346332"/>
+                  </a:lnTo>
+                  <a:lnTo>
+                    <a:pt x="1289205" y="330207"/>
+                  </a:lnTo>
+                  <a:lnTo>
+                    <a:pt x="1217582" y="313866"/>
+                  </a:lnTo>
+                  <a:lnTo>
+                    <a:pt x="1145960" y="297305"/>
+                  </a:lnTo>
+                  <a:lnTo>
+                    <a:pt x="1074337" y="280523"/>
+                  </a:lnTo>
+                  <a:lnTo>
+                    <a:pt x="1002715" y="263515"/>
+                  </a:lnTo>
+                  <a:lnTo>
+                    <a:pt x="931092" y="246279"/>
+                  </a:lnTo>
+                  <a:lnTo>
+                    <a:pt x="859470" y="228812"/>
+                  </a:lnTo>
+                  <a:lnTo>
+                    <a:pt x="787847" y="211110"/>
+                  </a:lnTo>
+                  <a:lnTo>
+                    <a:pt x="716225" y="193171"/>
+                  </a:lnTo>
+                  <a:lnTo>
+                    <a:pt x="644602" y="174992"/>
+                  </a:lnTo>
+                  <a:lnTo>
+                    <a:pt x="572980" y="156568"/>
+                  </a:lnTo>
+                  <a:lnTo>
+                    <a:pt x="501357" y="137898"/>
+                  </a:lnTo>
+                  <a:lnTo>
+                    <a:pt x="429735" y="118977"/>
+                  </a:lnTo>
+                  <a:lnTo>
+                    <a:pt x="358112" y="99802"/>
+                  </a:lnTo>
+                  <a:lnTo>
+                    <a:pt x="286490" y="80370"/>
+                  </a:lnTo>
+                  <a:lnTo>
+                    <a:pt x="214867" y="60677"/>
+                  </a:lnTo>
+                  <a:lnTo>
+                    <a:pt x="143245" y="40720"/>
+                  </a:lnTo>
+                  <a:lnTo>
+                    <a:pt x="71622" y="20495"/>
+                  </a:lnTo>
+                  <a:lnTo>
                     <a:pt x="0" y="0"/>
-                  </a:moveTo>
-                  <a:lnTo>
-                    <a:pt x="12335" y="25528"/>
-                  </a:lnTo>
-                  <a:lnTo>
-                    <a:pt x="88968" y="177165"/>
-                  </a:lnTo>
-                  <a:lnTo>
-                    <a:pt x="165600" y="322153"/>
-                  </a:lnTo>
-                  <a:lnTo>
-                    <a:pt x="242233" y="460783"/>
-                  </a:lnTo>
-                  <a:lnTo>
-                    <a:pt x="318865" y="593335"/>
-                  </a:lnTo>
-                  <a:lnTo>
-                    <a:pt x="395498" y="720074"/>
-                  </a:lnTo>
-                  <a:lnTo>
-                    <a:pt x="472130" y="841257"/>
-                  </a:lnTo>
-                  <a:lnTo>
-                    <a:pt x="548763" y="957125"/>
-                  </a:lnTo>
-                  <a:lnTo>
-                    <a:pt x="625396" y="1067913"/>
-                  </a:lnTo>
-                  <a:lnTo>
-                    <a:pt x="702028" y="1173843"/>
-                  </a:lnTo>
-                  <a:lnTo>
-                    <a:pt x="778661" y="1275128"/>
-                  </a:lnTo>
-                  <a:lnTo>
-                    <a:pt x="855293" y="1371972"/>
-                  </a:lnTo>
-                  <a:lnTo>
-                    <a:pt x="931926" y="1464570"/>
-                  </a:lnTo>
-                  <a:lnTo>
-                    <a:pt x="1008558" y="1553107"/>
-                  </a:lnTo>
-                  <a:lnTo>
-                    <a:pt x="1085191" y="1637763"/>
-                  </a:lnTo>
-                  <a:lnTo>
-                    <a:pt x="1161823" y="1718706"/>
-                  </a:lnTo>
-                  <a:lnTo>
-                    <a:pt x="1238456" y="1796100"/>
-                  </a:lnTo>
-                  <a:lnTo>
-                    <a:pt x="1315088" y="1870100"/>
-                  </a:lnTo>
-                  <a:lnTo>
-                    <a:pt x="1391721" y="1940856"/>
-                  </a:lnTo>
-                  <a:lnTo>
-                    <a:pt x="1468354" y="2008509"/>
-                  </a:lnTo>
-                  <a:lnTo>
-                    <a:pt x="1544986" y="2073195"/>
-                  </a:lnTo>
-                  <a:lnTo>
-                    <a:pt x="1621619" y="2135045"/>
-                  </a:lnTo>
-                  <a:lnTo>
-                    <a:pt x="1698251" y="2194184"/>
-                  </a:lnTo>
-                  <a:lnTo>
-                    <a:pt x="1774884" y="2250729"/>
-                  </a:lnTo>
-                  <a:lnTo>
-                    <a:pt x="1851516" y="2304794"/>
-                  </a:lnTo>
-                  <a:lnTo>
-                    <a:pt x="1928149" y="2356489"/>
-                  </a:lnTo>
-                  <a:lnTo>
-                    <a:pt x="2004781" y="2405918"/>
-                  </a:lnTo>
-                  <a:lnTo>
-                    <a:pt x="2081414" y="2453179"/>
-                  </a:lnTo>
-                  <a:lnTo>
-                    <a:pt x="2158047" y="2498367"/>
-                  </a:lnTo>
-                  <a:lnTo>
-                    <a:pt x="2234679" y="2541574"/>
-                  </a:lnTo>
-                  <a:lnTo>
-                    <a:pt x="2311312" y="2582887"/>
-                  </a:lnTo>
-                  <a:lnTo>
-                    <a:pt x="2387944" y="2622388"/>
-                  </a:lnTo>
-                  <a:lnTo>
-                    <a:pt x="2464577" y="2656033"/>
-                  </a:lnTo>
-                  <a:lnTo>
-                    <a:pt x="2541209" y="2666989"/>
-                  </a:lnTo>
-                  <a:lnTo>
-                    <a:pt x="2617842" y="2677801"/>
-                  </a:lnTo>
-                  <a:lnTo>
-                    <a:pt x="2694474" y="2688469"/>
-                  </a:lnTo>
-                  <a:lnTo>
-                    <a:pt x="2771107" y="2698996"/>
-                  </a:lnTo>
-                  <a:lnTo>
-                    <a:pt x="2847739" y="2709384"/>
-                  </a:lnTo>
-                  <a:lnTo>
-                    <a:pt x="2924372" y="2719634"/>
-                  </a:lnTo>
-                  <a:lnTo>
-                    <a:pt x="3001005" y="2729749"/>
-                  </a:lnTo>
-                  <a:lnTo>
-                    <a:pt x="3077637" y="2739730"/>
-                  </a:lnTo>
-                  <a:lnTo>
-                    <a:pt x="3154270" y="2749578"/>
-                  </a:lnTo>
-                  <a:lnTo>
-                    <a:pt x="3230902" y="2759297"/>
-                  </a:lnTo>
-                  <a:lnTo>
-                    <a:pt x="3307535" y="2768886"/>
-                  </a:lnTo>
-                  <a:lnTo>
-                    <a:pt x="3384167" y="2778349"/>
-                  </a:lnTo>
-                  <a:lnTo>
-                    <a:pt x="3460800" y="2787686"/>
-                  </a:lnTo>
-                  <a:lnTo>
-                    <a:pt x="3537432" y="2796900"/>
-                  </a:lnTo>
-                  <a:lnTo>
-                    <a:pt x="3614065" y="2805992"/>
-                  </a:lnTo>
-                  <a:lnTo>
-                    <a:pt x="3690698" y="2814963"/>
-                  </a:lnTo>
-                  <a:lnTo>
-                    <a:pt x="3767330" y="2823816"/>
-                  </a:lnTo>
-                  <a:lnTo>
-                    <a:pt x="3843963" y="2832551"/>
-                  </a:lnTo>
-                  <a:lnTo>
-                    <a:pt x="3920595" y="2841171"/>
-                  </a:lnTo>
-                  <a:lnTo>
-                    <a:pt x="3997228" y="2849677"/>
-                  </a:lnTo>
-                  <a:lnTo>
-                    <a:pt x="4073860" y="2858070"/>
-                  </a:lnTo>
-                  <a:lnTo>
-                    <a:pt x="4150493" y="2866352"/>
-                  </a:lnTo>
-                  <a:lnTo>
-                    <a:pt x="4227125" y="2874525"/>
-                  </a:lnTo>
-                  <a:lnTo>
-                    <a:pt x="4303758" y="2882589"/>
-                  </a:lnTo>
-                  <a:lnTo>
-                    <a:pt x="4380390" y="2890547"/>
-                  </a:lnTo>
-                  <a:lnTo>
-                    <a:pt x="4457023" y="2898399"/>
-                  </a:lnTo>
-                  <a:lnTo>
-                    <a:pt x="4533656" y="2906147"/>
-                  </a:lnTo>
-                  <a:lnTo>
-                    <a:pt x="4610288" y="2913793"/>
-                  </a:lnTo>
-                  <a:lnTo>
-                    <a:pt x="4686921" y="2921338"/>
-                  </a:lnTo>
-                  <a:lnTo>
-                    <a:pt x="4763553" y="2928782"/>
-                  </a:lnTo>
-                  <a:lnTo>
-                    <a:pt x="4840186" y="2936128"/>
-                  </a:lnTo>
-                  <a:lnTo>
-                    <a:pt x="4916818" y="2943377"/>
-                  </a:lnTo>
-                  <a:lnTo>
-                    <a:pt x="4993451" y="2950530"/>
-                  </a:lnTo>
-                  <a:lnTo>
-                    <a:pt x="5070083" y="2957588"/>
-                  </a:lnTo>
-                  <a:lnTo>
-                    <a:pt x="5146716" y="2964553"/>
-                  </a:lnTo>
-                  <a:lnTo>
-                    <a:pt x="5223348" y="2971426"/>
-                  </a:lnTo>
-                  <a:lnTo>
-                    <a:pt x="5299981" y="2978207"/>
-                  </a:lnTo>
-                  <a:lnTo>
-                    <a:pt x="5376614" y="2984899"/>
-                  </a:lnTo>
-                  <a:lnTo>
-                    <a:pt x="5453246" y="2991502"/>
-                  </a:lnTo>
-                  <a:lnTo>
-                    <a:pt x="5529879" y="2998018"/>
-                  </a:lnTo>
-                  <a:lnTo>
-                    <a:pt x="5606511" y="3004448"/>
-                  </a:lnTo>
-                  <a:lnTo>
-                    <a:pt x="5683144" y="3010792"/>
-                  </a:lnTo>
-                  <a:lnTo>
-                    <a:pt x="5759776" y="3017053"/>
-                  </a:lnTo>
-                  <a:lnTo>
-                    <a:pt x="5836409" y="3023230"/>
-                  </a:lnTo>
-                  <a:lnTo>
-                    <a:pt x="5913041" y="3029326"/>
-                  </a:lnTo>
-                  <a:lnTo>
-                    <a:pt x="5989674" y="3035341"/>
-                  </a:lnTo>
-                  <a:lnTo>
-                    <a:pt x="6066307" y="3041277"/>
-                  </a:lnTo>
-                  <a:lnTo>
-                    <a:pt x="6142939" y="3047134"/>
-                  </a:lnTo>
-                  <a:lnTo>
-                    <a:pt x="6219572" y="3052914"/>
-                  </a:lnTo>
-                  <a:lnTo>
-                    <a:pt x="6296204" y="3058616"/>
-                  </a:lnTo>
-                  <a:lnTo>
-                    <a:pt x="6372837" y="3064244"/>
-                  </a:lnTo>
-                  <a:lnTo>
-                    <a:pt x="6449469" y="3069797"/>
                   </a:lnTo>
                 </a:path>
               </a:pathLst>
@@ -3868,625 +4156,312 @@
           </p:nvSpPr>
           <p:spPr>
             <a:xfrm>
-              <a:off x="817517" y="4057294"/>
-              <a:ext cx="7403783" cy="1419952"/>
+              <a:off x="1172049" y="2318231"/>
+              <a:ext cx="7090630" cy="3057037"/>
             </a:xfrm>
             <a:custGeom>
               <a:avLst/>
               <a:pathLst>
-                <a:path w="7403783" h="1419952">
-                  <a:moveTo>
-                    <a:pt x="7403783" y="1419952"/>
-                  </a:moveTo>
-                  <a:lnTo>
-                    <a:pt x="7327150" y="1416283"/>
-                  </a:lnTo>
-                  <a:lnTo>
-                    <a:pt x="7250518" y="1412446"/>
-                  </a:lnTo>
-                  <a:lnTo>
-                    <a:pt x="7173885" y="1408433"/>
-                  </a:lnTo>
-                  <a:lnTo>
-                    <a:pt x="7097253" y="1404236"/>
-                  </a:lnTo>
-                  <a:lnTo>
-                    <a:pt x="7020620" y="1399846"/>
-                  </a:lnTo>
-                  <a:lnTo>
-                    <a:pt x="6943987" y="1395255"/>
-                  </a:lnTo>
-                  <a:lnTo>
-                    <a:pt x="6867355" y="1390454"/>
-                  </a:lnTo>
-                  <a:lnTo>
-                    <a:pt x="6790722" y="1385432"/>
-                  </a:lnTo>
-                  <a:lnTo>
-                    <a:pt x="6714090" y="1380180"/>
-                  </a:lnTo>
-                  <a:lnTo>
-                    <a:pt x="6637457" y="1374687"/>
-                  </a:lnTo>
-                  <a:lnTo>
-                    <a:pt x="6560825" y="1368943"/>
-                  </a:lnTo>
-                  <a:lnTo>
-                    <a:pt x="6484192" y="1362935"/>
-                  </a:lnTo>
-                  <a:lnTo>
-                    <a:pt x="6407560" y="1356651"/>
-                  </a:lnTo>
-                  <a:lnTo>
-                    <a:pt x="6330927" y="1350079"/>
-                  </a:lnTo>
-                  <a:lnTo>
-                    <a:pt x="6254294" y="1343206"/>
-                  </a:lnTo>
-                  <a:lnTo>
-                    <a:pt x="6177662" y="1336018"/>
-                  </a:lnTo>
-                  <a:lnTo>
-                    <a:pt x="6101029" y="1328500"/>
-                  </a:lnTo>
-                  <a:lnTo>
-                    <a:pt x="6024397" y="1320637"/>
-                  </a:lnTo>
-                  <a:lnTo>
-                    <a:pt x="5947764" y="1312414"/>
-                  </a:lnTo>
-                  <a:lnTo>
-                    <a:pt x="5871132" y="1303813"/>
-                  </a:lnTo>
-                  <a:lnTo>
-                    <a:pt x="5794499" y="1294818"/>
-                  </a:lnTo>
-                  <a:lnTo>
-                    <a:pt x="5717867" y="1285411"/>
-                  </a:lnTo>
-                  <a:lnTo>
-                    <a:pt x="5641234" y="1275572"/>
-                  </a:lnTo>
-                  <a:lnTo>
-                    <a:pt x="5564602" y="1265282"/>
-                  </a:lnTo>
-                  <a:lnTo>
-                    <a:pt x="5487969" y="1254520"/>
-                  </a:lnTo>
-                  <a:lnTo>
-                    <a:pt x="5411336" y="1243265"/>
-                  </a:lnTo>
-                  <a:lnTo>
-                    <a:pt x="5334704" y="1231493"/>
-                  </a:lnTo>
-                  <a:lnTo>
-                    <a:pt x="5258071" y="1219182"/>
-                  </a:lnTo>
-                  <a:lnTo>
-                    <a:pt x="5181439" y="1206306"/>
-                  </a:lnTo>
-                  <a:lnTo>
-                    <a:pt x="5104806" y="1192840"/>
-                  </a:lnTo>
-                  <a:lnTo>
-                    <a:pt x="5028174" y="1178756"/>
-                  </a:lnTo>
-                  <a:lnTo>
-                    <a:pt x="4951541" y="1164026"/>
-                  </a:lnTo>
-                  <a:lnTo>
-                    <a:pt x="4874909" y="1148620"/>
-                  </a:lnTo>
-                  <a:lnTo>
-                    <a:pt x="4798276" y="1132509"/>
-                  </a:lnTo>
-                  <a:lnTo>
-                    <a:pt x="4721644" y="1115658"/>
-                  </a:lnTo>
-                  <a:lnTo>
-                    <a:pt x="4645011" y="1098034"/>
-                  </a:lnTo>
-                  <a:lnTo>
-                    <a:pt x="4568378" y="1079603"/>
-                  </a:lnTo>
-                  <a:lnTo>
-                    <a:pt x="4491746" y="1060326"/>
-                  </a:lnTo>
-                  <a:lnTo>
-                    <a:pt x="4415113" y="1040165"/>
-                  </a:lnTo>
-                  <a:lnTo>
-                    <a:pt x="4338481" y="1019079"/>
-                  </a:lnTo>
-                  <a:lnTo>
-                    <a:pt x="4261848" y="997027"/>
-                  </a:lnTo>
-                  <a:lnTo>
-                    <a:pt x="4185216" y="973963"/>
-                  </a:lnTo>
-                  <a:lnTo>
-                    <a:pt x="4108583" y="949841"/>
-                  </a:lnTo>
-                  <a:lnTo>
-                    <a:pt x="4031951" y="924614"/>
-                  </a:lnTo>
-                  <a:lnTo>
-                    <a:pt x="3955318" y="898229"/>
-                  </a:lnTo>
-                  <a:lnTo>
-                    <a:pt x="3878685" y="870634"/>
-                  </a:lnTo>
-                  <a:lnTo>
-                    <a:pt x="3802053" y="841774"/>
-                  </a:lnTo>
-                  <a:lnTo>
-                    <a:pt x="3725420" y="811591"/>
-                  </a:lnTo>
-                  <a:lnTo>
-                    <a:pt x="3648788" y="780023"/>
-                  </a:lnTo>
-                  <a:lnTo>
-                    <a:pt x="3572155" y="747008"/>
-                  </a:lnTo>
-                  <a:lnTo>
-                    <a:pt x="3495523" y="712478"/>
-                  </a:lnTo>
-                  <a:lnTo>
-                    <a:pt x="3418890" y="676365"/>
-                  </a:lnTo>
-                  <a:lnTo>
-                    <a:pt x="3342258" y="661138"/>
-                  </a:lnTo>
-                  <a:lnTo>
-                    <a:pt x="3265625" y="649885"/>
-                  </a:lnTo>
-                  <a:lnTo>
-                    <a:pt x="3188993" y="638482"/>
-                  </a:lnTo>
-                  <a:lnTo>
-                    <a:pt x="3112360" y="626926"/>
-                  </a:lnTo>
-                  <a:lnTo>
-                    <a:pt x="3035727" y="615214"/>
-                  </a:lnTo>
-                  <a:lnTo>
-                    <a:pt x="2959095" y="603346"/>
-                  </a:lnTo>
-                  <a:lnTo>
-                    <a:pt x="2882462" y="591318"/>
-                  </a:lnTo>
-                  <a:lnTo>
-                    <a:pt x="2805830" y="579129"/>
-                  </a:lnTo>
-                  <a:lnTo>
-                    <a:pt x="2729197" y="566776"/>
-                  </a:lnTo>
-                  <a:lnTo>
-                    <a:pt x="2652565" y="554258"/>
-                  </a:lnTo>
-                  <a:lnTo>
-                    <a:pt x="2575932" y="541572"/>
-                  </a:lnTo>
-                  <a:lnTo>
-                    <a:pt x="2499300" y="528716"/>
-                  </a:lnTo>
-                  <a:lnTo>
-                    <a:pt x="2422667" y="515687"/>
-                  </a:lnTo>
-                  <a:lnTo>
-                    <a:pt x="2346034" y="502483"/>
-                  </a:lnTo>
-                  <a:lnTo>
-                    <a:pt x="2269402" y="489103"/>
-                  </a:lnTo>
-                  <a:lnTo>
-                    <a:pt x="2192769" y="475542"/>
-                  </a:lnTo>
-                  <a:lnTo>
-                    <a:pt x="2116137" y="461800"/>
-                  </a:lnTo>
-                  <a:lnTo>
-                    <a:pt x="2039504" y="447874"/>
-                  </a:lnTo>
-                  <a:lnTo>
-                    <a:pt x="1962872" y="433761"/>
-                  </a:lnTo>
-                  <a:lnTo>
-                    <a:pt x="1886239" y="419458"/>
-                  </a:lnTo>
-                  <a:lnTo>
-                    <a:pt x="1809607" y="404964"/>
-                  </a:lnTo>
-                  <a:lnTo>
-                    <a:pt x="1732974" y="390275"/>
-                  </a:lnTo>
-                  <a:lnTo>
-                    <a:pt x="1656342" y="375389"/>
-                  </a:lnTo>
-                  <a:lnTo>
-                    <a:pt x="1579709" y="360303"/>
-                  </a:lnTo>
-                  <a:lnTo>
-                    <a:pt x="1503076" y="345015"/>
-                  </a:lnTo>
-                  <a:lnTo>
-                    <a:pt x="1426444" y="329522"/>
-                  </a:lnTo>
-                  <a:lnTo>
-                    <a:pt x="1349811" y="313821"/>
-                  </a:lnTo>
-                  <a:lnTo>
-                    <a:pt x="1273179" y="297910"/>
-                  </a:lnTo>
-                  <a:lnTo>
-                    <a:pt x="1196546" y="281785"/>
-                  </a:lnTo>
-                  <a:lnTo>
-                    <a:pt x="1119914" y="265443"/>
-                  </a:lnTo>
-                  <a:lnTo>
-                    <a:pt x="1043281" y="248883"/>
-                  </a:lnTo>
-                  <a:lnTo>
-                    <a:pt x="966649" y="232100"/>
-                  </a:lnTo>
-                  <a:lnTo>
-                    <a:pt x="890016" y="215092"/>
-                  </a:lnTo>
-                  <a:lnTo>
-                    <a:pt x="813384" y="197857"/>
-                  </a:lnTo>
-                  <a:lnTo>
-                    <a:pt x="736751" y="180389"/>
-                  </a:lnTo>
-                  <a:lnTo>
-                    <a:pt x="660118" y="162688"/>
-                  </a:lnTo>
-                  <a:lnTo>
-                    <a:pt x="583486" y="144749"/>
-                  </a:lnTo>
-                  <a:lnTo>
-                    <a:pt x="506853" y="126569"/>
-                  </a:lnTo>
-                  <a:lnTo>
-                    <a:pt x="430221" y="108146"/>
-                  </a:lnTo>
-                  <a:lnTo>
-                    <a:pt x="353588" y="89475"/>
-                  </a:lnTo>
-                  <a:lnTo>
-                    <a:pt x="276956" y="70554"/>
-                  </a:lnTo>
-                  <a:lnTo>
-                    <a:pt x="200323" y="51379"/>
-                  </a:lnTo>
-                  <a:lnTo>
-                    <a:pt x="123691" y="31947"/>
-                  </a:lnTo>
-                  <a:lnTo>
-                    <a:pt x="47058" y="12255"/>
-                  </a:lnTo>
-                  <a:lnTo>
-                    <a:pt x="0" y="0"/>
-                  </a:lnTo>
-                </a:path>
-              </a:pathLst>
-            </a:custGeom>
-          </p:spPr>
-          <p:txBody>
-            <a:bodyPr/>
-            <a:lstStyle/>
-            <a:p/>
-          </p:txBody>
-        </p:sp>
-        <p:sp>
-          <p:nvSpPr>
-            <p:cNvPr id="24" name="pl24"/>
-            <p:cNvSpPr/>
-            <p:nvPr/>
-          </p:nvSpPr>
-          <p:spPr>
-            <a:xfrm>
-              <a:off x="817517" y="2535056"/>
-              <a:ext cx="7403783" cy="2840212"/>
-            </a:xfrm>
-            <a:custGeom>
-              <a:avLst/>
-              <a:pathLst>
-                <a:path w="7403783" h="2840212">
+                <a:path w="7090630" h="3057037">
                   <a:moveTo>
                     <a:pt x="0" y="0"/>
                   </a:moveTo>
                   <a:lnTo>
-                    <a:pt x="47058" y="53790"/>
-                  </a:lnTo>
-                  <a:lnTo>
-                    <a:pt x="123691" y="138874"/>
-                  </a:lnTo>
-                  <a:lnTo>
-                    <a:pt x="200323" y="221519"/>
-                  </a:lnTo>
-                  <a:lnTo>
-                    <a:pt x="276956" y="301795"/>
-                  </a:lnTo>
-                  <a:lnTo>
-                    <a:pt x="353588" y="379771"/>
-                  </a:lnTo>
-                  <a:lnTo>
-                    <a:pt x="430221" y="455511"/>
-                  </a:lnTo>
-                  <a:lnTo>
-                    <a:pt x="506853" y="529081"/>
-                  </a:lnTo>
-                  <a:lnTo>
-                    <a:pt x="583486" y="600541"/>
-                  </a:lnTo>
-                  <a:lnTo>
-                    <a:pt x="660118" y="669954"/>
-                  </a:lnTo>
-                  <a:lnTo>
-                    <a:pt x="736751" y="737376"/>
-                  </a:lnTo>
-                  <a:lnTo>
-                    <a:pt x="813384" y="802867"/>
-                  </a:lnTo>
-                  <a:lnTo>
-                    <a:pt x="890016" y="866480"/>
-                  </a:lnTo>
-                  <a:lnTo>
-                    <a:pt x="966649" y="928269"/>
-                  </a:lnTo>
-                  <a:lnTo>
-                    <a:pt x="1043281" y="988288"/>
-                  </a:lnTo>
-                  <a:lnTo>
-                    <a:pt x="1119914" y="1046586"/>
-                  </a:lnTo>
-                  <a:lnTo>
-                    <a:pt x="1196546" y="1103214"/>
-                  </a:lnTo>
-                  <a:lnTo>
-                    <a:pt x="1273179" y="1158218"/>
-                  </a:lnTo>
-                  <a:lnTo>
-                    <a:pt x="1349811" y="1211645"/>
-                  </a:lnTo>
-                  <a:lnTo>
-                    <a:pt x="1426444" y="1263542"/>
-                  </a:lnTo>
-                  <a:lnTo>
-                    <a:pt x="1503076" y="1313950"/>
-                  </a:lnTo>
-                  <a:lnTo>
-                    <a:pt x="1579709" y="1362914"/>
-                  </a:lnTo>
-                  <a:lnTo>
-                    <a:pt x="1656342" y="1410474"/>
-                  </a:lnTo>
-                  <a:lnTo>
-                    <a:pt x="1732974" y="1456671"/>
-                  </a:lnTo>
-                  <a:lnTo>
-                    <a:pt x="1809607" y="1501544"/>
-                  </a:lnTo>
-                  <a:lnTo>
-                    <a:pt x="1886239" y="1545131"/>
-                  </a:lnTo>
-                  <a:lnTo>
-                    <a:pt x="1962872" y="1587468"/>
-                  </a:lnTo>
-                  <a:lnTo>
-                    <a:pt x="2039504" y="1628592"/>
-                  </a:lnTo>
-                  <a:lnTo>
-                    <a:pt x="2116137" y="1668537"/>
-                  </a:lnTo>
-                  <a:lnTo>
-                    <a:pt x="2192769" y="1707337"/>
-                  </a:lnTo>
-                  <a:lnTo>
-                    <a:pt x="2269402" y="1745025"/>
-                  </a:lnTo>
-                  <a:lnTo>
-                    <a:pt x="2346034" y="1781633"/>
-                  </a:lnTo>
-                  <a:lnTo>
-                    <a:pt x="2422667" y="1817192"/>
-                  </a:lnTo>
-                  <a:lnTo>
-                    <a:pt x="2499300" y="1851731"/>
-                  </a:lnTo>
-                  <a:lnTo>
-                    <a:pt x="2575932" y="1885280"/>
-                  </a:lnTo>
-                  <a:lnTo>
-                    <a:pt x="2652565" y="1917868"/>
-                  </a:lnTo>
-                  <a:lnTo>
-                    <a:pt x="2729197" y="1949521"/>
-                  </a:lnTo>
-                  <a:lnTo>
-                    <a:pt x="2805830" y="1980268"/>
-                  </a:lnTo>
-                  <a:lnTo>
-                    <a:pt x="2882462" y="2010133"/>
-                  </a:lnTo>
-                  <a:lnTo>
-                    <a:pt x="2959095" y="2039141"/>
-                  </a:lnTo>
-                  <a:lnTo>
-                    <a:pt x="3035727" y="2067319"/>
-                  </a:lnTo>
-                  <a:lnTo>
-                    <a:pt x="3112360" y="2094689"/>
-                  </a:lnTo>
-                  <a:lnTo>
-                    <a:pt x="3188993" y="2121274"/>
-                  </a:lnTo>
-                  <a:lnTo>
-                    <a:pt x="3265625" y="2147097"/>
-                  </a:lnTo>
-                  <a:lnTo>
-                    <a:pt x="3342258" y="2172180"/>
-                  </a:lnTo>
-                  <a:lnTo>
-                    <a:pt x="3418890" y="2196544"/>
-                  </a:lnTo>
-                  <a:lnTo>
-                    <a:pt x="3495523" y="2220210"/>
-                  </a:lnTo>
-                  <a:lnTo>
-                    <a:pt x="3572155" y="2243198"/>
-                  </a:lnTo>
-                  <a:lnTo>
-                    <a:pt x="3648788" y="2265526"/>
-                  </a:lnTo>
-                  <a:lnTo>
-                    <a:pt x="3725420" y="2287215"/>
-                  </a:lnTo>
-                  <a:lnTo>
-                    <a:pt x="3802053" y="2308282"/>
-                  </a:lnTo>
-                  <a:lnTo>
-                    <a:pt x="3878685" y="2328745"/>
-                  </a:lnTo>
-                  <a:lnTo>
-                    <a:pt x="3955318" y="2348621"/>
-                  </a:lnTo>
-                  <a:lnTo>
-                    <a:pt x="4031951" y="2367928"/>
-                  </a:lnTo>
-                  <a:lnTo>
-                    <a:pt x="4108583" y="2386681"/>
-                  </a:lnTo>
-                  <a:lnTo>
-                    <a:pt x="4185216" y="2404897"/>
-                  </a:lnTo>
-                  <a:lnTo>
-                    <a:pt x="4261848" y="2422591"/>
-                  </a:lnTo>
-                  <a:lnTo>
-                    <a:pt x="4338481" y="2439777"/>
-                  </a:lnTo>
-                  <a:lnTo>
-                    <a:pt x="4415113" y="2456471"/>
-                  </a:lnTo>
-                  <a:lnTo>
-                    <a:pt x="4491746" y="2472687"/>
-                  </a:lnTo>
-                  <a:lnTo>
-                    <a:pt x="4568378" y="2488437"/>
-                  </a:lnTo>
-                  <a:lnTo>
-                    <a:pt x="4645011" y="2503736"/>
-                  </a:lnTo>
-                  <a:lnTo>
-                    <a:pt x="4721644" y="2518597"/>
-                  </a:lnTo>
-                  <a:lnTo>
-                    <a:pt x="4798276" y="2533032"/>
-                  </a:lnTo>
-                  <a:lnTo>
-                    <a:pt x="4874909" y="2547053"/>
-                  </a:lnTo>
-                  <a:lnTo>
-                    <a:pt x="4951541" y="2560672"/>
-                  </a:lnTo>
-                  <a:lnTo>
-                    <a:pt x="5028174" y="2573900"/>
-                  </a:lnTo>
-                  <a:lnTo>
-                    <a:pt x="5104806" y="2586750"/>
-                  </a:lnTo>
-                  <a:lnTo>
-                    <a:pt x="5181439" y="2599231"/>
-                  </a:lnTo>
-                  <a:lnTo>
-                    <a:pt x="5258071" y="2611355"/>
-                  </a:lnTo>
-                  <a:lnTo>
-                    <a:pt x="5334704" y="2623131"/>
-                  </a:lnTo>
-                  <a:lnTo>
-                    <a:pt x="5411336" y="2634569"/>
-                  </a:lnTo>
-                  <a:lnTo>
-                    <a:pt x="5487969" y="2645680"/>
-                  </a:lnTo>
-                  <a:lnTo>
-                    <a:pt x="5564602" y="2656472"/>
-                  </a:lnTo>
-                  <a:lnTo>
-                    <a:pt x="5641234" y="2666954"/>
-                  </a:lnTo>
-                  <a:lnTo>
-                    <a:pt x="5717867" y="2677137"/>
-                  </a:lnTo>
-                  <a:lnTo>
-                    <a:pt x="5794499" y="2687027"/>
-                  </a:lnTo>
-                  <a:lnTo>
-                    <a:pt x="5871132" y="2696634"/>
-                  </a:lnTo>
-                  <a:lnTo>
-                    <a:pt x="5947764" y="2705966"/>
-                  </a:lnTo>
-                  <a:lnTo>
-                    <a:pt x="6024397" y="2715030"/>
-                  </a:lnTo>
-                  <a:lnTo>
-                    <a:pt x="6101029" y="2723834"/>
-                  </a:lnTo>
-                  <a:lnTo>
-                    <a:pt x="6177662" y="2732386"/>
-                  </a:lnTo>
-                  <a:lnTo>
-                    <a:pt x="6254294" y="2740693"/>
-                  </a:lnTo>
-                  <a:lnTo>
-                    <a:pt x="6330927" y="2748762"/>
-                  </a:lnTo>
-                  <a:lnTo>
-                    <a:pt x="6407560" y="2756599"/>
-                  </a:lnTo>
-                  <a:lnTo>
-                    <a:pt x="6484192" y="2764212"/>
-                  </a:lnTo>
-                  <a:lnTo>
-                    <a:pt x="6560825" y="2771606"/>
-                  </a:lnTo>
-                  <a:lnTo>
-                    <a:pt x="6637457" y="2778789"/>
-                  </a:lnTo>
-                  <a:lnTo>
-                    <a:pt x="6714090" y="2785766"/>
-                  </a:lnTo>
-                  <a:lnTo>
-                    <a:pt x="6790722" y="2792543"/>
-                  </a:lnTo>
-                  <a:lnTo>
-                    <a:pt x="6867355" y="2799125"/>
-                  </a:lnTo>
-                  <a:lnTo>
-                    <a:pt x="6943987" y="2805519"/>
-                  </a:lnTo>
-                  <a:lnTo>
-                    <a:pt x="7020620" y="2811729"/>
-                  </a:lnTo>
-                  <a:lnTo>
-                    <a:pt x="7097253" y="2817762"/>
-                  </a:lnTo>
-                  <a:lnTo>
-                    <a:pt x="7173885" y="2823622"/>
-                  </a:lnTo>
-                  <a:lnTo>
-                    <a:pt x="7250518" y="2829313"/>
-                  </a:lnTo>
-                  <a:lnTo>
-                    <a:pt x="7327150" y="2834842"/>
-                  </a:lnTo>
-                  <a:lnTo>
-                    <a:pt x="7403783" y="2840212"/>
+                    <a:pt x="71622" y="92840"/>
+                  </a:lnTo>
+                  <a:lnTo>
+                    <a:pt x="143245" y="183020"/>
+                  </a:lnTo>
+                  <a:lnTo>
+                    <a:pt x="214867" y="270615"/>
+                  </a:lnTo>
+                  <a:lnTo>
+                    <a:pt x="286490" y="355699"/>
+                  </a:lnTo>
+                  <a:lnTo>
+                    <a:pt x="358112" y="438344"/>
+                  </a:lnTo>
+                  <a:lnTo>
+                    <a:pt x="429735" y="518620"/>
+                  </a:lnTo>
+                  <a:lnTo>
+                    <a:pt x="501357" y="596596"/>
+                  </a:lnTo>
+                  <a:lnTo>
+                    <a:pt x="572980" y="672336"/>
+                  </a:lnTo>
+                  <a:lnTo>
+                    <a:pt x="644602" y="745906"/>
+                  </a:lnTo>
+                  <a:lnTo>
+                    <a:pt x="716225" y="817366"/>
+                  </a:lnTo>
+                  <a:lnTo>
+                    <a:pt x="787847" y="886779"/>
+                  </a:lnTo>
+                  <a:lnTo>
+                    <a:pt x="859470" y="954201"/>
+                  </a:lnTo>
+                  <a:lnTo>
+                    <a:pt x="931092" y="1019692"/>
+                  </a:lnTo>
+                  <a:lnTo>
+                    <a:pt x="1002715" y="1083305"/>
+                  </a:lnTo>
+                  <a:lnTo>
+                    <a:pt x="1074337" y="1145094"/>
+                  </a:lnTo>
+                  <a:lnTo>
+                    <a:pt x="1145960" y="1205113"/>
+                  </a:lnTo>
+                  <a:lnTo>
+                    <a:pt x="1217582" y="1263411"/>
+                  </a:lnTo>
+                  <a:lnTo>
+                    <a:pt x="1289205" y="1320039"/>
+                  </a:lnTo>
+                  <a:lnTo>
+                    <a:pt x="1360827" y="1375043"/>
+                  </a:lnTo>
+                  <a:lnTo>
+                    <a:pt x="1432450" y="1428470"/>
+                  </a:lnTo>
+                  <a:lnTo>
+                    <a:pt x="1504073" y="1480366"/>
+                  </a:lnTo>
+                  <a:lnTo>
+                    <a:pt x="1575695" y="1530775"/>
+                  </a:lnTo>
+                  <a:lnTo>
+                    <a:pt x="1647318" y="1579739"/>
+                  </a:lnTo>
+                  <a:lnTo>
+                    <a:pt x="1718940" y="1627299"/>
+                  </a:lnTo>
+                  <a:lnTo>
+                    <a:pt x="1790563" y="1673496"/>
+                  </a:lnTo>
+                  <a:lnTo>
+                    <a:pt x="1862185" y="1718369"/>
+                  </a:lnTo>
+                  <a:lnTo>
+                    <a:pt x="1933808" y="1761956"/>
+                  </a:lnTo>
+                  <a:lnTo>
+                    <a:pt x="2005430" y="1804293"/>
+                  </a:lnTo>
+                  <a:lnTo>
+                    <a:pt x="2077053" y="1845417"/>
+                  </a:lnTo>
+                  <a:lnTo>
+                    <a:pt x="2148675" y="1885362"/>
+                  </a:lnTo>
+                  <a:lnTo>
+                    <a:pt x="2220298" y="1924162"/>
+                  </a:lnTo>
+                  <a:lnTo>
+                    <a:pt x="2291920" y="1961850"/>
+                  </a:lnTo>
+                  <a:lnTo>
+                    <a:pt x="2363543" y="1998458"/>
+                  </a:lnTo>
+                  <a:lnTo>
+                    <a:pt x="2435165" y="2034017"/>
+                  </a:lnTo>
+                  <a:lnTo>
+                    <a:pt x="2506788" y="2068556"/>
+                  </a:lnTo>
+                  <a:lnTo>
+                    <a:pt x="2578410" y="2102105"/>
+                  </a:lnTo>
+                  <a:lnTo>
+                    <a:pt x="2650033" y="2134693"/>
+                  </a:lnTo>
+                  <a:lnTo>
+                    <a:pt x="2721655" y="2166346"/>
+                  </a:lnTo>
+                  <a:lnTo>
+                    <a:pt x="2793278" y="2197093"/>
+                  </a:lnTo>
+                  <a:lnTo>
+                    <a:pt x="2864901" y="2226957"/>
+                  </a:lnTo>
+                  <a:lnTo>
+                    <a:pt x="2936523" y="2255966"/>
+                  </a:lnTo>
+                  <a:lnTo>
+                    <a:pt x="3008146" y="2284144"/>
+                  </a:lnTo>
+                  <a:lnTo>
+                    <a:pt x="3079768" y="2311514"/>
+                  </a:lnTo>
+                  <a:lnTo>
+                    <a:pt x="3151391" y="2338099"/>
+                  </a:lnTo>
+                  <a:lnTo>
+                    <a:pt x="3223013" y="2363922"/>
+                  </a:lnTo>
+                  <a:lnTo>
+                    <a:pt x="3294636" y="2389005"/>
+                  </a:lnTo>
+                  <a:lnTo>
+                    <a:pt x="3366258" y="2413369"/>
+                  </a:lnTo>
+                  <a:lnTo>
+                    <a:pt x="3437881" y="2437035"/>
+                  </a:lnTo>
+                  <a:lnTo>
+                    <a:pt x="3509503" y="2460023"/>
+                  </a:lnTo>
+                  <a:lnTo>
+                    <a:pt x="3581126" y="2482351"/>
+                  </a:lnTo>
+                  <a:lnTo>
+                    <a:pt x="3652748" y="2504040"/>
+                  </a:lnTo>
+                  <a:lnTo>
+                    <a:pt x="3724371" y="2525106"/>
+                  </a:lnTo>
+                  <a:lnTo>
+                    <a:pt x="3795993" y="2545570"/>
+                  </a:lnTo>
+                  <a:lnTo>
+                    <a:pt x="3867616" y="2565446"/>
+                  </a:lnTo>
+                  <a:lnTo>
+                    <a:pt x="3939238" y="2584753"/>
+                  </a:lnTo>
+                  <a:lnTo>
+                    <a:pt x="4010861" y="2603506"/>
+                  </a:lnTo>
+                  <a:lnTo>
+                    <a:pt x="4082483" y="2621722"/>
+                  </a:lnTo>
+                  <a:lnTo>
+                    <a:pt x="4154106" y="2639416"/>
+                  </a:lnTo>
+                  <a:lnTo>
+                    <a:pt x="4225729" y="2656602"/>
+                  </a:lnTo>
+                  <a:lnTo>
+                    <a:pt x="4297351" y="2673296"/>
+                  </a:lnTo>
+                  <a:lnTo>
+                    <a:pt x="4368974" y="2689512"/>
+                  </a:lnTo>
+                  <a:lnTo>
+                    <a:pt x="4440596" y="2705262"/>
+                  </a:lnTo>
+                  <a:lnTo>
+                    <a:pt x="4512219" y="2720561"/>
+                  </a:lnTo>
+                  <a:lnTo>
+                    <a:pt x="4583841" y="2735422"/>
+                  </a:lnTo>
+                  <a:lnTo>
+                    <a:pt x="4655464" y="2749857"/>
+                  </a:lnTo>
+                  <a:lnTo>
+                    <a:pt x="4727086" y="2763878"/>
+                  </a:lnTo>
+                  <a:lnTo>
+                    <a:pt x="4798709" y="2777497"/>
+                  </a:lnTo>
+                  <a:lnTo>
+                    <a:pt x="4870331" y="2790725"/>
+                  </a:lnTo>
+                  <a:lnTo>
+                    <a:pt x="4941954" y="2803575"/>
+                  </a:lnTo>
+                  <a:lnTo>
+                    <a:pt x="5013576" y="2816056"/>
+                  </a:lnTo>
+                  <a:lnTo>
+                    <a:pt x="5085199" y="2828180"/>
+                  </a:lnTo>
+                  <a:lnTo>
+                    <a:pt x="5156821" y="2839956"/>
+                  </a:lnTo>
+                  <a:lnTo>
+                    <a:pt x="5228444" y="2851394"/>
+                  </a:lnTo>
+                  <a:lnTo>
+                    <a:pt x="5300066" y="2862505"/>
+                  </a:lnTo>
+                  <a:lnTo>
+                    <a:pt x="5371689" y="2873297"/>
+                  </a:lnTo>
+                  <a:lnTo>
+                    <a:pt x="5443311" y="2883779"/>
+                  </a:lnTo>
+                  <a:lnTo>
+                    <a:pt x="5514934" y="2893962"/>
+                  </a:lnTo>
+                  <a:lnTo>
+                    <a:pt x="5586557" y="2903852"/>
+                  </a:lnTo>
+                  <a:lnTo>
+                    <a:pt x="5658179" y="2913459"/>
+                  </a:lnTo>
+                  <a:lnTo>
+                    <a:pt x="5729802" y="2922791"/>
+                  </a:lnTo>
+                  <a:lnTo>
+                    <a:pt x="5801424" y="2931855"/>
+                  </a:lnTo>
+                  <a:lnTo>
+                    <a:pt x="5873047" y="2940659"/>
+                  </a:lnTo>
+                  <a:lnTo>
+                    <a:pt x="5944669" y="2949211"/>
+                  </a:lnTo>
+                  <a:lnTo>
+                    <a:pt x="6016292" y="2957518"/>
+                  </a:lnTo>
+                  <a:lnTo>
+                    <a:pt x="6087914" y="2965587"/>
+                  </a:lnTo>
+                  <a:lnTo>
+                    <a:pt x="6159537" y="2973424"/>
+                  </a:lnTo>
+                  <a:lnTo>
+                    <a:pt x="6231159" y="2981037"/>
+                  </a:lnTo>
+                  <a:lnTo>
+                    <a:pt x="6302782" y="2988431"/>
+                  </a:lnTo>
+                  <a:lnTo>
+                    <a:pt x="6374404" y="2995614"/>
+                  </a:lnTo>
+                  <a:lnTo>
+                    <a:pt x="6446027" y="3002591"/>
+                  </a:lnTo>
+                  <a:lnTo>
+                    <a:pt x="6517649" y="3009367"/>
+                  </a:lnTo>
+                  <a:lnTo>
+                    <a:pt x="6589272" y="3015950"/>
+                  </a:lnTo>
+                  <a:lnTo>
+                    <a:pt x="6660894" y="3022344"/>
+                  </a:lnTo>
+                  <a:lnTo>
+                    <a:pt x="6732517" y="3028554"/>
+                  </a:lnTo>
+                  <a:lnTo>
+                    <a:pt x="6804139" y="3034587"/>
+                  </a:lnTo>
+                  <a:lnTo>
+                    <a:pt x="6875762" y="3040447"/>
+                  </a:lnTo>
+                  <a:lnTo>
+                    <a:pt x="6947385" y="3046138"/>
+                  </a:lnTo>
+                  <a:lnTo>
+                    <a:pt x="7019007" y="3051667"/>
+                  </a:lnTo>
+                  <a:lnTo>
+                    <a:pt x="7090630" y="3057037"/>
                   </a:lnTo>
                 </a:path>
               </a:pathLst>
@@ -4509,7 +4484,7 @@
         </p:sp>
         <p:sp>
           <p:nvSpPr>
-            <p:cNvPr id="25" name="pl25"/>
+            <p:cNvPr id="24" name="pl24"/>
             <p:cNvSpPr/>
             <p:nvPr/>
           </p:nvSpPr>
@@ -4552,13 +4527,13 @@
         </p:sp>
         <p:sp>
           <p:nvSpPr>
-            <p:cNvPr id="26" name="pl26"/>
+            <p:cNvPr id="25" name="pl25"/>
             <p:cNvSpPr/>
             <p:nvPr/>
           </p:nvSpPr>
           <p:spPr>
             <a:xfrm>
-              <a:off x="4224261" y="2073503"/>
+              <a:off x="4526955" y="2073503"/>
               <a:ext cx="0" cy="3649639"/>
             </a:xfrm>
             <a:custGeom>
@@ -4595,7 +4570,7 @@
         </p:sp>
         <p:sp>
           <p:nvSpPr>
-            <p:cNvPr id="27" name="tx27"/>
+            <p:cNvPr id="26" name="tx26"/>
             <p:cNvSpPr/>
             <p:nvPr/>
           </p:nvSpPr>
@@ -4641,7 +4616,7 @@
         </p:sp>
         <p:sp>
           <p:nvSpPr>
-            <p:cNvPr id="28" name="tx28"/>
+            <p:cNvPr id="27" name="tx27"/>
             <p:cNvSpPr/>
             <p:nvPr/>
           </p:nvSpPr>
@@ -4687,7 +4662,7 @@
         </p:sp>
         <p:sp>
           <p:nvSpPr>
-            <p:cNvPr id="29" name="tx29"/>
+            <p:cNvPr id="28" name="tx28"/>
             <p:cNvSpPr/>
             <p:nvPr/>
           </p:nvSpPr>
@@ -4733,7 +4708,7 @@
         </p:sp>
         <p:sp>
           <p:nvSpPr>
-            <p:cNvPr id="30" name="tx30"/>
+            <p:cNvPr id="29" name="tx29"/>
             <p:cNvSpPr/>
             <p:nvPr/>
           </p:nvSpPr>
@@ -4779,7 +4754,7 @@
         </p:sp>
         <p:sp>
           <p:nvSpPr>
-            <p:cNvPr id="31" name="tx31"/>
+            <p:cNvPr id="30" name="tx30"/>
             <p:cNvSpPr/>
             <p:nvPr/>
           </p:nvSpPr>
@@ -4825,14 +4800,14 @@
         </p:sp>
         <p:sp>
           <p:nvSpPr>
-            <p:cNvPr id="32" name="tx32"/>
+            <p:cNvPr id="31" name="tx31"/>
             <p:cNvSpPr/>
             <p:nvPr/>
           </p:nvSpPr>
           <p:spPr>
             <a:xfrm>
-              <a:off x="2423864" y="5785772"/>
-              <a:ext cx="155356" cy="80101"/>
+              <a:off x="2421884" y="5785772"/>
+              <a:ext cx="161574" cy="80101"/>
             </a:xfrm>
             <a:prstGeom prst="rect">
               <a:avLst/>
@@ -4864,21 +4839,21 @@
                   <a:latin typeface="Helvetica"/>
                   <a:cs typeface="Helvetica"/>
                 </a:rPr>
-                <a:t>0.8</a:t>
+                <a:t>-25</a:t>
               </a:r>
             </a:p>
           </p:txBody>
         </p:sp>
         <p:sp>
           <p:nvSpPr>
-            <p:cNvPr id="33" name="tx33"/>
+            <p:cNvPr id="32" name="tx32"/>
             <p:cNvSpPr/>
             <p:nvPr/>
           </p:nvSpPr>
           <p:spPr>
             <a:xfrm>
-              <a:off x="4196521" y="5785772"/>
-              <a:ext cx="155356" cy="80101"/>
+              <a:off x="4542539" y="5785772"/>
+              <a:ext cx="62179" cy="80101"/>
             </a:xfrm>
             <a:prstGeom prst="rect">
               <a:avLst/>
@@ -4910,21 +4885,21 @@
                   <a:latin typeface="Helvetica"/>
                   <a:cs typeface="Helvetica"/>
                 </a:rPr>
-                <a:t>1.0</a:t>
+                <a:t>0</a:t>
               </a:r>
             </a:p>
           </p:txBody>
         </p:sp>
         <p:sp>
           <p:nvSpPr>
-            <p:cNvPr id="34" name="tx34"/>
+            <p:cNvPr id="33" name="tx33"/>
             <p:cNvSpPr/>
             <p:nvPr/>
           </p:nvSpPr>
           <p:spPr>
             <a:xfrm>
-              <a:off x="5969179" y="5785772"/>
-              <a:ext cx="155356" cy="80101"/>
+              <a:off x="6582407" y="5785772"/>
+              <a:ext cx="124358" cy="80101"/>
             </a:xfrm>
             <a:prstGeom prst="rect">
               <a:avLst/>
@@ -4956,67 +4931,21 @@
                   <a:latin typeface="Helvetica"/>
                   <a:cs typeface="Helvetica"/>
                 </a:rPr>
-                <a:t>1.2</a:t>
+                <a:t>25</a:t>
               </a:r>
             </a:p>
           </p:txBody>
         </p:sp>
         <p:sp>
           <p:nvSpPr>
-            <p:cNvPr id="35" name="tx35"/>
+            <p:cNvPr id="34" name="tx34"/>
             <p:cNvSpPr/>
             <p:nvPr/>
           </p:nvSpPr>
           <p:spPr>
             <a:xfrm>
-              <a:off x="7741836" y="5785772"/>
-              <a:ext cx="155356" cy="80101"/>
-            </a:xfrm>
-            <a:prstGeom prst="rect">
-              <a:avLst/>
-            </a:prstGeom>
-            <a:noFill/>
-          </p:spPr>
-          <p:txBody>
-            <a:bodyPr lIns="0" rIns="0" tIns="0" bIns="0" anchorCtr="1" anchor="ctr" wrap="none"/>
-            <a:lstStyle/>
-            <a:p>
-              <a:pPr algn="l" marL="0" marR="0" indent="0">
-                <a:lnSpc>
-                  <a:spcPts val="880"/>
-                </a:lnSpc>
-                <a:spcBef>
-                  <a:spcPts val="0"/>
-                </a:spcBef>
-                <a:spcAft>
-                  <a:spcPts val="0"/>
-                </a:spcAft>
-              </a:pPr>
-              <a:r>
-                <a:rPr sz="880">
-                  <a:solidFill>
-                    <a:srgbClr val="4D4D4D">
-                      <a:alpha val="100000"/>
-                    </a:srgbClr>
-                  </a:solidFill>
-                  <a:latin typeface="Helvetica"/>
-                  <a:cs typeface="Helvetica"/>
-                </a:rPr>
-                <a:t>1.4</a:t>
-              </a:r>
-            </a:p>
-          </p:txBody>
-        </p:sp>
-        <p:sp>
-          <p:nvSpPr>
-            <p:cNvPr id="36" name="tx36"/>
-            <p:cNvSpPr/>
-            <p:nvPr/>
-          </p:nvSpPr>
-          <p:spPr>
-            <a:xfrm>
-              <a:off x="3879271" y="5925448"/>
-              <a:ext cx="1676186" cy="100218"/>
+              <a:off x="2928340" y="5925448"/>
+              <a:ext cx="3578047" cy="100218"/>
             </a:xfrm>
             <a:prstGeom prst="rect">
               <a:avLst/>
@@ -5048,14 +4977,14 @@
                   <a:latin typeface="Helvetica"/>
                   <a:cs typeface="Helvetica"/>
                 </a:rPr>
-                <a:t>CKD-EPI Cr-Cys / CG ratio</a:t>
+                <a:t>eGFR difference (%): 100 × (CKD-EPI Cr-Cys − CG) / CG</a:t>
               </a:r>
             </a:p>
           </p:txBody>
         </p:sp>
         <p:sp>
           <p:nvSpPr>
-            <p:cNvPr id="37" name="tx37"/>
+            <p:cNvPr id="35" name="tx35"/>
             <p:cNvSpPr/>
             <p:nvPr/>
           </p:nvSpPr>
@@ -5101,14 +5030,14 @@
         </p:sp>
         <p:sp>
           <p:nvSpPr>
-            <p:cNvPr id="38" name="tx38"/>
+            <p:cNvPr id="36" name="tx36"/>
             <p:cNvSpPr/>
             <p:nvPr/>
           </p:nvSpPr>
           <p:spPr>
             <a:xfrm>
               <a:off x="817517" y="1896563"/>
-              <a:ext cx="6833128" cy="82021"/>
+              <a:ext cx="6985375" cy="82021"/>
             </a:xfrm>
             <a:prstGeom prst="rect">
               <a:avLst/>
@@ -5140,14 +5069,14 @@
                   <a:latin typeface="Helvetica"/>
                   <a:cs typeface="Helvetica"/>
                 </a:rPr>
-                <a:t>subHR per 0.1 ratio decline: 1.40 (1.17-1.68), p_Bonf = 0.002 (n = 6)  |  per IQR decline (Δ = 0.30): 2.74 (1.59-4.72)  |  IQR: [0.85, 1.15]</a:t>
+                <a:t>subHR per 10 % decline: 1.40 (1.17-1.68), p_Bonf = 0.002 (n = 6)  |  per IQR decline (Δ = 29.9 %): 2.74 (1.59-4.72)  |  IQR: [-15.0, 14.9] %</a:t>
               </a:r>
             </a:p>
           </p:txBody>
         </p:sp>
         <p:sp>
           <p:nvSpPr>
-            <p:cNvPr id="39" name="tx39"/>
+            <p:cNvPr id="37" name="tx37"/>
             <p:cNvSpPr/>
             <p:nvPr/>
           </p:nvSpPr>

--- a/docs/pptx/carbo/jx-carbo-linsubhr-ratio-anemia3.pptx
+++ b/docs/pptx/carbo/jx-carbo-linsubhr-ratio-anemia3.pptx
@@ -2265,34 +2265,26 @@
         </p:sp>
         <p:sp>
           <p:nvSpPr>
-            <p:cNvPr id="4" name="pl4"/>
+            <p:cNvPr id="4" name="rc4"/>
             <p:cNvSpPr/>
             <p:nvPr/>
           </p:nvSpPr>
           <p:spPr>
             <a:xfrm>
-              <a:off x="817517" y="5142518"/>
-              <a:ext cx="7799693" cy="0"/>
+              <a:off x="457200" y="1600200"/>
+              <a:ext cx="8229600" cy="4525962"/>
             </a:xfrm>
-            <a:custGeom>
+            <a:prstGeom prst="rect">
               <a:avLst/>
-              <a:pathLst>
-                <a:path w="7799693" h="0">
-                  <a:moveTo>
-                    <a:pt x="0" y="0"/>
-                  </a:moveTo>
-                  <a:lnTo>
-                    <a:pt x="7799693" y="0"/>
-                  </a:lnTo>
-                  <a:lnTo>
-                    <a:pt x="7799693" y="0"/>
-                  </a:lnTo>
-                </a:path>
-              </a:pathLst>
-            </a:custGeom>
-            <a:ln w="6775" cap="flat">
+            </a:prstGeom>
+            <a:solidFill>
+              <a:srgbClr val="FFFFFF">
+                <a:alpha val="100000"/>
+              </a:srgbClr>
+            </a:solidFill>
+            <a:ln w="13550" cap="rnd">
               <a:solidFill>
-                <a:srgbClr val="EBEBEB">
+                <a:srgbClr val="FFFFFF">
                   <a:alpha val="100000"/>
                 </a:srgbClr>
               </a:solidFill>
@@ -2314,21 +2306,21 @@
           </p:nvSpPr>
           <p:spPr>
             <a:xfrm>
-              <a:off x="817517" y="4313054"/>
-              <a:ext cx="7799693" cy="0"/>
+              <a:off x="887106" y="3250627"/>
+              <a:ext cx="7660515" cy="0"/>
             </a:xfrm>
             <a:custGeom>
               <a:avLst/>
               <a:pathLst>
-                <a:path w="7799693" h="0">
+                <a:path w="7660515" h="0">
                   <a:moveTo>
                     <a:pt x="0" y="0"/>
                   </a:moveTo>
                   <a:lnTo>
-                    <a:pt x="7799693" y="0"/>
-                  </a:lnTo>
-                  <a:lnTo>
-                    <a:pt x="7799693" y="0"/>
+                    <a:pt x="7660515" y="0"/>
+                  </a:lnTo>
+                  <a:lnTo>
+                    <a:pt x="7660515" y="0"/>
                   </a:lnTo>
                 </a:path>
               </a:pathLst>
@@ -2357,21 +2349,21 @@
           </p:nvSpPr>
           <p:spPr>
             <a:xfrm>
-              <a:off x="817517" y="3483591"/>
-              <a:ext cx="7799693" cy="0"/>
+              <a:off x="887106" y="2951293"/>
+              <a:ext cx="7660515" cy="0"/>
             </a:xfrm>
             <a:custGeom>
               <a:avLst/>
               <a:pathLst>
-                <a:path w="7799693" h="0">
+                <a:path w="7660515" h="0">
                   <a:moveTo>
                     <a:pt x="0" y="0"/>
                   </a:moveTo>
                   <a:lnTo>
-                    <a:pt x="7799693" y="0"/>
-                  </a:lnTo>
-                  <a:lnTo>
-                    <a:pt x="7799693" y="0"/>
+                    <a:pt x="7660515" y="0"/>
+                  </a:lnTo>
+                  <a:lnTo>
+                    <a:pt x="7660515" y="0"/>
                   </a:lnTo>
                 </a:path>
               </a:pathLst>
@@ -2400,21 +2392,21 @@
           </p:nvSpPr>
           <p:spPr>
             <a:xfrm>
-              <a:off x="817517" y="2654127"/>
-              <a:ext cx="7799693" cy="0"/>
+              <a:off x="887106" y="2651959"/>
+              <a:ext cx="7660515" cy="0"/>
             </a:xfrm>
             <a:custGeom>
               <a:avLst/>
               <a:pathLst>
-                <a:path w="7799693" h="0">
+                <a:path w="7660515" h="0">
                   <a:moveTo>
                     <a:pt x="0" y="0"/>
                   </a:moveTo>
                   <a:lnTo>
-                    <a:pt x="7799693" y="0"/>
-                  </a:lnTo>
-                  <a:lnTo>
-                    <a:pt x="7799693" y="0"/>
+                    <a:pt x="7660515" y="0"/>
+                  </a:lnTo>
+                  <a:lnTo>
+                    <a:pt x="7660515" y="0"/>
                   </a:lnTo>
                 </a:path>
               </a:pathLst>
@@ -2443,21 +2435,21 @@
           </p:nvSpPr>
           <p:spPr>
             <a:xfrm>
-              <a:off x="1467192" y="2073503"/>
-              <a:ext cx="0" cy="3649639"/>
+              <a:off x="887106" y="2352625"/>
+              <a:ext cx="7660515" cy="0"/>
             </a:xfrm>
             <a:custGeom>
               <a:avLst/>
               <a:pathLst>
-                <a:path w="0" h="3649639">
+                <a:path w="7660515" h="0">
                   <a:moveTo>
-                    <a:pt x="0" y="3649639"/>
+                    <a:pt x="0" y="0"/>
                   </a:moveTo>
                   <a:lnTo>
-                    <a:pt x="0" y="0"/>
-                  </a:lnTo>
-                  <a:lnTo>
-                    <a:pt x="0" y="0"/>
+                    <a:pt x="7660515" y="0"/>
+                  </a:lnTo>
+                  <a:lnTo>
+                    <a:pt x="7660515" y="0"/>
                   </a:lnTo>
                 </a:path>
               </a:pathLst>
@@ -2486,15 +2478,15 @@
           </p:nvSpPr>
           <p:spPr>
             <a:xfrm>
-              <a:off x="3538150" y="2073503"/>
-              <a:ext cx="0" cy="3649639"/>
+              <a:off x="1525188" y="2143092"/>
+              <a:ext cx="0" cy="1317069"/>
             </a:xfrm>
             <a:custGeom>
               <a:avLst/>
               <a:pathLst>
-                <a:path w="0" h="3649639">
+                <a:path w="0" h="1317069">
                   <a:moveTo>
-                    <a:pt x="0" y="3649639"/>
+                    <a:pt x="0" y="1317069"/>
                   </a:moveTo>
                   <a:lnTo>
                     <a:pt x="0" y="0"/>
@@ -2529,15 +2521,15 @@
           </p:nvSpPr>
           <p:spPr>
             <a:xfrm>
-              <a:off x="5609107" y="2073503"/>
-              <a:ext cx="0" cy="3649639"/>
+              <a:off x="3559192" y="2143092"/>
+              <a:ext cx="0" cy="1317069"/>
             </a:xfrm>
             <a:custGeom>
               <a:avLst/>
               <a:pathLst>
-                <a:path w="0" h="3649639">
+                <a:path w="0" h="1317069">
                   <a:moveTo>
-                    <a:pt x="0" y="3649639"/>
+                    <a:pt x="0" y="1317069"/>
                   </a:moveTo>
                   <a:lnTo>
                     <a:pt x="0" y="0"/>
@@ -2572,15 +2564,15 @@
           </p:nvSpPr>
           <p:spPr>
             <a:xfrm>
-              <a:off x="7680065" y="2073503"/>
-              <a:ext cx="0" cy="3649639"/>
+              <a:off x="5593195" y="2143092"/>
+              <a:ext cx="0" cy="1317069"/>
             </a:xfrm>
             <a:custGeom>
               <a:avLst/>
               <a:pathLst>
-                <a:path w="0" h="3649639">
+                <a:path w="0" h="1317069">
                   <a:moveTo>
-                    <a:pt x="0" y="3649639"/>
+                    <a:pt x="0" y="1317069"/>
                   </a:moveTo>
                   <a:lnTo>
                     <a:pt x="0" y="0"/>
@@ -2615,26 +2607,26 @@
           </p:nvSpPr>
           <p:spPr>
             <a:xfrm>
-              <a:off x="817517" y="5557249"/>
-              <a:ext cx="7799693" cy="0"/>
+              <a:off x="7627198" y="2143092"/>
+              <a:ext cx="0" cy="1317069"/>
             </a:xfrm>
             <a:custGeom>
               <a:avLst/>
               <a:pathLst>
-                <a:path w="7799693" h="0">
+                <a:path w="0" h="1317069">
                   <a:moveTo>
+                    <a:pt x="0" y="1317069"/>
+                  </a:moveTo>
+                  <a:lnTo>
                     <a:pt x="0" y="0"/>
-                  </a:moveTo>
-                  <a:lnTo>
-                    <a:pt x="7799693" y="0"/>
-                  </a:lnTo>
-                  <a:lnTo>
-                    <a:pt x="7799693" y="0"/>
+                  </a:lnTo>
+                  <a:lnTo>
+                    <a:pt x="0" y="0"/>
                   </a:lnTo>
                 </a:path>
               </a:pathLst>
             </a:custGeom>
-            <a:ln w="13550" cap="flat">
+            <a:ln w="6775" cap="flat">
               <a:solidFill>
                 <a:srgbClr val="EBEBEB">
                   <a:alpha val="100000"/>
@@ -2658,21 +2650,21 @@
           </p:nvSpPr>
           <p:spPr>
             <a:xfrm>
-              <a:off x="817517" y="4727786"/>
-              <a:ext cx="7799693" cy="0"/>
+              <a:off x="887106" y="3400294"/>
+              <a:ext cx="7660515" cy="0"/>
             </a:xfrm>
             <a:custGeom>
               <a:avLst/>
               <a:pathLst>
-                <a:path w="7799693" h="0">
+                <a:path w="7660515" h="0">
                   <a:moveTo>
                     <a:pt x="0" y="0"/>
                   </a:moveTo>
                   <a:lnTo>
-                    <a:pt x="7799693" y="0"/>
-                  </a:lnTo>
-                  <a:lnTo>
-                    <a:pt x="7799693" y="0"/>
+                    <a:pt x="7660515" y="0"/>
+                  </a:lnTo>
+                  <a:lnTo>
+                    <a:pt x="7660515" y="0"/>
                   </a:lnTo>
                 </a:path>
               </a:pathLst>
@@ -2701,21 +2693,21 @@
           </p:nvSpPr>
           <p:spPr>
             <a:xfrm>
-              <a:off x="817517" y="3898322"/>
-              <a:ext cx="7799693" cy="0"/>
+              <a:off x="887106" y="3100960"/>
+              <a:ext cx="7660515" cy="0"/>
             </a:xfrm>
             <a:custGeom>
               <a:avLst/>
               <a:pathLst>
-                <a:path w="7799693" h="0">
+                <a:path w="7660515" h="0">
                   <a:moveTo>
                     <a:pt x="0" y="0"/>
                   </a:moveTo>
                   <a:lnTo>
-                    <a:pt x="7799693" y="0"/>
-                  </a:lnTo>
-                  <a:lnTo>
-                    <a:pt x="7799693" y="0"/>
+                    <a:pt x="7660515" y="0"/>
+                  </a:lnTo>
+                  <a:lnTo>
+                    <a:pt x="7660515" y="0"/>
                   </a:lnTo>
                 </a:path>
               </a:pathLst>
@@ -2744,21 +2736,21 @@
           </p:nvSpPr>
           <p:spPr>
             <a:xfrm>
-              <a:off x="817517" y="3068859"/>
-              <a:ext cx="7799693" cy="0"/>
+              <a:off x="887106" y="2801626"/>
+              <a:ext cx="7660515" cy="0"/>
             </a:xfrm>
             <a:custGeom>
               <a:avLst/>
               <a:pathLst>
-                <a:path w="7799693" h="0">
+                <a:path w="7660515" h="0">
                   <a:moveTo>
                     <a:pt x="0" y="0"/>
                   </a:moveTo>
                   <a:lnTo>
-                    <a:pt x="7799693" y="0"/>
-                  </a:lnTo>
-                  <a:lnTo>
-                    <a:pt x="7799693" y="0"/>
+                    <a:pt x="7660515" y="0"/>
+                  </a:lnTo>
+                  <a:lnTo>
+                    <a:pt x="7660515" y="0"/>
                   </a:lnTo>
                 </a:path>
               </a:pathLst>
@@ -2787,21 +2779,21 @@
           </p:nvSpPr>
           <p:spPr>
             <a:xfrm>
-              <a:off x="817517" y="2239395"/>
-              <a:ext cx="7799693" cy="0"/>
+              <a:off x="887106" y="2502292"/>
+              <a:ext cx="7660515" cy="0"/>
             </a:xfrm>
             <a:custGeom>
               <a:avLst/>
               <a:pathLst>
-                <a:path w="7799693" h="0">
+                <a:path w="7660515" h="0">
                   <a:moveTo>
                     <a:pt x="0" y="0"/>
                   </a:moveTo>
                   <a:lnTo>
-                    <a:pt x="7799693" y="0"/>
-                  </a:lnTo>
-                  <a:lnTo>
-                    <a:pt x="7799693" y="0"/>
+                    <a:pt x="7660515" y="0"/>
+                  </a:lnTo>
+                  <a:lnTo>
+                    <a:pt x="7660515" y="0"/>
                   </a:lnTo>
                 </a:path>
               </a:pathLst>
@@ -2830,21 +2822,21 @@
           </p:nvSpPr>
           <p:spPr>
             <a:xfrm>
-              <a:off x="2502671" y="2073503"/>
-              <a:ext cx="0" cy="3649639"/>
+              <a:off x="887106" y="2202958"/>
+              <a:ext cx="7660515" cy="0"/>
             </a:xfrm>
             <a:custGeom>
               <a:avLst/>
               <a:pathLst>
-                <a:path w="0" h="3649639">
+                <a:path w="7660515" h="0">
                   <a:moveTo>
-                    <a:pt x="0" y="3649639"/>
+                    <a:pt x="0" y="0"/>
                   </a:moveTo>
                   <a:lnTo>
-                    <a:pt x="0" y="0"/>
-                  </a:lnTo>
-                  <a:lnTo>
-                    <a:pt x="0" y="0"/>
+                    <a:pt x="7660515" y="0"/>
+                  </a:lnTo>
+                  <a:lnTo>
+                    <a:pt x="7660515" y="0"/>
                   </a:lnTo>
                 </a:path>
               </a:pathLst>
@@ -2873,15 +2865,15 @@
           </p:nvSpPr>
           <p:spPr>
             <a:xfrm>
-              <a:off x="4573628" y="2073503"/>
-              <a:ext cx="0" cy="3649639"/>
+              <a:off x="2542190" y="2143092"/>
+              <a:ext cx="0" cy="1317069"/>
             </a:xfrm>
             <a:custGeom>
               <a:avLst/>
               <a:pathLst>
-                <a:path w="0" h="3649639">
+                <a:path w="0" h="1317069">
                   <a:moveTo>
-                    <a:pt x="0" y="3649639"/>
+                    <a:pt x="0" y="1317069"/>
                   </a:moveTo>
                   <a:lnTo>
                     <a:pt x="0" y="0"/>
@@ -2916,15 +2908,15 @@
           </p:nvSpPr>
           <p:spPr>
             <a:xfrm>
-              <a:off x="6644586" y="2073503"/>
-              <a:ext cx="0" cy="3649639"/>
+              <a:off x="4576193" y="2143092"/>
+              <a:ext cx="0" cy="1317069"/>
             </a:xfrm>
             <a:custGeom>
               <a:avLst/>
               <a:pathLst>
-                <a:path w="0" h="3649639">
+                <a:path w="0" h="1317069">
                   <a:moveTo>
-                    <a:pt x="0" y="3649639"/>
+                    <a:pt x="0" y="1317069"/>
                   </a:moveTo>
                   <a:lnTo>
                     <a:pt x="0" y="0"/>
@@ -2953,576 +2945,619 @@
         </p:sp>
         <p:sp>
           <p:nvSpPr>
-            <p:cNvPr id="20" name="pg20"/>
+            <p:cNvPr id="20" name="pl20"/>
             <p:cNvSpPr/>
             <p:nvPr/>
           </p:nvSpPr>
           <p:spPr>
             <a:xfrm>
-              <a:off x="1172049" y="2073503"/>
-              <a:ext cx="7090630" cy="3403744"/>
+              <a:off x="6610197" y="2143092"/>
+              <a:ext cx="0" cy="1317069"/>
             </a:xfrm>
             <a:custGeom>
               <a:avLst/>
               <a:pathLst>
-                <a:path w="7090630" h="3403744">
+                <a:path w="0" h="1317069">
                   <a:moveTo>
-                    <a:pt x="1062808" y="0"/>
+                    <a:pt x="0" y="1317069"/>
                   </a:moveTo>
                   <a:lnTo>
-                    <a:pt x="1074337" y="25528"/>
-                  </a:lnTo>
-                  <a:lnTo>
-                    <a:pt x="1145960" y="177165"/>
-                  </a:lnTo>
-                  <a:lnTo>
-                    <a:pt x="1217582" y="322153"/>
-                  </a:lnTo>
-                  <a:lnTo>
-                    <a:pt x="1289205" y="460783"/>
-                  </a:lnTo>
-                  <a:lnTo>
-                    <a:pt x="1360827" y="593335"/>
-                  </a:lnTo>
-                  <a:lnTo>
-                    <a:pt x="1432450" y="720074"/>
-                  </a:lnTo>
-                  <a:lnTo>
-                    <a:pt x="1504073" y="841257"/>
-                  </a:lnTo>
-                  <a:lnTo>
-                    <a:pt x="1575695" y="957125"/>
-                  </a:lnTo>
-                  <a:lnTo>
-                    <a:pt x="1647318" y="1067913"/>
-                  </a:lnTo>
-                  <a:lnTo>
-                    <a:pt x="1718940" y="1173843"/>
-                  </a:lnTo>
-                  <a:lnTo>
-                    <a:pt x="1790563" y="1275128"/>
-                  </a:lnTo>
-                  <a:lnTo>
-                    <a:pt x="1862185" y="1371972"/>
-                  </a:lnTo>
-                  <a:lnTo>
-                    <a:pt x="1933808" y="1464570"/>
-                  </a:lnTo>
-                  <a:lnTo>
-                    <a:pt x="2005430" y="1553107"/>
-                  </a:lnTo>
-                  <a:lnTo>
-                    <a:pt x="2077053" y="1637763"/>
-                  </a:lnTo>
-                  <a:lnTo>
-                    <a:pt x="2148675" y="1718706"/>
-                  </a:lnTo>
-                  <a:lnTo>
-                    <a:pt x="2220298" y="1796100"/>
-                  </a:lnTo>
-                  <a:lnTo>
-                    <a:pt x="2291920" y="1870100"/>
-                  </a:lnTo>
-                  <a:lnTo>
-                    <a:pt x="2363543" y="1940856"/>
-                  </a:lnTo>
-                  <a:lnTo>
-                    <a:pt x="2435165" y="2008509"/>
-                  </a:lnTo>
-                  <a:lnTo>
-                    <a:pt x="2506788" y="2073195"/>
-                  </a:lnTo>
-                  <a:lnTo>
-                    <a:pt x="2578410" y="2135045"/>
-                  </a:lnTo>
-                  <a:lnTo>
-                    <a:pt x="2650033" y="2194184"/>
-                  </a:lnTo>
-                  <a:lnTo>
-                    <a:pt x="2721655" y="2250729"/>
-                  </a:lnTo>
-                  <a:lnTo>
-                    <a:pt x="2793278" y="2304794"/>
-                  </a:lnTo>
-                  <a:lnTo>
-                    <a:pt x="2864901" y="2356489"/>
-                  </a:lnTo>
-                  <a:lnTo>
-                    <a:pt x="2936523" y="2405918"/>
-                  </a:lnTo>
-                  <a:lnTo>
-                    <a:pt x="3008146" y="2453179"/>
-                  </a:lnTo>
-                  <a:lnTo>
-                    <a:pt x="3079768" y="2498367"/>
-                  </a:lnTo>
-                  <a:lnTo>
-                    <a:pt x="3151391" y="2541574"/>
-                  </a:lnTo>
-                  <a:lnTo>
-                    <a:pt x="3223013" y="2582887"/>
-                  </a:lnTo>
-                  <a:lnTo>
-                    <a:pt x="3294636" y="2622388"/>
-                  </a:lnTo>
-                  <a:lnTo>
-                    <a:pt x="3366258" y="2656033"/>
-                  </a:lnTo>
-                  <a:lnTo>
-                    <a:pt x="3437881" y="2666989"/>
-                  </a:lnTo>
-                  <a:lnTo>
-                    <a:pt x="3509503" y="2677801"/>
-                  </a:lnTo>
-                  <a:lnTo>
-                    <a:pt x="3581126" y="2688469"/>
-                  </a:lnTo>
-                  <a:lnTo>
-                    <a:pt x="3652748" y="2698996"/>
-                  </a:lnTo>
-                  <a:lnTo>
-                    <a:pt x="3724371" y="2709384"/>
-                  </a:lnTo>
-                  <a:lnTo>
-                    <a:pt x="3795993" y="2719634"/>
-                  </a:lnTo>
-                  <a:lnTo>
-                    <a:pt x="3867616" y="2729749"/>
-                  </a:lnTo>
-                  <a:lnTo>
-                    <a:pt x="3939238" y="2739730"/>
-                  </a:lnTo>
-                  <a:lnTo>
-                    <a:pt x="4010861" y="2749578"/>
-                  </a:lnTo>
-                  <a:lnTo>
-                    <a:pt x="4082483" y="2759297"/>
-                  </a:lnTo>
-                  <a:lnTo>
-                    <a:pt x="4154106" y="2768886"/>
-                  </a:lnTo>
-                  <a:lnTo>
-                    <a:pt x="4225729" y="2778349"/>
-                  </a:lnTo>
-                  <a:lnTo>
-                    <a:pt x="4297351" y="2787686"/>
-                  </a:lnTo>
-                  <a:lnTo>
-                    <a:pt x="4368974" y="2796900"/>
-                  </a:lnTo>
-                  <a:lnTo>
-                    <a:pt x="4440596" y="2805992"/>
-                  </a:lnTo>
-                  <a:lnTo>
-                    <a:pt x="4512219" y="2814963"/>
-                  </a:lnTo>
-                  <a:lnTo>
-                    <a:pt x="4583841" y="2823816"/>
-                  </a:lnTo>
-                  <a:lnTo>
-                    <a:pt x="4655464" y="2832551"/>
-                  </a:lnTo>
-                  <a:lnTo>
-                    <a:pt x="4727086" y="2841171"/>
-                  </a:lnTo>
-                  <a:lnTo>
-                    <a:pt x="4798709" y="2849677"/>
-                  </a:lnTo>
-                  <a:lnTo>
-                    <a:pt x="4870331" y="2858070"/>
-                  </a:lnTo>
-                  <a:lnTo>
-                    <a:pt x="4941954" y="2866352"/>
-                  </a:lnTo>
-                  <a:lnTo>
-                    <a:pt x="5013576" y="2874525"/>
-                  </a:lnTo>
-                  <a:lnTo>
-                    <a:pt x="5085199" y="2882589"/>
-                  </a:lnTo>
-                  <a:lnTo>
-                    <a:pt x="5156821" y="2890547"/>
-                  </a:lnTo>
-                  <a:lnTo>
-                    <a:pt x="5228444" y="2898399"/>
-                  </a:lnTo>
-                  <a:lnTo>
-                    <a:pt x="5300066" y="2906147"/>
-                  </a:lnTo>
-                  <a:lnTo>
-                    <a:pt x="5371689" y="2913793"/>
-                  </a:lnTo>
-                  <a:lnTo>
-                    <a:pt x="5443311" y="2921338"/>
-                  </a:lnTo>
-                  <a:lnTo>
-                    <a:pt x="5514934" y="2928782"/>
-                  </a:lnTo>
-                  <a:lnTo>
-                    <a:pt x="5586557" y="2936128"/>
-                  </a:lnTo>
-                  <a:lnTo>
-                    <a:pt x="5658179" y="2943377"/>
-                  </a:lnTo>
-                  <a:lnTo>
-                    <a:pt x="5729802" y="2950530"/>
-                  </a:lnTo>
-                  <a:lnTo>
-                    <a:pt x="5801424" y="2957588"/>
-                  </a:lnTo>
-                  <a:lnTo>
-                    <a:pt x="5873047" y="2964553"/>
-                  </a:lnTo>
-                  <a:lnTo>
-                    <a:pt x="5944669" y="2971426"/>
-                  </a:lnTo>
-                  <a:lnTo>
-                    <a:pt x="6016292" y="2978207"/>
-                  </a:lnTo>
-                  <a:lnTo>
-                    <a:pt x="6087914" y="2984899"/>
-                  </a:lnTo>
-                  <a:lnTo>
-                    <a:pt x="6159537" y="2991502"/>
-                  </a:lnTo>
-                  <a:lnTo>
-                    <a:pt x="6231159" y="2998018"/>
-                  </a:lnTo>
-                  <a:lnTo>
-                    <a:pt x="6302782" y="3004448"/>
-                  </a:lnTo>
-                  <a:lnTo>
-                    <a:pt x="6374404" y="3010792"/>
-                  </a:lnTo>
-                  <a:lnTo>
-                    <a:pt x="6446027" y="3017053"/>
-                  </a:lnTo>
-                  <a:lnTo>
-                    <a:pt x="6517649" y="3023230"/>
-                  </a:lnTo>
-                  <a:lnTo>
-                    <a:pt x="6589272" y="3029326"/>
-                  </a:lnTo>
-                  <a:lnTo>
-                    <a:pt x="6660894" y="3035341"/>
-                  </a:lnTo>
-                  <a:lnTo>
-                    <a:pt x="6732517" y="3041277"/>
-                  </a:lnTo>
-                  <a:lnTo>
-                    <a:pt x="6804139" y="3047134"/>
-                  </a:lnTo>
-                  <a:lnTo>
-                    <a:pt x="6875762" y="3052914"/>
-                  </a:lnTo>
-                  <a:lnTo>
-                    <a:pt x="6947385" y="3058616"/>
-                  </a:lnTo>
-                  <a:lnTo>
-                    <a:pt x="7019007" y="3064244"/>
-                  </a:lnTo>
-                  <a:lnTo>
-                    <a:pt x="7090630" y="3069797"/>
-                  </a:lnTo>
-                  <a:lnTo>
-                    <a:pt x="7090630" y="3403744"/>
-                  </a:lnTo>
-                  <a:lnTo>
-                    <a:pt x="7019007" y="3400075"/>
-                  </a:lnTo>
-                  <a:lnTo>
-                    <a:pt x="6947385" y="3396238"/>
-                  </a:lnTo>
-                  <a:lnTo>
-                    <a:pt x="6875762" y="3392225"/>
-                  </a:lnTo>
-                  <a:lnTo>
-                    <a:pt x="6804139" y="3388027"/>
-                  </a:lnTo>
-                  <a:lnTo>
-                    <a:pt x="6732517" y="3383638"/>
-                  </a:lnTo>
-                  <a:lnTo>
-                    <a:pt x="6660894" y="3379047"/>
-                  </a:lnTo>
-                  <a:lnTo>
-                    <a:pt x="6589272" y="3374246"/>
-                  </a:lnTo>
-                  <a:lnTo>
-                    <a:pt x="6517649" y="3369224"/>
-                  </a:lnTo>
-                  <a:lnTo>
-                    <a:pt x="6446027" y="3363972"/>
-                  </a:lnTo>
-                  <a:lnTo>
-                    <a:pt x="6374404" y="3358479"/>
-                  </a:lnTo>
-                  <a:lnTo>
-                    <a:pt x="6302782" y="3352735"/>
-                  </a:lnTo>
-                  <a:lnTo>
-                    <a:pt x="6231159" y="3346727"/>
-                  </a:lnTo>
-                  <a:lnTo>
-                    <a:pt x="6159537" y="3340443"/>
-                  </a:lnTo>
-                  <a:lnTo>
-                    <a:pt x="6087914" y="3333871"/>
-                  </a:lnTo>
-                  <a:lnTo>
-                    <a:pt x="6016292" y="3326998"/>
-                  </a:lnTo>
-                  <a:lnTo>
-                    <a:pt x="5944669" y="3319810"/>
-                  </a:lnTo>
-                  <a:lnTo>
-                    <a:pt x="5873047" y="3312292"/>
-                  </a:lnTo>
-                  <a:lnTo>
-                    <a:pt x="5801424" y="3304429"/>
-                  </a:lnTo>
-                  <a:lnTo>
-                    <a:pt x="5729802" y="3296206"/>
-                  </a:lnTo>
-                  <a:lnTo>
-                    <a:pt x="5658179" y="3287605"/>
-                  </a:lnTo>
-                  <a:lnTo>
-                    <a:pt x="5586557" y="3278610"/>
-                  </a:lnTo>
-                  <a:lnTo>
-                    <a:pt x="5514934" y="3269203"/>
-                  </a:lnTo>
-                  <a:lnTo>
-                    <a:pt x="5443311" y="3259364"/>
-                  </a:lnTo>
-                  <a:lnTo>
-                    <a:pt x="5371689" y="3249074"/>
-                  </a:lnTo>
-                  <a:lnTo>
-                    <a:pt x="5300066" y="3238312"/>
-                  </a:lnTo>
-                  <a:lnTo>
-                    <a:pt x="5228444" y="3227057"/>
-                  </a:lnTo>
-                  <a:lnTo>
-                    <a:pt x="5156821" y="3215285"/>
-                  </a:lnTo>
-                  <a:lnTo>
-                    <a:pt x="5085199" y="3202974"/>
-                  </a:lnTo>
-                  <a:lnTo>
-                    <a:pt x="5013576" y="3190098"/>
-                  </a:lnTo>
-                  <a:lnTo>
-                    <a:pt x="4941954" y="3176632"/>
-                  </a:lnTo>
-                  <a:lnTo>
-                    <a:pt x="4870331" y="3162548"/>
-                  </a:lnTo>
-                  <a:lnTo>
-                    <a:pt x="4798709" y="3147818"/>
-                  </a:lnTo>
-                  <a:lnTo>
-                    <a:pt x="4727086" y="3132412"/>
-                  </a:lnTo>
-                  <a:lnTo>
-                    <a:pt x="4655464" y="3116300"/>
-                  </a:lnTo>
-                  <a:lnTo>
-                    <a:pt x="4583841" y="3099450"/>
-                  </a:lnTo>
-                  <a:lnTo>
-                    <a:pt x="4512219" y="3081826"/>
-                  </a:lnTo>
-                  <a:lnTo>
-                    <a:pt x="4440596" y="3063395"/>
-                  </a:lnTo>
-                  <a:lnTo>
-                    <a:pt x="4368974" y="3044118"/>
-                  </a:lnTo>
-                  <a:lnTo>
-                    <a:pt x="4297351" y="3023957"/>
-                  </a:lnTo>
-                  <a:lnTo>
-                    <a:pt x="4225729" y="3002871"/>
-                  </a:lnTo>
-                  <a:lnTo>
-                    <a:pt x="4154106" y="2980819"/>
-                  </a:lnTo>
-                  <a:lnTo>
-                    <a:pt x="4082483" y="2957755"/>
-                  </a:lnTo>
-                  <a:lnTo>
-                    <a:pt x="4010861" y="2933633"/>
-                  </a:lnTo>
-                  <a:lnTo>
-                    <a:pt x="3939238" y="2908405"/>
-                  </a:lnTo>
-                  <a:lnTo>
-                    <a:pt x="3867616" y="2882021"/>
-                  </a:lnTo>
-                  <a:lnTo>
-                    <a:pt x="3795993" y="2854426"/>
-                  </a:lnTo>
-                  <a:lnTo>
-                    <a:pt x="3724371" y="2825566"/>
-                  </a:lnTo>
-                  <a:lnTo>
-                    <a:pt x="3652748" y="2795383"/>
-                  </a:lnTo>
-                  <a:lnTo>
-                    <a:pt x="3581126" y="2763815"/>
-                  </a:lnTo>
-                  <a:lnTo>
-                    <a:pt x="3509503" y="2730800"/>
-                  </a:lnTo>
-                  <a:lnTo>
-                    <a:pt x="3437881" y="2696270"/>
-                  </a:lnTo>
-                  <a:lnTo>
-                    <a:pt x="3366258" y="2660157"/>
-                  </a:lnTo>
-                  <a:lnTo>
-                    <a:pt x="3294636" y="2644930"/>
-                  </a:lnTo>
-                  <a:lnTo>
-                    <a:pt x="3223013" y="2633677"/>
-                  </a:lnTo>
-                  <a:lnTo>
-                    <a:pt x="3151391" y="2622274"/>
-                  </a:lnTo>
-                  <a:lnTo>
-                    <a:pt x="3079768" y="2610717"/>
-                  </a:lnTo>
-                  <a:lnTo>
-                    <a:pt x="3008146" y="2599006"/>
-                  </a:lnTo>
-                  <a:lnTo>
-                    <a:pt x="2936523" y="2587138"/>
-                  </a:lnTo>
-                  <a:lnTo>
-                    <a:pt x="2864901" y="2575110"/>
-                  </a:lnTo>
-                  <a:lnTo>
-                    <a:pt x="2793278" y="2562921"/>
-                  </a:lnTo>
-                  <a:lnTo>
-                    <a:pt x="2721655" y="2550568"/>
-                  </a:lnTo>
-                  <a:lnTo>
-                    <a:pt x="2650033" y="2538050"/>
-                  </a:lnTo>
-                  <a:lnTo>
-                    <a:pt x="2578410" y="2525364"/>
-                  </a:lnTo>
-                  <a:lnTo>
-                    <a:pt x="2506788" y="2512508"/>
-                  </a:lnTo>
-                  <a:lnTo>
-                    <a:pt x="2435165" y="2499479"/>
-                  </a:lnTo>
-                  <a:lnTo>
-                    <a:pt x="2363543" y="2486275"/>
-                  </a:lnTo>
-                  <a:lnTo>
-                    <a:pt x="2291920" y="2472895"/>
-                  </a:lnTo>
-                  <a:lnTo>
-                    <a:pt x="2220298" y="2459334"/>
-                  </a:lnTo>
-                  <a:lnTo>
-                    <a:pt x="2148675" y="2445592"/>
-                  </a:lnTo>
-                  <a:lnTo>
-                    <a:pt x="2077053" y="2431666"/>
-                  </a:lnTo>
-                  <a:lnTo>
-                    <a:pt x="2005430" y="2417553"/>
-                  </a:lnTo>
-                  <a:lnTo>
-                    <a:pt x="1933808" y="2403250"/>
-                  </a:lnTo>
-                  <a:lnTo>
-                    <a:pt x="1862185" y="2388756"/>
-                  </a:lnTo>
-                  <a:lnTo>
-                    <a:pt x="1790563" y="2374067"/>
-                  </a:lnTo>
-                  <a:lnTo>
-                    <a:pt x="1718940" y="2359181"/>
-                  </a:lnTo>
-                  <a:lnTo>
-                    <a:pt x="1647318" y="2344095"/>
-                  </a:lnTo>
-                  <a:lnTo>
-                    <a:pt x="1575695" y="2328807"/>
-                  </a:lnTo>
-                  <a:lnTo>
-                    <a:pt x="1504073" y="2313314"/>
-                  </a:lnTo>
-                  <a:lnTo>
-                    <a:pt x="1432450" y="2297613"/>
-                  </a:lnTo>
-                  <a:lnTo>
-                    <a:pt x="1360827" y="2281702"/>
-                  </a:lnTo>
-                  <a:lnTo>
-                    <a:pt x="1289205" y="2265577"/>
-                  </a:lnTo>
-                  <a:lnTo>
-                    <a:pt x="1217582" y="2249235"/>
-                  </a:lnTo>
-                  <a:lnTo>
-                    <a:pt x="1145960" y="2232675"/>
-                  </a:lnTo>
-                  <a:lnTo>
-                    <a:pt x="1074337" y="2215892"/>
-                  </a:lnTo>
-                  <a:lnTo>
-                    <a:pt x="1002715" y="2198884"/>
-                  </a:lnTo>
-                  <a:lnTo>
-                    <a:pt x="931092" y="2181648"/>
-                  </a:lnTo>
-                  <a:lnTo>
-                    <a:pt x="859470" y="2164181"/>
-                  </a:lnTo>
-                  <a:lnTo>
-                    <a:pt x="787847" y="2146480"/>
-                  </a:lnTo>
-                  <a:lnTo>
-                    <a:pt x="716225" y="2128541"/>
-                  </a:lnTo>
-                  <a:lnTo>
-                    <a:pt x="644602" y="2110361"/>
-                  </a:lnTo>
-                  <a:lnTo>
-                    <a:pt x="572980" y="2091938"/>
-                  </a:lnTo>
-                  <a:lnTo>
-                    <a:pt x="501357" y="2073267"/>
-                  </a:lnTo>
-                  <a:lnTo>
-                    <a:pt x="429735" y="2054346"/>
-                  </a:lnTo>
-                  <a:lnTo>
-                    <a:pt x="358112" y="2035171"/>
-                  </a:lnTo>
-                  <a:lnTo>
-                    <a:pt x="286490" y="2015739"/>
-                  </a:lnTo>
-                  <a:lnTo>
-                    <a:pt x="214867" y="1996047"/>
-                  </a:lnTo>
-                  <a:lnTo>
-                    <a:pt x="143245" y="1976090"/>
-                  </a:lnTo>
-                  <a:lnTo>
-                    <a:pt x="71622" y="1955865"/>
-                  </a:lnTo>
-                  <a:lnTo>
-                    <a:pt x="0" y="1935369"/>
+                    <a:pt x="0" y="0"/>
+                  </a:lnTo>
+                  <a:lnTo>
+                    <a:pt x="0" y="0"/>
+                  </a:lnTo>
+                </a:path>
+              </a:pathLst>
+            </a:custGeom>
+            <a:ln w="13550" cap="flat">
+              <a:solidFill>
+                <a:srgbClr val="EBEBEB">
+                  <a:alpha val="100000"/>
+                </a:srgbClr>
+              </a:solidFill>
+              <a:prstDash val="solid"/>
+              <a:round/>
+            </a:ln>
+          </p:spPr>
+          <p:txBody>
+            <a:bodyPr/>
+            <a:lstStyle/>
+            <a:p/>
+          </p:txBody>
+        </p:sp>
+        <p:sp>
+          <p:nvSpPr>
+            <p:cNvPr id="21" name="pg21"/>
+            <p:cNvSpPr/>
+            <p:nvPr/>
+          </p:nvSpPr>
+          <p:spPr>
+            <a:xfrm>
+              <a:off x="1235312" y="2143092"/>
+              <a:ext cx="6964104" cy="1228331"/>
+            </a:xfrm>
+            <a:custGeom>
+              <a:avLst/>
+              <a:pathLst>
+                <a:path w="6964104" h="1228331">
+                  <a:moveTo>
+                    <a:pt x="1043843" y="0"/>
+                  </a:moveTo>
+                  <a:lnTo>
+                    <a:pt x="1055167" y="9212"/>
+                  </a:lnTo>
+                  <a:lnTo>
+                    <a:pt x="1125511" y="63934"/>
+                  </a:lnTo>
+                  <a:lnTo>
+                    <a:pt x="1195856" y="116257"/>
+                  </a:lnTo>
+                  <a:lnTo>
+                    <a:pt x="1266200" y="166285"/>
+                  </a:lnTo>
+                  <a:lnTo>
+                    <a:pt x="1336545" y="214120"/>
+                  </a:lnTo>
+                  <a:lnTo>
+                    <a:pt x="1406889" y="259858"/>
+                  </a:lnTo>
+                  <a:lnTo>
+                    <a:pt x="1477234" y="303589"/>
+                  </a:lnTo>
+                  <a:lnTo>
+                    <a:pt x="1547578" y="345404"/>
+                  </a:lnTo>
+                  <a:lnTo>
+                    <a:pt x="1617923" y="385384"/>
+                  </a:lnTo>
+                  <a:lnTo>
+                    <a:pt x="1688267" y="423612"/>
+                  </a:lnTo>
+                  <a:lnTo>
+                    <a:pt x="1758612" y="460163"/>
+                  </a:lnTo>
+                  <a:lnTo>
+                    <a:pt x="1828956" y="495112"/>
+                  </a:lnTo>
+                  <a:lnTo>
+                    <a:pt x="1899301" y="528529"/>
+                  </a:lnTo>
+                  <a:lnTo>
+                    <a:pt x="1969645" y="560480"/>
+                  </a:lnTo>
+                  <a:lnTo>
+                    <a:pt x="2039990" y="591030"/>
+                  </a:lnTo>
+                  <a:lnTo>
+                    <a:pt x="2110334" y="620240"/>
+                  </a:lnTo>
+                  <a:lnTo>
+                    <a:pt x="2180679" y="648170"/>
+                  </a:lnTo>
+                  <a:lnTo>
+                    <a:pt x="2251023" y="674875"/>
+                  </a:lnTo>
+                  <a:lnTo>
+                    <a:pt x="2321368" y="700409"/>
+                  </a:lnTo>
+                  <a:lnTo>
+                    <a:pt x="2391712" y="724823"/>
+                  </a:lnTo>
+                  <a:lnTo>
+                    <a:pt x="2462057" y="748167"/>
+                  </a:lnTo>
+                  <a:lnTo>
+                    <a:pt x="2532401" y="770487"/>
+                  </a:lnTo>
+                  <a:lnTo>
+                    <a:pt x="2602746" y="791829"/>
+                  </a:lnTo>
+                  <a:lnTo>
+                    <a:pt x="2673090" y="812235"/>
+                  </a:lnTo>
+                  <a:lnTo>
+                    <a:pt x="2743435" y="831746"/>
+                  </a:lnTo>
+                  <a:lnTo>
+                    <a:pt x="2813779" y="850401"/>
+                  </a:lnTo>
+                  <a:lnTo>
+                    <a:pt x="2884124" y="868239"/>
+                  </a:lnTo>
+                  <a:lnTo>
+                    <a:pt x="2954468" y="885294"/>
+                  </a:lnTo>
+                  <a:lnTo>
+                    <a:pt x="3024813" y="901602"/>
+                  </a:lnTo>
+                  <a:lnTo>
+                    <a:pt x="3095157" y="917194"/>
+                  </a:lnTo>
+                  <a:lnTo>
+                    <a:pt x="3165502" y="932103"/>
+                  </a:lnTo>
+                  <a:lnTo>
+                    <a:pt x="3235846" y="946358"/>
+                  </a:lnTo>
+                  <a:lnTo>
+                    <a:pt x="3306191" y="958499"/>
+                  </a:lnTo>
+                  <a:lnTo>
+                    <a:pt x="3376535" y="962453"/>
+                  </a:lnTo>
+                  <a:lnTo>
+                    <a:pt x="3446880" y="966355"/>
+                  </a:lnTo>
+                  <a:lnTo>
+                    <a:pt x="3517224" y="970205"/>
+                  </a:lnTo>
+                  <a:lnTo>
+                    <a:pt x="3587569" y="974004"/>
+                  </a:lnTo>
+                  <a:lnTo>
+                    <a:pt x="3657913" y="977753"/>
+                  </a:lnTo>
+                  <a:lnTo>
+                    <a:pt x="3728257" y="981452"/>
+                  </a:lnTo>
+                  <a:lnTo>
+                    <a:pt x="3798602" y="985102"/>
+                  </a:lnTo>
+                  <a:lnTo>
+                    <a:pt x="3868946" y="988704"/>
+                  </a:lnTo>
+                  <a:lnTo>
+                    <a:pt x="3939291" y="992258"/>
+                  </a:lnTo>
+                  <a:lnTo>
+                    <a:pt x="4009635" y="995765"/>
+                  </a:lnTo>
+                  <a:lnTo>
+                    <a:pt x="4079980" y="999226"/>
+                  </a:lnTo>
+                  <a:lnTo>
+                    <a:pt x="4150324" y="1002640"/>
+                  </a:lnTo>
+                  <a:lnTo>
+                    <a:pt x="4220669" y="1006010"/>
+                  </a:lnTo>
+                  <a:lnTo>
+                    <a:pt x="4291013" y="1009335"/>
+                  </a:lnTo>
+                  <a:lnTo>
+                    <a:pt x="4361358" y="1012616"/>
+                  </a:lnTo>
+                  <a:lnTo>
+                    <a:pt x="4431702" y="1015854"/>
+                  </a:lnTo>
+                  <a:lnTo>
+                    <a:pt x="4502047" y="1019048"/>
+                  </a:lnTo>
+                  <a:lnTo>
+                    <a:pt x="4572391" y="1022201"/>
+                  </a:lnTo>
+                  <a:lnTo>
+                    <a:pt x="4642736" y="1025312"/>
+                  </a:lnTo>
+                  <a:lnTo>
+                    <a:pt x="4713080" y="1028381"/>
+                  </a:lnTo>
+                  <a:lnTo>
+                    <a:pt x="4783425" y="1031410"/>
+                  </a:lnTo>
+                  <a:lnTo>
+                    <a:pt x="4853769" y="1034399"/>
+                  </a:lnTo>
+                  <a:lnTo>
+                    <a:pt x="4924114" y="1037348"/>
+                  </a:lnTo>
+                  <a:lnTo>
+                    <a:pt x="4994458" y="1040258"/>
+                  </a:lnTo>
+                  <a:lnTo>
+                    <a:pt x="5064803" y="1043130"/>
+                  </a:lnTo>
+                  <a:lnTo>
+                    <a:pt x="5135147" y="1045964"/>
+                  </a:lnTo>
+                  <a:lnTo>
+                    <a:pt x="5205492" y="1048760"/>
+                  </a:lnTo>
+                  <a:lnTo>
+                    <a:pt x="5275836" y="1051519"/>
+                  </a:lnTo>
+                  <a:lnTo>
+                    <a:pt x="5346181" y="1054242"/>
+                  </a:lnTo>
+                  <a:lnTo>
+                    <a:pt x="5416525" y="1056928"/>
+                  </a:lnTo>
+                  <a:lnTo>
+                    <a:pt x="5486870" y="1059579"/>
+                  </a:lnTo>
+                  <a:lnTo>
+                    <a:pt x="5557214" y="1062195"/>
+                  </a:lnTo>
+                  <a:lnTo>
+                    <a:pt x="5627559" y="1064777"/>
+                  </a:lnTo>
+                  <a:lnTo>
+                    <a:pt x="5697903" y="1067324"/>
+                  </a:lnTo>
+                  <a:lnTo>
+                    <a:pt x="5768248" y="1069837"/>
+                  </a:lnTo>
+                  <a:lnTo>
+                    <a:pt x="5838592" y="1072317"/>
+                  </a:lnTo>
+                  <a:lnTo>
+                    <a:pt x="5908937" y="1074765"/>
+                  </a:lnTo>
+                  <a:lnTo>
+                    <a:pt x="5979281" y="1077180"/>
+                  </a:lnTo>
+                  <a:lnTo>
+                    <a:pt x="6049626" y="1079562"/>
+                  </a:lnTo>
+                  <a:lnTo>
+                    <a:pt x="6119970" y="1081914"/>
+                  </a:lnTo>
+                  <a:lnTo>
+                    <a:pt x="6190315" y="1084234"/>
+                  </a:lnTo>
+                  <a:lnTo>
+                    <a:pt x="6260659" y="1086524"/>
+                  </a:lnTo>
+                  <a:lnTo>
+                    <a:pt x="6331004" y="1088783"/>
+                  </a:lnTo>
+                  <a:lnTo>
+                    <a:pt x="6401348" y="1091012"/>
+                  </a:lnTo>
+                  <a:lnTo>
+                    <a:pt x="6471693" y="1093212"/>
+                  </a:lnTo>
+                  <a:lnTo>
+                    <a:pt x="6542037" y="1095383"/>
+                  </a:lnTo>
+                  <a:lnTo>
+                    <a:pt x="6612382" y="1097525"/>
+                  </a:lnTo>
+                  <a:lnTo>
+                    <a:pt x="6682726" y="1099639"/>
+                  </a:lnTo>
+                  <a:lnTo>
+                    <a:pt x="6753071" y="1101724"/>
+                  </a:lnTo>
+                  <a:lnTo>
+                    <a:pt x="6823415" y="1103782"/>
+                  </a:lnTo>
+                  <a:lnTo>
+                    <a:pt x="6893760" y="1105813"/>
+                  </a:lnTo>
+                  <a:lnTo>
+                    <a:pt x="6964104" y="1107817"/>
+                  </a:lnTo>
+                  <a:lnTo>
+                    <a:pt x="6964104" y="1228331"/>
+                  </a:lnTo>
+                  <a:lnTo>
+                    <a:pt x="6893760" y="1227007"/>
+                  </a:lnTo>
+                  <a:lnTo>
+                    <a:pt x="6823415" y="1225622"/>
+                  </a:lnTo>
+                  <a:lnTo>
+                    <a:pt x="6753071" y="1224174"/>
+                  </a:lnTo>
+                  <a:lnTo>
+                    <a:pt x="6682726" y="1222659"/>
+                  </a:lnTo>
+                  <a:lnTo>
+                    <a:pt x="6612382" y="1221075"/>
+                  </a:lnTo>
+                  <a:lnTo>
+                    <a:pt x="6542037" y="1219418"/>
+                  </a:lnTo>
+                  <a:lnTo>
+                    <a:pt x="6471693" y="1217686"/>
+                  </a:lnTo>
+                  <a:lnTo>
+                    <a:pt x="6401348" y="1215873"/>
+                  </a:lnTo>
+                  <a:lnTo>
+                    <a:pt x="6331004" y="1213978"/>
+                  </a:lnTo>
+                  <a:lnTo>
+                    <a:pt x="6260659" y="1211996"/>
+                  </a:lnTo>
+                  <a:lnTo>
+                    <a:pt x="6190315" y="1209923"/>
+                  </a:lnTo>
+                  <a:lnTo>
+                    <a:pt x="6119970" y="1207755"/>
+                  </a:lnTo>
+                  <a:lnTo>
+                    <a:pt x="6049626" y="1205487"/>
+                  </a:lnTo>
+                  <a:lnTo>
+                    <a:pt x="5979281" y="1203115"/>
+                  </a:lnTo>
+                  <a:lnTo>
+                    <a:pt x="5908937" y="1200635"/>
+                  </a:lnTo>
+                  <a:lnTo>
+                    <a:pt x="5838592" y="1198041"/>
+                  </a:lnTo>
+                  <a:lnTo>
+                    <a:pt x="5768248" y="1195328"/>
+                  </a:lnTo>
+                  <a:lnTo>
+                    <a:pt x="5697903" y="1192490"/>
+                  </a:lnTo>
+                  <a:lnTo>
+                    <a:pt x="5627559" y="1189523"/>
+                  </a:lnTo>
+                  <a:lnTo>
+                    <a:pt x="5557214" y="1186419"/>
+                  </a:lnTo>
+                  <a:lnTo>
+                    <a:pt x="5486870" y="1183173"/>
+                  </a:lnTo>
+                  <a:lnTo>
+                    <a:pt x="5416525" y="1179778"/>
+                  </a:lnTo>
+                  <a:lnTo>
+                    <a:pt x="5346181" y="1176228"/>
+                  </a:lnTo>
+                  <a:lnTo>
+                    <a:pt x="5275836" y="1172514"/>
+                  </a:lnTo>
+                  <a:lnTo>
+                    <a:pt x="5205492" y="1168630"/>
+                  </a:lnTo>
+                  <a:lnTo>
+                    <a:pt x="5135147" y="1164569"/>
+                  </a:lnTo>
+                  <a:lnTo>
+                    <a:pt x="5064803" y="1160321"/>
+                  </a:lnTo>
+                  <a:lnTo>
+                    <a:pt x="4994458" y="1155878"/>
+                  </a:lnTo>
+                  <a:lnTo>
+                    <a:pt x="4924114" y="1151231"/>
+                  </a:lnTo>
+                  <a:lnTo>
+                    <a:pt x="4853769" y="1146371"/>
+                  </a:lnTo>
+                  <a:lnTo>
+                    <a:pt x="4783425" y="1141289"/>
+                  </a:lnTo>
+                  <a:lnTo>
+                    <a:pt x="4713080" y="1135973"/>
+                  </a:lnTo>
+                  <a:lnTo>
+                    <a:pt x="4642736" y="1130414"/>
+                  </a:lnTo>
+                  <a:lnTo>
+                    <a:pt x="4572391" y="1124599"/>
+                  </a:lnTo>
+                  <a:lnTo>
+                    <a:pt x="4502047" y="1118518"/>
+                  </a:lnTo>
+                  <a:lnTo>
+                    <a:pt x="4431702" y="1112158"/>
+                  </a:lnTo>
+                  <a:lnTo>
+                    <a:pt x="4361358" y="1105507"/>
+                  </a:lnTo>
+                  <a:lnTo>
+                    <a:pt x="4291013" y="1098550"/>
+                  </a:lnTo>
+                  <a:lnTo>
+                    <a:pt x="4220669" y="1091274"/>
+                  </a:lnTo>
+                  <a:lnTo>
+                    <a:pt x="4150324" y="1083665"/>
+                  </a:lnTo>
+                  <a:lnTo>
+                    <a:pt x="4079980" y="1075707"/>
+                  </a:lnTo>
+                  <a:lnTo>
+                    <a:pt x="4009635" y="1067384"/>
+                  </a:lnTo>
+                  <a:lnTo>
+                    <a:pt x="3939291" y="1058679"/>
+                  </a:lnTo>
+                  <a:lnTo>
+                    <a:pt x="3868946" y="1049575"/>
+                  </a:lnTo>
+                  <a:lnTo>
+                    <a:pt x="3798602" y="1040053"/>
+                  </a:lnTo>
+                  <a:lnTo>
+                    <a:pt x="3728257" y="1030095"/>
+                  </a:lnTo>
+                  <a:lnTo>
+                    <a:pt x="3657913" y="1019680"/>
+                  </a:lnTo>
+                  <a:lnTo>
+                    <a:pt x="3587569" y="1008788"/>
+                  </a:lnTo>
+                  <a:lnTo>
+                    <a:pt x="3517224" y="997395"/>
+                  </a:lnTo>
+                  <a:lnTo>
+                    <a:pt x="3446880" y="985481"/>
+                  </a:lnTo>
+                  <a:lnTo>
+                    <a:pt x="3376535" y="973020"/>
+                  </a:lnTo>
+                  <a:lnTo>
+                    <a:pt x="3306191" y="959988"/>
+                  </a:lnTo>
+                  <a:lnTo>
+                    <a:pt x="3235846" y="954493"/>
+                  </a:lnTo>
+                  <a:lnTo>
+                    <a:pt x="3165502" y="950432"/>
+                  </a:lnTo>
+                  <a:lnTo>
+                    <a:pt x="3095157" y="946317"/>
+                  </a:lnTo>
+                  <a:lnTo>
+                    <a:pt x="3024813" y="942146"/>
+                  </a:lnTo>
+                  <a:lnTo>
+                    <a:pt x="2954468" y="937920"/>
+                  </a:lnTo>
+                  <a:lnTo>
+                    <a:pt x="2884124" y="933637"/>
+                  </a:lnTo>
+                  <a:lnTo>
+                    <a:pt x="2813779" y="929296"/>
+                  </a:lnTo>
+                  <a:lnTo>
+                    <a:pt x="2743435" y="924898"/>
+                  </a:lnTo>
+                  <a:lnTo>
+                    <a:pt x="2673090" y="920440"/>
+                  </a:lnTo>
+                  <a:lnTo>
+                    <a:pt x="2602746" y="915922"/>
+                  </a:lnTo>
+                  <a:lnTo>
+                    <a:pt x="2532401" y="911344"/>
+                  </a:lnTo>
+                  <a:lnTo>
+                    <a:pt x="2462057" y="906705"/>
+                  </a:lnTo>
+                  <a:lnTo>
+                    <a:pt x="2391712" y="902003"/>
+                  </a:lnTo>
+                  <a:lnTo>
+                    <a:pt x="2321368" y="897238"/>
+                  </a:lnTo>
+                  <a:lnTo>
+                    <a:pt x="2251023" y="892409"/>
+                  </a:lnTo>
+                  <a:lnTo>
+                    <a:pt x="2180679" y="887516"/>
+                  </a:lnTo>
+                  <a:lnTo>
+                    <a:pt x="2110334" y="882556"/>
+                  </a:lnTo>
+                  <a:lnTo>
+                    <a:pt x="2039990" y="877531"/>
+                  </a:lnTo>
+                  <a:lnTo>
+                    <a:pt x="1969645" y="872438"/>
+                  </a:lnTo>
+                  <a:lnTo>
+                    <a:pt x="1899301" y="867276"/>
+                  </a:lnTo>
+                  <a:lnTo>
+                    <a:pt x="1828956" y="862045"/>
+                  </a:lnTo>
+                  <a:lnTo>
+                    <a:pt x="1758612" y="856744"/>
+                  </a:lnTo>
+                  <a:lnTo>
+                    <a:pt x="1688267" y="851372"/>
+                  </a:lnTo>
+                  <a:lnTo>
+                    <a:pt x="1617923" y="845928"/>
+                  </a:lnTo>
+                  <a:lnTo>
+                    <a:pt x="1547578" y="840411"/>
+                  </a:lnTo>
+                  <a:lnTo>
+                    <a:pt x="1477234" y="834820"/>
+                  </a:lnTo>
+                  <a:lnTo>
+                    <a:pt x="1406889" y="829154"/>
+                  </a:lnTo>
+                  <a:lnTo>
+                    <a:pt x="1336545" y="823412"/>
+                  </a:lnTo>
+                  <a:lnTo>
+                    <a:pt x="1266200" y="817593"/>
+                  </a:lnTo>
+                  <a:lnTo>
+                    <a:pt x="1195856" y="811696"/>
+                  </a:lnTo>
+                  <a:lnTo>
+                    <a:pt x="1125511" y="805719"/>
+                  </a:lnTo>
+                  <a:lnTo>
+                    <a:pt x="1055167" y="799663"/>
+                  </a:lnTo>
+                  <a:lnTo>
+                    <a:pt x="984822" y="793525"/>
+                  </a:lnTo>
+                  <a:lnTo>
+                    <a:pt x="914478" y="787305"/>
+                  </a:lnTo>
+                  <a:lnTo>
+                    <a:pt x="844133" y="781002"/>
+                  </a:lnTo>
+                  <a:lnTo>
+                    <a:pt x="773789" y="774614"/>
+                  </a:lnTo>
+                  <a:lnTo>
+                    <a:pt x="703444" y="768140"/>
+                  </a:lnTo>
+                  <a:lnTo>
+                    <a:pt x="633100" y="761579"/>
+                  </a:lnTo>
+                  <a:lnTo>
+                    <a:pt x="562755" y="754931"/>
+                  </a:lnTo>
+                  <a:lnTo>
+                    <a:pt x="492411" y="748193"/>
+                  </a:lnTo>
+                  <a:lnTo>
+                    <a:pt x="422066" y="741365"/>
+                  </a:lnTo>
+                  <a:lnTo>
+                    <a:pt x="351722" y="734445"/>
+                  </a:lnTo>
+                  <a:lnTo>
+                    <a:pt x="281377" y="727433"/>
+                  </a:lnTo>
+                  <a:lnTo>
+                    <a:pt x="211033" y="720326"/>
+                  </a:lnTo>
+                  <a:lnTo>
+                    <a:pt x="140688" y="713124"/>
+                  </a:lnTo>
+                  <a:lnTo>
+                    <a:pt x="70344" y="705825"/>
+                  </a:lnTo>
+                  <a:lnTo>
+                    <a:pt x="0" y="698429"/>
                   </a:lnTo>
                   <a:close/>
                 </a:path>
@@ -3542,601 +3577,276 @@
         </p:sp>
         <p:sp>
           <p:nvSpPr>
-            <p:cNvPr id="21" name="pl21"/>
-            <p:cNvSpPr/>
-            <p:nvPr/>
-          </p:nvSpPr>
-          <p:spPr>
-            <a:xfrm>
-              <a:off x="2234858" y="2073503"/>
-              <a:ext cx="6027821" cy="3069797"/>
-            </a:xfrm>
-            <a:custGeom>
-              <a:avLst/>
-              <a:pathLst>
-                <a:path w="6027821" h="3069797">
-                  <a:moveTo>
-                    <a:pt x="0" y="0"/>
-                  </a:moveTo>
-                  <a:lnTo>
-                    <a:pt x="11529" y="25528"/>
-                  </a:lnTo>
-                  <a:lnTo>
-                    <a:pt x="83151" y="177165"/>
-                  </a:lnTo>
-                  <a:lnTo>
-                    <a:pt x="154774" y="322153"/>
-                  </a:lnTo>
-                  <a:lnTo>
-                    <a:pt x="226396" y="460783"/>
-                  </a:lnTo>
-                  <a:lnTo>
-                    <a:pt x="298019" y="593335"/>
-                  </a:lnTo>
-                  <a:lnTo>
-                    <a:pt x="369641" y="720074"/>
-                  </a:lnTo>
-                  <a:lnTo>
-                    <a:pt x="441264" y="841257"/>
-                  </a:lnTo>
-                  <a:lnTo>
-                    <a:pt x="512886" y="957125"/>
-                  </a:lnTo>
-                  <a:lnTo>
-                    <a:pt x="584509" y="1067913"/>
-                  </a:lnTo>
-                  <a:lnTo>
-                    <a:pt x="656131" y="1173843"/>
-                  </a:lnTo>
-                  <a:lnTo>
-                    <a:pt x="727754" y="1275128"/>
-                  </a:lnTo>
-                  <a:lnTo>
-                    <a:pt x="799376" y="1371972"/>
-                  </a:lnTo>
-                  <a:lnTo>
-                    <a:pt x="870999" y="1464570"/>
-                  </a:lnTo>
-                  <a:lnTo>
-                    <a:pt x="942622" y="1553107"/>
-                  </a:lnTo>
-                  <a:lnTo>
-                    <a:pt x="1014244" y="1637763"/>
-                  </a:lnTo>
-                  <a:lnTo>
-                    <a:pt x="1085867" y="1718706"/>
-                  </a:lnTo>
-                  <a:lnTo>
-                    <a:pt x="1157489" y="1796100"/>
-                  </a:lnTo>
-                  <a:lnTo>
-                    <a:pt x="1229112" y="1870100"/>
-                  </a:lnTo>
-                  <a:lnTo>
-                    <a:pt x="1300734" y="1940856"/>
-                  </a:lnTo>
-                  <a:lnTo>
-                    <a:pt x="1372357" y="2008509"/>
-                  </a:lnTo>
-                  <a:lnTo>
-                    <a:pt x="1443979" y="2073195"/>
-                  </a:lnTo>
-                  <a:lnTo>
-                    <a:pt x="1515602" y="2135045"/>
-                  </a:lnTo>
-                  <a:lnTo>
-                    <a:pt x="1587224" y="2194184"/>
-                  </a:lnTo>
-                  <a:lnTo>
-                    <a:pt x="1658847" y="2250729"/>
-                  </a:lnTo>
-                  <a:lnTo>
-                    <a:pt x="1730469" y="2304794"/>
-                  </a:lnTo>
-                  <a:lnTo>
-                    <a:pt x="1802092" y="2356489"/>
-                  </a:lnTo>
-                  <a:lnTo>
-                    <a:pt x="1873714" y="2405918"/>
-                  </a:lnTo>
-                  <a:lnTo>
-                    <a:pt x="1945337" y="2453179"/>
-                  </a:lnTo>
-                  <a:lnTo>
-                    <a:pt x="2016959" y="2498367"/>
-                  </a:lnTo>
-                  <a:lnTo>
-                    <a:pt x="2088582" y="2541574"/>
-                  </a:lnTo>
-                  <a:lnTo>
-                    <a:pt x="2160204" y="2582887"/>
-                  </a:lnTo>
-                  <a:lnTo>
-                    <a:pt x="2231827" y="2622388"/>
-                  </a:lnTo>
-                  <a:lnTo>
-                    <a:pt x="2303450" y="2656033"/>
-                  </a:lnTo>
-                  <a:lnTo>
-                    <a:pt x="2375072" y="2666989"/>
-                  </a:lnTo>
-                  <a:lnTo>
-                    <a:pt x="2446695" y="2677801"/>
-                  </a:lnTo>
-                  <a:lnTo>
-                    <a:pt x="2518317" y="2688469"/>
-                  </a:lnTo>
-                  <a:lnTo>
-                    <a:pt x="2589940" y="2698996"/>
-                  </a:lnTo>
-                  <a:lnTo>
-                    <a:pt x="2661562" y="2709384"/>
-                  </a:lnTo>
-                  <a:lnTo>
-                    <a:pt x="2733185" y="2719634"/>
-                  </a:lnTo>
-                  <a:lnTo>
-                    <a:pt x="2804807" y="2729749"/>
-                  </a:lnTo>
-                  <a:lnTo>
-                    <a:pt x="2876430" y="2739730"/>
-                  </a:lnTo>
-                  <a:lnTo>
-                    <a:pt x="2948052" y="2749578"/>
-                  </a:lnTo>
-                  <a:lnTo>
-                    <a:pt x="3019675" y="2759297"/>
-                  </a:lnTo>
-                  <a:lnTo>
-                    <a:pt x="3091297" y="2768886"/>
-                  </a:lnTo>
-                  <a:lnTo>
-                    <a:pt x="3162920" y="2778349"/>
-                  </a:lnTo>
-                  <a:lnTo>
-                    <a:pt x="3234542" y="2787686"/>
-                  </a:lnTo>
-                  <a:lnTo>
-                    <a:pt x="3306165" y="2796900"/>
-                  </a:lnTo>
-                  <a:lnTo>
-                    <a:pt x="3377787" y="2805992"/>
-                  </a:lnTo>
-                  <a:lnTo>
-                    <a:pt x="3449410" y="2814963"/>
-                  </a:lnTo>
-                  <a:lnTo>
-                    <a:pt x="3521032" y="2823816"/>
-                  </a:lnTo>
-                  <a:lnTo>
-                    <a:pt x="3592655" y="2832551"/>
-                  </a:lnTo>
-                  <a:lnTo>
-                    <a:pt x="3664278" y="2841171"/>
-                  </a:lnTo>
-                  <a:lnTo>
-                    <a:pt x="3735900" y="2849677"/>
-                  </a:lnTo>
-                  <a:lnTo>
-                    <a:pt x="3807523" y="2858070"/>
-                  </a:lnTo>
-                  <a:lnTo>
-                    <a:pt x="3879145" y="2866352"/>
-                  </a:lnTo>
-                  <a:lnTo>
-                    <a:pt x="3950768" y="2874525"/>
-                  </a:lnTo>
-                  <a:lnTo>
-                    <a:pt x="4022390" y="2882589"/>
-                  </a:lnTo>
-                  <a:lnTo>
-                    <a:pt x="4094013" y="2890547"/>
-                  </a:lnTo>
-                  <a:lnTo>
-                    <a:pt x="4165635" y="2898399"/>
-                  </a:lnTo>
-                  <a:lnTo>
-                    <a:pt x="4237258" y="2906147"/>
-                  </a:lnTo>
-                  <a:lnTo>
-                    <a:pt x="4308880" y="2913793"/>
-                  </a:lnTo>
-                  <a:lnTo>
-                    <a:pt x="4380503" y="2921338"/>
-                  </a:lnTo>
-                  <a:lnTo>
-                    <a:pt x="4452125" y="2928782"/>
-                  </a:lnTo>
-                  <a:lnTo>
-                    <a:pt x="4523748" y="2936128"/>
-                  </a:lnTo>
-                  <a:lnTo>
-                    <a:pt x="4595370" y="2943377"/>
-                  </a:lnTo>
-                  <a:lnTo>
-                    <a:pt x="4666993" y="2950530"/>
-                  </a:lnTo>
-                  <a:lnTo>
-                    <a:pt x="4738615" y="2957588"/>
-                  </a:lnTo>
-                  <a:lnTo>
-                    <a:pt x="4810238" y="2964553"/>
-                  </a:lnTo>
-                  <a:lnTo>
-                    <a:pt x="4881860" y="2971426"/>
-                  </a:lnTo>
-                  <a:lnTo>
-                    <a:pt x="4953483" y="2978207"/>
-                  </a:lnTo>
-                  <a:lnTo>
-                    <a:pt x="5025106" y="2984899"/>
-                  </a:lnTo>
-                  <a:lnTo>
-                    <a:pt x="5096728" y="2991502"/>
-                  </a:lnTo>
-                  <a:lnTo>
-                    <a:pt x="5168351" y="2998018"/>
-                  </a:lnTo>
-                  <a:lnTo>
-                    <a:pt x="5239973" y="3004448"/>
-                  </a:lnTo>
-                  <a:lnTo>
-                    <a:pt x="5311596" y="3010792"/>
-                  </a:lnTo>
-                  <a:lnTo>
-                    <a:pt x="5383218" y="3017053"/>
-                  </a:lnTo>
-                  <a:lnTo>
-                    <a:pt x="5454841" y="3023230"/>
-                  </a:lnTo>
-                  <a:lnTo>
-                    <a:pt x="5526463" y="3029326"/>
-                  </a:lnTo>
-                  <a:lnTo>
-                    <a:pt x="5598086" y="3035341"/>
-                  </a:lnTo>
-                  <a:lnTo>
-                    <a:pt x="5669708" y="3041277"/>
-                  </a:lnTo>
-                  <a:lnTo>
-                    <a:pt x="5741331" y="3047134"/>
-                  </a:lnTo>
-                  <a:lnTo>
-                    <a:pt x="5812953" y="3052914"/>
-                  </a:lnTo>
-                  <a:lnTo>
-                    <a:pt x="5884576" y="3058616"/>
-                  </a:lnTo>
-                  <a:lnTo>
-                    <a:pt x="5956198" y="3064244"/>
-                  </a:lnTo>
-                  <a:lnTo>
-                    <a:pt x="6027821" y="3069797"/>
-                  </a:lnTo>
-                </a:path>
-              </a:pathLst>
-            </a:custGeom>
-          </p:spPr>
-          <p:txBody>
-            <a:bodyPr/>
-            <a:lstStyle/>
-            <a:p/>
-          </p:txBody>
-        </p:sp>
-        <p:sp>
-          <p:nvSpPr>
             <p:cNvPr id="22" name="pl22"/>
             <p:cNvSpPr/>
             <p:nvPr/>
           </p:nvSpPr>
           <p:spPr>
             <a:xfrm>
-              <a:off x="1172049" y="4008872"/>
-              <a:ext cx="7090630" cy="1468374"/>
+              <a:off x="2279156" y="2143092"/>
+              <a:ext cx="5920260" cy="1107817"/>
             </a:xfrm>
             <a:custGeom>
               <a:avLst/>
               <a:pathLst>
-                <a:path w="7090630" h="1468374">
+                <a:path w="5920260" h="1107817">
                   <a:moveTo>
-                    <a:pt x="7090630" y="1468374"/>
+                    <a:pt x="0" y="0"/>
                   </a:moveTo>
                   <a:lnTo>
-                    <a:pt x="7019007" y="1464705"/>
-                  </a:lnTo>
-                  <a:lnTo>
-                    <a:pt x="6947385" y="1460868"/>
-                  </a:lnTo>
-                  <a:lnTo>
-                    <a:pt x="6875762" y="1456855"/>
-                  </a:lnTo>
-                  <a:lnTo>
-                    <a:pt x="6804139" y="1452658"/>
-                  </a:lnTo>
-                  <a:lnTo>
-                    <a:pt x="6732517" y="1448268"/>
-                  </a:lnTo>
-                  <a:lnTo>
-                    <a:pt x="6660894" y="1443677"/>
-                  </a:lnTo>
-                  <a:lnTo>
-                    <a:pt x="6589272" y="1438876"/>
-                  </a:lnTo>
-                  <a:lnTo>
-                    <a:pt x="6517649" y="1433854"/>
-                  </a:lnTo>
-                  <a:lnTo>
-                    <a:pt x="6446027" y="1428602"/>
-                  </a:lnTo>
-                  <a:lnTo>
-                    <a:pt x="6374404" y="1423110"/>
-                  </a:lnTo>
-                  <a:lnTo>
-                    <a:pt x="6302782" y="1417365"/>
-                  </a:lnTo>
-                  <a:lnTo>
-                    <a:pt x="6231159" y="1411357"/>
-                  </a:lnTo>
-                  <a:lnTo>
-                    <a:pt x="6159537" y="1405073"/>
-                  </a:lnTo>
-                  <a:lnTo>
-                    <a:pt x="6087914" y="1398502"/>
-                  </a:lnTo>
-                  <a:lnTo>
-                    <a:pt x="6016292" y="1391628"/>
-                  </a:lnTo>
-                  <a:lnTo>
-                    <a:pt x="5944669" y="1384440"/>
-                  </a:lnTo>
-                  <a:lnTo>
-                    <a:pt x="5873047" y="1376922"/>
-                  </a:lnTo>
-                  <a:lnTo>
-                    <a:pt x="5801424" y="1369059"/>
-                  </a:lnTo>
-                  <a:lnTo>
-                    <a:pt x="5729802" y="1360836"/>
-                  </a:lnTo>
-                  <a:lnTo>
-                    <a:pt x="5658179" y="1352236"/>
-                  </a:lnTo>
-                  <a:lnTo>
-                    <a:pt x="5586557" y="1343241"/>
-                  </a:lnTo>
-                  <a:lnTo>
-                    <a:pt x="5514934" y="1333833"/>
-                  </a:lnTo>
-                  <a:lnTo>
-                    <a:pt x="5443311" y="1323995"/>
-                  </a:lnTo>
-                  <a:lnTo>
-                    <a:pt x="5371689" y="1313705"/>
-                  </a:lnTo>
-                  <a:lnTo>
-                    <a:pt x="5300066" y="1302943"/>
-                  </a:lnTo>
-                  <a:lnTo>
-                    <a:pt x="5228444" y="1291687"/>
-                  </a:lnTo>
-                  <a:lnTo>
-                    <a:pt x="5156821" y="1279916"/>
-                  </a:lnTo>
-                  <a:lnTo>
-                    <a:pt x="5085199" y="1267604"/>
-                  </a:lnTo>
-                  <a:lnTo>
-                    <a:pt x="5013576" y="1254729"/>
-                  </a:lnTo>
-                  <a:lnTo>
-                    <a:pt x="4941954" y="1241262"/>
-                  </a:lnTo>
-                  <a:lnTo>
-                    <a:pt x="4870331" y="1227178"/>
-                  </a:lnTo>
-                  <a:lnTo>
-                    <a:pt x="4798709" y="1212448"/>
-                  </a:lnTo>
-                  <a:lnTo>
-                    <a:pt x="4727086" y="1197043"/>
-                  </a:lnTo>
-                  <a:lnTo>
-                    <a:pt x="4655464" y="1180931"/>
-                  </a:lnTo>
-                  <a:lnTo>
-                    <a:pt x="4583841" y="1164080"/>
-                  </a:lnTo>
-                  <a:lnTo>
-                    <a:pt x="4512219" y="1146457"/>
-                  </a:lnTo>
-                  <a:lnTo>
-                    <a:pt x="4440596" y="1128025"/>
-                  </a:lnTo>
-                  <a:lnTo>
-                    <a:pt x="4368974" y="1108748"/>
-                  </a:lnTo>
-                  <a:lnTo>
-                    <a:pt x="4297351" y="1088587"/>
-                  </a:lnTo>
-                  <a:lnTo>
-                    <a:pt x="4225729" y="1067501"/>
-                  </a:lnTo>
-                  <a:lnTo>
-                    <a:pt x="4154106" y="1045449"/>
-                  </a:lnTo>
-                  <a:lnTo>
-                    <a:pt x="4082483" y="1022385"/>
-                  </a:lnTo>
-                  <a:lnTo>
-                    <a:pt x="4010861" y="998264"/>
-                  </a:lnTo>
-                  <a:lnTo>
-                    <a:pt x="3939238" y="973036"/>
-                  </a:lnTo>
-                  <a:lnTo>
-                    <a:pt x="3867616" y="946651"/>
-                  </a:lnTo>
-                  <a:lnTo>
-                    <a:pt x="3795993" y="919057"/>
-                  </a:lnTo>
-                  <a:lnTo>
-                    <a:pt x="3724371" y="890197"/>
-                  </a:lnTo>
-                  <a:lnTo>
-                    <a:pt x="3652748" y="860013"/>
-                  </a:lnTo>
-                  <a:lnTo>
-                    <a:pt x="3581126" y="828445"/>
-                  </a:lnTo>
-                  <a:lnTo>
-                    <a:pt x="3509503" y="795430"/>
-                  </a:lnTo>
-                  <a:lnTo>
-                    <a:pt x="3437881" y="760901"/>
-                  </a:lnTo>
-                  <a:lnTo>
-                    <a:pt x="3366258" y="724788"/>
-                  </a:lnTo>
-                  <a:lnTo>
-                    <a:pt x="3294636" y="709560"/>
-                  </a:lnTo>
-                  <a:lnTo>
-                    <a:pt x="3223013" y="698308"/>
-                  </a:lnTo>
-                  <a:lnTo>
-                    <a:pt x="3151391" y="686904"/>
-                  </a:lnTo>
-                  <a:lnTo>
-                    <a:pt x="3079768" y="675348"/>
-                  </a:lnTo>
-                  <a:lnTo>
-                    <a:pt x="3008146" y="663637"/>
-                  </a:lnTo>
-                  <a:lnTo>
-                    <a:pt x="2936523" y="651768"/>
-                  </a:lnTo>
-                  <a:lnTo>
-                    <a:pt x="2864901" y="639740"/>
-                  </a:lnTo>
-                  <a:lnTo>
-                    <a:pt x="2793278" y="627551"/>
-                  </a:lnTo>
-                  <a:lnTo>
-                    <a:pt x="2721655" y="615199"/>
-                  </a:lnTo>
-                  <a:lnTo>
-                    <a:pt x="2650033" y="602681"/>
-                  </a:lnTo>
-                  <a:lnTo>
-                    <a:pt x="2578410" y="589994"/>
-                  </a:lnTo>
-                  <a:lnTo>
-                    <a:pt x="2506788" y="577138"/>
-                  </a:lnTo>
-                  <a:lnTo>
-                    <a:pt x="2435165" y="564109"/>
-                  </a:lnTo>
-                  <a:lnTo>
-                    <a:pt x="2363543" y="550906"/>
-                  </a:lnTo>
-                  <a:lnTo>
-                    <a:pt x="2291920" y="537525"/>
-                  </a:lnTo>
-                  <a:lnTo>
-                    <a:pt x="2220298" y="523965"/>
-                  </a:lnTo>
-                  <a:lnTo>
-                    <a:pt x="2148675" y="510223"/>
-                  </a:lnTo>
-                  <a:lnTo>
-                    <a:pt x="2077053" y="496296"/>
-                  </a:lnTo>
-                  <a:lnTo>
-                    <a:pt x="2005430" y="482183"/>
-                  </a:lnTo>
-                  <a:lnTo>
-                    <a:pt x="1933808" y="467880"/>
-                  </a:lnTo>
-                  <a:lnTo>
-                    <a:pt x="1862185" y="453386"/>
-                  </a:lnTo>
-                  <a:lnTo>
-                    <a:pt x="1790563" y="438697"/>
-                  </a:lnTo>
-                  <a:lnTo>
-                    <a:pt x="1718940" y="423811"/>
-                  </a:lnTo>
-                  <a:lnTo>
-                    <a:pt x="1647318" y="408726"/>
-                  </a:lnTo>
-                  <a:lnTo>
-                    <a:pt x="1575695" y="393438"/>
-                  </a:lnTo>
-                  <a:lnTo>
-                    <a:pt x="1504073" y="377945"/>
-                  </a:lnTo>
-                  <a:lnTo>
-                    <a:pt x="1432450" y="362244"/>
-                  </a:lnTo>
-                  <a:lnTo>
-                    <a:pt x="1360827" y="346332"/>
-                  </a:lnTo>
-                  <a:lnTo>
-                    <a:pt x="1289205" y="330207"/>
-                  </a:lnTo>
-                  <a:lnTo>
-                    <a:pt x="1217582" y="313866"/>
-                  </a:lnTo>
-                  <a:lnTo>
-                    <a:pt x="1145960" y="297305"/>
-                  </a:lnTo>
-                  <a:lnTo>
-                    <a:pt x="1074337" y="280523"/>
-                  </a:lnTo>
-                  <a:lnTo>
-                    <a:pt x="1002715" y="263515"/>
-                  </a:lnTo>
-                  <a:lnTo>
-                    <a:pt x="931092" y="246279"/>
-                  </a:lnTo>
-                  <a:lnTo>
-                    <a:pt x="859470" y="228812"/>
-                  </a:lnTo>
-                  <a:lnTo>
-                    <a:pt x="787847" y="211110"/>
-                  </a:lnTo>
-                  <a:lnTo>
-                    <a:pt x="716225" y="193171"/>
-                  </a:lnTo>
-                  <a:lnTo>
-                    <a:pt x="644602" y="174992"/>
-                  </a:lnTo>
-                  <a:lnTo>
-                    <a:pt x="572980" y="156568"/>
-                  </a:lnTo>
-                  <a:lnTo>
-                    <a:pt x="501357" y="137898"/>
-                  </a:lnTo>
-                  <a:lnTo>
-                    <a:pt x="429735" y="118977"/>
-                  </a:lnTo>
-                  <a:lnTo>
-                    <a:pt x="358112" y="99802"/>
-                  </a:lnTo>
-                  <a:lnTo>
-                    <a:pt x="286490" y="80370"/>
-                  </a:lnTo>
-                  <a:lnTo>
-                    <a:pt x="214867" y="60677"/>
-                  </a:lnTo>
-                  <a:lnTo>
-                    <a:pt x="143245" y="40720"/>
-                  </a:lnTo>
-                  <a:lnTo>
-                    <a:pt x="71622" y="20495"/>
-                  </a:lnTo>
-                  <a:lnTo>
-                    <a:pt x="0" y="0"/>
+                    <a:pt x="11323" y="9212"/>
+                  </a:lnTo>
+                  <a:lnTo>
+                    <a:pt x="81667" y="63934"/>
+                  </a:lnTo>
+                  <a:lnTo>
+                    <a:pt x="152012" y="116257"/>
+                  </a:lnTo>
+                  <a:lnTo>
+                    <a:pt x="222356" y="166285"/>
+                  </a:lnTo>
+                  <a:lnTo>
+                    <a:pt x="292701" y="214120"/>
+                  </a:lnTo>
+                  <a:lnTo>
+                    <a:pt x="363045" y="259858"/>
+                  </a:lnTo>
+                  <a:lnTo>
+                    <a:pt x="433390" y="303589"/>
+                  </a:lnTo>
+                  <a:lnTo>
+                    <a:pt x="503734" y="345404"/>
+                  </a:lnTo>
+                  <a:lnTo>
+                    <a:pt x="574079" y="385384"/>
+                  </a:lnTo>
+                  <a:lnTo>
+                    <a:pt x="644423" y="423612"/>
+                  </a:lnTo>
+                  <a:lnTo>
+                    <a:pt x="714768" y="460163"/>
+                  </a:lnTo>
+                  <a:lnTo>
+                    <a:pt x="785112" y="495112"/>
+                  </a:lnTo>
+                  <a:lnTo>
+                    <a:pt x="855457" y="528529"/>
+                  </a:lnTo>
+                  <a:lnTo>
+                    <a:pt x="925801" y="560480"/>
+                  </a:lnTo>
+                  <a:lnTo>
+                    <a:pt x="996146" y="591030"/>
+                  </a:lnTo>
+                  <a:lnTo>
+                    <a:pt x="1066490" y="620240"/>
+                  </a:lnTo>
+                  <a:lnTo>
+                    <a:pt x="1136835" y="648170"/>
+                  </a:lnTo>
+                  <a:lnTo>
+                    <a:pt x="1207179" y="674875"/>
+                  </a:lnTo>
+                  <a:lnTo>
+                    <a:pt x="1277524" y="700409"/>
+                  </a:lnTo>
+                  <a:lnTo>
+                    <a:pt x="1347868" y="724823"/>
+                  </a:lnTo>
+                  <a:lnTo>
+                    <a:pt x="1418213" y="748167"/>
+                  </a:lnTo>
+                  <a:lnTo>
+                    <a:pt x="1488557" y="770487"/>
+                  </a:lnTo>
+                  <a:lnTo>
+                    <a:pt x="1558902" y="791829"/>
+                  </a:lnTo>
+                  <a:lnTo>
+                    <a:pt x="1629246" y="812235"/>
+                  </a:lnTo>
+                  <a:lnTo>
+                    <a:pt x="1699591" y="831746"/>
+                  </a:lnTo>
+                  <a:lnTo>
+                    <a:pt x="1769935" y="850401"/>
+                  </a:lnTo>
+                  <a:lnTo>
+                    <a:pt x="1840280" y="868239"/>
+                  </a:lnTo>
+                  <a:lnTo>
+                    <a:pt x="1910624" y="885294"/>
+                  </a:lnTo>
+                  <a:lnTo>
+                    <a:pt x="1980969" y="901602"/>
+                  </a:lnTo>
+                  <a:lnTo>
+                    <a:pt x="2051313" y="917194"/>
+                  </a:lnTo>
+                  <a:lnTo>
+                    <a:pt x="2121658" y="932103"/>
+                  </a:lnTo>
+                  <a:lnTo>
+                    <a:pt x="2192002" y="946358"/>
+                  </a:lnTo>
+                  <a:lnTo>
+                    <a:pt x="2262347" y="958499"/>
+                  </a:lnTo>
+                  <a:lnTo>
+                    <a:pt x="2332691" y="962453"/>
+                  </a:lnTo>
+                  <a:lnTo>
+                    <a:pt x="2403036" y="966355"/>
+                  </a:lnTo>
+                  <a:lnTo>
+                    <a:pt x="2473380" y="970205"/>
+                  </a:lnTo>
+                  <a:lnTo>
+                    <a:pt x="2543725" y="974004"/>
+                  </a:lnTo>
+                  <a:lnTo>
+                    <a:pt x="2614069" y="977753"/>
+                  </a:lnTo>
+                  <a:lnTo>
+                    <a:pt x="2684414" y="981452"/>
+                  </a:lnTo>
+                  <a:lnTo>
+                    <a:pt x="2754758" y="985102"/>
+                  </a:lnTo>
+                  <a:lnTo>
+                    <a:pt x="2825103" y="988704"/>
+                  </a:lnTo>
+                  <a:lnTo>
+                    <a:pt x="2895447" y="992258"/>
+                  </a:lnTo>
+                  <a:lnTo>
+                    <a:pt x="2965792" y="995765"/>
+                  </a:lnTo>
+                  <a:lnTo>
+                    <a:pt x="3036136" y="999226"/>
+                  </a:lnTo>
+                  <a:lnTo>
+                    <a:pt x="3106481" y="1002640"/>
+                  </a:lnTo>
+                  <a:lnTo>
+                    <a:pt x="3176825" y="1006010"/>
+                  </a:lnTo>
+                  <a:lnTo>
+                    <a:pt x="3247170" y="1009335"/>
+                  </a:lnTo>
+                  <a:lnTo>
+                    <a:pt x="3317514" y="1012616"/>
+                  </a:lnTo>
+                  <a:lnTo>
+                    <a:pt x="3387858" y="1015854"/>
+                  </a:lnTo>
+                  <a:lnTo>
+                    <a:pt x="3458203" y="1019048"/>
+                  </a:lnTo>
+                  <a:lnTo>
+                    <a:pt x="3528547" y="1022201"/>
+                  </a:lnTo>
+                  <a:lnTo>
+                    <a:pt x="3598892" y="1025312"/>
+                  </a:lnTo>
+                  <a:lnTo>
+                    <a:pt x="3669236" y="1028381"/>
+                  </a:lnTo>
+                  <a:lnTo>
+                    <a:pt x="3739581" y="1031410"/>
+                  </a:lnTo>
+                  <a:lnTo>
+                    <a:pt x="3809925" y="1034399"/>
+                  </a:lnTo>
+                  <a:lnTo>
+                    <a:pt x="3880270" y="1037348"/>
+                  </a:lnTo>
+                  <a:lnTo>
+                    <a:pt x="3950614" y="1040258"/>
+                  </a:lnTo>
+                  <a:lnTo>
+                    <a:pt x="4020959" y="1043130"/>
+                  </a:lnTo>
+                  <a:lnTo>
+                    <a:pt x="4091303" y="1045964"/>
+                  </a:lnTo>
+                  <a:lnTo>
+                    <a:pt x="4161648" y="1048760"/>
+                  </a:lnTo>
+                  <a:lnTo>
+                    <a:pt x="4231992" y="1051519"/>
+                  </a:lnTo>
+                  <a:lnTo>
+                    <a:pt x="4302337" y="1054242"/>
+                  </a:lnTo>
+                  <a:lnTo>
+                    <a:pt x="4372681" y="1056928"/>
+                  </a:lnTo>
+                  <a:lnTo>
+                    <a:pt x="4443026" y="1059579"/>
+                  </a:lnTo>
+                  <a:lnTo>
+                    <a:pt x="4513370" y="1062195"/>
+                  </a:lnTo>
+                  <a:lnTo>
+                    <a:pt x="4583715" y="1064777"/>
+                  </a:lnTo>
+                  <a:lnTo>
+                    <a:pt x="4654059" y="1067324"/>
+                  </a:lnTo>
+                  <a:lnTo>
+                    <a:pt x="4724404" y="1069837"/>
+                  </a:lnTo>
+                  <a:lnTo>
+                    <a:pt x="4794748" y="1072317"/>
+                  </a:lnTo>
+                  <a:lnTo>
+                    <a:pt x="4865093" y="1074765"/>
+                  </a:lnTo>
+                  <a:lnTo>
+                    <a:pt x="4935437" y="1077180"/>
+                  </a:lnTo>
+                  <a:lnTo>
+                    <a:pt x="5005782" y="1079562"/>
+                  </a:lnTo>
+                  <a:lnTo>
+                    <a:pt x="5076126" y="1081914"/>
+                  </a:lnTo>
+                  <a:lnTo>
+                    <a:pt x="5146471" y="1084234"/>
+                  </a:lnTo>
+                  <a:lnTo>
+                    <a:pt x="5216815" y="1086524"/>
+                  </a:lnTo>
+                  <a:lnTo>
+                    <a:pt x="5287160" y="1088783"/>
+                  </a:lnTo>
+                  <a:lnTo>
+                    <a:pt x="5357504" y="1091012"/>
+                  </a:lnTo>
+                  <a:lnTo>
+                    <a:pt x="5427849" y="1093212"/>
+                  </a:lnTo>
+                  <a:lnTo>
+                    <a:pt x="5498193" y="1095383"/>
+                  </a:lnTo>
+                  <a:lnTo>
+                    <a:pt x="5568538" y="1097525"/>
+                  </a:lnTo>
+                  <a:lnTo>
+                    <a:pt x="5638882" y="1099639"/>
+                  </a:lnTo>
+                  <a:lnTo>
+                    <a:pt x="5709227" y="1101724"/>
+                  </a:lnTo>
+                  <a:lnTo>
+                    <a:pt x="5779571" y="1103782"/>
+                  </a:lnTo>
+                  <a:lnTo>
+                    <a:pt x="5849916" y="1105813"/>
+                  </a:lnTo>
+                  <a:lnTo>
+                    <a:pt x="5920260" y="1107817"/>
                   </a:lnTo>
                 </a:path>
               </a:pathLst>
@@ -4156,312 +3866,637 @@
           </p:nvSpPr>
           <p:spPr>
             <a:xfrm>
-              <a:off x="1172049" y="2318231"/>
-              <a:ext cx="7090630" cy="3057037"/>
+              <a:off x="1235312" y="2841521"/>
+              <a:ext cx="6964104" cy="529901"/>
             </a:xfrm>
             <a:custGeom>
               <a:avLst/>
               <a:pathLst>
-                <a:path w="7090630" h="3057037">
+                <a:path w="6964104" h="529901">
+                  <a:moveTo>
+                    <a:pt x="6964104" y="529901"/>
+                  </a:moveTo>
+                  <a:lnTo>
+                    <a:pt x="6893760" y="528577"/>
+                  </a:lnTo>
+                  <a:lnTo>
+                    <a:pt x="6823415" y="527193"/>
+                  </a:lnTo>
+                  <a:lnTo>
+                    <a:pt x="6753071" y="525744"/>
+                  </a:lnTo>
+                  <a:lnTo>
+                    <a:pt x="6682726" y="524230"/>
+                  </a:lnTo>
+                  <a:lnTo>
+                    <a:pt x="6612382" y="522646"/>
+                  </a:lnTo>
+                  <a:lnTo>
+                    <a:pt x="6542037" y="520989"/>
+                  </a:lnTo>
+                  <a:lnTo>
+                    <a:pt x="6471693" y="519256"/>
+                  </a:lnTo>
+                  <a:lnTo>
+                    <a:pt x="6401348" y="517444"/>
+                  </a:lnTo>
+                  <a:lnTo>
+                    <a:pt x="6331004" y="515549"/>
+                  </a:lnTo>
+                  <a:lnTo>
+                    <a:pt x="6260659" y="513567"/>
+                  </a:lnTo>
+                  <a:lnTo>
+                    <a:pt x="6190315" y="511493"/>
+                  </a:lnTo>
+                  <a:lnTo>
+                    <a:pt x="6119970" y="509325"/>
+                  </a:lnTo>
+                  <a:lnTo>
+                    <a:pt x="6049626" y="507058"/>
+                  </a:lnTo>
+                  <a:lnTo>
+                    <a:pt x="5979281" y="504686"/>
+                  </a:lnTo>
+                  <a:lnTo>
+                    <a:pt x="5908937" y="502206"/>
+                  </a:lnTo>
+                  <a:lnTo>
+                    <a:pt x="5838592" y="499612"/>
+                  </a:lnTo>
+                  <a:lnTo>
+                    <a:pt x="5768248" y="496898"/>
+                  </a:lnTo>
+                  <a:lnTo>
+                    <a:pt x="5697903" y="494061"/>
+                  </a:lnTo>
+                  <a:lnTo>
+                    <a:pt x="5627559" y="491093"/>
+                  </a:lnTo>
+                  <a:lnTo>
+                    <a:pt x="5557214" y="487990"/>
+                  </a:lnTo>
+                  <a:lnTo>
+                    <a:pt x="5486870" y="484744"/>
+                  </a:lnTo>
+                  <a:lnTo>
+                    <a:pt x="5416525" y="481349"/>
+                  </a:lnTo>
+                  <a:lnTo>
+                    <a:pt x="5346181" y="477798"/>
+                  </a:lnTo>
+                  <a:lnTo>
+                    <a:pt x="5275836" y="474085"/>
+                  </a:lnTo>
+                  <a:lnTo>
+                    <a:pt x="5205492" y="470201"/>
+                  </a:lnTo>
+                  <a:lnTo>
+                    <a:pt x="5135147" y="466139"/>
+                  </a:lnTo>
+                  <a:lnTo>
+                    <a:pt x="5064803" y="461891"/>
+                  </a:lnTo>
+                  <a:lnTo>
+                    <a:pt x="4994458" y="457448"/>
+                  </a:lnTo>
+                  <a:lnTo>
+                    <a:pt x="4924114" y="452802"/>
+                  </a:lnTo>
+                  <a:lnTo>
+                    <a:pt x="4853769" y="447942"/>
+                  </a:lnTo>
+                  <a:lnTo>
+                    <a:pt x="4783425" y="442859"/>
+                  </a:lnTo>
+                  <a:lnTo>
+                    <a:pt x="4713080" y="437544"/>
+                  </a:lnTo>
+                  <a:lnTo>
+                    <a:pt x="4642736" y="431984"/>
+                  </a:lnTo>
+                  <a:lnTo>
+                    <a:pt x="4572391" y="426170"/>
+                  </a:lnTo>
+                  <a:lnTo>
+                    <a:pt x="4502047" y="420089"/>
+                  </a:lnTo>
+                  <a:lnTo>
+                    <a:pt x="4431702" y="413729"/>
+                  </a:lnTo>
+                  <a:lnTo>
+                    <a:pt x="4361358" y="407077"/>
+                  </a:lnTo>
+                  <a:lnTo>
+                    <a:pt x="4291013" y="400121"/>
+                  </a:lnTo>
+                  <a:lnTo>
+                    <a:pt x="4220669" y="392845"/>
+                  </a:lnTo>
+                  <a:lnTo>
+                    <a:pt x="4150324" y="385236"/>
+                  </a:lnTo>
+                  <a:lnTo>
+                    <a:pt x="4079980" y="377278"/>
+                  </a:lnTo>
+                  <a:lnTo>
+                    <a:pt x="4009635" y="368954"/>
+                  </a:lnTo>
+                  <a:lnTo>
+                    <a:pt x="3939291" y="360250"/>
+                  </a:lnTo>
+                  <a:lnTo>
+                    <a:pt x="3868946" y="351145"/>
+                  </a:lnTo>
+                  <a:lnTo>
+                    <a:pt x="3798602" y="341624"/>
+                  </a:lnTo>
+                  <a:lnTo>
+                    <a:pt x="3728257" y="331666"/>
+                  </a:lnTo>
+                  <a:lnTo>
+                    <a:pt x="3657913" y="321251"/>
+                  </a:lnTo>
+                  <a:lnTo>
+                    <a:pt x="3587569" y="310358"/>
+                  </a:lnTo>
+                  <a:lnTo>
+                    <a:pt x="3517224" y="298966"/>
+                  </a:lnTo>
+                  <a:lnTo>
+                    <a:pt x="3446880" y="287052"/>
+                  </a:lnTo>
+                  <a:lnTo>
+                    <a:pt x="3376535" y="274591"/>
+                  </a:lnTo>
+                  <a:lnTo>
+                    <a:pt x="3306191" y="261558"/>
+                  </a:lnTo>
+                  <a:lnTo>
+                    <a:pt x="3235846" y="256063"/>
+                  </a:lnTo>
+                  <a:lnTo>
+                    <a:pt x="3165502" y="252002"/>
+                  </a:lnTo>
+                  <a:lnTo>
+                    <a:pt x="3095157" y="247887"/>
+                  </a:lnTo>
+                  <a:lnTo>
+                    <a:pt x="3024813" y="243717"/>
+                  </a:lnTo>
+                  <a:lnTo>
+                    <a:pt x="2954468" y="239490"/>
+                  </a:lnTo>
+                  <a:lnTo>
+                    <a:pt x="2884124" y="235207"/>
+                  </a:lnTo>
+                  <a:lnTo>
+                    <a:pt x="2813779" y="230867"/>
+                  </a:lnTo>
+                  <a:lnTo>
+                    <a:pt x="2743435" y="226468"/>
+                  </a:lnTo>
+                  <a:lnTo>
+                    <a:pt x="2673090" y="222010"/>
+                  </a:lnTo>
+                  <a:lnTo>
+                    <a:pt x="2602746" y="217493"/>
+                  </a:lnTo>
+                  <a:lnTo>
+                    <a:pt x="2532401" y="212915"/>
+                  </a:lnTo>
+                  <a:lnTo>
+                    <a:pt x="2462057" y="208275"/>
+                  </a:lnTo>
+                  <a:lnTo>
+                    <a:pt x="2391712" y="203573"/>
+                  </a:lnTo>
+                  <a:lnTo>
+                    <a:pt x="2321368" y="198809"/>
+                  </a:lnTo>
+                  <a:lnTo>
+                    <a:pt x="2251023" y="193980"/>
+                  </a:lnTo>
+                  <a:lnTo>
+                    <a:pt x="2180679" y="189086"/>
+                  </a:lnTo>
+                  <a:lnTo>
+                    <a:pt x="2110334" y="184127"/>
+                  </a:lnTo>
+                  <a:lnTo>
+                    <a:pt x="2039990" y="179101"/>
+                  </a:lnTo>
+                  <a:lnTo>
+                    <a:pt x="1969645" y="174008"/>
+                  </a:lnTo>
+                  <a:lnTo>
+                    <a:pt x="1899301" y="168847"/>
+                  </a:lnTo>
+                  <a:lnTo>
+                    <a:pt x="1828956" y="163616"/>
+                  </a:lnTo>
+                  <a:lnTo>
+                    <a:pt x="1758612" y="158315"/>
+                  </a:lnTo>
+                  <a:lnTo>
+                    <a:pt x="1688267" y="152943"/>
+                  </a:lnTo>
+                  <a:lnTo>
+                    <a:pt x="1617923" y="147499"/>
+                  </a:lnTo>
+                  <a:lnTo>
+                    <a:pt x="1547578" y="141982"/>
+                  </a:lnTo>
+                  <a:lnTo>
+                    <a:pt x="1477234" y="136391"/>
+                  </a:lnTo>
+                  <a:lnTo>
+                    <a:pt x="1406889" y="130725"/>
+                  </a:lnTo>
+                  <a:lnTo>
+                    <a:pt x="1336545" y="124983"/>
+                  </a:lnTo>
+                  <a:lnTo>
+                    <a:pt x="1266200" y="119164"/>
+                  </a:lnTo>
+                  <a:lnTo>
+                    <a:pt x="1195856" y="113266"/>
+                  </a:lnTo>
+                  <a:lnTo>
+                    <a:pt x="1125511" y="107290"/>
+                  </a:lnTo>
+                  <a:lnTo>
+                    <a:pt x="1055167" y="101234"/>
+                  </a:lnTo>
+                  <a:lnTo>
+                    <a:pt x="984822" y="95096"/>
+                  </a:lnTo>
+                  <a:lnTo>
+                    <a:pt x="914478" y="88876"/>
+                  </a:lnTo>
+                  <a:lnTo>
+                    <a:pt x="844133" y="82572"/>
+                  </a:lnTo>
+                  <a:lnTo>
+                    <a:pt x="773789" y="76184"/>
+                  </a:lnTo>
+                  <a:lnTo>
+                    <a:pt x="703444" y="69711"/>
+                  </a:lnTo>
+                  <a:lnTo>
+                    <a:pt x="633100" y="63150"/>
+                  </a:lnTo>
+                  <a:lnTo>
+                    <a:pt x="562755" y="56502"/>
+                  </a:lnTo>
+                  <a:lnTo>
+                    <a:pt x="492411" y="49764"/>
+                  </a:lnTo>
+                  <a:lnTo>
+                    <a:pt x="422066" y="42936"/>
+                  </a:lnTo>
+                  <a:lnTo>
+                    <a:pt x="351722" y="36016"/>
+                  </a:lnTo>
+                  <a:lnTo>
+                    <a:pt x="281377" y="29003"/>
+                  </a:lnTo>
+                  <a:lnTo>
+                    <a:pt x="211033" y="21897"/>
+                  </a:lnTo>
+                  <a:lnTo>
+                    <a:pt x="140688" y="14695"/>
+                  </a:lnTo>
+                  <a:lnTo>
+                    <a:pt x="70344" y="7396"/>
+                  </a:lnTo>
+                  <a:lnTo>
+                    <a:pt x="0" y="0"/>
+                  </a:lnTo>
+                </a:path>
+              </a:pathLst>
+            </a:custGeom>
+          </p:spPr>
+          <p:txBody>
+            <a:bodyPr/>
+            <a:lstStyle/>
+            <a:p/>
+          </p:txBody>
+        </p:sp>
+        <p:sp>
+          <p:nvSpPr>
+            <p:cNvPr id="24" name="pl24"/>
+            <p:cNvSpPr/>
+            <p:nvPr/>
+          </p:nvSpPr>
+          <p:spPr>
+            <a:xfrm>
+              <a:off x="1235312" y="2231408"/>
+              <a:ext cx="6964104" cy="1103212"/>
+            </a:xfrm>
+            <a:custGeom>
+              <a:avLst/>
+              <a:pathLst>
+                <a:path w="6964104" h="1103212">
                   <a:moveTo>
                     <a:pt x="0" y="0"/>
                   </a:moveTo>
                   <a:lnTo>
-                    <a:pt x="71622" y="92840"/>
-                  </a:lnTo>
-                  <a:lnTo>
-                    <a:pt x="143245" y="183020"/>
-                  </a:lnTo>
-                  <a:lnTo>
-                    <a:pt x="214867" y="270615"/>
-                  </a:lnTo>
-                  <a:lnTo>
-                    <a:pt x="286490" y="355699"/>
-                  </a:lnTo>
-                  <a:lnTo>
-                    <a:pt x="358112" y="438344"/>
-                  </a:lnTo>
-                  <a:lnTo>
-                    <a:pt x="429735" y="518620"/>
-                  </a:lnTo>
-                  <a:lnTo>
-                    <a:pt x="501357" y="596596"/>
-                  </a:lnTo>
-                  <a:lnTo>
-                    <a:pt x="572980" y="672336"/>
-                  </a:lnTo>
-                  <a:lnTo>
-                    <a:pt x="644602" y="745906"/>
-                  </a:lnTo>
-                  <a:lnTo>
-                    <a:pt x="716225" y="817366"/>
-                  </a:lnTo>
-                  <a:lnTo>
-                    <a:pt x="787847" y="886779"/>
-                  </a:lnTo>
-                  <a:lnTo>
-                    <a:pt x="859470" y="954201"/>
-                  </a:lnTo>
-                  <a:lnTo>
-                    <a:pt x="931092" y="1019692"/>
-                  </a:lnTo>
-                  <a:lnTo>
-                    <a:pt x="1002715" y="1083305"/>
-                  </a:lnTo>
-                  <a:lnTo>
-                    <a:pt x="1074337" y="1145094"/>
-                  </a:lnTo>
-                  <a:lnTo>
-                    <a:pt x="1145960" y="1205113"/>
-                  </a:lnTo>
-                  <a:lnTo>
-                    <a:pt x="1217582" y="1263411"/>
-                  </a:lnTo>
-                  <a:lnTo>
-                    <a:pt x="1289205" y="1320039"/>
-                  </a:lnTo>
-                  <a:lnTo>
-                    <a:pt x="1360827" y="1375043"/>
-                  </a:lnTo>
-                  <a:lnTo>
-                    <a:pt x="1432450" y="1428470"/>
-                  </a:lnTo>
-                  <a:lnTo>
-                    <a:pt x="1504073" y="1480366"/>
-                  </a:lnTo>
-                  <a:lnTo>
-                    <a:pt x="1575695" y="1530775"/>
-                  </a:lnTo>
-                  <a:lnTo>
-                    <a:pt x="1647318" y="1579739"/>
-                  </a:lnTo>
-                  <a:lnTo>
-                    <a:pt x="1718940" y="1627299"/>
-                  </a:lnTo>
-                  <a:lnTo>
-                    <a:pt x="1790563" y="1673496"/>
-                  </a:lnTo>
-                  <a:lnTo>
-                    <a:pt x="1862185" y="1718369"/>
-                  </a:lnTo>
-                  <a:lnTo>
-                    <a:pt x="1933808" y="1761956"/>
-                  </a:lnTo>
-                  <a:lnTo>
-                    <a:pt x="2005430" y="1804293"/>
-                  </a:lnTo>
-                  <a:lnTo>
-                    <a:pt x="2077053" y="1845417"/>
-                  </a:lnTo>
-                  <a:lnTo>
-                    <a:pt x="2148675" y="1885362"/>
-                  </a:lnTo>
-                  <a:lnTo>
-                    <a:pt x="2220298" y="1924162"/>
-                  </a:lnTo>
-                  <a:lnTo>
-                    <a:pt x="2291920" y="1961850"/>
-                  </a:lnTo>
-                  <a:lnTo>
-                    <a:pt x="2363543" y="1998458"/>
-                  </a:lnTo>
-                  <a:lnTo>
-                    <a:pt x="2435165" y="2034017"/>
-                  </a:lnTo>
-                  <a:lnTo>
-                    <a:pt x="2506788" y="2068556"/>
-                  </a:lnTo>
-                  <a:lnTo>
-                    <a:pt x="2578410" y="2102105"/>
-                  </a:lnTo>
-                  <a:lnTo>
-                    <a:pt x="2650033" y="2134693"/>
-                  </a:lnTo>
-                  <a:lnTo>
-                    <a:pt x="2721655" y="2166346"/>
-                  </a:lnTo>
-                  <a:lnTo>
-                    <a:pt x="2793278" y="2197093"/>
-                  </a:lnTo>
-                  <a:lnTo>
-                    <a:pt x="2864901" y="2226957"/>
-                  </a:lnTo>
-                  <a:lnTo>
-                    <a:pt x="2936523" y="2255966"/>
-                  </a:lnTo>
-                  <a:lnTo>
-                    <a:pt x="3008146" y="2284144"/>
-                  </a:lnTo>
-                  <a:lnTo>
-                    <a:pt x="3079768" y="2311514"/>
-                  </a:lnTo>
-                  <a:lnTo>
-                    <a:pt x="3151391" y="2338099"/>
-                  </a:lnTo>
-                  <a:lnTo>
-                    <a:pt x="3223013" y="2363922"/>
-                  </a:lnTo>
-                  <a:lnTo>
-                    <a:pt x="3294636" y="2389005"/>
-                  </a:lnTo>
-                  <a:lnTo>
-                    <a:pt x="3366258" y="2413369"/>
-                  </a:lnTo>
-                  <a:lnTo>
-                    <a:pt x="3437881" y="2437035"/>
-                  </a:lnTo>
-                  <a:lnTo>
-                    <a:pt x="3509503" y="2460023"/>
-                  </a:lnTo>
-                  <a:lnTo>
-                    <a:pt x="3581126" y="2482351"/>
-                  </a:lnTo>
-                  <a:lnTo>
-                    <a:pt x="3652748" y="2504040"/>
-                  </a:lnTo>
-                  <a:lnTo>
-                    <a:pt x="3724371" y="2525106"/>
-                  </a:lnTo>
-                  <a:lnTo>
-                    <a:pt x="3795993" y="2545570"/>
-                  </a:lnTo>
-                  <a:lnTo>
-                    <a:pt x="3867616" y="2565446"/>
-                  </a:lnTo>
-                  <a:lnTo>
-                    <a:pt x="3939238" y="2584753"/>
-                  </a:lnTo>
-                  <a:lnTo>
-                    <a:pt x="4010861" y="2603506"/>
-                  </a:lnTo>
-                  <a:lnTo>
-                    <a:pt x="4082483" y="2621722"/>
-                  </a:lnTo>
-                  <a:lnTo>
-                    <a:pt x="4154106" y="2639416"/>
-                  </a:lnTo>
-                  <a:lnTo>
-                    <a:pt x="4225729" y="2656602"/>
-                  </a:lnTo>
-                  <a:lnTo>
-                    <a:pt x="4297351" y="2673296"/>
-                  </a:lnTo>
-                  <a:lnTo>
-                    <a:pt x="4368974" y="2689512"/>
-                  </a:lnTo>
-                  <a:lnTo>
-                    <a:pt x="4440596" y="2705262"/>
-                  </a:lnTo>
-                  <a:lnTo>
-                    <a:pt x="4512219" y="2720561"/>
-                  </a:lnTo>
-                  <a:lnTo>
-                    <a:pt x="4583841" y="2735422"/>
-                  </a:lnTo>
-                  <a:lnTo>
-                    <a:pt x="4655464" y="2749857"/>
-                  </a:lnTo>
-                  <a:lnTo>
-                    <a:pt x="4727086" y="2763878"/>
-                  </a:lnTo>
-                  <a:lnTo>
-                    <a:pt x="4798709" y="2777497"/>
-                  </a:lnTo>
-                  <a:lnTo>
-                    <a:pt x="4870331" y="2790725"/>
-                  </a:lnTo>
-                  <a:lnTo>
-                    <a:pt x="4941954" y="2803575"/>
-                  </a:lnTo>
-                  <a:lnTo>
-                    <a:pt x="5013576" y="2816056"/>
-                  </a:lnTo>
-                  <a:lnTo>
-                    <a:pt x="5085199" y="2828180"/>
-                  </a:lnTo>
-                  <a:lnTo>
-                    <a:pt x="5156821" y="2839956"/>
-                  </a:lnTo>
-                  <a:lnTo>
-                    <a:pt x="5228444" y="2851394"/>
-                  </a:lnTo>
-                  <a:lnTo>
-                    <a:pt x="5300066" y="2862505"/>
-                  </a:lnTo>
-                  <a:lnTo>
-                    <a:pt x="5371689" y="2873297"/>
-                  </a:lnTo>
-                  <a:lnTo>
-                    <a:pt x="5443311" y="2883779"/>
-                  </a:lnTo>
-                  <a:lnTo>
-                    <a:pt x="5514934" y="2893962"/>
-                  </a:lnTo>
-                  <a:lnTo>
-                    <a:pt x="5586557" y="2903852"/>
-                  </a:lnTo>
-                  <a:lnTo>
-                    <a:pt x="5658179" y="2913459"/>
-                  </a:lnTo>
-                  <a:lnTo>
-                    <a:pt x="5729802" y="2922791"/>
-                  </a:lnTo>
-                  <a:lnTo>
-                    <a:pt x="5801424" y="2931855"/>
-                  </a:lnTo>
-                  <a:lnTo>
-                    <a:pt x="5873047" y="2940659"/>
-                  </a:lnTo>
-                  <a:lnTo>
-                    <a:pt x="5944669" y="2949211"/>
-                  </a:lnTo>
-                  <a:lnTo>
-                    <a:pt x="6016292" y="2957518"/>
-                  </a:lnTo>
-                  <a:lnTo>
-                    <a:pt x="6087914" y="2965587"/>
-                  </a:lnTo>
-                  <a:lnTo>
-                    <a:pt x="6159537" y="2973424"/>
-                  </a:lnTo>
-                  <a:lnTo>
-                    <a:pt x="6231159" y="2981037"/>
-                  </a:lnTo>
-                  <a:lnTo>
-                    <a:pt x="6302782" y="2988431"/>
-                  </a:lnTo>
-                  <a:lnTo>
-                    <a:pt x="6374404" y="2995614"/>
-                  </a:lnTo>
-                  <a:lnTo>
-                    <a:pt x="6446027" y="3002591"/>
-                  </a:lnTo>
-                  <a:lnTo>
-                    <a:pt x="6517649" y="3009367"/>
-                  </a:lnTo>
-                  <a:lnTo>
-                    <a:pt x="6589272" y="3015950"/>
-                  </a:lnTo>
-                  <a:lnTo>
-                    <a:pt x="6660894" y="3022344"/>
-                  </a:lnTo>
-                  <a:lnTo>
-                    <a:pt x="6732517" y="3028554"/>
-                  </a:lnTo>
-                  <a:lnTo>
-                    <a:pt x="6804139" y="3034587"/>
-                  </a:lnTo>
-                  <a:lnTo>
-                    <a:pt x="6875762" y="3040447"/>
-                  </a:lnTo>
-                  <a:lnTo>
-                    <a:pt x="6947385" y="3046138"/>
-                  </a:lnTo>
-                  <a:lnTo>
-                    <a:pt x="7019007" y="3051667"/>
-                  </a:lnTo>
-                  <a:lnTo>
-                    <a:pt x="7090630" y="3057037"/>
+                    <a:pt x="70344" y="33504"/>
+                  </a:lnTo>
+                  <a:lnTo>
+                    <a:pt x="140688" y="66047"/>
+                  </a:lnTo>
+                  <a:lnTo>
+                    <a:pt x="211033" y="97658"/>
+                  </a:lnTo>
+                  <a:lnTo>
+                    <a:pt x="281377" y="128363"/>
+                  </a:lnTo>
+                  <a:lnTo>
+                    <a:pt x="351722" y="158188"/>
+                  </a:lnTo>
+                  <a:lnTo>
+                    <a:pt x="422066" y="187158"/>
+                  </a:lnTo>
+                  <a:lnTo>
+                    <a:pt x="492411" y="215297"/>
+                  </a:lnTo>
+                  <a:lnTo>
+                    <a:pt x="562755" y="242630"/>
+                  </a:lnTo>
+                  <a:lnTo>
+                    <a:pt x="633100" y="269179"/>
+                  </a:lnTo>
+                  <a:lnTo>
+                    <a:pt x="703444" y="294968"/>
+                  </a:lnTo>
+                  <a:lnTo>
+                    <a:pt x="773789" y="320017"/>
+                  </a:lnTo>
+                  <a:lnTo>
+                    <a:pt x="844133" y="344349"/>
+                  </a:lnTo>
+                  <a:lnTo>
+                    <a:pt x="914478" y="367982"/>
+                  </a:lnTo>
+                  <a:lnTo>
+                    <a:pt x="984822" y="390939"/>
+                  </a:lnTo>
+                  <a:lnTo>
+                    <a:pt x="1055167" y="413237"/>
+                  </a:lnTo>
+                  <a:lnTo>
+                    <a:pt x="1125511" y="434897"/>
+                  </a:lnTo>
+                  <a:lnTo>
+                    <a:pt x="1195856" y="455935"/>
+                  </a:lnTo>
+                  <a:lnTo>
+                    <a:pt x="1266200" y="476371"/>
+                  </a:lnTo>
+                  <a:lnTo>
+                    <a:pt x="1336545" y="496220"/>
+                  </a:lnTo>
+                  <a:lnTo>
+                    <a:pt x="1406889" y="515501"/>
+                  </a:lnTo>
+                  <a:lnTo>
+                    <a:pt x="1477234" y="534229"/>
+                  </a:lnTo>
+                  <a:lnTo>
+                    <a:pt x="1547578" y="552420"/>
+                  </a:lnTo>
+                  <a:lnTo>
+                    <a:pt x="1617923" y="570090"/>
+                  </a:lnTo>
+                  <a:lnTo>
+                    <a:pt x="1688267" y="587254"/>
+                  </a:lnTo>
+                  <a:lnTo>
+                    <a:pt x="1758612" y="603925"/>
+                  </a:lnTo>
+                  <a:lnTo>
+                    <a:pt x="1828956" y="620119"/>
+                  </a:lnTo>
+                  <a:lnTo>
+                    <a:pt x="1899301" y="635848"/>
+                  </a:lnTo>
+                  <a:lnTo>
+                    <a:pt x="1969645" y="651127"/>
+                  </a:lnTo>
+                  <a:lnTo>
+                    <a:pt x="2039990" y="665967"/>
+                  </a:lnTo>
+                  <a:lnTo>
+                    <a:pt x="2110334" y="680383"/>
+                  </a:lnTo>
+                  <a:lnTo>
+                    <a:pt x="2180679" y="694385"/>
+                  </a:lnTo>
+                  <a:lnTo>
+                    <a:pt x="2251023" y="707985"/>
+                  </a:lnTo>
+                  <a:lnTo>
+                    <a:pt x="2321368" y="721196"/>
+                  </a:lnTo>
+                  <a:lnTo>
+                    <a:pt x="2391712" y="734028"/>
+                  </a:lnTo>
+                  <a:lnTo>
+                    <a:pt x="2462057" y="746493"/>
+                  </a:lnTo>
+                  <a:lnTo>
+                    <a:pt x="2532401" y="758600"/>
+                  </a:lnTo>
+                  <a:lnTo>
+                    <a:pt x="2602746" y="770360"/>
+                  </a:lnTo>
+                  <a:lnTo>
+                    <a:pt x="2673090" y="781783"/>
+                  </a:lnTo>
+                  <a:lnTo>
+                    <a:pt x="2743435" y="792879"/>
+                  </a:lnTo>
+                  <a:lnTo>
+                    <a:pt x="2813779" y="803656"/>
+                  </a:lnTo>
+                  <a:lnTo>
+                    <a:pt x="2884124" y="814125"/>
+                  </a:lnTo>
+                  <a:lnTo>
+                    <a:pt x="2954468" y="824293"/>
+                  </a:lnTo>
+                  <a:lnTo>
+                    <a:pt x="3024813" y="834171"/>
+                  </a:lnTo>
+                  <a:lnTo>
+                    <a:pt x="3095157" y="843765"/>
+                  </a:lnTo>
+                  <a:lnTo>
+                    <a:pt x="3165502" y="853084"/>
+                  </a:lnTo>
+                  <a:lnTo>
+                    <a:pt x="3235846" y="862135"/>
+                  </a:lnTo>
+                  <a:lnTo>
+                    <a:pt x="3306191" y="870928"/>
+                  </a:lnTo>
+                  <a:lnTo>
+                    <a:pt x="3376535" y="879468"/>
+                  </a:lnTo>
+                  <a:lnTo>
+                    <a:pt x="3446880" y="887764"/>
+                  </a:lnTo>
+                  <a:lnTo>
+                    <a:pt x="3517224" y="895822"/>
+                  </a:lnTo>
+                  <a:lnTo>
+                    <a:pt x="3587569" y="903649"/>
+                  </a:lnTo>
+                  <a:lnTo>
+                    <a:pt x="3657913" y="911251"/>
+                  </a:lnTo>
+                  <a:lnTo>
+                    <a:pt x="3728257" y="918636"/>
+                  </a:lnTo>
+                  <a:lnTo>
+                    <a:pt x="3798602" y="925809"/>
+                  </a:lnTo>
+                  <a:lnTo>
+                    <a:pt x="3868946" y="932776"/>
+                  </a:lnTo>
+                  <a:lnTo>
+                    <a:pt x="3939291" y="939544"/>
+                  </a:lnTo>
+                  <a:lnTo>
+                    <a:pt x="4009635" y="946117"/>
+                  </a:lnTo>
+                  <a:lnTo>
+                    <a:pt x="4079980" y="952503"/>
+                  </a:lnTo>
+                  <a:lnTo>
+                    <a:pt x="4150324" y="958705"/>
+                  </a:lnTo>
+                  <a:lnTo>
+                    <a:pt x="4220669" y="964729"/>
+                  </a:lnTo>
+                  <a:lnTo>
+                    <a:pt x="4291013" y="970581"/>
+                  </a:lnTo>
+                  <a:lnTo>
+                    <a:pt x="4361358" y="976265"/>
+                  </a:lnTo>
+                  <a:lnTo>
+                    <a:pt x="4431702" y="981786"/>
+                  </a:lnTo>
+                  <a:lnTo>
+                    <a:pt x="4502047" y="987149"/>
+                  </a:lnTo>
+                  <a:lnTo>
+                    <a:pt x="4572391" y="992358"/>
+                  </a:lnTo>
+                  <a:lnTo>
+                    <a:pt x="4642736" y="997418"/>
+                  </a:lnTo>
+                  <a:lnTo>
+                    <a:pt x="4713080" y="1002333"/>
+                  </a:lnTo>
+                  <a:lnTo>
+                    <a:pt x="4783425" y="1007107"/>
+                  </a:lnTo>
+                  <a:lnTo>
+                    <a:pt x="4853769" y="1011744"/>
+                  </a:lnTo>
+                  <a:lnTo>
+                    <a:pt x="4924114" y="1016248"/>
+                  </a:lnTo>
+                  <a:lnTo>
+                    <a:pt x="4994458" y="1020623"/>
+                  </a:lnTo>
+                  <a:lnTo>
+                    <a:pt x="5064803" y="1024873"/>
+                  </a:lnTo>
+                  <a:lnTo>
+                    <a:pt x="5135147" y="1029001"/>
+                  </a:lnTo>
+                  <a:lnTo>
+                    <a:pt x="5205492" y="1033010"/>
+                  </a:lnTo>
+                  <a:lnTo>
+                    <a:pt x="5275836" y="1036905"/>
+                  </a:lnTo>
+                  <a:lnTo>
+                    <a:pt x="5346181" y="1040688"/>
+                  </a:lnTo>
+                  <a:lnTo>
+                    <a:pt x="5416525" y="1044362"/>
+                  </a:lnTo>
+                  <a:lnTo>
+                    <a:pt x="5486870" y="1047932"/>
+                  </a:lnTo>
+                  <a:lnTo>
+                    <a:pt x="5557214" y="1051399"/>
+                  </a:lnTo>
+                  <a:lnTo>
+                    <a:pt x="5627559" y="1054766"/>
+                  </a:lnTo>
+                  <a:lnTo>
+                    <a:pt x="5697903" y="1058037"/>
+                  </a:lnTo>
+                  <a:lnTo>
+                    <a:pt x="5768248" y="1061214"/>
+                  </a:lnTo>
+                  <a:lnTo>
+                    <a:pt x="5838592" y="1064301"/>
+                  </a:lnTo>
+                  <a:lnTo>
+                    <a:pt x="5908937" y="1067298"/>
+                  </a:lnTo>
+                  <a:lnTo>
+                    <a:pt x="5979281" y="1070210"/>
+                  </a:lnTo>
+                  <a:lnTo>
+                    <a:pt x="6049626" y="1073038"/>
+                  </a:lnTo>
+                  <a:lnTo>
+                    <a:pt x="6119970" y="1075786"/>
+                  </a:lnTo>
+                  <a:lnTo>
+                    <a:pt x="6190315" y="1078454"/>
+                  </a:lnTo>
+                  <a:lnTo>
+                    <a:pt x="6260659" y="1081046"/>
+                  </a:lnTo>
+                  <a:lnTo>
+                    <a:pt x="6331004" y="1083564"/>
+                  </a:lnTo>
+                  <a:lnTo>
+                    <a:pt x="6401348" y="1086010"/>
+                  </a:lnTo>
+                  <a:lnTo>
+                    <a:pt x="6471693" y="1088385"/>
+                  </a:lnTo>
+                  <a:lnTo>
+                    <a:pt x="6542037" y="1090692"/>
+                  </a:lnTo>
+                  <a:lnTo>
+                    <a:pt x="6612382" y="1092934"/>
+                  </a:lnTo>
+                  <a:lnTo>
+                    <a:pt x="6682726" y="1095111"/>
+                  </a:lnTo>
+                  <a:lnTo>
+                    <a:pt x="6753071" y="1097225"/>
+                  </a:lnTo>
+                  <a:lnTo>
+                    <a:pt x="6823415" y="1099279"/>
+                  </a:lnTo>
+                  <a:lnTo>
+                    <a:pt x="6893760" y="1101274"/>
+                  </a:lnTo>
+                  <a:lnTo>
+                    <a:pt x="6964104" y="1103212"/>
                   </a:lnTo>
                 </a:path>
               </a:pathLst>
@@ -4484,27 +4519,27 @@
         </p:sp>
         <p:sp>
           <p:nvSpPr>
-            <p:cNvPr id="24" name="pl24"/>
+            <p:cNvPr id="25" name="pl25"/>
             <p:cNvSpPr/>
             <p:nvPr/>
           </p:nvSpPr>
           <p:spPr>
             <a:xfrm>
-              <a:off x="817517" y="4727786"/>
-              <a:ext cx="7799693" cy="0"/>
+              <a:off x="887106" y="3100960"/>
+              <a:ext cx="7660515" cy="0"/>
             </a:xfrm>
             <a:custGeom>
               <a:avLst/>
               <a:pathLst>
-                <a:path w="7799693" h="0">
+                <a:path w="7660515" h="0">
                   <a:moveTo>
                     <a:pt x="0" y="0"/>
                   </a:moveTo>
                   <a:lnTo>
-                    <a:pt x="7799693" y="0"/>
-                  </a:lnTo>
-                  <a:lnTo>
-                    <a:pt x="7799693" y="0"/>
+                    <a:pt x="7660515" y="0"/>
+                  </a:lnTo>
+                  <a:lnTo>
+                    <a:pt x="7660515" y="0"/>
                   </a:lnTo>
                 </a:path>
               </a:pathLst>
@@ -4527,21 +4562,21 @@
         </p:sp>
         <p:sp>
           <p:nvSpPr>
-            <p:cNvPr id="25" name="pl25"/>
+            <p:cNvPr id="26" name="pl26"/>
             <p:cNvSpPr/>
             <p:nvPr/>
           </p:nvSpPr>
           <p:spPr>
             <a:xfrm>
-              <a:off x="4526955" y="2073503"/>
-              <a:ext cx="0" cy="3649639"/>
+              <a:off x="4530353" y="2143092"/>
+              <a:ext cx="0" cy="1317069"/>
             </a:xfrm>
             <a:custGeom>
               <a:avLst/>
               <a:pathLst>
-                <a:path w="0" h="3649639">
+                <a:path w="0" h="1317069">
                   <a:moveTo>
-                    <a:pt x="0" y="3649639"/>
+                    <a:pt x="0" y="1317069"/>
                   </a:moveTo>
                   <a:lnTo>
                     <a:pt x="0" y="0"/>
@@ -4570,13 +4605,13 @@
         </p:sp>
         <p:sp>
           <p:nvSpPr>
-            <p:cNvPr id="26" name="tx26"/>
+            <p:cNvPr id="27" name="tx27"/>
             <p:cNvSpPr/>
             <p:nvPr/>
           </p:nvSpPr>
           <p:spPr>
             <a:xfrm>
-              <a:off x="692708" y="5517199"/>
+              <a:off x="762297" y="3360243"/>
               <a:ext cx="62179" cy="80101"/>
             </a:xfrm>
             <a:prstGeom prst="rect">
@@ -4616,13 +4651,13 @@
         </p:sp>
         <p:sp>
           <p:nvSpPr>
-            <p:cNvPr id="27" name="tx27"/>
+            <p:cNvPr id="28" name="tx28"/>
             <p:cNvSpPr/>
             <p:nvPr/>
           </p:nvSpPr>
           <p:spPr>
             <a:xfrm>
-              <a:off x="692708" y="4687735"/>
+              <a:off x="762297" y="3060909"/>
               <a:ext cx="62179" cy="80101"/>
             </a:xfrm>
             <a:prstGeom prst="rect">
@@ -4662,13 +4697,13 @@
         </p:sp>
         <p:sp>
           <p:nvSpPr>
-            <p:cNvPr id="28" name="tx28"/>
+            <p:cNvPr id="29" name="tx29"/>
             <p:cNvSpPr/>
             <p:nvPr/>
           </p:nvSpPr>
           <p:spPr>
             <a:xfrm>
-              <a:off x="692708" y="3858272"/>
+              <a:off x="762297" y="2761575"/>
               <a:ext cx="62179" cy="80101"/>
             </a:xfrm>
             <a:prstGeom prst="rect">
@@ -4708,13 +4743,13 @@
         </p:sp>
         <p:sp>
           <p:nvSpPr>
-            <p:cNvPr id="29" name="tx29"/>
+            <p:cNvPr id="30" name="tx30"/>
             <p:cNvSpPr/>
             <p:nvPr/>
           </p:nvSpPr>
           <p:spPr>
             <a:xfrm>
-              <a:off x="692708" y="3028808"/>
+              <a:off x="762297" y="2462242"/>
               <a:ext cx="62179" cy="80101"/>
             </a:xfrm>
             <a:prstGeom prst="rect">
@@ -4754,13 +4789,13 @@
         </p:sp>
         <p:sp>
           <p:nvSpPr>
-            <p:cNvPr id="30" name="tx30"/>
+            <p:cNvPr id="31" name="tx31"/>
             <p:cNvSpPr/>
             <p:nvPr/>
           </p:nvSpPr>
           <p:spPr>
             <a:xfrm>
-              <a:off x="692708" y="2199345"/>
+              <a:off x="762297" y="2162908"/>
               <a:ext cx="62179" cy="80101"/>
             </a:xfrm>
             <a:prstGeom prst="rect">
@@ -4800,13 +4835,13 @@
         </p:sp>
         <p:sp>
           <p:nvSpPr>
-            <p:cNvPr id="31" name="tx31"/>
+            <p:cNvPr id="32" name="tx32"/>
             <p:cNvSpPr/>
             <p:nvPr/>
           </p:nvSpPr>
           <p:spPr>
             <a:xfrm>
-              <a:off x="2421884" y="5785772"/>
+              <a:off x="2461403" y="3522791"/>
               <a:ext cx="161574" cy="80101"/>
             </a:xfrm>
             <a:prstGeom prst="rect">
@@ -4846,13 +4881,13 @@
         </p:sp>
         <p:sp>
           <p:nvSpPr>
-            <p:cNvPr id="32" name="tx32"/>
+            <p:cNvPr id="33" name="tx33"/>
             <p:cNvSpPr/>
             <p:nvPr/>
           </p:nvSpPr>
           <p:spPr>
             <a:xfrm>
-              <a:off x="4542539" y="5785772"/>
+              <a:off x="4545104" y="3522791"/>
               <a:ext cx="62179" cy="80101"/>
             </a:xfrm>
             <a:prstGeom prst="rect">
@@ -4892,13 +4927,13 @@
         </p:sp>
         <p:sp>
           <p:nvSpPr>
-            <p:cNvPr id="33" name="tx33"/>
+            <p:cNvPr id="34" name="tx34"/>
             <p:cNvSpPr/>
             <p:nvPr/>
           </p:nvSpPr>
           <p:spPr>
             <a:xfrm>
-              <a:off x="6582407" y="5785772"/>
+              <a:off x="6548017" y="3522791"/>
               <a:ext cx="124358" cy="80101"/>
             </a:xfrm>
             <a:prstGeom prst="rect">
@@ -4938,13 +4973,13 @@
         </p:sp>
         <p:sp>
           <p:nvSpPr>
-            <p:cNvPr id="34" name="tx34"/>
+            <p:cNvPr id="35" name="tx35"/>
             <p:cNvSpPr/>
             <p:nvPr/>
           </p:nvSpPr>
           <p:spPr>
             <a:xfrm>
-              <a:off x="2928340" y="5925448"/>
+              <a:off x="2928340" y="3662467"/>
               <a:ext cx="3578047" cy="100218"/>
             </a:xfrm>
             <a:prstGeom prst="rect">
@@ -4984,13 +5019,13 @@
         </p:sp>
         <p:sp>
           <p:nvSpPr>
-            <p:cNvPr id="35" name="tx35"/>
+            <p:cNvPr id="36" name="tx36"/>
             <p:cNvSpPr/>
             <p:nvPr/>
           </p:nvSpPr>
           <p:spPr>
             <a:xfrm rot="-5400000">
-              <a:off x="68446" y="3848213"/>
+              <a:off x="138035" y="2751517"/>
               <a:ext cx="1016904" cy="100218"/>
             </a:xfrm>
             <a:prstGeom prst="rect">
@@ -5030,13 +5065,13 @@
         </p:sp>
         <p:sp>
           <p:nvSpPr>
-            <p:cNvPr id="36" name="tx36"/>
+            <p:cNvPr id="37" name="tx37"/>
             <p:cNvSpPr/>
             <p:nvPr/>
           </p:nvSpPr>
           <p:spPr>
             <a:xfrm>
-              <a:off x="817517" y="1896563"/>
+              <a:off x="887106" y="1966152"/>
               <a:ext cx="6985375" cy="82021"/>
             </a:xfrm>
             <a:prstGeom prst="rect">
@@ -5076,13 +5111,3662 @@
         </p:sp>
         <p:sp>
           <p:nvSpPr>
-            <p:cNvPr id="37" name="tx37"/>
+            <p:cNvPr id="38" name="tx38"/>
             <p:cNvSpPr/>
             <p:nvPr/>
           </p:nvSpPr>
           <p:spPr>
             <a:xfrm>
-              <a:off x="817517" y="1669789"/>
+              <a:off x="887106" y="1739378"/>
+              <a:ext cx="2234793" cy="120152"/>
+            </a:xfrm>
+            <a:prstGeom prst="rect">
+              <a:avLst/>
+            </a:prstGeom>
+            <a:noFill/>
+          </p:spPr>
+          <p:txBody>
+            <a:bodyPr lIns="0" rIns="0" tIns="0" bIns="0" anchorCtr="1" anchor="ctr" wrap="none"/>
+            <a:lstStyle/>
+            <a:p>
+              <a:pPr algn="l" marL="0" marR="0" indent="0">
+                <a:lnSpc>
+                  <a:spcPts val="1320"/>
+                </a:lnSpc>
+                <a:spcBef>
+                  <a:spcPts val="0"/>
+                </a:spcBef>
+                <a:spcAft>
+                  <a:spcPts val="0"/>
+                </a:spcAft>
+              </a:pPr>
+              <a:r>
+                <a:rPr sz="1320">
+                  <a:solidFill>
+                    <a:srgbClr val="000000">
+                      <a:alpha val="100000"/>
+                    </a:srgbClr>
+                  </a:solidFill>
+                  <a:latin typeface="Helvetica"/>
+                  <a:cs typeface="Helvetica"/>
+                </a:rPr>
+                <a:t>Anemia Grade 3 (Carboplatin)</a:t>
+              </a:r>
+            </a:p>
+          </p:txBody>
+        </p:sp>
+        <p:sp>
+          <p:nvSpPr>
+            <p:cNvPr id="39" name="pl39"/>
+            <p:cNvSpPr/>
+            <p:nvPr/>
+          </p:nvSpPr>
+          <p:spPr>
+            <a:xfrm>
+              <a:off x="887106" y="5444019"/>
+              <a:ext cx="7660515" cy="0"/>
+            </a:xfrm>
+            <a:custGeom>
+              <a:avLst/>
+              <a:pathLst>
+                <a:path w="7660515" h="0">
+                  <a:moveTo>
+                    <a:pt x="0" y="0"/>
+                  </a:moveTo>
+                  <a:lnTo>
+                    <a:pt x="7660515" y="0"/>
+                  </a:lnTo>
+                  <a:lnTo>
+                    <a:pt x="7660515" y="0"/>
+                  </a:lnTo>
+                </a:path>
+              </a:pathLst>
+            </a:custGeom>
+            <a:ln w="6775" cap="flat">
+              <a:solidFill>
+                <a:srgbClr val="EBEBEB">
+                  <a:alpha val="100000"/>
+                </a:srgbClr>
+              </a:solidFill>
+              <a:prstDash val="solid"/>
+              <a:round/>
+            </a:ln>
+          </p:spPr>
+          <p:txBody>
+            <a:bodyPr/>
+            <a:lstStyle/>
+            <a:p/>
+          </p:txBody>
+        </p:sp>
+        <p:sp>
+          <p:nvSpPr>
+            <p:cNvPr id="40" name="pl40"/>
+            <p:cNvSpPr/>
+            <p:nvPr/>
+          </p:nvSpPr>
+          <p:spPr>
+            <a:xfrm>
+              <a:off x="887106" y="5144686"/>
+              <a:ext cx="7660515" cy="0"/>
+            </a:xfrm>
+            <a:custGeom>
+              <a:avLst/>
+              <a:pathLst>
+                <a:path w="7660515" h="0">
+                  <a:moveTo>
+                    <a:pt x="0" y="0"/>
+                  </a:moveTo>
+                  <a:lnTo>
+                    <a:pt x="7660515" y="0"/>
+                  </a:lnTo>
+                  <a:lnTo>
+                    <a:pt x="7660515" y="0"/>
+                  </a:lnTo>
+                </a:path>
+              </a:pathLst>
+            </a:custGeom>
+            <a:ln w="6775" cap="flat">
+              <a:solidFill>
+                <a:srgbClr val="EBEBEB">
+                  <a:alpha val="100000"/>
+                </a:srgbClr>
+              </a:solidFill>
+              <a:prstDash val="solid"/>
+              <a:round/>
+            </a:ln>
+          </p:spPr>
+          <p:txBody>
+            <a:bodyPr/>
+            <a:lstStyle/>
+            <a:p/>
+          </p:txBody>
+        </p:sp>
+        <p:sp>
+          <p:nvSpPr>
+            <p:cNvPr id="41" name="pl41"/>
+            <p:cNvSpPr/>
+            <p:nvPr/>
+          </p:nvSpPr>
+          <p:spPr>
+            <a:xfrm>
+              <a:off x="887106" y="4845352"/>
+              <a:ext cx="7660515" cy="0"/>
+            </a:xfrm>
+            <a:custGeom>
+              <a:avLst/>
+              <a:pathLst>
+                <a:path w="7660515" h="0">
+                  <a:moveTo>
+                    <a:pt x="0" y="0"/>
+                  </a:moveTo>
+                  <a:lnTo>
+                    <a:pt x="7660515" y="0"/>
+                  </a:lnTo>
+                  <a:lnTo>
+                    <a:pt x="7660515" y="0"/>
+                  </a:lnTo>
+                </a:path>
+              </a:pathLst>
+            </a:custGeom>
+            <a:ln w="6775" cap="flat">
+              <a:solidFill>
+                <a:srgbClr val="EBEBEB">
+                  <a:alpha val="100000"/>
+                </a:srgbClr>
+              </a:solidFill>
+              <a:prstDash val="solid"/>
+              <a:round/>
+            </a:ln>
+          </p:spPr>
+          <p:txBody>
+            <a:bodyPr/>
+            <a:lstStyle/>
+            <a:p/>
+          </p:txBody>
+        </p:sp>
+        <p:sp>
+          <p:nvSpPr>
+            <p:cNvPr id="42" name="pl42"/>
+            <p:cNvSpPr/>
+            <p:nvPr/>
+          </p:nvSpPr>
+          <p:spPr>
+            <a:xfrm>
+              <a:off x="887106" y="4546018"/>
+              <a:ext cx="7660515" cy="0"/>
+            </a:xfrm>
+            <a:custGeom>
+              <a:avLst/>
+              <a:pathLst>
+                <a:path w="7660515" h="0">
+                  <a:moveTo>
+                    <a:pt x="0" y="0"/>
+                  </a:moveTo>
+                  <a:lnTo>
+                    <a:pt x="7660515" y="0"/>
+                  </a:lnTo>
+                  <a:lnTo>
+                    <a:pt x="7660515" y="0"/>
+                  </a:lnTo>
+                </a:path>
+              </a:pathLst>
+            </a:custGeom>
+            <a:ln w="6775" cap="flat">
+              <a:solidFill>
+                <a:srgbClr val="EBEBEB">
+                  <a:alpha val="100000"/>
+                </a:srgbClr>
+              </a:solidFill>
+              <a:prstDash val="solid"/>
+              <a:round/>
+            </a:ln>
+          </p:spPr>
+          <p:txBody>
+            <a:bodyPr/>
+            <a:lstStyle/>
+            <a:p/>
+          </p:txBody>
+        </p:sp>
+        <p:sp>
+          <p:nvSpPr>
+            <p:cNvPr id="43" name="pl43"/>
+            <p:cNvSpPr/>
+            <p:nvPr/>
+          </p:nvSpPr>
+          <p:spPr>
+            <a:xfrm>
+              <a:off x="914987" y="4336484"/>
+              <a:ext cx="0" cy="1317069"/>
+            </a:xfrm>
+            <a:custGeom>
+              <a:avLst/>
+              <a:pathLst>
+                <a:path w="0" h="1317069">
+                  <a:moveTo>
+                    <a:pt x="0" y="1317069"/>
+                  </a:moveTo>
+                  <a:lnTo>
+                    <a:pt x="0" y="0"/>
+                  </a:lnTo>
+                  <a:lnTo>
+                    <a:pt x="0" y="0"/>
+                  </a:lnTo>
+                </a:path>
+              </a:pathLst>
+            </a:custGeom>
+            <a:ln w="6775" cap="flat">
+              <a:solidFill>
+                <a:srgbClr val="EBEBEB">
+                  <a:alpha val="100000"/>
+                </a:srgbClr>
+              </a:solidFill>
+              <a:prstDash val="solid"/>
+              <a:round/>
+            </a:ln>
+          </p:spPr>
+          <p:txBody>
+            <a:bodyPr/>
+            <a:lstStyle/>
+            <a:p/>
+          </p:txBody>
+        </p:sp>
+        <p:sp>
+          <p:nvSpPr>
+            <p:cNvPr id="44" name="pl44"/>
+            <p:cNvSpPr/>
+            <p:nvPr/>
+          </p:nvSpPr>
+          <p:spPr>
+            <a:xfrm>
+              <a:off x="1728588" y="4336484"/>
+              <a:ext cx="0" cy="1317069"/>
+            </a:xfrm>
+            <a:custGeom>
+              <a:avLst/>
+              <a:pathLst>
+                <a:path w="0" h="1317069">
+                  <a:moveTo>
+                    <a:pt x="0" y="1317069"/>
+                  </a:moveTo>
+                  <a:lnTo>
+                    <a:pt x="0" y="0"/>
+                  </a:lnTo>
+                  <a:lnTo>
+                    <a:pt x="0" y="0"/>
+                  </a:lnTo>
+                </a:path>
+              </a:pathLst>
+            </a:custGeom>
+            <a:ln w="6775" cap="flat">
+              <a:solidFill>
+                <a:srgbClr val="EBEBEB">
+                  <a:alpha val="100000"/>
+                </a:srgbClr>
+              </a:solidFill>
+              <a:prstDash val="solid"/>
+              <a:round/>
+            </a:ln>
+          </p:spPr>
+          <p:txBody>
+            <a:bodyPr/>
+            <a:lstStyle/>
+            <a:p/>
+          </p:txBody>
+        </p:sp>
+        <p:sp>
+          <p:nvSpPr>
+            <p:cNvPr id="45" name="pl45"/>
+            <p:cNvSpPr/>
+            <p:nvPr/>
+          </p:nvSpPr>
+          <p:spPr>
+            <a:xfrm>
+              <a:off x="2542190" y="4336484"/>
+              <a:ext cx="0" cy="1317069"/>
+            </a:xfrm>
+            <a:custGeom>
+              <a:avLst/>
+              <a:pathLst>
+                <a:path w="0" h="1317069">
+                  <a:moveTo>
+                    <a:pt x="0" y="1317069"/>
+                  </a:moveTo>
+                  <a:lnTo>
+                    <a:pt x="0" y="0"/>
+                  </a:lnTo>
+                  <a:lnTo>
+                    <a:pt x="0" y="0"/>
+                  </a:lnTo>
+                </a:path>
+              </a:pathLst>
+            </a:custGeom>
+            <a:ln w="6775" cap="flat">
+              <a:solidFill>
+                <a:srgbClr val="EBEBEB">
+                  <a:alpha val="100000"/>
+                </a:srgbClr>
+              </a:solidFill>
+              <a:prstDash val="solid"/>
+              <a:round/>
+            </a:ln>
+          </p:spPr>
+          <p:txBody>
+            <a:bodyPr/>
+            <a:lstStyle/>
+            <a:p/>
+          </p:txBody>
+        </p:sp>
+        <p:sp>
+          <p:nvSpPr>
+            <p:cNvPr id="46" name="pl46"/>
+            <p:cNvSpPr/>
+            <p:nvPr/>
+          </p:nvSpPr>
+          <p:spPr>
+            <a:xfrm>
+              <a:off x="3355791" y="4336484"/>
+              <a:ext cx="0" cy="1317069"/>
+            </a:xfrm>
+            <a:custGeom>
+              <a:avLst/>
+              <a:pathLst>
+                <a:path w="0" h="1317069">
+                  <a:moveTo>
+                    <a:pt x="0" y="1317069"/>
+                  </a:moveTo>
+                  <a:lnTo>
+                    <a:pt x="0" y="0"/>
+                  </a:lnTo>
+                  <a:lnTo>
+                    <a:pt x="0" y="0"/>
+                  </a:lnTo>
+                </a:path>
+              </a:pathLst>
+            </a:custGeom>
+            <a:ln w="6775" cap="flat">
+              <a:solidFill>
+                <a:srgbClr val="EBEBEB">
+                  <a:alpha val="100000"/>
+                </a:srgbClr>
+              </a:solidFill>
+              <a:prstDash val="solid"/>
+              <a:round/>
+            </a:ln>
+          </p:spPr>
+          <p:txBody>
+            <a:bodyPr/>
+            <a:lstStyle/>
+            <a:p/>
+          </p:txBody>
+        </p:sp>
+        <p:sp>
+          <p:nvSpPr>
+            <p:cNvPr id="47" name="pl47"/>
+            <p:cNvSpPr/>
+            <p:nvPr/>
+          </p:nvSpPr>
+          <p:spPr>
+            <a:xfrm>
+              <a:off x="4169393" y="4336484"/>
+              <a:ext cx="0" cy="1317069"/>
+            </a:xfrm>
+            <a:custGeom>
+              <a:avLst/>
+              <a:pathLst>
+                <a:path w="0" h="1317069">
+                  <a:moveTo>
+                    <a:pt x="0" y="1317069"/>
+                  </a:moveTo>
+                  <a:lnTo>
+                    <a:pt x="0" y="0"/>
+                  </a:lnTo>
+                  <a:lnTo>
+                    <a:pt x="0" y="0"/>
+                  </a:lnTo>
+                </a:path>
+              </a:pathLst>
+            </a:custGeom>
+            <a:ln w="6775" cap="flat">
+              <a:solidFill>
+                <a:srgbClr val="EBEBEB">
+                  <a:alpha val="100000"/>
+                </a:srgbClr>
+              </a:solidFill>
+              <a:prstDash val="solid"/>
+              <a:round/>
+            </a:ln>
+          </p:spPr>
+          <p:txBody>
+            <a:bodyPr/>
+            <a:lstStyle/>
+            <a:p/>
+          </p:txBody>
+        </p:sp>
+        <p:sp>
+          <p:nvSpPr>
+            <p:cNvPr id="48" name="pl48"/>
+            <p:cNvSpPr/>
+            <p:nvPr/>
+          </p:nvSpPr>
+          <p:spPr>
+            <a:xfrm>
+              <a:off x="4982994" y="4336484"/>
+              <a:ext cx="0" cy="1317069"/>
+            </a:xfrm>
+            <a:custGeom>
+              <a:avLst/>
+              <a:pathLst>
+                <a:path w="0" h="1317069">
+                  <a:moveTo>
+                    <a:pt x="0" y="1317069"/>
+                  </a:moveTo>
+                  <a:lnTo>
+                    <a:pt x="0" y="0"/>
+                  </a:lnTo>
+                  <a:lnTo>
+                    <a:pt x="0" y="0"/>
+                  </a:lnTo>
+                </a:path>
+              </a:pathLst>
+            </a:custGeom>
+            <a:ln w="6775" cap="flat">
+              <a:solidFill>
+                <a:srgbClr val="EBEBEB">
+                  <a:alpha val="100000"/>
+                </a:srgbClr>
+              </a:solidFill>
+              <a:prstDash val="solid"/>
+              <a:round/>
+            </a:ln>
+          </p:spPr>
+          <p:txBody>
+            <a:bodyPr/>
+            <a:lstStyle/>
+            <a:p/>
+          </p:txBody>
+        </p:sp>
+        <p:sp>
+          <p:nvSpPr>
+            <p:cNvPr id="49" name="pl49"/>
+            <p:cNvSpPr/>
+            <p:nvPr/>
+          </p:nvSpPr>
+          <p:spPr>
+            <a:xfrm>
+              <a:off x="5796595" y="4336484"/>
+              <a:ext cx="0" cy="1317069"/>
+            </a:xfrm>
+            <a:custGeom>
+              <a:avLst/>
+              <a:pathLst>
+                <a:path w="0" h="1317069">
+                  <a:moveTo>
+                    <a:pt x="0" y="1317069"/>
+                  </a:moveTo>
+                  <a:lnTo>
+                    <a:pt x="0" y="0"/>
+                  </a:lnTo>
+                  <a:lnTo>
+                    <a:pt x="0" y="0"/>
+                  </a:lnTo>
+                </a:path>
+              </a:pathLst>
+            </a:custGeom>
+            <a:ln w="6775" cap="flat">
+              <a:solidFill>
+                <a:srgbClr val="EBEBEB">
+                  <a:alpha val="100000"/>
+                </a:srgbClr>
+              </a:solidFill>
+              <a:prstDash val="solid"/>
+              <a:round/>
+            </a:ln>
+          </p:spPr>
+          <p:txBody>
+            <a:bodyPr/>
+            <a:lstStyle/>
+            <a:p/>
+          </p:txBody>
+        </p:sp>
+        <p:sp>
+          <p:nvSpPr>
+            <p:cNvPr id="50" name="pl50"/>
+            <p:cNvSpPr/>
+            <p:nvPr/>
+          </p:nvSpPr>
+          <p:spPr>
+            <a:xfrm>
+              <a:off x="6610197" y="4336484"/>
+              <a:ext cx="0" cy="1317069"/>
+            </a:xfrm>
+            <a:custGeom>
+              <a:avLst/>
+              <a:pathLst>
+                <a:path w="0" h="1317069">
+                  <a:moveTo>
+                    <a:pt x="0" y="1317069"/>
+                  </a:moveTo>
+                  <a:lnTo>
+                    <a:pt x="0" y="0"/>
+                  </a:lnTo>
+                  <a:lnTo>
+                    <a:pt x="0" y="0"/>
+                  </a:lnTo>
+                </a:path>
+              </a:pathLst>
+            </a:custGeom>
+            <a:ln w="6775" cap="flat">
+              <a:solidFill>
+                <a:srgbClr val="EBEBEB">
+                  <a:alpha val="100000"/>
+                </a:srgbClr>
+              </a:solidFill>
+              <a:prstDash val="solid"/>
+              <a:round/>
+            </a:ln>
+          </p:spPr>
+          <p:txBody>
+            <a:bodyPr/>
+            <a:lstStyle/>
+            <a:p/>
+          </p:txBody>
+        </p:sp>
+        <p:sp>
+          <p:nvSpPr>
+            <p:cNvPr id="51" name="pl51"/>
+            <p:cNvSpPr/>
+            <p:nvPr/>
+          </p:nvSpPr>
+          <p:spPr>
+            <a:xfrm>
+              <a:off x="7423798" y="4336484"/>
+              <a:ext cx="0" cy="1317069"/>
+            </a:xfrm>
+            <a:custGeom>
+              <a:avLst/>
+              <a:pathLst>
+                <a:path w="0" h="1317069">
+                  <a:moveTo>
+                    <a:pt x="0" y="1317069"/>
+                  </a:moveTo>
+                  <a:lnTo>
+                    <a:pt x="0" y="0"/>
+                  </a:lnTo>
+                  <a:lnTo>
+                    <a:pt x="0" y="0"/>
+                  </a:lnTo>
+                </a:path>
+              </a:pathLst>
+            </a:custGeom>
+            <a:ln w="6775" cap="flat">
+              <a:solidFill>
+                <a:srgbClr val="EBEBEB">
+                  <a:alpha val="100000"/>
+                </a:srgbClr>
+              </a:solidFill>
+              <a:prstDash val="solid"/>
+              <a:round/>
+            </a:ln>
+          </p:spPr>
+          <p:txBody>
+            <a:bodyPr/>
+            <a:lstStyle/>
+            <a:p/>
+          </p:txBody>
+        </p:sp>
+        <p:sp>
+          <p:nvSpPr>
+            <p:cNvPr id="52" name="pl52"/>
+            <p:cNvSpPr/>
+            <p:nvPr/>
+          </p:nvSpPr>
+          <p:spPr>
+            <a:xfrm>
+              <a:off x="8237399" y="4336484"/>
+              <a:ext cx="0" cy="1317069"/>
+            </a:xfrm>
+            <a:custGeom>
+              <a:avLst/>
+              <a:pathLst>
+                <a:path w="0" h="1317069">
+                  <a:moveTo>
+                    <a:pt x="0" y="1317069"/>
+                  </a:moveTo>
+                  <a:lnTo>
+                    <a:pt x="0" y="0"/>
+                  </a:lnTo>
+                  <a:lnTo>
+                    <a:pt x="0" y="0"/>
+                  </a:lnTo>
+                </a:path>
+              </a:pathLst>
+            </a:custGeom>
+            <a:ln w="6775" cap="flat">
+              <a:solidFill>
+                <a:srgbClr val="EBEBEB">
+                  <a:alpha val="100000"/>
+                </a:srgbClr>
+              </a:solidFill>
+              <a:prstDash val="solid"/>
+              <a:round/>
+            </a:ln>
+          </p:spPr>
+          <p:txBody>
+            <a:bodyPr/>
+            <a:lstStyle/>
+            <a:p/>
+          </p:txBody>
+        </p:sp>
+        <p:sp>
+          <p:nvSpPr>
+            <p:cNvPr id="53" name="pl53"/>
+            <p:cNvSpPr/>
+            <p:nvPr/>
+          </p:nvSpPr>
+          <p:spPr>
+            <a:xfrm>
+              <a:off x="887106" y="5593686"/>
+              <a:ext cx="7660515" cy="0"/>
+            </a:xfrm>
+            <a:custGeom>
+              <a:avLst/>
+              <a:pathLst>
+                <a:path w="7660515" h="0">
+                  <a:moveTo>
+                    <a:pt x="0" y="0"/>
+                  </a:moveTo>
+                  <a:lnTo>
+                    <a:pt x="7660515" y="0"/>
+                  </a:lnTo>
+                  <a:lnTo>
+                    <a:pt x="7660515" y="0"/>
+                  </a:lnTo>
+                </a:path>
+              </a:pathLst>
+            </a:custGeom>
+            <a:ln w="13550" cap="flat">
+              <a:solidFill>
+                <a:srgbClr val="EBEBEB">
+                  <a:alpha val="100000"/>
+                </a:srgbClr>
+              </a:solidFill>
+              <a:prstDash val="solid"/>
+              <a:round/>
+            </a:ln>
+          </p:spPr>
+          <p:txBody>
+            <a:bodyPr/>
+            <a:lstStyle/>
+            <a:p/>
+          </p:txBody>
+        </p:sp>
+        <p:sp>
+          <p:nvSpPr>
+            <p:cNvPr id="54" name="pl54"/>
+            <p:cNvSpPr/>
+            <p:nvPr/>
+          </p:nvSpPr>
+          <p:spPr>
+            <a:xfrm>
+              <a:off x="887106" y="5294352"/>
+              <a:ext cx="7660515" cy="0"/>
+            </a:xfrm>
+            <a:custGeom>
+              <a:avLst/>
+              <a:pathLst>
+                <a:path w="7660515" h="0">
+                  <a:moveTo>
+                    <a:pt x="0" y="0"/>
+                  </a:moveTo>
+                  <a:lnTo>
+                    <a:pt x="7660515" y="0"/>
+                  </a:lnTo>
+                  <a:lnTo>
+                    <a:pt x="7660515" y="0"/>
+                  </a:lnTo>
+                </a:path>
+              </a:pathLst>
+            </a:custGeom>
+            <a:ln w="13550" cap="flat">
+              <a:solidFill>
+                <a:srgbClr val="EBEBEB">
+                  <a:alpha val="100000"/>
+                </a:srgbClr>
+              </a:solidFill>
+              <a:prstDash val="solid"/>
+              <a:round/>
+            </a:ln>
+          </p:spPr>
+          <p:txBody>
+            <a:bodyPr/>
+            <a:lstStyle/>
+            <a:p/>
+          </p:txBody>
+        </p:sp>
+        <p:sp>
+          <p:nvSpPr>
+            <p:cNvPr id="55" name="pl55"/>
+            <p:cNvSpPr/>
+            <p:nvPr/>
+          </p:nvSpPr>
+          <p:spPr>
+            <a:xfrm>
+              <a:off x="887106" y="4995019"/>
+              <a:ext cx="7660515" cy="0"/>
+            </a:xfrm>
+            <a:custGeom>
+              <a:avLst/>
+              <a:pathLst>
+                <a:path w="7660515" h="0">
+                  <a:moveTo>
+                    <a:pt x="0" y="0"/>
+                  </a:moveTo>
+                  <a:lnTo>
+                    <a:pt x="7660515" y="0"/>
+                  </a:lnTo>
+                  <a:lnTo>
+                    <a:pt x="7660515" y="0"/>
+                  </a:lnTo>
+                </a:path>
+              </a:pathLst>
+            </a:custGeom>
+            <a:ln w="13550" cap="flat">
+              <a:solidFill>
+                <a:srgbClr val="EBEBEB">
+                  <a:alpha val="100000"/>
+                </a:srgbClr>
+              </a:solidFill>
+              <a:prstDash val="solid"/>
+              <a:round/>
+            </a:ln>
+          </p:spPr>
+          <p:txBody>
+            <a:bodyPr/>
+            <a:lstStyle/>
+            <a:p/>
+          </p:txBody>
+        </p:sp>
+        <p:sp>
+          <p:nvSpPr>
+            <p:cNvPr id="56" name="pl56"/>
+            <p:cNvSpPr/>
+            <p:nvPr/>
+          </p:nvSpPr>
+          <p:spPr>
+            <a:xfrm>
+              <a:off x="887106" y="4695685"/>
+              <a:ext cx="7660515" cy="0"/>
+            </a:xfrm>
+            <a:custGeom>
+              <a:avLst/>
+              <a:pathLst>
+                <a:path w="7660515" h="0">
+                  <a:moveTo>
+                    <a:pt x="0" y="0"/>
+                  </a:moveTo>
+                  <a:lnTo>
+                    <a:pt x="7660515" y="0"/>
+                  </a:lnTo>
+                  <a:lnTo>
+                    <a:pt x="7660515" y="0"/>
+                  </a:lnTo>
+                </a:path>
+              </a:pathLst>
+            </a:custGeom>
+            <a:ln w="13550" cap="flat">
+              <a:solidFill>
+                <a:srgbClr val="EBEBEB">
+                  <a:alpha val="100000"/>
+                </a:srgbClr>
+              </a:solidFill>
+              <a:prstDash val="solid"/>
+              <a:round/>
+            </a:ln>
+          </p:spPr>
+          <p:txBody>
+            <a:bodyPr/>
+            <a:lstStyle/>
+            <a:p/>
+          </p:txBody>
+        </p:sp>
+        <p:sp>
+          <p:nvSpPr>
+            <p:cNvPr id="57" name="pl57"/>
+            <p:cNvSpPr/>
+            <p:nvPr/>
+          </p:nvSpPr>
+          <p:spPr>
+            <a:xfrm>
+              <a:off x="887106" y="4396351"/>
+              <a:ext cx="7660515" cy="0"/>
+            </a:xfrm>
+            <a:custGeom>
+              <a:avLst/>
+              <a:pathLst>
+                <a:path w="7660515" h="0">
+                  <a:moveTo>
+                    <a:pt x="0" y="0"/>
+                  </a:moveTo>
+                  <a:lnTo>
+                    <a:pt x="7660515" y="0"/>
+                  </a:lnTo>
+                  <a:lnTo>
+                    <a:pt x="7660515" y="0"/>
+                  </a:lnTo>
+                </a:path>
+              </a:pathLst>
+            </a:custGeom>
+            <a:ln w="13550" cap="flat">
+              <a:solidFill>
+                <a:srgbClr val="EBEBEB">
+                  <a:alpha val="100000"/>
+                </a:srgbClr>
+              </a:solidFill>
+              <a:prstDash val="solid"/>
+              <a:round/>
+            </a:ln>
+          </p:spPr>
+          <p:txBody>
+            <a:bodyPr/>
+            <a:lstStyle/>
+            <a:p/>
+          </p:txBody>
+        </p:sp>
+        <p:sp>
+          <p:nvSpPr>
+            <p:cNvPr id="58" name="pl58"/>
+            <p:cNvSpPr/>
+            <p:nvPr/>
+          </p:nvSpPr>
+          <p:spPr>
+            <a:xfrm>
+              <a:off x="1321788" y="4336484"/>
+              <a:ext cx="0" cy="1317069"/>
+            </a:xfrm>
+            <a:custGeom>
+              <a:avLst/>
+              <a:pathLst>
+                <a:path w="0" h="1317069">
+                  <a:moveTo>
+                    <a:pt x="0" y="1317069"/>
+                  </a:moveTo>
+                  <a:lnTo>
+                    <a:pt x="0" y="0"/>
+                  </a:lnTo>
+                  <a:lnTo>
+                    <a:pt x="0" y="0"/>
+                  </a:lnTo>
+                </a:path>
+              </a:pathLst>
+            </a:custGeom>
+            <a:ln w="13550" cap="flat">
+              <a:solidFill>
+                <a:srgbClr val="EBEBEB">
+                  <a:alpha val="100000"/>
+                </a:srgbClr>
+              </a:solidFill>
+              <a:prstDash val="solid"/>
+              <a:round/>
+            </a:ln>
+          </p:spPr>
+          <p:txBody>
+            <a:bodyPr/>
+            <a:lstStyle/>
+            <a:p/>
+          </p:txBody>
+        </p:sp>
+        <p:sp>
+          <p:nvSpPr>
+            <p:cNvPr id="59" name="pl59"/>
+            <p:cNvSpPr/>
+            <p:nvPr/>
+          </p:nvSpPr>
+          <p:spPr>
+            <a:xfrm>
+              <a:off x="2135389" y="4336484"/>
+              <a:ext cx="0" cy="1317069"/>
+            </a:xfrm>
+            <a:custGeom>
+              <a:avLst/>
+              <a:pathLst>
+                <a:path w="0" h="1317069">
+                  <a:moveTo>
+                    <a:pt x="0" y="1317069"/>
+                  </a:moveTo>
+                  <a:lnTo>
+                    <a:pt x="0" y="0"/>
+                  </a:lnTo>
+                  <a:lnTo>
+                    <a:pt x="0" y="0"/>
+                  </a:lnTo>
+                </a:path>
+              </a:pathLst>
+            </a:custGeom>
+            <a:ln w="13550" cap="flat">
+              <a:solidFill>
+                <a:srgbClr val="EBEBEB">
+                  <a:alpha val="100000"/>
+                </a:srgbClr>
+              </a:solidFill>
+              <a:prstDash val="solid"/>
+              <a:round/>
+            </a:ln>
+          </p:spPr>
+          <p:txBody>
+            <a:bodyPr/>
+            <a:lstStyle/>
+            <a:p/>
+          </p:txBody>
+        </p:sp>
+        <p:sp>
+          <p:nvSpPr>
+            <p:cNvPr id="60" name="pl60"/>
+            <p:cNvSpPr/>
+            <p:nvPr/>
+          </p:nvSpPr>
+          <p:spPr>
+            <a:xfrm>
+              <a:off x="2948991" y="4336484"/>
+              <a:ext cx="0" cy="1317069"/>
+            </a:xfrm>
+            <a:custGeom>
+              <a:avLst/>
+              <a:pathLst>
+                <a:path w="0" h="1317069">
+                  <a:moveTo>
+                    <a:pt x="0" y="1317069"/>
+                  </a:moveTo>
+                  <a:lnTo>
+                    <a:pt x="0" y="0"/>
+                  </a:lnTo>
+                  <a:lnTo>
+                    <a:pt x="0" y="0"/>
+                  </a:lnTo>
+                </a:path>
+              </a:pathLst>
+            </a:custGeom>
+            <a:ln w="13550" cap="flat">
+              <a:solidFill>
+                <a:srgbClr val="EBEBEB">
+                  <a:alpha val="100000"/>
+                </a:srgbClr>
+              </a:solidFill>
+              <a:prstDash val="solid"/>
+              <a:round/>
+            </a:ln>
+          </p:spPr>
+          <p:txBody>
+            <a:bodyPr/>
+            <a:lstStyle/>
+            <a:p/>
+          </p:txBody>
+        </p:sp>
+        <p:sp>
+          <p:nvSpPr>
+            <p:cNvPr id="61" name="pl61"/>
+            <p:cNvSpPr/>
+            <p:nvPr/>
+          </p:nvSpPr>
+          <p:spPr>
+            <a:xfrm>
+              <a:off x="3762592" y="4336484"/>
+              <a:ext cx="0" cy="1317069"/>
+            </a:xfrm>
+            <a:custGeom>
+              <a:avLst/>
+              <a:pathLst>
+                <a:path w="0" h="1317069">
+                  <a:moveTo>
+                    <a:pt x="0" y="1317069"/>
+                  </a:moveTo>
+                  <a:lnTo>
+                    <a:pt x="0" y="0"/>
+                  </a:lnTo>
+                  <a:lnTo>
+                    <a:pt x="0" y="0"/>
+                  </a:lnTo>
+                </a:path>
+              </a:pathLst>
+            </a:custGeom>
+            <a:ln w="13550" cap="flat">
+              <a:solidFill>
+                <a:srgbClr val="EBEBEB">
+                  <a:alpha val="100000"/>
+                </a:srgbClr>
+              </a:solidFill>
+              <a:prstDash val="solid"/>
+              <a:round/>
+            </a:ln>
+          </p:spPr>
+          <p:txBody>
+            <a:bodyPr/>
+            <a:lstStyle/>
+            <a:p/>
+          </p:txBody>
+        </p:sp>
+        <p:sp>
+          <p:nvSpPr>
+            <p:cNvPr id="62" name="pl62"/>
+            <p:cNvSpPr/>
+            <p:nvPr/>
+          </p:nvSpPr>
+          <p:spPr>
+            <a:xfrm>
+              <a:off x="4576193" y="4336484"/>
+              <a:ext cx="0" cy="1317069"/>
+            </a:xfrm>
+            <a:custGeom>
+              <a:avLst/>
+              <a:pathLst>
+                <a:path w="0" h="1317069">
+                  <a:moveTo>
+                    <a:pt x="0" y="1317069"/>
+                  </a:moveTo>
+                  <a:lnTo>
+                    <a:pt x="0" y="0"/>
+                  </a:lnTo>
+                  <a:lnTo>
+                    <a:pt x="0" y="0"/>
+                  </a:lnTo>
+                </a:path>
+              </a:pathLst>
+            </a:custGeom>
+            <a:ln w="13550" cap="flat">
+              <a:solidFill>
+                <a:srgbClr val="EBEBEB">
+                  <a:alpha val="100000"/>
+                </a:srgbClr>
+              </a:solidFill>
+              <a:prstDash val="solid"/>
+              <a:round/>
+            </a:ln>
+          </p:spPr>
+          <p:txBody>
+            <a:bodyPr/>
+            <a:lstStyle/>
+            <a:p/>
+          </p:txBody>
+        </p:sp>
+        <p:sp>
+          <p:nvSpPr>
+            <p:cNvPr id="63" name="pl63"/>
+            <p:cNvSpPr/>
+            <p:nvPr/>
+          </p:nvSpPr>
+          <p:spPr>
+            <a:xfrm>
+              <a:off x="5389795" y="4336484"/>
+              <a:ext cx="0" cy="1317069"/>
+            </a:xfrm>
+            <a:custGeom>
+              <a:avLst/>
+              <a:pathLst>
+                <a:path w="0" h="1317069">
+                  <a:moveTo>
+                    <a:pt x="0" y="1317069"/>
+                  </a:moveTo>
+                  <a:lnTo>
+                    <a:pt x="0" y="0"/>
+                  </a:lnTo>
+                  <a:lnTo>
+                    <a:pt x="0" y="0"/>
+                  </a:lnTo>
+                </a:path>
+              </a:pathLst>
+            </a:custGeom>
+            <a:ln w="13550" cap="flat">
+              <a:solidFill>
+                <a:srgbClr val="EBEBEB">
+                  <a:alpha val="100000"/>
+                </a:srgbClr>
+              </a:solidFill>
+              <a:prstDash val="solid"/>
+              <a:round/>
+            </a:ln>
+          </p:spPr>
+          <p:txBody>
+            <a:bodyPr/>
+            <a:lstStyle/>
+            <a:p/>
+          </p:txBody>
+        </p:sp>
+        <p:sp>
+          <p:nvSpPr>
+            <p:cNvPr id="64" name="pl64"/>
+            <p:cNvSpPr/>
+            <p:nvPr/>
+          </p:nvSpPr>
+          <p:spPr>
+            <a:xfrm>
+              <a:off x="6203396" y="4336484"/>
+              <a:ext cx="0" cy="1317069"/>
+            </a:xfrm>
+            <a:custGeom>
+              <a:avLst/>
+              <a:pathLst>
+                <a:path w="0" h="1317069">
+                  <a:moveTo>
+                    <a:pt x="0" y="1317069"/>
+                  </a:moveTo>
+                  <a:lnTo>
+                    <a:pt x="0" y="0"/>
+                  </a:lnTo>
+                  <a:lnTo>
+                    <a:pt x="0" y="0"/>
+                  </a:lnTo>
+                </a:path>
+              </a:pathLst>
+            </a:custGeom>
+            <a:ln w="13550" cap="flat">
+              <a:solidFill>
+                <a:srgbClr val="EBEBEB">
+                  <a:alpha val="100000"/>
+                </a:srgbClr>
+              </a:solidFill>
+              <a:prstDash val="solid"/>
+              <a:round/>
+            </a:ln>
+          </p:spPr>
+          <p:txBody>
+            <a:bodyPr/>
+            <a:lstStyle/>
+            <a:p/>
+          </p:txBody>
+        </p:sp>
+        <p:sp>
+          <p:nvSpPr>
+            <p:cNvPr id="65" name="pl65"/>
+            <p:cNvSpPr/>
+            <p:nvPr/>
+          </p:nvSpPr>
+          <p:spPr>
+            <a:xfrm>
+              <a:off x="7016997" y="4336484"/>
+              <a:ext cx="0" cy="1317069"/>
+            </a:xfrm>
+            <a:custGeom>
+              <a:avLst/>
+              <a:pathLst>
+                <a:path w="0" h="1317069">
+                  <a:moveTo>
+                    <a:pt x="0" y="1317069"/>
+                  </a:moveTo>
+                  <a:lnTo>
+                    <a:pt x="0" y="0"/>
+                  </a:lnTo>
+                  <a:lnTo>
+                    <a:pt x="0" y="0"/>
+                  </a:lnTo>
+                </a:path>
+              </a:pathLst>
+            </a:custGeom>
+            <a:ln w="13550" cap="flat">
+              <a:solidFill>
+                <a:srgbClr val="EBEBEB">
+                  <a:alpha val="100000"/>
+                </a:srgbClr>
+              </a:solidFill>
+              <a:prstDash val="solid"/>
+              <a:round/>
+            </a:ln>
+          </p:spPr>
+          <p:txBody>
+            <a:bodyPr/>
+            <a:lstStyle/>
+            <a:p/>
+          </p:txBody>
+        </p:sp>
+        <p:sp>
+          <p:nvSpPr>
+            <p:cNvPr id="66" name="pl66"/>
+            <p:cNvSpPr/>
+            <p:nvPr/>
+          </p:nvSpPr>
+          <p:spPr>
+            <a:xfrm>
+              <a:off x="7830599" y="4336484"/>
+              <a:ext cx="0" cy="1317069"/>
+            </a:xfrm>
+            <a:custGeom>
+              <a:avLst/>
+              <a:pathLst>
+                <a:path w="0" h="1317069">
+                  <a:moveTo>
+                    <a:pt x="0" y="1317069"/>
+                  </a:moveTo>
+                  <a:lnTo>
+                    <a:pt x="0" y="0"/>
+                  </a:lnTo>
+                  <a:lnTo>
+                    <a:pt x="0" y="0"/>
+                  </a:lnTo>
+                </a:path>
+              </a:pathLst>
+            </a:custGeom>
+            <a:ln w="13550" cap="flat">
+              <a:solidFill>
+                <a:srgbClr val="EBEBEB">
+                  <a:alpha val="100000"/>
+                </a:srgbClr>
+              </a:solidFill>
+              <a:prstDash val="solid"/>
+              <a:round/>
+            </a:ln>
+          </p:spPr>
+          <p:txBody>
+            <a:bodyPr/>
+            <a:lstStyle/>
+            <a:p/>
+          </p:txBody>
+        </p:sp>
+        <p:sp>
+          <p:nvSpPr>
+            <p:cNvPr id="67" name="pg67"/>
+            <p:cNvSpPr/>
+            <p:nvPr/>
+          </p:nvSpPr>
+          <p:spPr>
+            <a:xfrm>
+              <a:off x="1235312" y="4336484"/>
+              <a:ext cx="6964104" cy="1228331"/>
+            </a:xfrm>
+            <a:custGeom>
+              <a:avLst/>
+              <a:pathLst>
+                <a:path w="6964104" h="1228331">
+                  <a:moveTo>
+                    <a:pt x="1043843" y="0"/>
+                  </a:moveTo>
+                  <a:lnTo>
+                    <a:pt x="1055167" y="9212"/>
+                  </a:lnTo>
+                  <a:lnTo>
+                    <a:pt x="1125511" y="63934"/>
+                  </a:lnTo>
+                  <a:lnTo>
+                    <a:pt x="1195856" y="116257"/>
+                  </a:lnTo>
+                  <a:lnTo>
+                    <a:pt x="1266200" y="166285"/>
+                  </a:lnTo>
+                  <a:lnTo>
+                    <a:pt x="1336545" y="214120"/>
+                  </a:lnTo>
+                  <a:lnTo>
+                    <a:pt x="1406889" y="259858"/>
+                  </a:lnTo>
+                  <a:lnTo>
+                    <a:pt x="1477234" y="303589"/>
+                  </a:lnTo>
+                  <a:lnTo>
+                    <a:pt x="1547578" y="345404"/>
+                  </a:lnTo>
+                  <a:lnTo>
+                    <a:pt x="1617923" y="385384"/>
+                  </a:lnTo>
+                  <a:lnTo>
+                    <a:pt x="1688267" y="423612"/>
+                  </a:lnTo>
+                  <a:lnTo>
+                    <a:pt x="1758612" y="460163"/>
+                  </a:lnTo>
+                  <a:lnTo>
+                    <a:pt x="1828956" y="495112"/>
+                  </a:lnTo>
+                  <a:lnTo>
+                    <a:pt x="1899301" y="528529"/>
+                  </a:lnTo>
+                  <a:lnTo>
+                    <a:pt x="1969645" y="560480"/>
+                  </a:lnTo>
+                  <a:lnTo>
+                    <a:pt x="2039990" y="591030"/>
+                  </a:lnTo>
+                  <a:lnTo>
+                    <a:pt x="2110334" y="620240"/>
+                  </a:lnTo>
+                  <a:lnTo>
+                    <a:pt x="2180679" y="648170"/>
+                  </a:lnTo>
+                  <a:lnTo>
+                    <a:pt x="2251023" y="674875"/>
+                  </a:lnTo>
+                  <a:lnTo>
+                    <a:pt x="2321368" y="700409"/>
+                  </a:lnTo>
+                  <a:lnTo>
+                    <a:pt x="2391712" y="724823"/>
+                  </a:lnTo>
+                  <a:lnTo>
+                    <a:pt x="2462057" y="748167"/>
+                  </a:lnTo>
+                  <a:lnTo>
+                    <a:pt x="2532401" y="770487"/>
+                  </a:lnTo>
+                  <a:lnTo>
+                    <a:pt x="2602746" y="791829"/>
+                  </a:lnTo>
+                  <a:lnTo>
+                    <a:pt x="2673090" y="812235"/>
+                  </a:lnTo>
+                  <a:lnTo>
+                    <a:pt x="2743435" y="831746"/>
+                  </a:lnTo>
+                  <a:lnTo>
+                    <a:pt x="2813779" y="850401"/>
+                  </a:lnTo>
+                  <a:lnTo>
+                    <a:pt x="2884124" y="868239"/>
+                  </a:lnTo>
+                  <a:lnTo>
+                    <a:pt x="2954468" y="885294"/>
+                  </a:lnTo>
+                  <a:lnTo>
+                    <a:pt x="3024813" y="901602"/>
+                  </a:lnTo>
+                  <a:lnTo>
+                    <a:pt x="3095157" y="917194"/>
+                  </a:lnTo>
+                  <a:lnTo>
+                    <a:pt x="3165502" y="932103"/>
+                  </a:lnTo>
+                  <a:lnTo>
+                    <a:pt x="3235846" y="946358"/>
+                  </a:lnTo>
+                  <a:lnTo>
+                    <a:pt x="3306191" y="958499"/>
+                  </a:lnTo>
+                  <a:lnTo>
+                    <a:pt x="3376535" y="962453"/>
+                  </a:lnTo>
+                  <a:lnTo>
+                    <a:pt x="3446880" y="966355"/>
+                  </a:lnTo>
+                  <a:lnTo>
+                    <a:pt x="3517224" y="970205"/>
+                  </a:lnTo>
+                  <a:lnTo>
+                    <a:pt x="3587569" y="974004"/>
+                  </a:lnTo>
+                  <a:lnTo>
+                    <a:pt x="3657913" y="977753"/>
+                  </a:lnTo>
+                  <a:lnTo>
+                    <a:pt x="3728257" y="981452"/>
+                  </a:lnTo>
+                  <a:lnTo>
+                    <a:pt x="3798602" y="985102"/>
+                  </a:lnTo>
+                  <a:lnTo>
+                    <a:pt x="3868946" y="988704"/>
+                  </a:lnTo>
+                  <a:lnTo>
+                    <a:pt x="3939291" y="992258"/>
+                  </a:lnTo>
+                  <a:lnTo>
+                    <a:pt x="4009635" y="995765"/>
+                  </a:lnTo>
+                  <a:lnTo>
+                    <a:pt x="4079980" y="999226"/>
+                  </a:lnTo>
+                  <a:lnTo>
+                    <a:pt x="4150324" y="1002640"/>
+                  </a:lnTo>
+                  <a:lnTo>
+                    <a:pt x="4220669" y="1006010"/>
+                  </a:lnTo>
+                  <a:lnTo>
+                    <a:pt x="4291013" y="1009335"/>
+                  </a:lnTo>
+                  <a:lnTo>
+                    <a:pt x="4361358" y="1012616"/>
+                  </a:lnTo>
+                  <a:lnTo>
+                    <a:pt x="4431702" y="1015854"/>
+                  </a:lnTo>
+                  <a:lnTo>
+                    <a:pt x="4502047" y="1019048"/>
+                  </a:lnTo>
+                  <a:lnTo>
+                    <a:pt x="4572391" y="1022201"/>
+                  </a:lnTo>
+                  <a:lnTo>
+                    <a:pt x="4642736" y="1025312"/>
+                  </a:lnTo>
+                  <a:lnTo>
+                    <a:pt x="4713080" y="1028381"/>
+                  </a:lnTo>
+                  <a:lnTo>
+                    <a:pt x="4783425" y="1031410"/>
+                  </a:lnTo>
+                  <a:lnTo>
+                    <a:pt x="4853769" y="1034399"/>
+                  </a:lnTo>
+                  <a:lnTo>
+                    <a:pt x="4924114" y="1037348"/>
+                  </a:lnTo>
+                  <a:lnTo>
+                    <a:pt x="4994458" y="1040258"/>
+                  </a:lnTo>
+                  <a:lnTo>
+                    <a:pt x="5064803" y="1043130"/>
+                  </a:lnTo>
+                  <a:lnTo>
+                    <a:pt x="5135147" y="1045964"/>
+                  </a:lnTo>
+                  <a:lnTo>
+                    <a:pt x="5205492" y="1048760"/>
+                  </a:lnTo>
+                  <a:lnTo>
+                    <a:pt x="5275836" y="1051519"/>
+                  </a:lnTo>
+                  <a:lnTo>
+                    <a:pt x="5346181" y="1054242"/>
+                  </a:lnTo>
+                  <a:lnTo>
+                    <a:pt x="5416525" y="1056928"/>
+                  </a:lnTo>
+                  <a:lnTo>
+                    <a:pt x="5486870" y="1059579"/>
+                  </a:lnTo>
+                  <a:lnTo>
+                    <a:pt x="5557214" y="1062195"/>
+                  </a:lnTo>
+                  <a:lnTo>
+                    <a:pt x="5627559" y="1064777"/>
+                  </a:lnTo>
+                  <a:lnTo>
+                    <a:pt x="5697903" y="1067324"/>
+                  </a:lnTo>
+                  <a:lnTo>
+                    <a:pt x="5768248" y="1069837"/>
+                  </a:lnTo>
+                  <a:lnTo>
+                    <a:pt x="5838592" y="1072317"/>
+                  </a:lnTo>
+                  <a:lnTo>
+                    <a:pt x="5908937" y="1074765"/>
+                  </a:lnTo>
+                  <a:lnTo>
+                    <a:pt x="5979281" y="1077180"/>
+                  </a:lnTo>
+                  <a:lnTo>
+                    <a:pt x="6049626" y="1079562"/>
+                  </a:lnTo>
+                  <a:lnTo>
+                    <a:pt x="6119970" y="1081914"/>
+                  </a:lnTo>
+                  <a:lnTo>
+                    <a:pt x="6190315" y="1084234"/>
+                  </a:lnTo>
+                  <a:lnTo>
+                    <a:pt x="6260659" y="1086524"/>
+                  </a:lnTo>
+                  <a:lnTo>
+                    <a:pt x="6331004" y="1088783"/>
+                  </a:lnTo>
+                  <a:lnTo>
+                    <a:pt x="6401348" y="1091012"/>
+                  </a:lnTo>
+                  <a:lnTo>
+                    <a:pt x="6471693" y="1093212"/>
+                  </a:lnTo>
+                  <a:lnTo>
+                    <a:pt x="6542037" y="1095383"/>
+                  </a:lnTo>
+                  <a:lnTo>
+                    <a:pt x="6612382" y="1097525"/>
+                  </a:lnTo>
+                  <a:lnTo>
+                    <a:pt x="6682726" y="1099639"/>
+                  </a:lnTo>
+                  <a:lnTo>
+                    <a:pt x="6753071" y="1101724"/>
+                  </a:lnTo>
+                  <a:lnTo>
+                    <a:pt x="6823415" y="1103782"/>
+                  </a:lnTo>
+                  <a:lnTo>
+                    <a:pt x="6893760" y="1105813"/>
+                  </a:lnTo>
+                  <a:lnTo>
+                    <a:pt x="6964104" y="1107817"/>
+                  </a:lnTo>
+                  <a:lnTo>
+                    <a:pt x="6964104" y="1228331"/>
+                  </a:lnTo>
+                  <a:lnTo>
+                    <a:pt x="6893760" y="1227007"/>
+                  </a:lnTo>
+                  <a:lnTo>
+                    <a:pt x="6823415" y="1225622"/>
+                  </a:lnTo>
+                  <a:lnTo>
+                    <a:pt x="6753071" y="1224174"/>
+                  </a:lnTo>
+                  <a:lnTo>
+                    <a:pt x="6682726" y="1222659"/>
+                  </a:lnTo>
+                  <a:lnTo>
+                    <a:pt x="6612382" y="1221075"/>
+                  </a:lnTo>
+                  <a:lnTo>
+                    <a:pt x="6542037" y="1219418"/>
+                  </a:lnTo>
+                  <a:lnTo>
+                    <a:pt x="6471693" y="1217686"/>
+                  </a:lnTo>
+                  <a:lnTo>
+                    <a:pt x="6401348" y="1215873"/>
+                  </a:lnTo>
+                  <a:lnTo>
+                    <a:pt x="6331004" y="1213978"/>
+                  </a:lnTo>
+                  <a:lnTo>
+                    <a:pt x="6260659" y="1211996"/>
+                  </a:lnTo>
+                  <a:lnTo>
+                    <a:pt x="6190315" y="1209923"/>
+                  </a:lnTo>
+                  <a:lnTo>
+                    <a:pt x="6119970" y="1207755"/>
+                  </a:lnTo>
+                  <a:lnTo>
+                    <a:pt x="6049626" y="1205487"/>
+                  </a:lnTo>
+                  <a:lnTo>
+                    <a:pt x="5979281" y="1203115"/>
+                  </a:lnTo>
+                  <a:lnTo>
+                    <a:pt x="5908937" y="1200635"/>
+                  </a:lnTo>
+                  <a:lnTo>
+                    <a:pt x="5838592" y="1198041"/>
+                  </a:lnTo>
+                  <a:lnTo>
+                    <a:pt x="5768248" y="1195328"/>
+                  </a:lnTo>
+                  <a:lnTo>
+                    <a:pt x="5697903" y="1192490"/>
+                  </a:lnTo>
+                  <a:lnTo>
+                    <a:pt x="5627559" y="1189523"/>
+                  </a:lnTo>
+                  <a:lnTo>
+                    <a:pt x="5557214" y="1186419"/>
+                  </a:lnTo>
+                  <a:lnTo>
+                    <a:pt x="5486870" y="1183173"/>
+                  </a:lnTo>
+                  <a:lnTo>
+                    <a:pt x="5416525" y="1179778"/>
+                  </a:lnTo>
+                  <a:lnTo>
+                    <a:pt x="5346181" y="1176228"/>
+                  </a:lnTo>
+                  <a:lnTo>
+                    <a:pt x="5275836" y="1172514"/>
+                  </a:lnTo>
+                  <a:lnTo>
+                    <a:pt x="5205492" y="1168630"/>
+                  </a:lnTo>
+                  <a:lnTo>
+                    <a:pt x="5135147" y="1164569"/>
+                  </a:lnTo>
+                  <a:lnTo>
+                    <a:pt x="5064803" y="1160321"/>
+                  </a:lnTo>
+                  <a:lnTo>
+                    <a:pt x="4994458" y="1155878"/>
+                  </a:lnTo>
+                  <a:lnTo>
+                    <a:pt x="4924114" y="1151231"/>
+                  </a:lnTo>
+                  <a:lnTo>
+                    <a:pt x="4853769" y="1146371"/>
+                  </a:lnTo>
+                  <a:lnTo>
+                    <a:pt x="4783425" y="1141289"/>
+                  </a:lnTo>
+                  <a:lnTo>
+                    <a:pt x="4713080" y="1135973"/>
+                  </a:lnTo>
+                  <a:lnTo>
+                    <a:pt x="4642736" y="1130414"/>
+                  </a:lnTo>
+                  <a:lnTo>
+                    <a:pt x="4572391" y="1124599"/>
+                  </a:lnTo>
+                  <a:lnTo>
+                    <a:pt x="4502047" y="1118518"/>
+                  </a:lnTo>
+                  <a:lnTo>
+                    <a:pt x="4431702" y="1112158"/>
+                  </a:lnTo>
+                  <a:lnTo>
+                    <a:pt x="4361358" y="1105507"/>
+                  </a:lnTo>
+                  <a:lnTo>
+                    <a:pt x="4291013" y="1098550"/>
+                  </a:lnTo>
+                  <a:lnTo>
+                    <a:pt x="4220669" y="1091274"/>
+                  </a:lnTo>
+                  <a:lnTo>
+                    <a:pt x="4150324" y="1083665"/>
+                  </a:lnTo>
+                  <a:lnTo>
+                    <a:pt x="4079980" y="1075707"/>
+                  </a:lnTo>
+                  <a:lnTo>
+                    <a:pt x="4009635" y="1067384"/>
+                  </a:lnTo>
+                  <a:lnTo>
+                    <a:pt x="3939291" y="1058679"/>
+                  </a:lnTo>
+                  <a:lnTo>
+                    <a:pt x="3868946" y="1049575"/>
+                  </a:lnTo>
+                  <a:lnTo>
+                    <a:pt x="3798602" y="1040053"/>
+                  </a:lnTo>
+                  <a:lnTo>
+                    <a:pt x="3728257" y="1030095"/>
+                  </a:lnTo>
+                  <a:lnTo>
+                    <a:pt x="3657913" y="1019680"/>
+                  </a:lnTo>
+                  <a:lnTo>
+                    <a:pt x="3587569" y="1008788"/>
+                  </a:lnTo>
+                  <a:lnTo>
+                    <a:pt x="3517224" y="997395"/>
+                  </a:lnTo>
+                  <a:lnTo>
+                    <a:pt x="3446880" y="985481"/>
+                  </a:lnTo>
+                  <a:lnTo>
+                    <a:pt x="3376535" y="973020"/>
+                  </a:lnTo>
+                  <a:lnTo>
+                    <a:pt x="3306191" y="959988"/>
+                  </a:lnTo>
+                  <a:lnTo>
+                    <a:pt x="3235846" y="954493"/>
+                  </a:lnTo>
+                  <a:lnTo>
+                    <a:pt x="3165502" y="950432"/>
+                  </a:lnTo>
+                  <a:lnTo>
+                    <a:pt x="3095157" y="946317"/>
+                  </a:lnTo>
+                  <a:lnTo>
+                    <a:pt x="3024813" y="942146"/>
+                  </a:lnTo>
+                  <a:lnTo>
+                    <a:pt x="2954468" y="937920"/>
+                  </a:lnTo>
+                  <a:lnTo>
+                    <a:pt x="2884124" y="933637"/>
+                  </a:lnTo>
+                  <a:lnTo>
+                    <a:pt x="2813779" y="929296"/>
+                  </a:lnTo>
+                  <a:lnTo>
+                    <a:pt x="2743435" y="924898"/>
+                  </a:lnTo>
+                  <a:lnTo>
+                    <a:pt x="2673090" y="920440"/>
+                  </a:lnTo>
+                  <a:lnTo>
+                    <a:pt x="2602746" y="915922"/>
+                  </a:lnTo>
+                  <a:lnTo>
+                    <a:pt x="2532401" y="911344"/>
+                  </a:lnTo>
+                  <a:lnTo>
+                    <a:pt x="2462057" y="906705"/>
+                  </a:lnTo>
+                  <a:lnTo>
+                    <a:pt x="2391712" y="902003"/>
+                  </a:lnTo>
+                  <a:lnTo>
+                    <a:pt x="2321368" y="897238"/>
+                  </a:lnTo>
+                  <a:lnTo>
+                    <a:pt x="2251023" y="892409"/>
+                  </a:lnTo>
+                  <a:lnTo>
+                    <a:pt x="2180679" y="887516"/>
+                  </a:lnTo>
+                  <a:lnTo>
+                    <a:pt x="2110334" y="882556"/>
+                  </a:lnTo>
+                  <a:lnTo>
+                    <a:pt x="2039990" y="877531"/>
+                  </a:lnTo>
+                  <a:lnTo>
+                    <a:pt x="1969645" y="872438"/>
+                  </a:lnTo>
+                  <a:lnTo>
+                    <a:pt x="1899301" y="867276"/>
+                  </a:lnTo>
+                  <a:lnTo>
+                    <a:pt x="1828956" y="862045"/>
+                  </a:lnTo>
+                  <a:lnTo>
+                    <a:pt x="1758612" y="856744"/>
+                  </a:lnTo>
+                  <a:lnTo>
+                    <a:pt x="1688267" y="851372"/>
+                  </a:lnTo>
+                  <a:lnTo>
+                    <a:pt x="1617923" y="845928"/>
+                  </a:lnTo>
+                  <a:lnTo>
+                    <a:pt x="1547578" y="840411"/>
+                  </a:lnTo>
+                  <a:lnTo>
+                    <a:pt x="1477234" y="834820"/>
+                  </a:lnTo>
+                  <a:lnTo>
+                    <a:pt x="1406889" y="829154"/>
+                  </a:lnTo>
+                  <a:lnTo>
+                    <a:pt x="1336545" y="823412"/>
+                  </a:lnTo>
+                  <a:lnTo>
+                    <a:pt x="1266200" y="817593"/>
+                  </a:lnTo>
+                  <a:lnTo>
+                    <a:pt x="1195856" y="811696"/>
+                  </a:lnTo>
+                  <a:lnTo>
+                    <a:pt x="1125511" y="805719"/>
+                  </a:lnTo>
+                  <a:lnTo>
+                    <a:pt x="1055167" y="799663"/>
+                  </a:lnTo>
+                  <a:lnTo>
+                    <a:pt x="984822" y="793525"/>
+                  </a:lnTo>
+                  <a:lnTo>
+                    <a:pt x="914478" y="787305"/>
+                  </a:lnTo>
+                  <a:lnTo>
+                    <a:pt x="844133" y="781002"/>
+                  </a:lnTo>
+                  <a:lnTo>
+                    <a:pt x="773789" y="774614"/>
+                  </a:lnTo>
+                  <a:lnTo>
+                    <a:pt x="703444" y="768140"/>
+                  </a:lnTo>
+                  <a:lnTo>
+                    <a:pt x="633100" y="761579"/>
+                  </a:lnTo>
+                  <a:lnTo>
+                    <a:pt x="562755" y="754931"/>
+                  </a:lnTo>
+                  <a:lnTo>
+                    <a:pt x="492411" y="748193"/>
+                  </a:lnTo>
+                  <a:lnTo>
+                    <a:pt x="422066" y="741365"/>
+                  </a:lnTo>
+                  <a:lnTo>
+                    <a:pt x="351722" y="734445"/>
+                  </a:lnTo>
+                  <a:lnTo>
+                    <a:pt x="281377" y="727433"/>
+                  </a:lnTo>
+                  <a:lnTo>
+                    <a:pt x="211033" y="720326"/>
+                  </a:lnTo>
+                  <a:lnTo>
+                    <a:pt x="140688" y="713124"/>
+                  </a:lnTo>
+                  <a:lnTo>
+                    <a:pt x="70344" y="705825"/>
+                  </a:lnTo>
+                  <a:lnTo>
+                    <a:pt x="0" y="698429"/>
+                  </a:lnTo>
+                  <a:close/>
+                </a:path>
+              </a:pathLst>
+            </a:custGeom>
+            <a:solidFill>
+              <a:srgbClr val="FF8C00">
+                <a:alpha val="20000"/>
+              </a:srgbClr>
+            </a:solidFill>
+          </p:spPr>
+          <p:txBody>
+            <a:bodyPr/>
+            <a:lstStyle/>
+            <a:p/>
+          </p:txBody>
+        </p:sp>
+        <p:sp>
+          <p:nvSpPr>
+            <p:cNvPr id="68" name="pl68"/>
+            <p:cNvSpPr/>
+            <p:nvPr/>
+          </p:nvSpPr>
+          <p:spPr>
+            <a:xfrm>
+              <a:off x="2279156" y="4336484"/>
+              <a:ext cx="5920260" cy="1107817"/>
+            </a:xfrm>
+            <a:custGeom>
+              <a:avLst/>
+              <a:pathLst>
+                <a:path w="5920260" h="1107817">
+                  <a:moveTo>
+                    <a:pt x="0" y="0"/>
+                  </a:moveTo>
+                  <a:lnTo>
+                    <a:pt x="11323" y="9212"/>
+                  </a:lnTo>
+                  <a:lnTo>
+                    <a:pt x="81667" y="63934"/>
+                  </a:lnTo>
+                  <a:lnTo>
+                    <a:pt x="152012" y="116257"/>
+                  </a:lnTo>
+                  <a:lnTo>
+                    <a:pt x="222356" y="166285"/>
+                  </a:lnTo>
+                  <a:lnTo>
+                    <a:pt x="292701" y="214120"/>
+                  </a:lnTo>
+                  <a:lnTo>
+                    <a:pt x="363045" y="259858"/>
+                  </a:lnTo>
+                  <a:lnTo>
+                    <a:pt x="433390" y="303589"/>
+                  </a:lnTo>
+                  <a:lnTo>
+                    <a:pt x="503734" y="345404"/>
+                  </a:lnTo>
+                  <a:lnTo>
+                    <a:pt x="574079" y="385384"/>
+                  </a:lnTo>
+                  <a:lnTo>
+                    <a:pt x="644423" y="423612"/>
+                  </a:lnTo>
+                  <a:lnTo>
+                    <a:pt x="714768" y="460163"/>
+                  </a:lnTo>
+                  <a:lnTo>
+                    <a:pt x="785112" y="495112"/>
+                  </a:lnTo>
+                  <a:lnTo>
+                    <a:pt x="855457" y="528529"/>
+                  </a:lnTo>
+                  <a:lnTo>
+                    <a:pt x="925801" y="560480"/>
+                  </a:lnTo>
+                  <a:lnTo>
+                    <a:pt x="996146" y="591030"/>
+                  </a:lnTo>
+                  <a:lnTo>
+                    <a:pt x="1066490" y="620240"/>
+                  </a:lnTo>
+                  <a:lnTo>
+                    <a:pt x="1136835" y="648170"/>
+                  </a:lnTo>
+                  <a:lnTo>
+                    <a:pt x="1207179" y="674875"/>
+                  </a:lnTo>
+                  <a:lnTo>
+                    <a:pt x="1277524" y="700409"/>
+                  </a:lnTo>
+                  <a:lnTo>
+                    <a:pt x="1347868" y="724823"/>
+                  </a:lnTo>
+                  <a:lnTo>
+                    <a:pt x="1418213" y="748167"/>
+                  </a:lnTo>
+                  <a:lnTo>
+                    <a:pt x="1488557" y="770487"/>
+                  </a:lnTo>
+                  <a:lnTo>
+                    <a:pt x="1558902" y="791829"/>
+                  </a:lnTo>
+                  <a:lnTo>
+                    <a:pt x="1629246" y="812235"/>
+                  </a:lnTo>
+                  <a:lnTo>
+                    <a:pt x="1699591" y="831746"/>
+                  </a:lnTo>
+                  <a:lnTo>
+                    <a:pt x="1769935" y="850401"/>
+                  </a:lnTo>
+                  <a:lnTo>
+                    <a:pt x="1840280" y="868239"/>
+                  </a:lnTo>
+                  <a:lnTo>
+                    <a:pt x="1910624" y="885294"/>
+                  </a:lnTo>
+                  <a:lnTo>
+                    <a:pt x="1980969" y="901602"/>
+                  </a:lnTo>
+                  <a:lnTo>
+                    <a:pt x="2051313" y="917194"/>
+                  </a:lnTo>
+                  <a:lnTo>
+                    <a:pt x="2121658" y="932103"/>
+                  </a:lnTo>
+                  <a:lnTo>
+                    <a:pt x="2192002" y="946358"/>
+                  </a:lnTo>
+                  <a:lnTo>
+                    <a:pt x="2262347" y="958499"/>
+                  </a:lnTo>
+                  <a:lnTo>
+                    <a:pt x="2332691" y="962453"/>
+                  </a:lnTo>
+                  <a:lnTo>
+                    <a:pt x="2403036" y="966355"/>
+                  </a:lnTo>
+                  <a:lnTo>
+                    <a:pt x="2473380" y="970205"/>
+                  </a:lnTo>
+                  <a:lnTo>
+                    <a:pt x="2543725" y="974004"/>
+                  </a:lnTo>
+                  <a:lnTo>
+                    <a:pt x="2614069" y="977753"/>
+                  </a:lnTo>
+                  <a:lnTo>
+                    <a:pt x="2684414" y="981452"/>
+                  </a:lnTo>
+                  <a:lnTo>
+                    <a:pt x="2754758" y="985102"/>
+                  </a:lnTo>
+                  <a:lnTo>
+                    <a:pt x="2825103" y="988704"/>
+                  </a:lnTo>
+                  <a:lnTo>
+                    <a:pt x="2895447" y="992258"/>
+                  </a:lnTo>
+                  <a:lnTo>
+                    <a:pt x="2965792" y="995765"/>
+                  </a:lnTo>
+                  <a:lnTo>
+                    <a:pt x="3036136" y="999226"/>
+                  </a:lnTo>
+                  <a:lnTo>
+                    <a:pt x="3106481" y="1002640"/>
+                  </a:lnTo>
+                  <a:lnTo>
+                    <a:pt x="3176825" y="1006010"/>
+                  </a:lnTo>
+                  <a:lnTo>
+                    <a:pt x="3247170" y="1009335"/>
+                  </a:lnTo>
+                  <a:lnTo>
+                    <a:pt x="3317514" y="1012616"/>
+                  </a:lnTo>
+                  <a:lnTo>
+                    <a:pt x="3387858" y="1015854"/>
+                  </a:lnTo>
+                  <a:lnTo>
+                    <a:pt x="3458203" y="1019048"/>
+                  </a:lnTo>
+                  <a:lnTo>
+                    <a:pt x="3528547" y="1022201"/>
+                  </a:lnTo>
+                  <a:lnTo>
+                    <a:pt x="3598892" y="1025312"/>
+                  </a:lnTo>
+                  <a:lnTo>
+                    <a:pt x="3669236" y="1028381"/>
+                  </a:lnTo>
+                  <a:lnTo>
+                    <a:pt x="3739581" y="1031410"/>
+                  </a:lnTo>
+                  <a:lnTo>
+                    <a:pt x="3809925" y="1034399"/>
+                  </a:lnTo>
+                  <a:lnTo>
+                    <a:pt x="3880270" y="1037348"/>
+                  </a:lnTo>
+                  <a:lnTo>
+                    <a:pt x="3950614" y="1040258"/>
+                  </a:lnTo>
+                  <a:lnTo>
+                    <a:pt x="4020959" y="1043130"/>
+                  </a:lnTo>
+                  <a:lnTo>
+                    <a:pt x="4091303" y="1045964"/>
+                  </a:lnTo>
+                  <a:lnTo>
+                    <a:pt x="4161648" y="1048760"/>
+                  </a:lnTo>
+                  <a:lnTo>
+                    <a:pt x="4231992" y="1051519"/>
+                  </a:lnTo>
+                  <a:lnTo>
+                    <a:pt x="4302337" y="1054242"/>
+                  </a:lnTo>
+                  <a:lnTo>
+                    <a:pt x="4372681" y="1056928"/>
+                  </a:lnTo>
+                  <a:lnTo>
+                    <a:pt x="4443026" y="1059579"/>
+                  </a:lnTo>
+                  <a:lnTo>
+                    <a:pt x="4513370" y="1062195"/>
+                  </a:lnTo>
+                  <a:lnTo>
+                    <a:pt x="4583715" y="1064777"/>
+                  </a:lnTo>
+                  <a:lnTo>
+                    <a:pt x="4654059" y="1067324"/>
+                  </a:lnTo>
+                  <a:lnTo>
+                    <a:pt x="4724404" y="1069837"/>
+                  </a:lnTo>
+                  <a:lnTo>
+                    <a:pt x="4794748" y="1072317"/>
+                  </a:lnTo>
+                  <a:lnTo>
+                    <a:pt x="4865093" y="1074765"/>
+                  </a:lnTo>
+                  <a:lnTo>
+                    <a:pt x="4935437" y="1077180"/>
+                  </a:lnTo>
+                  <a:lnTo>
+                    <a:pt x="5005782" y="1079562"/>
+                  </a:lnTo>
+                  <a:lnTo>
+                    <a:pt x="5076126" y="1081914"/>
+                  </a:lnTo>
+                  <a:lnTo>
+                    <a:pt x="5146471" y="1084234"/>
+                  </a:lnTo>
+                  <a:lnTo>
+                    <a:pt x="5216815" y="1086524"/>
+                  </a:lnTo>
+                  <a:lnTo>
+                    <a:pt x="5287160" y="1088783"/>
+                  </a:lnTo>
+                  <a:lnTo>
+                    <a:pt x="5357504" y="1091012"/>
+                  </a:lnTo>
+                  <a:lnTo>
+                    <a:pt x="5427849" y="1093212"/>
+                  </a:lnTo>
+                  <a:lnTo>
+                    <a:pt x="5498193" y="1095383"/>
+                  </a:lnTo>
+                  <a:lnTo>
+                    <a:pt x="5568538" y="1097525"/>
+                  </a:lnTo>
+                  <a:lnTo>
+                    <a:pt x="5638882" y="1099639"/>
+                  </a:lnTo>
+                  <a:lnTo>
+                    <a:pt x="5709227" y="1101724"/>
+                  </a:lnTo>
+                  <a:lnTo>
+                    <a:pt x="5779571" y="1103782"/>
+                  </a:lnTo>
+                  <a:lnTo>
+                    <a:pt x="5849916" y="1105813"/>
+                  </a:lnTo>
+                  <a:lnTo>
+                    <a:pt x="5920260" y="1107817"/>
+                  </a:lnTo>
+                </a:path>
+              </a:pathLst>
+            </a:custGeom>
+          </p:spPr>
+          <p:txBody>
+            <a:bodyPr/>
+            <a:lstStyle/>
+            <a:p/>
+          </p:txBody>
+        </p:sp>
+        <p:sp>
+          <p:nvSpPr>
+            <p:cNvPr id="69" name="pl69"/>
+            <p:cNvSpPr/>
+            <p:nvPr/>
+          </p:nvSpPr>
+          <p:spPr>
+            <a:xfrm>
+              <a:off x="1235312" y="5034913"/>
+              <a:ext cx="6964104" cy="529901"/>
+            </a:xfrm>
+            <a:custGeom>
+              <a:avLst/>
+              <a:pathLst>
+                <a:path w="6964104" h="529901">
+                  <a:moveTo>
+                    <a:pt x="6964104" y="529901"/>
+                  </a:moveTo>
+                  <a:lnTo>
+                    <a:pt x="6893760" y="528577"/>
+                  </a:lnTo>
+                  <a:lnTo>
+                    <a:pt x="6823415" y="527193"/>
+                  </a:lnTo>
+                  <a:lnTo>
+                    <a:pt x="6753071" y="525744"/>
+                  </a:lnTo>
+                  <a:lnTo>
+                    <a:pt x="6682726" y="524230"/>
+                  </a:lnTo>
+                  <a:lnTo>
+                    <a:pt x="6612382" y="522646"/>
+                  </a:lnTo>
+                  <a:lnTo>
+                    <a:pt x="6542037" y="520989"/>
+                  </a:lnTo>
+                  <a:lnTo>
+                    <a:pt x="6471693" y="519256"/>
+                  </a:lnTo>
+                  <a:lnTo>
+                    <a:pt x="6401348" y="517444"/>
+                  </a:lnTo>
+                  <a:lnTo>
+                    <a:pt x="6331004" y="515549"/>
+                  </a:lnTo>
+                  <a:lnTo>
+                    <a:pt x="6260659" y="513567"/>
+                  </a:lnTo>
+                  <a:lnTo>
+                    <a:pt x="6190315" y="511493"/>
+                  </a:lnTo>
+                  <a:lnTo>
+                    <a:pt x="6119970" y="509325"/>
+                  </a:lnTo>
+                  <a:lnTo>
+                    <a:pt x="6049626" y="507058"/>
+                  </a:lnTo>
+                  <a:lnTo>
+                    <a:pt x="5979281" y="504686"/>
+                  </a:lnTo>
+                  <a:lnTo>
+                    <a:pt x="5908937" y="502206"/>
+                  </a:lnTo>
+                  <a:lnTo>
+                    <a:pt x="5838592" y="499612"/>
+                  </a:lnTo>
+                  <a:lnTo>
+                    <a:pt x="5768248" y="496898"/>
+                  </a:lnTo>
+                  <a:lnTo>
+                    <a:pt x="5697903" y="494061"/>
+                  </a:lnTo>
+                  <a:lnTo>
+                    <a:pt x="5627559" y="491093"/>
+                  </a:lnTo>
+                  <a:lnTo>
+                    <a:pt x="5557214" y="487990"/>
+                  </a:lnTo>
+                  <a:lnTo>
+                    <a:pt x="5486870" y="484744"/>
+                  </a:lnTo>
+                  <a:lnTo>
+                    <a:pt x="5416525" y="481349"/>
+                  </a:lnTo>
+                  <a:lnTo>
+                    <a:pt x="5346181" y="477798"/>
+                  </a:lnTo>
+                  <a:lnTo>
+                    <a:pt x="5275836" y="474085"/>
+                  </a:lnTo>
+                  <a:lnTo>
+                    <a:pt x="5205492" y="470201"/>
+                  </a:lnTo>
+                  <a:lnTo>
+                    <a:pt x="5135147" y="466139"/>
+                  </a:lnTo>
+                  <a:lnTo>
+                    <a:pt x="5064803" y="461891"/>
+                  </a:lnTo>
+                  <a:lnTo>
+                    <a:pt x="4994458" y="457448"/>
+                  </a:lnTo>
+                  <a:lnTo>
+                    <a:pt x="4924114" y="452802"/>
+                  </a:lnTo>
+                  <a:lnTo>
+                    <a:pt x="4853769" y="447942"/>
+                  </a:lnTo>
+                  <a:lnTo>
+                    <a:pt x="4783425" y="442859"/>
+                  </a:lnTo>
+                  <a:lnTo>
+                    <a:pt x="4713080" y="437544"/>
+                  </a:lnTo>
+                  <a:lnTo>
+                    <a:pt x="4642736" y="431984"/>
+                  </a:lnTo>
+                  <a:lnTo>
+                    <a:pt x="4572391" y="426170"/>
+                  </a:lnTo>
+                  <a:lnTo>
+                    <a:pt x="4502047" y="420089"/>
+                  </a:lnTo>
+                  <a:lnTo>
+                    <a:pt x="4431702" y="413729"/>
+                  </a:lnTo>
+                  <a:lnTo>
+                    <a:pt x="4361358" y="407077"/>
+                  </a:lnTo>
+                  <a:lnTo>
+                    <a:pt x="4291013" y="400121"/>
+                  </a:lnTo>
+                  <a:lnTo>
+                    <a:pt x="4220669" y="392845"/>
+                  </a:lnTo>
+                  <a:lnTo>
+                    <a:pt x="4150324" y="385236"/>
+                  </a:lnTo>
+                  <a:lnTo>
+                    <a:pt x="4079980" y="377278"/>
+                  </a:lnTo>
+                  <a:lnTo>
+                    <a:pt x="4009635" y="368954"/>
+                  </a:lnTo>
+                  <a:lnTo>
+                    <a:pt x="3939291" y="360250"/>
+                  </a:lnTo>
+                  <a:lnTo>
+                    <a:pt x="3868946" y="351145"/>
+                  </a:lnTo>
+                  <a:lnTo>
+                    <a:pt x="3798602" y="341624"/>
+                  </a:lnTo>
+                  <a:lnTo>
+                    <a:pt x="3728257" y="331666"/>
+                  </a:lnTo>
+                  <a:lnTo>
+                    <a:pt x="3657913" y="321251"/>
+                  </a:lnTo>
+                  <a:lnTo>
+                    <a:pt x="3587569" y="310358"/>
+                  </a:lnTo>
+                  <a:lnTo>
+                    <a:pt x="3517224" y="298966"/>
+                  </a:lnTo>
+                  <a:lnTo>
+                    <a:pt x="3446880" y="287052"/>
+                  </a:lnTo>
+                  <a:lnTo>
+                    <a:pt x="3376535" y="274591"/>
+                  </a:lnTo>
+                  <a:lnTo>
+                    <a:pt x="3306191" y="261558"/>
+                  </a:lnTo>
+                  <a:lnTo>
+                    <a:pt x="3235846" y="256063"/>
+                  </a:lnTo>
+                  <a:lnTo>
+                    <a:pt x="3165502" y="252002"/>
+                  </a:lnTo>
+                  <a:lnTo>
+                    <a:pt x="3095157" y="247887"/>
+                  </a:lnTo>
+                  <a:lnTo>
+                    <a:pt x="3024813" y="243717"/>
+                  </a:lnTo>
+                  <a:lnTo>
+                    <a:pt x="2954468" y="239490"/>
+                  </a:lnTo>
+                  <a:lnTo>
+                    <a:pt x="2884124" y="235207"/>
+                  </a:lnTo>
+                  <a:lnTo>
+                    <a:pt x="2813779" y="230867"/>
+                  </a:lnTo>
+                  <a:lnTo>
+                    <a:pt x="2743435" y="226468"/>
+                  </a:lnTo>
+                  <a:lnTo>
+                    <a:pt x="2673090" y="222010"/>
+                  </a:lnTo>
+                  <a:lnTo>
+                    <a:pt x="2602746" y="217493"/>
+                  </a:lnTo>
+                  <a:lnTo>
+                    <a:pt x="2532401" y="212915"/>
+                  </a:lnTo>
+                  <a:lnTo>
+                    <a:pt x="2462057" y="208275"/>
+                  </a:lnTo>
+                  <a:lnTo>
+                    <a:pt x="2391712" y="203573"/>
+                  </a:lnTo>
+                  <a:lnTo>
+                    <a:pt x="2321368" y="198809"/>
+                  </a:lnTo>
+                  <a:lnTo>
+                    <a:pt x="2251023" y="193980"/>
+                  </a:lnTo>
+                  <a:lnTo>
+                    <a:pt x="2180679" y="189086"/>
+                  </a:lnTo>
+                  <a:lnTo>
+                    <a:pt x="2110334" y="184127"/>
+                  </a:lnTo>
+                  <a:lnTo>
+                    <a:pt x="2039990" y="179101"/>
+                  </a:lnTo>
+                  <a:lnTo>
+                    <a:pt x="1969645" y="174008"/>
+                  </a:lnTo>
+                  <a:lnTo>
+                    <a:pt x="1899301" y="168847"/>
+                  </a:lnTo>
+                  <a:lnTo>
+                    <a:pt x="1828956" y="163616"/>
+                  </a:lnTo>
+                  <a:lnTo>
+                    <a:pt x="1758612" y="158315"/>
+                  </a:lnTo>
+                  <a:lnTo>
+                    <a:pt x="1688267" y="152943"/>
+                  </a:lnTo>
+                  <a:lnTo>
+                    <a:pt x="1617923" y="147499"/>
+                  </a:lnTo>
+                  <a:lnTo>
+                    <a:pt x="1547578" y="141982"/>
+                  </a:lnTo>
+                  <a:lnTo>
+                    <a:pt x="1477234" y="136391"/>
+                  </a:lnTo>
+                  <a:lnTo>
+                    <a:pt x="1406889" y="130725"/>
+                  </a:lnTo>
+                  <a:lnTo>
+                    <a:pt x="1336545" y="124983"/>
+                  </a:lnTo>
+                  <a:lnTo>
+                    <a:pt x="1266200" y="119164"/>
+                  </a:lnTo>
+                  <a:lnTo>
+                    <a:pt x="1195856" y="113266"/>
+                  </a:lnTo>
+                  <a:lnTo>
+                    <a:pt x="1125511" y="107290"/>
+                  </a:lnTo>
+                  <a:lnTo>
+                    <a:pt x="1055167" y="101234"/>
+                  </a:lnTo>
+                  <a:lnTo>
+                    <a:pt x="984822" y="95096"/>
+                  </a:lnTo>
+                  <a:lnTo>
+                    <a:pt x="914478" y="88876"/>
+                  </a:lnTo>
+                  <a:lnTo>
+                    <a:pt x="844133" y="82572"/>
+                  </a:lnTo>
+                  <a:lnTo>
+                    <a:pt x="773789" y="76184"/>
+                  </a:lnTo>
+                  <a:lnTo>
+                    <a:pt x="703444" y="69711"/>
+                  </a:lnTo>
+                  <a:lnTo>
+                    <a:pt x="633100" y="63150"/>
+                  </a:lnTo>
+                  <a:lnTo>
+                    <a:pt x="562755" y="56502"/>
+                  </a:lnTo>
+                  <a:lnTo>
+                    <a:pt x="492411" y="49764"/>
+                  </a:lnTo>
+                  <a:lnTo>
+                    <a:pt x="422066" y="42936"/>
+                  </a:lnTo>
+                  <a:lnTo>
+                    <a:pt x="351722" y="36016"/>
+                  </a:lnTo>
+                  <a:lnTo>
+                    <a:pt x="281377" y="29003"/>
+                  </a:lnTo>
+                  <a:lnTo>
+                    <a:pt x="211033" y="21897"/>
+                  </a:lnTo>
+                  <a:lnTo>
+                    <a:pt x="140688" y="14695"/>
+                  </a:lnTo>
+                  <a:lnTo>
+                    <a:pt x="70344" y="7396"/>
+                  </a:lnTo>
+                  <a:lnTo>
+                    <a:pt x="0" y="0"/>
+                  </a:lnTo>
+                </a:path>
+              </a:pathLst>
+            </a:custGeom>
+          </p:spPr>
+          <p:txBody>
+            <a:bodyPr/>
+            <a:lstStyle/>
+            <a:p/>
+          </p:txBody>
+        </p:sp>
+        <p:sp>
+          <p:nvSpPr>
+            <p:cNvPr id="70" name="pl70"/>
+            <p:cNvSpPr/>
+            <p:nvPr/>
+          </p:nvSpPr>
+          <p:spPr>
+            <a:xfrm>
+              <a:off x="1235312" y="4424801"/>
+              <a:ext cx="6964104" cy="1103212"/>
+            </a:xfrm>
+            <a:custGeom>
+              <a:avLst/>
+              <a:pathLst>
+                <a:path w="6964104" h="1103212">
+                  <a:moveTo>
+                    <a:pt x="0" y="0"/>
+                  </a:moveTo>
+                  <a:lnTo>
+                    <a:pt x="70344" y="33504"/>
+                  </a:lnTo>
+                  <a:lnTo>
+                    <a:pt x="140688" y="66047"/>
+                  </a:lnTo>
+                  <a:lnTo>
+                    <a:pt x="211033" y="97658"/>
+                  </a:lnTo>
+                  <a:lnTo>
+                    <a:pt x="281377" y="128363"/>
+                  </a:lnTo>
+                  <a:lnTo>
+                    <a:pt x="351722" y="158188"/>
+                  </a:lnTo>
+                  <a:lnTo>
+                    <a:pt x="422066" y="187158"/>
+                  </a:lnTo>
+                  <a:lnTo>
+                    <a:pt x="492411" y="215297"/>
+                  </a:lnTo>
+                  <a:lnTo>
+                    <a:pt x="562755" y="242630"/>
+                  </a:lnTo>
+                  <a:lnTo>
+                    <a:pt x="633100" y="269179"/>
+                  </a:lnTo>
+                  <a:lnTo>
+                    <a:pt x="703444" y="294968"/>
+                  </a:lnTo>
+                  <a:lnTo>
+                    <a:pt x="773789" y="320017"/>
+                  </a:lnTo>
+                  <a:lnTo>
+                    <a:pt x="844133" y="344349"/>
+                  </a:lnTo>
+                  <a:lnTo>
+                    <a:pt x="914478" y="367982"/>
+                  </a:lnTo>
+                  <a:lnTo>
+                    <a:pt x="984822" y="390939"/>
+                  </a:lnTo>
+                  <a:lnTo>
+                    <a:pt x="1055167" y="413237"/>
+                  </a:lnTo>
+                  <a:lnTo>
+                    <a:pt x="1125511" y="434897"/>
+                  </a:lnTo>
+                  <a:lnTo>
+                    <a:pt x="1195856" y="455935"/>
+                  </a:lnTo>
+                  <a:lnTo>
+                    <a:pt x="1266200" y="476371"/>
+                  </a:lnTo>
+                  <a:lnTo>
+                    <a:pt x="1336545" y="496220"/>
+                  </a:lnTo>
+                  <a:lnTo>
+                    <a:pt x="1406889" y="515501"/>
+                  </a:lnTo>
+                  <a:lnTo>
+                    <a:pt x="1477234" y="534229"/>
+                  </a:lnTo>
+                  <a:lnTo>
+                    <a:pt x="1547578" y="552420"/>
+                  </a:lnTo>
+                  <a:lnTo>
+                    <a:pt x="1617923" y="570090"/>
+                  </a:lnTo>
+                  <a:lnTo>
+                    <a:pt x="1688267" y="587254"/>
+                  </a:lnTo>
+                  <a:lnTo>
+                    <a:pt x="1758612" y="603925"/>
+                  </a:lnTo>
+                  <a:lnTo>
+                    <a:pt x="1828956" y="620119"/>
+                  </a:lnTo>
+                  <a:lnTo>
+                    <a:pt x="1899301" y="635848"/>
+                  </a:lnTo>
+                  <a:lnTo>
+                    <a:pt x="1969645" y="651127"/>
+                  </a:lnTo>
+                  <a:lnTo>
+                    <a:pt x="2039990" y="665967"/>
+                  </a:lnTo>
+                  <a:lnTo>
+                    <a:pt x="2110334" y="680383"/>
+                  </a:lnTo>
+                  <a:lnTo>
+                    <a:pt x="2180679" y="694385"/>
+                  </a:lnTo>
+                  <a:lnTo>
+                    <a:pt x="2251023" y="707985"/>
+                  </a:lnTo>
+                  <a:lnTo>
+                    <a:pt x="2321368" y="721196"/>
+                  </a:lnTo>
+                  <a:lnTo>
+                    <a:pt x="2391712" y="734028"/>
+                  </a:lnTo>
+                  <a:lnTo>
+                    <a:pt x="2462057" y="746493"/>
+                  </a:lnTo>
+                  <a:lnTo>
+                    <a:pt x="2532401" y="758600"/>
+                  </a:lnTo>
+                  <a:lnTo>
+                    <a:pt x="2602746" y="770360"/>
+                  </a:lnTo>
+                  <a:lnTo>
+                    <a:pt x="2673090" y="781783"/>
+                  </a:lnTo>
+                  <a:lnTo>
+                    <a:pt x="2743435" y="792879"/>
+                  </a:lnTo>
+                  <a:lnTo>
+                    <a:pt x="2813779" y="803656"/>
+                  </a:lnTo>
+                  <a:lnTo>
+                    <a:pt x="2884124" y="814125"/>
+                  </a:lnTo>
+                  <a:lnTo>
+                    <a:pt x="2954468" y="824293"/>
+                  </a:lnTo>
+                  <a:lnTo>
+                    <a:pt x="3024813" y="834171"/>
+                  </a:lnTo>
+                  <a:lnTo>
+                    <a:pt x="3095157" y="843765"/>
+                  </a:lnTo>
+                  <a:lnTo>
+                    <a:pt x="3165502" y="853084"/>
+                  </a:lnTo>
+                  <a:lnTo>
+                    <a:pt x="3235846" y="862135"/>
+                  </a:lnTo>
+                  <a:lnTo>
+                    <a:pt x="3306191" y="870928"/>
+                  </a:lnTo>
+                  <a:lnTo>
+                    <a:pt x="3376535" y="879468"/>
+                  </a:lnTo>
+                  <a:lnTo>
+                    <a:pt x="3446880" y="887764"/>
+                  </a:lnTo>
+                  <a:lnTo>
+                    <a:pt x="3517224" y="895822"/>
+                  </a:lnTo>
+                  <a:lnTo>
+                    <a:pt x="3587569" y="903649"/>
+                  </a:lnTo>
+                  <a:lnTo>
+                    <a:pt x="3657913" y="911251"/>
+                  </a:lnTo>
+                  <a:lnTo>
+                    <a:pt x="3728257" y="918636"/>
+                  </a:lnTo>
+                  <a:lnTo>
+                    <a:pt x="3798602" y="925809"/>
+                  </a:lnTo>
+                  <a:lnTo>
+                    <a:pt x="3868946" y="932776"/>
+                  </a:lnTo>
+                  <a:lnTo>
+                    <a:pt x="3939291" y="939544"/>
+                  </a:lnTo>
+                  <a:lnTo>
+                    <a:pt x="4009635" y="946117"/>
+                  </a:lnTo>
+                  <a:lnTo>
+                    <a:pt x="4079980" y="952503"/>
+                  </a:lnTo>
+                  <a:lnTo>
+                    <a:pt x="4150324" y="958705"/>
+                  </a:lnTo>
+                  <a:lnTo>
+                    <a:pt x="4220669" y="964729"/>
+                  </a:lnTo>
+                  <a:lnTo>
+                    <a:pt x="4291013" y="970581"/>
+                  </a:lnTo>
+                  <a:lnTo>
+                    <a:pt x="4361358" y="976265"/>
+                  </a:lnTo>
+                  <a:lnTo>
+                    <a:pt x="4431702" y="981786"/>
+                  </a:lnTo>
+                  <a:lnTo>
+                    <a:pt x="4502047" y="987149"/>
+                  </a:lnTo>
+                  <a:lnTo>
+                    <a:pt x="4572391" y="992358"/>
+                  </a:lnTo>
+                  <a:lnTo>
+                    <a:pt x="4642736" y="997418"/>
+                  </a:lnTo>
+                  <a:lnTo>
+                    <a:pt x="4713080" y="1002333"/>
+                  </a:lnTo>
+                  <a:lnTo>
+                    <a:pt x="4783425" y="1007107"/>
+                  </a:lnTo>
+                  <a:lnTo>
+                    <a:pt x="4853769" y="1011744"/>
+                  </a:lnTo>
+                  <a:lnTo>
+                    <a:pt x="4924114" y="1016248"/>
+                  </a:lnTo>
+                  <a:lnTo>
+                    <a:pt x="4994458" y="1020623"/>
+                  </a:lnTo>
+                  <a:lnTo>
+                    <a:pt x="5064803" y="1024873"/>
+                  </a:lnTo>
+                  <a:lnTo>
+                    <a:pt x="5135147" y="1029001"/>
+                  </a:lnTo>
+                  <a:lnTo>
+                    <a:pt x="5205492" y="1033010"/>
+                  </a:lnTo>
+                  <a:lnTo>
+                    <a:pt x="5275836" y="1036905"/>
+                  </a:lnTo>
+                  <a:lnTo>
+                    <a:pt x="5346181" y="1040688"/>
+                  </a:lnTo>
+                  <a:lnTo>
+                    <a:pt x="5416525" y="1044362"/>
+                  </a:lnTo>
+                  <a:lnTo>
+                    <a:pt x="5486870" y="1047932"/>
+                  </a:lnTo>
+                  <a:lnTo>
+                    <a:pt x="5557214" y="1051399"/>
+                  </a:lnTo>
+                  <a:lnTo>
+                    <a:pt x="5627559" y="1054766"/>
+                  </a:lnTo>
+                  <a:lnTo>
+                    <a:pt x="5697903" y="1058037"/>
+                  </a:lnTo>
+                  <a:lnTo>
+                    <a:pt x="5768248" y="1061214"/>
+                  </a:lnTo>
+                  <a:lnTo>
+                    <a:pt x="5838592" y="1064301"/>
+                  </a:lnTo>
+                  <a:lnTo>
+                    <a:pt x="5908937" y="1067298"/>
+                  </a:lnTo>
+                  <a:lnTo>
+                    <a:pt x="5979281" y="1070210"/>
+                  </a:lnTo>
+                  <a:lnTo>
+                    <a:pt x="6049626" y="1073038"/>
+                  </a:lnTo>
+                  <a:lnTo>
+                    <a:pt x="6119970" y="1075786"/>
+                  </a:lnTo>
+                  <a:lnTo>
+                    <a:pt x="6190315" y="1078454"/>
+                  </a:lnTo>
+                  <a:lnTo>
+                    <a:pt x="6260659" y="1081046"/>
+                  </a:lnTo>
+                  <a:lnTo>
+                    <a:pt x="6331004" y="1083564"/>
+                  </a:lnTo>
+                  <a:lnTo>
+                    <a:pt x="6401348" y="1086010"/>
+                  </a:lnTo>
+                  <a:lnTo>
+                    <a:pt x="6471693" y="1088385"/>
+                  </a:lnTo>
+                  <a:lnTo>
+                    <a:pt x="6542037" y="1090692"/>
+                  </a:lnTo>
+                  <a:lnTo>
+                    <a:pt x="6612382" y="1092934"/>
+                  </a:lnTo>
+                  <a:lnTo>
+                    <a:pt x="6682726" y="1095111"/>
+                  </a:lnTo>
+                  <a:lnTo>
+                    <a:pt x="6753071" y="1097225"/>
+                  </a:lnTo>
+                  <a:lnTo>
+                    <a:pt x="6823415" y="1099279"/>
+                  </a:lnTo>
+                  <a:lnTo>
+                    <a:pt x="6893760" y="1101274"/>
+                  </a:lnTo>
+                  <a:lnTo>
+                    <a:pt x="6964104" y="1103212"/>
+                  </a:lnTo>
+                </a:path>
+              </a:pathLst>
+            </a:custGeom>
+            <a:ln w="27101" cap="flat">
+              <a:solidFill>
+                <a:srgbClr val="FF8C00">
+                  <a:alpha val="100000"/>
+                </a:srgbClr>
+              </a:solidFill>
+              <a:prstDash val="solid"/>
+              <a:round/>
+            </a:ln>
+          </p:spPr>
+          <p:txBody>
+            <a:bodyPr/>
+            <a:lstStyle/>
+            <a:p/>
+          </p:txBody>
+        </p:sp>
+        <p:sp>
+          <p:nvSpPr>
+            <p:cNvPr id="71" name="pl71"/>
+            <p:cNvSpPr/>
+            <p:nvPr/>
+          </p:nvSpPr>
+          <p:spPr>
+            <a:xfrm>
+              <a:off x="887106" y="5294352"/>
+              <a:ext cx="7660515" cy="0"/>
+            </a:xfrm>
+            <a:custGeom>
+              <a:avLst/>
+              <a:pathLst>
+                <a:path w="7660515" h="0">
+                  <a:moveTo>
+                    <a:pt x="0" y="0"/>
+                  </a:moveTo>
+                  <a:lnTo>
+                    <a:pt x="7660515" y="0"/>
+                  </a:lnTo>
+                  <a:lnTo>
+                    <a:pt x="7660515" y="0"/>
+                  </a:lnTo>
+                </a:path>
+              </a:pathLst>
+            </a:custGeom>
+            <a:ln w="13550" cap="flat">
+              <a:solidFill>
+                <a:srgbClr val="7F7F7F">
+                  <a:alpha val="100000"/>
+                </a:srgbClr>
+              </a:solidFill>
+              <a:prstDash val="dash"/>
+              <a:round/>
+            </a:ln>
+          </p:spPr>
+          <p:txBody>
+            <a:bodyPr/>
+            <a:lstStyle/>
+            <a:p/>
+          </p:txBody>
+        </p:sp>
+        <p:sp>
+          <p:nvSpPr>
+            <p:cNvPr id="72" name="pl72"/>
+            <p:cNvSpPr/>
+            <p:nvPr/>
+          </p:nvSpPr>
+          <p:spPr>
+            <a:xfrm>
+              <a:off x="4530353" y="4336484"/>
+              <a:ext cx="0" cy="1317069"/>
+            </a:xfrm>
+            <a:custGeom>
+              <a:avLst/>
+              <a:pathLst>
+                <a:path w="0" h="1317069">
+                  <a:moveTo>
+                    <a:pt x="0" y="1317069"/>
+                  </a:moveTo>
+                  <a:lnTo>
+                    <a:pt x="0" y="0"/>
+                  </a:lnTo>
+                  <a:lnTo>
+                    <a:pt x="0" y="0"/>
+                  </a:lnTo>
+                </a:path>
+              </a:pathLst>
+            </a:custGeom>
+            <a:ln w="13550" cap="flat">
+              <a:solidFill>
+                <a:srgbClr val="666666">
+                  <a:alpha val="100000"/>
+                </a:srgbClr>
+              </a:solidFill>
+              <a:prstDash val="dot"/>
+              <a:round/>
+            </a:ln>
+          </p:spPr>
+          <p:txBody>
+            <a:bodyPr/>
+            <a:lstStyle/>
+            <a:p/>
+          </p:txBody>
+        </p:sp>
+        <p:sp>
+          <p:nvSpPr>
+            <p:cNvPr id="73" name="tx73"/>
+            <p:cNvSpPr/>
+            <p:nvPr/>
+          </p:nvSpPr>
+          <p:spPr>
+            <a:xfrm>
+              <a:off x="762297" y="5553636"/>
+              <a:ext cx="62179" cy="80101"/>
+            </a:xfrm>
+            <a:prstGeom prst="rect">
+              <a:avLst/>
+            </a:prstGeom>
+            <a:noFill/>
+          </p:spPr>
+          <p:txBody>
+            <a:bodyPr lIns="0" rIns="0" tIns="0" bIns="0" anchorCtr="1" anchor="ctr" wrap="none"/>
+            <a:lstStyle/>
+            <a:p>
+              <a:pPr algn="l" marL="0" marR="0" indent="0">
+                <a:lnSpc>
+                  <a:spcPts val="880"/>
+                </a:lnSpc>
+                <a:spcBef>
+                  <a:spcPts val="0"/>
+                </a:spcBef>
+                <a:spcAft>
+                  <a:spcPts val="0"/>
+                </a:spcAft>
+              </a:pPr>
+              <a:r>
+                <a:rPr sz="880">
+                  <a:solidFill>
+                    <a:srgbClr val="4D4D4D">
+                      <a:alpha val="100000"/>
+                    </a:srgbClr>
+                  </a:solidFill>
+                  <a:latin typeface="Helvetica"/>
+                  <a:cs typeface="Helvetica"/>
+                </a:rPr>
+                <a:t>0</a:t>
+              </a:r>
+            </a:p>
+          </p:txBody>
+        </p:sp>
+        <p:sp>
+          <p:nvSpPr>
+            <p:cNvPr id="74" name="tx74"/>
+            <p:cNvSpPr/>
+            <p:nvPr/>
+          </p:nvSpPr>
+          <p:spPr>
+            <a:xfrm>
+              <a:off x="762297" y="5254302"/>
+              <a:ext cx="62179" cy="80101"/>
+            </a:xfrm>
+            <a:prstGeom prst="rect">
+              <a:avLst/>
+            </a:prstGeom>
+            <a:noFill/>
+          </p:spPr>
+          <p:txBody>
+            <a:bodyPr lIns="0" rIns="0" tIns="0" bIns="0" anchorCtr="1" anchor="ctr" wrap="none"/>
+            <a:lstStyle/>
+            <a:p>
+              <a:pPr algn="l" marL="0" marR="0" indent="0">
+                <a:lnSpc>
+                  <a:spcPts val="880"/>
+                </a:lnSpc>
+                <a:spcBef>
+                  <a:spcPts val="0"/>
+                </a:spcBef>
+                <a:spcAft>
+                  <a:spcPts val="0"/>
+                </a:spcAft>
+              </a:pPr>
+              <a:r>
+                <a:rPr sz="880">
+                  <a:solidFill>
+                    <a:srgbClr val="4D4D4D">
+                      <a:alpha val="100000"/>
+                    </a:srgbClr>
+                  </a:solidFill>
+                  <a:latin typeface="Helvetica"/>
+                  <a:cs typeface="Helvetica"/>
+                </a:rPr>
+                <a:t>1</a:t>
+              </a:r>
+            </a:p>
+          </p:txBody>
+        </p:sp>
+        <p:sp>
+          <p:nvSpPr>
+            <p:cNvPr id="75" name="tx75"/>
+            <p:cNvSpPr/>
+            <p:nvPr/>
+          </p:nvSpPr>
+          <p:spPr>
+            <a:xfrm>
+              <a:off x="762297" y="4954968"/>
+              <a:ext cx="62179" cy="80101"/>
+            </a:xfrm>
+            <a:prstGeom prst="rect">
+              <a:avLst/>
+            </a:prstGeom>
+            <a:noFill/>
+          </p:spPr>
+          <p:txBody>
+            <a:bodyPr lIns="0" rIns="0" tIns="0" bIns="0" anchorCtr="1" anchor="ctr" wrap="none"/>
+            <a:lstStyle/>
+            <a:p>
+              <a:pPr algn="l" marL="0" marR="0" indent="0">
+                <a:lnSpc>
+                  <a:spcPts val="880"/>
+                </a:lnSpc>
+                <a:spcBef>
+                  <a:spcPts val="0"/>
+                </a:spcBef>
+                <a:spcAft>
+                  <a:spcPts val="0"/>
+                </a:spcAft>
+              </a:pPr>
+              <a:r>
+                <a:rPr sz="880">
+                  <a:solidFill>
+                    <a:srgbClr val="4D4D4D">
+                      <a:alpha val="100000"/>
+                    </a:srgbClr>
+                  </a:solidFill>
+                  <a:latin typeface="Helvetica"/>
+                  <a:cs typeface="Helvetica"/>
+                </a:rPr>
+                <a:t>2</a:t>
+              </a:r>
+            </a:p>
+          </p:txBody>
+        </p:sp>
+        <p:sp>
+          <p:nvSpPr>
+            <p:cNvPr id="76" name="tx76"/>
+            <p:cNvSpPr/>
+            <p:nvPr/>
+          </p:nvSpPr>
+          <p:spPr>
+            <a:xfrm>
+              <a:off x="762297" y="4655634"/>
+              <a:ext cx="62179" cy="80101"/>
+            </a:xfrm>
+            <a:prstGeom prst="rect">
+              <a:avLst/>
+            </a:prstGeom>
+            <a:noFill/>
+          </p:spPr>
+          <p:txBody>
+            <a:bodyPr lIns="0" rIns="0" tIns="0" bIns="0" anchorCtr="1" anchor="ctr" wrap="none"/>
+            <a:lstStyle/>
+            <a:p>
+              <a:pPr algn="l" marL="0" marR="0" indent="0">
+                <a:lnSpc>
+                  <a:spcPts val="880"/>
+                </a:lnSpc>
+                <a:spcBef>
+                  <a:spcPts val="0"/>
+                </a:spcBef>
+                <a:spcAft>
+                  <a:spcPts val="0"/>
+                </a:spcAft>
+              </a:pPr>
+              <a:r>
+                <a:rPr sz="880">
+                  <a:solidFill>
+                    <a:srgbClr val="4D4D4D">
+                      <a:alpha val="100000"/>
+                    </a:srgbClr>
+                  </a:solidFill>
+                  <a:latin typeface="Helvetica"/>
+                  <a:cs typeface="Helvetica"/>
+                </a:rPr>
+                <a:t>3</a:t>
+              </a:r>
+            </a:p>
+          </p:txBody>
+        </p:sp>
+        <p:sp>
+          <p:nvSpPr>
+            <p:cNvPr id="77" name="tx77"/>
+            <p:cNvSpPr/>
+            <p:nvPr/>
+          </p:nvSpPr>
+          <p:spPr>
+            <a:xfrm>
+              <a:off x="762297" y="4356300"/>
+              <a:ext cx="62179" cy="80101"/>
+            </a:xfrm>
+            <a:prstGeom prst="rect">
+              <a:avLst/>
+            </a:prstGeom>
+            <a:noFill/>
+          </p:spPr>
+          <p:txBody>
+            <a:bodyPr lIns="0" rIns="0" tIns="0" bIns="0" anchorCtr="1" anchor="ctr" wrap="none"/>
+            <a:lstStyle/>
+            <a:p>
+              <a:pPr algn="l" marL="0" marR="0" indent="0">
+                <a:lnSpc>
+                  <a:spcPts val="880"/>
+                </a:lnSpc>
+                <a:spcBef>
+                  <a:spcPts val="0"/>
+                </a:spcBef>
+                <a:spcAft>
+                  <a:spcPts val="0"/>
+                </a:spcAft>
+              </a:pPr>
+              <a:r>
+                <a:rPr sz="880">
+                  <a:solidFill>
+                    <a:srgbClr val="4D4D4D">
+                      <a:alpha val="100000"/>
+                    </a:srgbClr>
+                  </a:solidFill>
+                  <a:latin typeface="Helvetica"/>
+                  <a:cs typeface="Helvetica"/>
+                </a:rPr>
+                <a:t>4</a:t>
+              </a:r>
+            </a:p>
+          </p:txBody>
+        </p:sp>
+        <p:sp>
+          <p:nvSpPr>
+            <p:cNvPr id="78" name="tx78"/>
+            <p:cNvSpPr/>
+            <p:nvPr/>
+          </p:nvSpPr>
+          <p:spPr>
+            <a:xfrm>
+              <a:off x="1241001" y="5716183"/>
+              <a:ext cx="161574" cy="80101"/>
+            </a:xfrm>
+            <a:prstGeom prst="rect">
+              <a:avLst/>
+            </a:prstGeom>
+            <a:noFill/>
+          </p:spPr>
+          <p:txBody>
+            <a:bodyPr lIns="0" rIns="0" tIns="0" bIns="0" anchorCtr="1" anchor="ctr" wrap="none"/>
+            <a:lstStyle/>
+            <a:p>
+              <a:pPr algn="l" marL="0" marR="0" indent="0">
+                <a:lnSpc>
+                  <a:spcPts val="880"/>
+                </a:lnSpc>
+                <a:spcBef>
+                  <a:spcPts val="0"/>
+                </a:spcBef>
+                <a:spcAft>
+                  <a:spcPts val="0"/>
+                </a:spcAft>
+              </a:pPr>
+              <a:r>
+                <a:rPr sz="880">
+                  <a:solidFill>
+                    <a:srgbClr val="4D4D4D">
+                      <a:alpha val="100000"/>
+                    </a:srgbClr>
+                  </a:solidFill>
+                  <a:latin typeface="Helvetica"/>
+                  <a:cs typeface="Helvetica"/>
+                </a:rPr>
+                <a:t>-40</a:t>
+              </a:r>
+            </a:p>
+          </p:txBody>
+        </p:sp>
+        <p:sp>
+          <p:nvSpPr>
+            <p:cNvPr id="79" name="tx79"/>
+            <p:cNvSpPr/>
+            <p:nvPr/>
+          </p:nvSpPr>
+          <p:spPr>
+            <a:xfrm>
+              <a:off x="2054602" y="5716183"/>
+              <a:ext cx="161574" cy="80101"/>
+            </a:xfrm>
+            <a:prstGeom prst="rect">
+              <a:avLst/>
+            </a:prstGeom>
+            <a:noFill/>
+          </p:spPr>
+          <p:txBody>
+            <a:bodyPr lIns="0" rIns="0" tIns="0" bIns="0" anchorCtr="1" anchor="ctr" wrap="none"/>
+            <a:lstStyle/>
+            <a:p>
+              <a:pPr algn="l" marL="0" marR="0" indent="0">
+                <a:lnSpc>
+                  <a:spcPts val="880"/>
+                </a:lnSpc>
+                <a:spcBef>
+                  <a:spcPts val="0"/>
+                </a:spcBef>
+                <a:spcAft>
+                  <a:spcPts val="0"/>
+                </a:spcAft>
+              </a:pPr>
+              <a:r>
+                <a:rPr sz="880">
+                  <a:solidFill>
+                    <a:srgbClr val="4D4D4D">
+                      <a:alpha val="100000"/>
+                    </a:srgbClr>
+                  </a:solidFill>
+                  <a:latin typeface="Helvetica"/>
+                  <a:cs typeface="Helvetica"/>
+                </a:rPr>
+                <a:t>-30</a:t>
+              </a:r>
+            </a:p>
+          </p:txBody>
+        </p:sp>
+        <p:sp>
+          <p:nvSpPr>
+            <p:cNvPr id="80" name="tx80"/>
+            <p:cNvSpPr/>
+            <p:nvPr/>
+          </p:nvSpPr>
+          <p:spPr>
+            <a:xfrm>
+              <a:off x="2868203" y="5716183"/>
+              <a:ext cx="161574" cy="80101"/>
+            </a:xfrm>
+            <a:prstGeom prst="rect">
+              <a:avLst/>
+            </a:prstGeom>
+            <a:noFill/>
+          </p:spPr>
+          <p:txBody>
+            <a:bodyPr lIns="0" rIns="0" tIns="0" bIns="0" anchorCtr="1" anchor="ctr" wrap="none"/>
+            <a:lstStyle/>
+            <a:p>
+              <a:pPr algn="l" marL="0" marR="0" indent="0">
+                <a:lnSpc>
+                  <a:spcPts val="880"/>
+                </a:lnSpc>
+                <a:spcBef>
+                  <a:spcPts val="0"/>
+                </a:spcBef>
+                <a:spcAft>
+                  <a:spcPts val="0"/>
+                </a:spcAft>
+              </a:pPr>
+              <a:r>
+                <a:rPr sz="880">
+                  <a:solidFill>
+                    <a:srgbClr val="4D4D4D">
+                      <a:alpha val="100000"/>
+                    </a:srgbClr>
+                  </a:solidFill>
+                  <a:latin typeface="Helvetica"/>
+                  <a:cs typeface="Helvetica"/>
+                </a:rPr>
+                <a:t>-20</a:t>
+              </a:r>
+            </a:p>
+          </p:txBody>
+        </p:sp>
+        <p:sp>
+          <p:nvSpPr>
+            <p:cNvPr id="81" name="tx81"/>
+            <p:cNvSpPr/>
+            <p:nvPr/>
+          </p:nvSpPr>
+          <p:spPr>
+            <a:xfrm>
+              <a:off x="3681805" y="5716183"/>
+              <a:ext cx="161574" cy="80101"/>
+            </a:xfrm>
+            <a:prstGeom prst="rect">
+              <a:avLst/>
+            </a:prstGeom>
+            <a:noFill/>
+          </p:spPr>
+          <p:txBody>
+            <a:bodyPr lIns="0" rIns="0" tIns="0" bIns="0" anchorCtr="1" anchor="ctr" wrap="none"/>
+            <a:lstStyle/>
+            <a:p>
+              <a:pPr algn="l" marL="0" marR="0" indent="0">
+                <a:lnSpc>
+                  <a:spcPts val="880"/>
+                </a:lnSpc>
+                <a:spcBef>
+                  <a:spcPts val="0"/>
+                </a:spcBef>
+                <a:spcAft>
+                  <a:spcPts val="0"/>
+                </a:spcAft>
+              </a:pPr>
+              <a:r>
+                <a:rPr sz="880">
+                  <a:solidFill>
+                    <a:srgbClr val="4D4D4D">
+                      <a:alpha val="100000"/>
+                    </a:srgbClr>
+                  </a:solidFill>
+                  <a:latin typeface="Helvetica"/>
+                  <a:cs typeface="Helvetica"/>
+                </a:rPr>
+                <a:t>-10</a:t>
+              </a:r>
+            </a:p>
+          </p:txBody>
+        </p:sp>
+        <p:sp>
+          <p:nvSpPr>
+            <p:cNvPr id="82" name="tx82"/>
+            <p:cNvSpPr/>
+            <p:nvPr/>
+          </p:nvSpPr>
+          <p:spPr>
+            <a:xfrm>
+              <a:off x="4545104" y="5716183"/>
+              <a:ext cx="62179" cy="80101"/>
+            </a:xfrm>
+            <a:prstGeom prst="rect">
+              <a:avLst/>
+            </a:prstGeom>
+            <a:noFill/>
+          </p:spPr>
+          <p:txBody>
+            <a:bodyPr lIns="0" rIns="0" tIns="0" bIns="0" anchorCtr="1" anchor="ctr" wrap="none"/>
+            <a:lstStyle/>
+            <a:p>
+              <a:pPr algn="l" marL="0" marR="0" indent="0">
+                <a:lnSpc>
+                  <a:spcPts val="880"/>
+                </a:lnSpc>
+                <a:spcBef>
+                  <a:spcPts val="0"/>
+                </a:spcBef>
+                <a:spcAft>
+                  <a:spcPts val="0"/>
+                </a:spcAft>
+              </a:pPr>
+              <a:r>
+                <a:rPr sz="880">
+                  <a:solidFill>
+                    <a:srgbClr val="4D4D4D">
+                      <a:alpha val="100000"/>
+                    </a:srgbClr>
+                  </a:solidFill>
+                  <a:latin typeface="Helvetica"/>
+                  <a:cs typeface="Helvetica"/>
+                </a:rPr>
+                <a:t>0</a:t>
+              </a:r>
+            </a:p>
+          </p:txBody>
+        </p:sp>
+        <p:sp>
+          <p:nvSpPr>
+            <p:cNvPr id="83" name="tx83"/>
+            <p:cNvSpPr/>
+            <p:nvPr/>
+          </p:nvSpPr>
+          <p:spPr>
+            <a:xfrm>
+              <a:off x="5327615" y="5716183"/>
+              <a:ext cx="124358" cy="80101"/>
+            </a:xfrm>
+            <a:prstGeom prst="rect">
+              <a:avLst/>
+            </a:prstGeom>
+            <a:noFill/>
+          </p:spPr>
+          <p:txBody>
+            <a:bodyPr lIns="0" rIns="0" tIns="0" bIns="0" anchorCtr="1" anchor="ctr" wrap="none"/>
+            <a:lstStyle/>
+            <a:p>
+              <a:pPr algn="l" marL="0" marR="0" indent="0">
+                <a:lnSpc>
+                  <a:spcPts val="880"/>
+                </a:lnSpc>
+                <a:spcBef>
+                  <a:spcPts val="0"/>
+                </a:spcBef>
+                <a:spcAft>
+                  <a:spcPts val="0"/>
+                </a:spcAft>
+              </a:pPr>
+              <a:r>
+                <a:rPr sz="880">
+                  <a:solidFill>
+                    <a:srgbClr val="4D4D4D">
+                      <a:alpha val="100000"/>
+                    </a:srgbClr>
+                  </a:solidFill>
+                  <a:latin typeface="Helvetica"/>
+                  <a:cs typeface="Helvetica"/>
+                </a:rPr>
+                <a:t>10</a:t>
+              </a:r>
+            </a:p>
+          </p:txBody>
+        </p:sp>
+        <p:sp>
+          <p:nvSpPr>
+            <p:cNvPr id="84" name="tx84"/>
+            <p:cNvSpPr/>
+            <p:nvPr/>
+          </p:nvSpPr>
+          <p:spPr>
+            <a:xfrm>
+              <a:off x="6141217" y="5716183"/>
+              <a:ext cx="124358" cy="80101"/>
+            </a:xfrm>
+            <a:prstGeom prst="rect">
+              <a:avLst/>
+            </a:prstGeom>
+            <a:noFill/>
+          </p:spPr>
+          <p:txBody>
+            <a:bodyPr lIns="0" rIns="0" tIns="0" bIns="0" anchorCtr="1" anchor="ctr" wrap="none"/>
+            <a:lstStyle/>
+            <a:p>
+              <a:pPr algn="l" marL="0" marR="0" indent="0">
+                <a:lnSpc>
+                  <a:spcPts val="880"/>
+                </a:lnSpc>
+                <a:spcBef>
+                  <a:spcPts val="0"/>
+                </a:spcBef>
+                <a:spcAft>
+                  <a:spcPts val="0"/>
+                </a:spcAft>
+              </a:pPr>
+              <a:r>
+                <a:rPr sz="880">
+                  <a:solidFill>
+                    <a:srgbClr val="4D4D4D">
+                      <a:alpha val="100000"/>
+                    </a:srgbClr>
+                  </a:solidFill>
+                  <a:latin typeface="Helvetica"/>
+                  <a:cs typeface="Helvetica"/>
+                </a:rPr>
+                <a:t>20</a:t>
+              </a:r>
+            </a:p>
+          </p:txBody>
+        </p:sp>
+        <p:sp>
+          <p:nvSpPr>
+            <p:cNvPr id="85" name="tx85"/>
+            <p:cNvSpPr/>
+            <p:nvPr/>
+          </p:nvSpPr>
+          <p:spPr>
+            <a:xfrm>
+              <a:off x="6954818" y="5716183"/>
+              <a:ext cx="124358" cy="80101"/>
+            </a:xfrm>
+            <a:prstGeom prst="rect">
+              <a:avLst/>
+            </a:prstGeom>
+            <a:noFill/>
+          </p:spPr>
+          <p:txBody>
+            <a:bodyPr lIns="0" rIns="0" tIns="0" bIns="0" anchorCtr="1" anchor="ctr" wrap="none"/>
+            <a:lstStyle/>
+            <a:p>
+              <a:pPr algn="l" marL="0" marR="0" indent="0">
+                <a:lnSpc>
+                  <a:spcPts val="880"/>
+                </a:lnSpc>
+                <a:spcBef>
+                  <a:spcPts val="0"/>
+                </a:spcBef>
+                <a:spcAft>
+                  <a:spcPts val="0"/>
+                </a:spcAft>
+              </a:pPr>
+              <a:r>
+                <a:rPr sz="880">
+                  <a:solidFill>
+                    <a:srgbClr val="4D4D4D">
+                      <a:alpha val="100000"/>
+                    </a:srgbClr>
+                  </a:solidFill>
+                  <a:latin typeface="Helvetica"/>
+                  <a:cs typeface="Helvetica"/>
+                </a:rPr>
+                <a:t>30</a:t>
+              </a:r>
+            </a:p>
+          </p:txBody>
+        </p:sp>
+        <p:sp>
+          <p:nvSpPr>
+            <p:cNvPr id="86" name="tx86"/>
+            <p:cNvSpPr/>
+            <p:nvPr/>
+          </p:nvSpPr>
+          <p:spPr>
+            <a:xfrm>
+              <a:off x="7768419" y="5716183"/>
+              <a:ext cx="124358" cy="80101"/>
+            </a:xfrm>
+            <a:prstGeom prst="rect">
+              <a:avLst/>
+            </a:prstGeom>
+            <a:noFill/>
+          </p:spPr>
+          <p:txBody>
+            <a:bodyPr lIns="0" rIns="0" tIns="0" bIns="0" anchorCtr="1" anchor="ctr" wrap="none"/>
+            <a:lstStyle/>
+            <a:p>
+              <a:pPr algn="l" marL="0" marR="0" indent="0">
+                <a:lnSpc>
+                  <a:spcPts val="880"/>
+                </a:lnSpc>
+                <a:spcBef>
+                  <a:spcPts val="0"/>
+                </a:spcBef>
+                <a:spcAft>
+                  <a:spcPts val="0"/>
+                </a:spcAft>
+              </a:pPr>
+              <a:r>
+                <a:rPr sz="880">
+                  <a:solidFill>
+                    <a:srgbClr val="4D4D4D">
+                      <a:alpha val="100000"/>
+                    </a:srgbClr>
+                  </a:solidFill>
+                  <a:latin typeface="Helvetica"/>
+                  <a:cs typeface="Helvetica"/>
+                </a:rPr>
+                <a:t>40</a:t>
+              </a:r>
+            </a:p>
+          </p:txBody>
+        </p:sp>
+        <p:sp>
+          <p:nvSpPr>
+            <p:cNvPr id="87" name="tx87"/>
+            <p:cNvSpPr/>
+            <p:nvPr/>
+          </p:nvSpPr>
+          <p:spPr>
+            <a:xfrm>
+              <a:off x="2928340" y="5855859"/>
+              <a:ext cx="3578047" cy="100218"/>
+            </a:xfrm>
+            <a:prstGeom prst="rect">
+              <a:avLst/>
+            </a:prstGeom>
+            <a:noFill/>
+          </p:spPr>
+          <p:txBody>
+            <a:bodyPr lIns="0" rIns="0" tIns="0" bIns="0" anchorCtr="1" anchor="ctr" wrap="none"/>
+            <a:lstStyle/>
+            <a:p>
+              <a:pPr algn="l" marL="0" marR="0" indent="0">
+                <a:lnSpc>
+                  <a:spcPts val="1100"/>
+                </a:lnSpc>
+                <a:spcBef>
+                  <a:spcPts val="0"/>
+                </a:spcBef>
+                <a:spcAft>
+                  <a:spcPts val="0"/>
+                </a:spcAft>
+              </a:pPr>
+              <a:r>
+                <a:rPr sz="1100">
+                  <a:solidFill>
+                    <a:srgbClr val="000000">
+                      <a:alpha val="100000"/>
+                    </a:srgbClr>
+                  </a:solidFill>
+                  <a:latin typeface="Helvetica"/>
+                  <a:cs typeface="Helvetica"/>
+                </a:rPr>
+                <a:t>eGFR difference (%): 100 × (CKD-EPI Cr-Cys − CG) / CG</a:t>
+              </a:r>
+            </a:p>
+          </p:txBody>
+        </p:sp>
+        <p:sp>
+          <p:nvSpPr>
+            <p:cNvPr id="88" name="tx88"/>
+            <p:cNvSpPr/>
+            <p:nvPr/>
+          </p:nvSpPr>
+          <p:spPr>
+            <a:xfrm rot="-5400000">
+              <a:off x="138035" y="4944909"/>
+              <a:ext cx="1016904" cy="100218"/>
+            </a:xfrm>
+            <a:prstGeom prst="rect">
+              <a:avLst/>
+            </a:prstGeom>
+            <a:noFill/>
+          </p:spPr>
+          <p:txBody>
+            <a:bodyPr lIns="0" rIns="0" tIns="0" bIns="0" anchorCtr="1" anchor="ctr" wrap="none"/>
+            <a:lstStyle/>
+            <a:p>
+              <a:pPr algn="l" marL="0" marR="0" indent="0">
+                <a:lnSpc>
+                  <a:spcPts val="1100"/>
+                </a:lnSpc>
+                <a:spcBef>
+                  <a:spcPts val="0"/>
+                </a:spcBef>
+                <a:spcAft>
+                  <a:spcPts val="0"/>
+                </a:spcAft>
+              </a:pPr>
+              <a:r>
+                <a:rPr sz="1100">
+                  <a:solidFill>
+                    <a:srgbClr val="000000">
+                      <a:alpha val="100000"/>
+                    </a:srgbClr>
+                  </a:solidFill>
+                  <a:latin typeface="Helvetica"/>
+                  <a:cs typeface="Helvetica"/>
+                </a:rPr>
+                <a:t>subHR (95% CI)</a:t>
+              </a:r>
+            </a:p>
+          </p:txBody>
+        </p:sp>
+        <p:sp>
+          <p:nvSpPr>
+            <p:cNvPr id="89" name="tx89"/>
+            <p:cNvSpPr/>
+            <p:nvPr/>
+          </p:nvSpPr>
+          <p:spPr>
+            <a:xfrm>
+              <a:off x="887106" y="4159544"/>
+              <a:ext cx="6985375" cy="82021"/>
+            </a:xfrm>
+            <a:prstGeom prst="rect">
+              <a:avLst/>
+            </a:prstGeom>
+            <a:noFill/>
+          </p:spPr>
+          <p:txBody>
+            <a:bodyPr lIns="0" rIns="0" tIns="0" bIns="0" anchorCtr="1" anchor="ctr" wrap="none"/>
+            <a:lstStyle/>
+            <a:p>
+              <a:pPr algn="l" marL="0" marR="0" indent="0">
+                <a:lnSpc>
+                  <a:spcPts val="900"/>
+                </a:lnSpc>
+                <a:spcBef>
+                  <a:spcPts val="0"/>
+                </a:spcBef>
+                <a:spcAft>
+                  <a:spcPts val="0"/>
+                </a:spcAft>
+              </a:pPr>
+              <a:r>
+                <a:rPr sz="900">
+                  <a:solidFill>
+                    <a:srgbClr val="404040">
+                      <a:alpha val="100000"/>
+                    </a:srgbClr>
+                  </a:solidFill>
+                  <a:latin typeface="Helvetica"/>
+                  <a:cs typeface="Helvetica"/>
+                </a:rPr>
+                <a:t>subHR per 10 % decline: 1.40 (1.17-1.68), p_Bonf = 0.002 (n = 6)  |  per IQR decline (Δ = 29.9 %): 2.74 (1.59-4.72)  |  IQR: [-15.0, 14.9] %</a:t>
+              </a:r>
+            </a:p>
+          </p:txBody>
+        </p:sp>
+        <p:sp>
+          <p:nvSpPr>
+            <p:cNvPr id="90" name="tx90"/>
+            <p:cNvSpPr/>
+            <p:nvPr/>
+          </p:nvSpPr>
+          <p:spPr>
+            <a:xfrm>
+              <a:off x="887106" y="3932770"/>
               <a:ext cx="2234793" cy="120152"/>
             </a:xfrm>
             <a:prstGeom prst="rect">
